--- a/docs/presentations/KubernetesFundamentals/KubernetesFundamentals.pptx
+++ b/docs/presentations/KubernetesFundamentals/KubernetesFundamentals.pptx
@@ -4,6 +4,9 @@
   <p:sldMasterIdLst>
     <p:sldMasterId id="2147483648" r:id="rId1"/>
   </p:sldMasterIdLst>
+  <p:notesMasterIdLst>
+    <p:notesMasterId r:id="rId24"/>
+  </p:notesMasterIdLst>
   <p:sldIdLst>
     <p:sldId id="256" r:id="rId2"/>
     <p:sldId id="257" r:id="rId3"/>
@@ -28,9 +31,6 @@
     <p:sldId id="276" r:id="rId22"/>
     <p:sldId id="277" r:id="rId23"/>
   </p:sldIdLst>
-  <p:notesMasterIdLst>
-    <p:notesMasterId r:id="rId24"/>
-  </p:notesMasterIdLst>
   <p:sldSz cx="12192000" cy="6858000"/>
   <p:notesSz cx="6858000" cy="12192000"/>
   <p:defaultTextStyle>
@@ -125,6 +125,11 @@
       </a:defRPr>
     </a:lvl9pPr>
   </p:defaultTextStyle>
+  <p:extLst>
+    <p:ext uri="{EFAFB233-063F-42B5-8137-9DF3F51BA10A}">
+      <p15:sldGuideLst xmlns:p15="http://schemas.microsoft.com/office/powerpoint/2012/main"/>
+    </p:ext>
+  </p:extLst>
 </p:presentation>
 </file>
 
@@ -150,234 +155,10 @@
           <a:chExt cx="0" cy="0"/>
         </a:xfrm>
       </p:grpSpPr>
-      <p:sp>
-        <p:nvSpPr>
-          <p:cNvPr id="2" name="Header Placeholder 1"/>
-          <p:cNvSpPr>
-            <a:spLocks noGrp="1"/>
-          </p:cNvSpPr>
-          <p:nvPr>
-            <p:ph type="hdr" sz="quarter"/>
-          </p:nvPr>
-        </p:nvSpPr>
-        <p:spPr>
-          <a:xfrm>
-            <a:off x="0" y="0"/>
-            <a:ext cx="2971800" cy="458788"/>
-          </a:xfrm>
-          <a:prstGeom prst="rect">
-            <a:avLst/>
-          </a:prstGeom>
-        </p:spPr>
-        <p:txBody>
-          <a:bodyPr vert="horz" lIns="91440" tIns="45720" rIns="91440" bIns="45720" rtlCol="0"/>
-          <a:lstStyle>
-            <a:lvl1pPr algn="l">
-              <a:defRPr sz="1200"/>
-            </a:lvl1pPr>
-          </a:lstStyle>
-          <a:p>
-            <a:endParaRPr lang="en-US"/>
-          </a:p>
-        </p:txBody>
-      </p:sp>
-      <p:sp>
-        <p:nvSpPr>
-          <p:cNvPr id="3" name="Date Placeholder 2"/>
-          <p:cNvSpPr>
-            <a:spLocks noGrp="1"/>
-          </p:cNvSpPr>
-          <p:nvPr>
-            <p:ph type="dt" idx="1"/>
-          </p:nvPr>
-        </p:nvSpPr>
-        <p:spPr>
-          <a:xfrm>
-            <a:off x="3884613" y="0"/>
-            <a:ext cx="2971800" cy="458788"/>
-          </a:xfrm>
-          <a:prstGeom prst="rect">
-            <a:avLst/>
-          </a:prstGeom>
-        </p:spPr>
-        <p:txBody>
-          <a:bodyPr vert="horz" lIns="91440" tIns="45720" rIns="91440" bIns="45720" rtlCol="0"/>
-          <a:lstStyle>
-            <a:lvl1pPr algn="r">
-              <a:defRPr sz="1200"/>
-            </a:lvl1pPr>
-          </a:lstStyle>
-          <a:p>
-            <a:fld id="{5282F153-3F37-0F45-9E97-73ACFA13230C}" type="datetimeFigureOut">
-              <a:rPr lang="en-US"/>
-              <a:t>7/23/19</a:t>
-            </a:fld>
-            <a:endParaRPr lang="en-US"/>
-          </a:p>
-        </p:txBody>
-      </p:sp>
-      <p:sp>
-        <p:nvSpPr>
-          <p:cNvPr id="4" name="Slide Image Placeholder 3"/>
-          <p:cNvSpPr>
-            <a:spLocks noGrp="1" noRot="1" noChangeAspect="1"/>
-          </p:cNvSpPr>
-          <p:nvPr>
-            <p:ph type="sldImg" idx="2"/>
-          </p:nvPr>
-        </p:nvSpPr>
-        <p:spPr>
-          <a:xfrm>
-            <a:off x="685800" y="1143000"/>
-            <a:ext cx="5486400" cy="3086100"/>
-          </a:xfrm>
-          <a:prstGeom prst="rect">
-            <a:avLst/>
-          </a:prstGeom>
-          <a:noFill/>
-          <a:ln w="12700">
-            <a:solidFill>
-              <a:prstClr val="black"/>
-            </a:solidFill>
-          </a:ln>
-        </p:spPr>
-        <p:txBody>
-          <a:bodyPr vert="horz" lIns="91440" tIns="45720" rIns="91440" bIns="45720" rtlCol="0" anchor="ctr"/>
-          <a:lstStyle/>
-          <a:p>
-            <a:endParaRPr lang="en-US"/>
-          </a:p>
-        </p:txBody>
-      </p:sp>
-      <p:sp>
-        <p:nvSpPr>
-          <p:cNvPr id="5" name="Notes Placeholder 4"/>
-          <p:cNvSpPr>
-            <a:spLocks noGrp="1"/>
-          </p:cNvSpPr>
-          <p:nvPr>
-            <p:ph type="body" sz="quarter" idx="3"/>
-          </p:nvPr>
-        </p:nvSpPr>
-        <p:spPr>
-          <a:xfrm>
-            <a:off x="685800" y="4400550"/>
-            <a:ext cx="5486400" cy="3600450"/>
-          </a:xfrm>
-          <a:prstGeom prst="rect">
-            <a:avLst/>
-          </a:prstGeom>
-        </p:spPr>
-        <p:txBody>
-          <a:bodyPr vert="horz" lIns="91440" tIns="45720" rIns="91440" bIns="45720" rtlCol="0"/>
-          <a:lstStyle/>
-          <a:p>
-            <a:pPr lvl="0"/>
-            <a:r>
-              <a:rPr lang="en-US"/>
-              <a:t>Click to edit Master text styles</a:t>
-            </a:r>
-          </a:p>
-          <a:p>
-            <a:pPr lvl="1"/>
-            <a:r>
-              <a:rPr lang="en-US"/>
-              <a:t>Second level</a:t>
-            </a:r>
-          </a:p>
-          <a:p>
-            <a:pPr lvl="2"/>
-            <a:r>
-              <a:rPr lang="en-US"/>
-              <a:t>Third level</a:t>
-            </a:r>
-          </a:p>
-          <a:p>
-            <a:pPr lvl="3"/>
-            <a:r>
-              <a:rPr lang="en-US"/>
-              <a:t>Fourth level</a:t>
-            </a:r>
-          </a:p>
-          <a:p>
-            <a:pPr lvl="4"/>
-            <a:r>
-              <a:rPr lang="en-US"/>
-              <a:t>Fifth level</a:t>
-            </a:r>
-          </a:p>
-        </p:txBody>
-      </p:sp>
-      <p:sp>
-        <p:nvSpPr>
-          <p:cNvPr id="6" name="Footer Placeholder 5"/>
-          <p:cNvSpPr>
-            <a:spLocks noGrp="1"/>
-          </p:cNvSpPr>
-          <p:nvPr>
-            <p:ph type="ftr" sz="quarter" idx="4"/>
-          </p:nvPr>
-        </p:nvSpPr>
-        <p:spPr>
-          <a:xfrm>
-            <a:off x="0" y="8685213"/>
-            <a:ext cx="2971800" cy="458787"/>
-          </a:xfrm>
-          <a:prstGeom prst="rect">
-            <a:avLst/>
-          </a:prstGeom>
-        </p:spPr>
-        <p:txBody>
-          <a:bodyPr vert="horz" lIns="91440" tIns="45720" rIns="91440" bIns="45720" rtlCol="0" anchor="b"/>
-          <a:lstStyle>
-            <a:lvl1pPr algn="l">
-              <a:defRPr sz="1200"/>
-            </a:lvl1pPr>
-          </a:lstStyle>
-          <a:p>
-            <a:endParaRPr lang="en-US"/>
-          </a:p>
-        </p:txBody>
-      </p:sp>
-      <p:sp>
-        <p:nvSpPr>
-          <p:cNvPr id="7" name="Slide Number Placeholder 6"/>
-          <p:cNvSpPr>
-            <a:spLocks noGrp="1"/>
-          </p:cNvSpPr>
-          <p:nvPr>
-            <p:ph type="sldNum" sz="quarter" idx="5"/>
-          </p:nvPr>
-        </p:nvSpPr>
-        <p:spPr>
-          <a:xfrm>
-            <a:off x="3884613" y="8685213"/>
-            <a:ext cx="2971800" cy="458787"/>
-          </a:xfrm>
-          <a:prstGeom prst="rect">
-            <a:avLst/>
-          </a:prstGeom>
-        </p:spPr>
-        <p:txBody>
-          <a:bodyPr vert="horz" lIns="91440" tIns="45720" rIns="91440" bIns="45720" rtlCol="0" anchor="b"/>
-          <a:lstStyle>
-            <a:lvl1pPr algn="r">
-              <a:defRPr sz="1200"/>
-            </a:lvl1pPr>
-          </a:lstStyle>
-          <a:p>
-            <a:fld id="{CE5E9CC1-C706-0F49-92D6-E571CC5EEA8F}" type="slidenum">
-              <a:rPr lang="en-US"/>
-              <a:t>‹#›</a:t>
-            </a:fld>
-            <a:endParaRPr lang="en-US"/>
-          </a:p>
-        </p:txBody>
-      </p:sp>
     </p:spTree>
     <p:extLst>
       <p:ext uri="{BB962C8B-B14F-4D97-AF65-F5344CB8AC3E}">
-        <p14:creationId xmlns:p14="http://schemas.microsoft.com/office/powerpoint/2010/main" val="1024086991"/>
+        <p14:creationId xmlns:p14="http://schemas.microsoft.com/office/powerpoint/2010/main" val="470938966"/>
       </p:ext>
     </p:extLst>
   </p:cSld>
@@ -525,7 +306,6 @@
               <a:rPr lang="en-US" dirty="0"/>
               <a:t>Set the frame immediately: this is the concept deck to watch/read before opening TUTORIAL.md in this same repo, not a standalone reference. Ten to fifteen minutes to build the mental model before the first kubectl command. Companion to this repo's TUTORIAL.md — read/watch this first, then go hands-on. No prior Kubernetes knowledge assumed.</a:t>
             </a:r>
-            <a:endParaRPr lang="en-US" dirty="0"/>
           </a:p>
         </p:txBody>
       </p:sp>
@@ -613,7 +393,6 @@
               <a:rPr lang="en-US" dirty="0"/>
               <a:t>Walk each component's single job in order — API server first since everything else is described relative to it. Land on kubelet since it's the bridge to the worker-node side.</a:t>
             </a:r>
-            <a:endParaRPr lang="en-US" dirty="0"/>
           </a:p>
         </p:txBody>
       </p:sp>
@@ -701,7 +480,6 @@
               <a:rPr lang="en-US" dirty="0"/>
               <a:t>Trace one concrete request end to end so the component table on the previous slide stops being abstract. Call out the pod-before-container ordering explicitly — it's a detail worth remembering.</a:t>
             </a:r>
-            <a:endParaRPr lang="en-US" dirty="0"/>
           </a:p>
         </p:txBody>
       </p:sp>
@@ -789,7 +567,6 @@
               <a:rPr lang="en-US" dirty="0"/>
               <a:t>Third focus area — move from control-plane theory into the actual objects readers will type in Module 1 and Module 2.</a:t>
             </a:r>
-            <a:endParaRPr lang="en-US" dirty="0"/>
           </a:p>
         </p:txBody>
       </p:sp>
@@ -877,7 +654,6 @@
               <a:rPr lang="en-US" dirty="0"/>
               <a:t>This is the "aha" moment of the deck for a first-time reader: run the delete experiment and watch the Pod not come back. Frame it as a problem statement, not a dead end — Slide 14 is the fix.</a:t>
             </a:r>
-            <a:endParaRPr lang="en-US" dirty="0"/>
           </a:p>
         </p:txBody>
       </p:sp>
@@ -965,7 +741,6 @@
               <a:rPr lang="en-US" dirty="0"/>
               <a:t>Repeat the exact delete experiment from Slide 13, but this time on a Deployment-managed Pod — the contrast is the whole point. Tie the self-healing behavior explicitly back to Slide 8's reconciliation loop.</a:t>
             </a:r>
-            <a:endParaRPr lang="en-US" dirty="0"/>
           </a:p>
         </p:txBody>
       </p:sp>
@@ -1053,7 +828,6 @@
               <a:rPr lang="en-US" dirty="0"/>
               <a:t>Fourth and final focus area — the last two object types, then the capstone that wires everything together.</a:t>
             </a:r>
-            <a:endParaRPr lang="en-US" dirty="0"/>
           </a:p>
         </p:txBody>
       </p:sp>
@@ -1141,7 +915,6 @@
               <a:rPr lang="en-US" dirty="0"/>
               <a:t>Anchor this in the fact that the reader just watched a Pod's IP change in the previous section — a Service is the direct answer to that instability.</a:t>
             </a:r>
-            <a:endParaRPr lang="en-US" dirty="0"/>
           </a:p>
         </p:txBody>
       </p:sp>
@@ -1229,7 +1002,6 @@
               <a:rPr lang="en-US" dirty="0"/>
               <a:t>Keep this conceptual per the high-level depth — one short illustrative snippet, not a manifest walkthrough. The base64-is-not-encryption point is the one thing to land hard.</a:t>
             </a:r>
-            <a:endParaRPr lang="en-US" dirty="0"/>
           </a:p>
         </p:txBody>
       </p:sp>
@@ -1317,7 +1089,6 @@
               <a:rPr lang="en-US" dirty="0"/>
               <a:t>This is where all four focus areas visibly compose into TUTORIAL.md's Module 5. The DNS-name-per-Service detail and the deploy-order gotcha are the two things worth remembering here.</a:t>
             </a:r>
-            <a:endParaRPr lang="en-US" dirty="0"/>
           </a:p>
         </p:txBody>
       </p:sp>
@@ -1405,7 +1176,6 @@
               <a:rPr lang="en-US" dirty="0"/>
               <a:t>Frame this as "things that were harder than expected" for an onboarding audience — real failure modes pulled straight from the tutorial's own troubleshooting notes, not hypotheticals.</a:t>
             </a:r>
-            <a:endParaRPr lang="en-US" dirty="0"/>
           </a:p>
         </p:txBody>
       </p:sp>
@@ -1493,7 +1263,6 @@
               <a:rPr lang="en-US" dirty="0"/>
               <a:t>Open with the pain, not the architecture. This is the itch that motivated Kubernetes existing at all — no jargon yet, just "here's what breaks."</a:t>
             </a:r>
-            <a:endParaRPr lang="en-US" dirty="0"/>
           </a:p>
         </p:txBody>
       </p:sp>
@@ -1581,7 +1350,6 @@
               <a:rPr lang="en-US" dirty="0"/>
               <a:t>Land the single unifying idea before handing off to TUTORIAL.md — everything walked through today is one mechanism wearing different hats.</a:t>
             </a:r>
-            <a:endParaRPr lang="en-US" dirty="0"/>
           </a:p>
         </p:txBody>
       </p:sp>
@@ -1669,7 +1437,6 @@
               <a:rPr lang="en-US" dirty="0"/>
               <a:t>Explicit handoff — this is the deck's actual job, to end with the reader opening a terminal and starting Module 0 with the mental model already in place.</a:t>
             </a:r>
-            <a:endParaRPr lang="en-US" dirty="0"/>
           </a:p>
         </p:txBody>
       </p:sp>
@@ -1757,7 +1524,6 @@
               <a:rPr lang="en-US" dirty="0"/>
               <a:t>Three takeaways, no more — the last line is the one thing worth remembering walking into Module 1.</a:t>
             </a:r>
-            <a:endParaRPr lang="en-US" dirty="0"/>
           </a:p>
         </p:txBody>
       </p:sp>
@@ -1845,7 +1611,6 @@
               <a:rPr lang="en-US" dirty="0"/>
               <a:t>Transition from "why" to "how" — zoom out to the two kinds of machines before drilling into any one component.</a:t>
             </a:r>
-            <a:endParaRPr lang="en-US" dirty="0"/>
           </a:p>
         </p:txBody>
       </p:sp>
@@ -1933,7 +1698,6 @@
               <a:rPr lang="en-US" dirty="0"/>
               <a:t>Establish the two-tier model before naming any single component in depth. Emphasize that you never talk to a worker node directly — everything routes through the API server.</a:t>
             </a:r>
-            <a:endParaRPr lang="en-US" dirty="0"/>
           </a:p>
         </p:txBody>
       </p:sp>
@@ -2021,7 +1785,6 @@
               <a:rPr lang="en-US" dirty="0"/>
               <a:t>Orient the reader to exactly what they're about to install in TUTORIAL.md Module 0, and flag the one gotcha (containerd runtime flag) before they hit it themselves.</a:t>
             </a:r>
-            <a:endParaRPr lang="en-US" dirty="0"/>
           </a:p>
         </p:txBody>
       </p:sp>
@@ -2109,7 +1872,6 @@
               <a:rPr lang="en-US" dirty="0"/>
               <a:t>First of the four focus areas — go one level deeper on the motivation now that the architecture is in view.</a:t>
             </a:r>
-            <a:endParaRPr lang="en-US" dirty="0"/>
           </a:p>
         </p:txBody>
       </p:sp>
@@ -2197,7 +1959,6 @@
               <a:rPr lang="en-US" dirty="0"/>
               <a:t>Make each failure mode concrete with what Kubernetes actually does about it, not just the abstract label.</a:t>
             </a:r>
-            <a:endParaRPr lang="en-US" dirty="0"/>
           </a:p>
         </p:txBody>
       </p:sp>
@@ -2285,7 +2046,6 @@
               <a:rPr lang="en-US" dirty="0"/>
               <a:t>This is the single most important concept in the deck — everything downstream (self-healing, scaling) is this same idea running continuously. Spell out declarative vs. imperative explicitly for onboarding.</a:t>
             </a:r>
-            <a:endParaRPr lang="en-US" dirty="0"/>
           </a:p>
         </p:txBody>
       </p:sp>
@@ -2373,7 +2133,6 @@
               <a:rPr lang="en-US" dirty="0"/>
               <a:t>Second focus area — now open the door from Slide 4 and name every piece behind it.</a:t>
             </a:r>
-            <a:endParaRPr lang="en-US" dirty="0"/>
           </a:p>
         </p:txBody>
       </p:sp>
@@ -2446,6 +2205,11 @@
 <file path=ppt/slideMasters/slideMaster1.xml><?xml version="1.0" encoding="utf-8"?>
 <p:sldMaster xmlns:a="http://schemas.openxmlformats.org/drawingml/2006/main" xmlns:r="http://schemas.openxmlformats.org/officeDocument/2006/relationships" xmlns:p="http://schemas.openxmlformats.org/presentationml/2006/main">
   <p:cSld>
+    <p:bg>
+      <p:bgRef idx="1001">
+        <a:schemeClr val="bg1"/>
+      </p:bgRef>
+    </p:bg>
     <p:spTree>
       <p:nvGrpSpPr>
         <p:cNvPr id="1" name=""/>
@@ -2728,6 +2492,7 @@
         <a:solidFill>
           <a:srgbClr val="EAFCFF"/>
         </a:solidFill>
+        <a:effectLst/>
       </p:bgPr>
     </p:bg>
     <p:spTree>
@@ -2765,11 +2530,11 @@
           <a:bodyPr wrap="square" rtlCol="0" anchor="ctr"/>
           <a:lstStyle/>
           <a:p>
-            <a:pPr algn="ctr" indent="0" marL="0">
+            <a:pPr marL="0" indent="0" algn="ctr">
               <a:buNone/>
             </a:pPr>
             <a:r>
-              <a:rPr lang="en-US" sz="6400" b="1" spc="50" kern="0" dirty="0">
+              <a:rPr lang="en-US" sz="6400" b="1" kern="0" spc="50" dirty="0">
                 <a:solidFill>
                   <a:srgbClr val="0A1A1C"/>
                 </a:solidFill>
@@ -2804,7 +2569,7 @@
           <a:bodyPr wrap="square" rtlCol="0" anchor="ctr"/>
           <a:lstStyle/>
           <a:p>
-            <a:pPr algn="ctr" indent="0" marL="0">
+            <a:pPr marL="0" indent="0" algn="ctr">
               <a:buNone/>
             </a:pPr>
             <a:r>
@@ -2846,6 +2611,13 @@
             <a:prstDash val="solid"/>
           </a:ln>
         </p:spPr>
+        <p:txBody>
+          <a:bodyPr/>
+          <a:lstStyle/>
+          <a:p>
+            <a:endParaRPr lang="en-US"/>
+          </a:p>
+        </p:txBody>
       </p:sp>
       <p:sp>
         <p:nvSpPr>
@@ -2868,7 +2640,7 @@
           <a:bodyPr wrap="square" rtlCol="0" anchor="ctr"/>
           <a:lstStyle/>
           <a:p>
-            <a:pPr algn="ctr" indent="0" marL="0">
+            <a:pPr marL="0" indent="0" algn="ctr">
               <a:buNone/>
             </a:pPr>
             <a:r>
@@ -2907,11 +2679,11 @@
           <a:bodyPr wrap="square" rtlCol="0" anchor="ctr"/>
           <a:lstStyle/>
           <a:p>
-            <a:pPr algn="ctr" indent="0" marL="0">
+            <a:pPr marL="0" indent="0" algn="ctr">
               <a:buNone/>
             </a:pPr>
             <a:r>
-              <a:rPr lang="en-US" sz="1400" spc="50" kern="0" dirty="0">
+              <a:rPr lang="en-US" sz="1400" kern="0" spc="50" dirty="0">
                 <a:solidFill>
                   <a:srgbClr val="306878"/>
                 </a:solidFill>
@@ -2941,6 +2713,7 @@
         <a:solidFill>
           <a:srgbClr val="EAFCFF"/>
         </a:solidFill>
+        <a:effectLst/>
       </p:bgPr>
     </p:bg>
     <p:spTree>
@@ -2981,6 +2754,13 @@
             <a:prstDash val="solid"/>
           </a:ln>
         </p:spPr>
+        <p:txBody>
+          <a:bodyPr/>
+          <a:lstStyle/>
+          <a:p>
+            <a:endParaRPr lang="en-US"/>
+          </a:p>
+        </p:txBody>
       </p:sp>
       <p:sp>
         <p:nvSpPr>
@@ -3003,11 +2783,11 @@
           <a:bodyPr wrap="square" rtlCol="0" anchor="ctr"/>
           <a:lstStyle/>
           <a:p>
-            <a:pPr algn="ctr" indent="0" marL="0">
+            <a:pPr marL="0" indent="0" algn="ctr">
               <a:buNone/>
             </a:pPr>
             <a:r>
-              <a:rPr lang="en-US" sz="1200" b="1" spc="50" kern="0" dirty="0">
+              <a:rPr lang="en-US" sz="1200" b="1" kern="0" spc="50" dirty="0">
                 <a:solidFill>
                   <a:srgbClr val="FFFFFF"/>
                 </a:solidFill>
@@ -3042,11 +2822,11 @@
           <a:bodyPr wrap="square" rtlCol="0" anchor="ctr"/>
           <a:lstStyle/>
           <a:p>
-            <a:pPr indent="0" marL="0">
+            <a:pPr marL="0" indent="0">
               <a:buNone/>
             </a:pPr>
             <a:r>
-              <a:rPr lang="en-US" sz="3000" b="1" spc="50" kern="0" dirty="0">
+              <a:rPr lang="en-US" sz="3000" b="1" kern="0" spc="50" dirty="0">
                 <a:solidFill>
                   <a:srgbClr val="0A1A1C"/>
                 </a:solidFill>
@@ -3084,6 +2864,13 @@
             <a:prstDash val="solid"/>
           </a:ln>
         </p:spPr>
+        <p:txBody>
+          <a:bodyPr/>
+          <a:lstStyle/>
+          <a:p>
+            <a:endParaRPr lang="en-US"/>
+          </a:p>
+        </p:txBody>
       </p:sp>
       <p:sp>
         <p:nvSpPr>
@@ -3121,9 +2908,6 @@
               </a:rPr>
               <a:t>API server — </a:t>
             </a:r>
-            <a:pPr indent="0" marL="0">
-              <a:buNone/>
-            </a:pPr>
             <a:r>
               <a:rPr lang="en-US" sz="2000" dirty="0">
                 <a:solidFill>
@@ -3175,9 +2959,6 @@
               </a:rPr>
               <a:t>etcd — </a:t>
             </a:r>
-            <a:pPr indent="0" marL="0">
-              <a:buNone/>
-            </a:pPr>
             <a:r>
               <a:rPr lang="en-US" sz="2000" dirty="0">
                 <a:solidFill>
@@ -3229,9 +3010,6 @@
               </a:rPr>
               <a:t>Scheduler — </a:t>
             </a:r>
-            <a:pPr indent="0" marL="0">
-              <a:buNone/>
-            </a:pPr>
             <a:r>
               <a:rPr lang="en-US" sz="2000" dirty="0">
                 <a:solidFill>
@@ -3283,9 +3061,6 @@
               </a:rPr>
               <a:t>Controller manager — </a:t>
             </a:r>
-            <a:pPr indent="0" marL="0">
-              <a:buNone/>
-            </a:pPr>
             <a:r>
               <a:rPr lang="en-US" sz="2000" dirty="0">
                 <a:solidFill>
@@ -3337,9 +3112,6 @@
               </a:rPr>
               <a:t>kubelet — </a:t>
             </a:r>
-            <a:pPr indent="0" marL="0">
-              <a:buNone/>
-            </a:pPr>
             <a:r>
               <a:rPr lang="en-US" sz="2000" dirty="0">
                 <a:solidFill>
@@ -3371,6 +3143,7 @@
         <a:solidFill>
           <a:srgbClr val="EAFCFF"/>
         </a:solidFill>
+        <a:effectLst/>
       </p:bgPr>
     </p:bg>
     <p:spTree>
@@ -3411,6 +3184,13 @@
             <a:prstDash val="solid"/>
           </a:ln>
         </p:spPr>
+        <p:txBody>
+          <a:bodyPr/>
+          <a:lstStyle/>
+          <a:p>
+            <a:endParaRPr lang="en-US"/>
+          </a:p>
+        </p:txBody>
       </p:sp>
       <p:sp>
         <p:nvSpPr>
@@ -3433,11 +3213,11 @@
           <a:bodyPr wrap="square" rtlCol="0" anchor="ctr"/>
           <a:lstStyle/>
           <a:p>
-            <a:pPr algn="ctr" indent="0" marL="0">
+            <a:pPr marL="0" indent="0" algn="ctr">
               <a:buNone/>
             </a:pPr>
             <a:r>
-              <a:rPr lang="en-US" sz="1200" b="1" spc="50" kern="0" dirty="0">
+              <a:rPr lang="en-US" sz="1200" b="1" kern="0" spc="50" dirty="0">
                 <a:solidFill>
                   <a:srgbClr val="FFFFFF"/>
                 </a:solidFill>
@@ -3472,11 +3252,11 @@
           <a:bodyPr wrap="square" rtlCol="0" anchor="ctr"/>
           <a:lstStyle/>
           <a:p>
-            <a:pPr indent="0" marL="0">
+            <a:pPr marL="0" indent="0">
               <a:buNone/>
             </a:pPr>
             <a:r>
-              <a:rPr lang="en-US" sz="3000" b="1" spc="50" kern="0" dirty="0">
+              <a:rPr lang="en-US" sz="3000" b="1" kern="0" spc="50" dirty="0">
                 <a:solidFill>
                   <a:srgbClr val="0A1A1C"/>
                 </a:solidFill>
@@ -3514,6 +3294,13 @@
             <a:prstDash val="solid"/>
           </a:ln>
         </p:spPr>
+        <p:txBody>
+          <a:bodyPr/>
+          <a:lstStyle/>
+          <a:p>
+            <a:endParaRPr lang="en-US"/>
+          </a:p>
+        </p:txBody>
       </p:sp>
       <p:sp>
         <p:nvSpPr>
@@ -3541,6 +3328,13 @@
             <a:prstDash val="solid"/>
           </a:ln>
         </p:spPr>
+        <p:txBody>
+          <a:bodyPr/>
+          <a:lstStyle/>
+          <a:p>
+            <a:endParaRPr lang="en-US"/>
+          </a:p>
+        </p:txBody>
       </p:sp>
       <p:sp>
         <p:nvSpPr>
@@ -3563,7 +3357,7 @@
           <a:bodyPr wrap="square" rtlCol="0" anchor="ctr"/>
           <a:lstStyle/>
           <a:p>
-            <a:pPr algn="ctr" indent="0" marL="0">
+            <a:pPr marL="0" indent="0" algn="ctr">
               <a:buNone/>
             </a:pPr>
             <a:r>
@@ -3602,7 +3396,7 @@
           <a:bodyPr wrap="square" rtlCol="0" anchor="ctr"/>
           <a:lstStyle/>
           <a:p>
-            <a:pPr algn="ctr" indent="0" marL="0">
+            <a:pPr marL="0" indent="0" algn="ctr">
               <a:buNone/>
             </a:pPr>
             <a:r>
@@ -3646,6 +3440,13 @@
             <a:prstDash val="solid"/>
           </a:ln>
         </p:spPr>
+        <p:txBody>
+          <a:bodyPr/>
+          <a:lstStyle/>
+          <a:p>
+            <a:endParaRPr lang="en-US"/>
+          </a:p>
+        </p:txBody>
       </p:sp>
       <p:sp>
         <p:nvSpPr>
@@ -3668,7 +3469,7 @@
           <a:bodyPr wrap="square" rtlCol="0" anchor="ctr"/>
           <a:lstStyle/>
           <a:p>
-            <a:pPr algn="ctr" indent="0" marL="0">
+            <a:pPr marL="0" indent="0" algn="ctr">
               <a:buNone/>
             </a:pPr>
             <a:r>
@@ -3685,7 +3486,7 @@
             <a:endParaRPr lang="en-US" sz="1100" dirty="0"/>
           </a:p>
           <a:p>
-            <a:pPr algn="ctr" indent="0" marL="0">
+            <a:pPr marL="0" indent="0" algn="ctr">
               <a:buNone/>
             </a:pPr>
             <a:r>
@@ -3724,7 +3525,7 @@
           <a:bodyPr wrap="square" rtlCol="0" anchor="ctr"/>
           <a:lstStyle/>
           <a:p>
-            <a:pPr algn="ctr" indent="0" marL="0">
+            <a:pPr marL="0" indent="0" algn="ctr">
               <a:buNone/>
             </a:pPr>
             <a:r>
@@ -3768,6 +3569,13 @@
             <a:prstDash val="solid"/>
           </a:ln>
         </p:spPr>
+        <p:txBody>
+          <a:bodyPr/>
+          <a:lstStyle/>
+          <a:p>
+            <a:endParaRPr lang="en-US"/>
+          </a:p>
+        </p:txBody>
       </p:sp>
       <p:sp>
         <p:nvSpPr>
@@ -3790,7 +3598,7 @@
           <a:bodyPr wrap="square" rtlCol="0" anchor="ctr"/>
           <a:lstStyle/>
           <a:p>
-            <a:pPr algn="ctr" indent="0" marL="0">
+            <a:pPr marL="0" indent="0" algn="ctr">
               <a:buNone/>
             </a:pPr>
             <a:r>
@@ -3829,7 +3637,7 @@
           <a:bodyPr wrap="square" rtlCol="0" anchor="ctr"/>
           <a:lstStyle/>
           <a:p>
-            <a:pPr algn="ctr" indent="0" marL="0">
+            <a:pPr marL="0" indent="0" algn="ctr">
               <a:buNone/>
             </a:pPr>
             <a:r>
@@ -3873,6 +3681,13 @@
             <a:prstDash val="solid"/>
           </a:ln>
         </p:spPr>
+        <p:txBody>
+          <a:bodyPr/>
+          <a:lstStyle/>
+          <a:p>
+            <a:endParaRPr lang="en-US"/>
+          </a:p>
+        </p:txBody>
       </p:sp>
       <p:sp>
         <p:nvSpPr>
@@ -3895,7 +3710,7 @@
           <a:bodyPr wrap="square" rtlCol="0" anchor="ctr"/>
           <a:lstStyle/>
           <a:p>
-            <a:pPr algn="ctr" indent="0" marL="0">
+            <a:pPr marL="0" indent="0" algn="ctr">
               <a:buNone/>
             </a:pPr>
             <a:r>
@@ -3934,7 +3749,7 @@
           <a:bodyPr wrap="square" rtlCol="0" anchor="ctr"/>
           <a:lstStyle/>
           <a:p>
-            <a:pPr algn="ctr" indent="0" marL="0">
+            <a:pPr marL="0" indent="0" algn="ctr">
               <a:buNone/>
             </a:pPr>
             <a:r>
@@ -3978,6 +3793,13 @@
             <a:prstDash val="solid"/>
           </a:ln>
         </p:spPr>
+        <p:txBody>
+          <a:bodyPr/>
+          <a:lstStyle/>
+          <a:p>
+            <a:endParaRPr lang="en-US"/>
+          </a:p>
+        </p:txBody>
       </p:sp>
       <p:sp>
         <p:nvSpPr>
@@ -4000,7 +3822,7 @@
           <a:bodyPr wrap="square" rtlCol="0" anchor="ctr"/>
           <a:lstStyle/>
           <a:p>
-            <a:pPr algn="ctr" indent="0" marL="0">
+            <a:pPr marL="0" indent="0" algn="ctr">
               <a:buNone/>
             </a:pPr>
             <a:r>
@@ -4039,7 +3861,7 @@
           <a:bodyPr wrap="square" rtlCol="0" anchor="ctr"/>
           <a:lstStyle/>
           <a:p>
-            <a:pPr algn="ctr" indent="0" marL="0">
+            <a:pPr marL="0" indent="0" algn="ctr">
               <a:buNone/>
             </a:pPr>
             <a:r>
@@ -4083,6 +3905,13 @@
             <a:prstDash val="solid"/>
           </a:ln>
         </p:spPr>
+        <p:txBody>
+          <a:bodyPr/>
+          <a:lstStyle/>
+          <a:p>
+            <a:endParaRPr lang="en-US"/>
+          </a:p>
+        </p:txBody>
       </p:sp>
       <p:sp>
         <p:nvSpPr>
@@ -4105,7 +3934,7 @@
           <a:bodyPr wrap="square" rtlCol="0" anchor="ctr"/>
           <a:lstStyle/>
           <a:p>
-            <a:pPr algn="ctr" indent="0" marL="0">
+            <a:pPr marL="0" indent="0" algn="ctr">
               <a:buNone/>
             </a:pPr>
             <a:r>
@@ -4122,7 +3951,7 @@
             <a:endParaRPr lang="en-US" sz="1100" dirty="0"/>
           </a:p>
           <a:p>
-            <a:pPr algn="ctr" indent="0" marL="0">
+            <a:pPr marL="0" indent="0" algn="ctr">
               <a:buNone/>
             </a:pPr>
             <a:r>
@@ -4436,6 +4265,7 @@
         <a:solidFill>
           <a:srgbClr val="007A90"/>
         </a:solidFill>
+        <a:effectLst/>
       </p:bgPr>
     </p:bg>
     <p:spTree>
@@ -4476,6 +4306,13 @@
             <a:prstDash val="solid"/>
           </a:ln>
         </p:spPr>
+        <p:txBody>
+          <a:bodyPr/>
+          <a:lstStyle/>
+          <a:p>
+            <a:endParaRPr lang="en-US"/>
+          </a:p>
+        </p:txBody>
       </p:sp>
       <p:sp>
         <p:nvSpPr>
@@ -4498,11 +4335,11 @@
           <a:bodyPr wrap="square" rtlCol="0" anchor="ctr"/>
           <a:lstStyle/>
           <a:p>
-            <a:pPr algn="ctr" indent="0" marL="0">
+            <a:pPr marL="0" indent="0" algn="ctr">
               <a:buNone/>
             </a:pPr>
             <a:r>
-              <a:rPr lang="en-US" sz="4800" b="1" spc="50" kern="0" dirty="0">
+              <a:rPr lang="en-US" sz="4800" b="1" kern="0" spc="50" dirty="0">
                 <a:solidFill>
                   <a:srgbClr val="FFFFFF"/>
                 </a:solidFill>
@@ -4537,7 +4374,7 @@
           <a:bodyPr wrap="square" rtlCol="0" anchor="ctr"/>
           <a:lstStyle/>
           <a:p>
-            <a:pPr algn="ctr" indent="0" marL="0">
+            <a:pPr marL="0" indent="0" algn="ctr">
               <a:buNone/>
             </a:pPr>
             <a:r>
@@ -4573,6 +4410,7 @@
         <a:solidFill>
           <a:srgbClr val="EAFCFF"/>
         </a:solidFill>
+        <a:effectLst/>
       </p:bgPr>
     </p:bg>
     <p:spTree>
@@ -4613,6 +4451,13 @@
             <a:prstDash val="solid"/>
           </a:ln>
         </p:spPr>
+        <p:txBody>
+          <a:bodyPr/>
+          <a:lstStyle/>
+          <a:p>
+            <a:endParaRPr lang="en-US"/>
+          </a:p>
+        </p:txBody>
       </p:sp>
       <p:sp>
         <p:nvSpPr>
@@ -4635,11 +4480,11 @@
           <a:bodyPr wrap="square" rtlCol="0" anchor="ctr"/>
           <a:lstStyle/>
           <a:p>
-            <a:pPr algn="ctr" indent="0" marL="0">
+            <a:pPr marL="0" indent="0" algn="ctr">
               <a:buNone/>
             </a:pPr>
             <a:r>
-              <a:rPr lang="en-US" sz="1200" b="1" spc="50" kern="0" dirty="0">
+              <a:rPr lang="en-US" sz="1200" b="1" kern="0" spc="50" dirty="0">
                 <a:solidFill>
                   <a:srgbClr val="FFFFFF"/>
                 </a:solidFill>
@@ -4674,11 +4519,11 @@
           <a:bodyPr wrap="square" rtlCol="0" anchor="ctr"/>
           <a:lstStyle/>
           <a:p>
-            <a:pPr indent="0" marL="0">
+            <a:pPr marL="0" indent="0">
               <a:buNone/>
             </a:pPr>
             <a:r>
-              <a:rPr lang="en-US" sz="3000" b="1" spc="50" kern="0" dirty="0">
+              <a:rPr lang="en-US" sz="3000" b="1" kern="0" spc="50" dirty="0">
                 <a:solidFill>
                   <a:srgbClr val="0A1A1C"/>
                 </a:solidFill>
@@ -4716,6 +4561,13 @@
             <a:prstDash val="solid"/>
           </a:ln>
         </p:spPr>
+        <p:txBody>
+          <a:bodyPr/>
+          <a:lstStyle/>
+          <a:p>
+            <a:endParaRPr lang="en-US"/>
+          </a:p>
+        </p:txBody>
       </p:sp>
       <p:sp>
         <p:nvSpPr>
@@ -4725,8 +4577,8 @@
         </p:nvSpPr>
         <p:spPr>
           <a:xfrm>
-            <a:off x="457200" y="1572768"/>
-            <a:ext cx="5477256" cy="5010912"/>
+            <a:off x="686614" y="2814223"/>
+            <a:ext cx="5204564" cy="2626457"/>
           </a:xfrm>
           <a:prstGeom prst="rect">
             <a:avLst/>
@@ -4741,6 +4593,13 @@
             <a:prstDash val="solid"/>
           </a:ln>
         </p:spPr>
+        <p:txBody>
+          <a:bodyPr/>
+          <a:lstStyle/>
+          <a:p>
+            <a:endParaRPr lang="en-US"/>
+          </a:p>
+        </p:txBody>
       </p:sp>
       <p:sp>
         <p:nvSpPr>
@@ -4750,7 +4609,7 @@
         </p:nvSpPr>
         <p:spPr>
           <a:xfrm>
-            <a:off x="640080" y="1709928"/>
+            <a:off x="914807" y="3007899"/>
             <a:ext cx="5111496" cy="4736592"/>
           </a:xfrm>
           <a:prstGeom prst="rect">
@@ -4763,7 +4622,7 @@
           <a:bodyPr wrap="none" rtlCol="0" anchor="t"/>
           <a:lstStyle/>
           <a:p>
-            <a:pPr indent="0" marL="0">
+            <a:pPr marL="0" indent="0">
               <a:buNone/>
             </a:pPr>
             <a:r>
@@ -4780,7 +4639,7 @@
             <a:endParaRPr lang="en-US" sz="1400" dirty="0"/>
           </a:p>
           <a:p>
-            <a:pPr indent="0" marL="0">
+            <a:pPr marL="0" indent="0">
               <a:buNone/>
             </a:pPr>
             <a:r>
@@ -4797,7 +4656,7 @@
             <a:endParaRPr lang="en-US" sz="1400" dirty="0"/>
           </a:p>
           <a:p>
-            <a:pPr indent="0" marL="0">
+            <a:pPr marL="0" indent="0">
               <a:buNone/>
             </a:pPr>
             <a:r>
@@ -4814,7 +4673,7 @@
             <a:endParaRPr lang="en-US" sz="1400" dirty="0"/>
           </a:p>
           <a:p>
-            <a:pPr indent="0" marL="0">
+            <a:pPr marL="0" indent="0">
               <a:buNone/>
             </a:pPr>
             <a:r>
@@ -4831,7 +4690,7 @@
             <a:endParaRPr lang="en-US" sz="1400" dirty="0"/>
           </a:p>
           <a:p>
-            <a:pPr indent="0" marL="0">
+            <a:pPr marL="0" indent="0">
               <a:buNone/>
             </a:pPr>
             <a:r>
@@ -4848,7 +4707,7 @@
             <a:endParaRPr lang="en-US" sz="1400" dirty="0"/>
           </a:p>
           <a:p>
-            <a:pPr indent="0" marL="0">
+            <a:pPr marL="0" indent="0">
               <a:buNone/>
             </a:pPr>
             <a:r>
@@ -4865,7 +4724,7 @@
             <a:endParaRPr lang="en-US" sz="1400" dirty="0"/>
           </a:p>
           <a:p>
-            <a:pPr indent="0" marL="0">
+            <a:pPr marL="0" indent="0">
               <a:buNone/>
             </a:pPr>
             <a:r>
@@ -4882,7 +4741,7 @@
             <a:endParaRPr lang="en-US" sz="1400" dirty="0"/>
           </a:p>
           <a:p>
-            <a:pPr indent="0" marL="0">
+            <a:pPr marL="0" indent="0">
               <a:buNone/>
             </a:pPr>
             <a:r>
@@ -4899,7 +4758,7 @@
             <a:endParaRPr lang="en-US" sz="1400" dirty="0"/>
           </a:p>
           <a:p>
-            <a:pPr indent="0" marL="0">
+            <a:pPr marL="0" indent="0">
               <a:buNone/>
             </a:pPr>
             <a:r>
@@ -4916,7 +4775,7 @@
             <a:endParaRPr lang="en-US" sz="1400" dirty="0"/>
           </a:p>
           <a:p>
-            <a:pPr indent="0" marL="0">
+            <a:pPr marL="0" indent="0">
               <a:buNone/>
             </a:pPr>
             <a:r>
@@ -5150,6 +5009,7 @@
         <a:solidFill>
           <a:srgbClr val="EAFCFF"/>
         </a:solidFill>
+        <a:effectLst/>
       </p:bgPr>
     </p:bg>
     <p:spTree>
@@ -5190,6 +5050,13 @@
             <a:prstDash val="solid"/>
           </a:ln>
         </p:spPr>
+        <p:txBody>
+          <a:bodyPr/>
+          <a:lstStyle/>
+          <a:p>
+            <a:endParaRPr lang="en-US"/>
+          </a:p>
+        </p:txBody>
       </p:sp>
       <p:sp>
         <p:nvSpPr>
@@ -5212,11 +5079,11 @@
           <a:bodyPr wrap="square" rtlCol="0" anchor="ctr"/>
           <a:lstStyle/>
           <a:p>
-            <a:pPr algn="ctr" indent="0" marL="0">
+            <a:pPr marL="0" indent="0" algn="ctr">
               <a:buNone/>
             </a:pPr>
             <a:r>
-              <a:rPr lang="en-US" sz="1200" b="1" spc="50" kern="0" dirty="0">
+              <a:rPr lang="en-US" sz="1200" b="1" kern="0" spc="50" dirty="0">
                 <a:solidFill>
                   <a:srgbClr val="FFFFFF"/>
                 </a:solidFill>
@@ -5251,11 +5118,11 @@
           <a:bodyPr wrap="square" rtlCol="0" anchor="ctr"/>
           <a:lstStyle/>
           <a:p>
-            <a:pPr indent="0" marL="0">
+            <a:pPr marL="0" indent="0">
               <a:buNone/>
             </a:pPr>
             <a:r>
-              <a:rPr lang="en-US" sz="3000" b="1" spc="50" kern="0" dirty="0">
+              <a:rPr lang="en-US" sz="3000" b="1" kern="0" spc="50" dirty="0">
                 <a:solidFill>
                   <a:srgbClr val="0A1A1C"/>
                 </a:solidFill>
@@ -5293,6 +5160,13 @@
             <a:prstDash val="solid"/>
           </a:ln>
         </p:spPr>
+        <p:txBody>
+          <a:bodyPr/>
+          <a:lstStyle/>
+          <a:p>
+            <a:endParaRPr lang="en-US"/>
+          </a:p>
+        </p:txBody>
       </p:sp>
       <p:sp>
         <p:nvSpPr>
@@ -5320,6 +5194,13 @@
             <a:prstDash val="solid"/>
           </a:ln>
         </p:spPr>
+        <p:txBody>
+          <a:bodyPr/>
+          <a:lstStyle/>
+          <a:p>
+            <a:endParaRPr lang="en-US"/>
+          </a:p>
+        </p:txBody>
       </p:sp>
       <p:sp>
         <p:nvSpPr>
@@ -5342,7 +5223,7 @@
           <a:bodyPr wrap="square" rtlCol="0" anchor="ctr"/>
           <a:lstStyle/>
           <a:p>
-            <a:pPr algn="ctr" indent="0" marL="0">
+            <a:pPr marL="0" indent="0" algn="ctr">
               <a:buNone/>
             </a:pPr>
             <a:r>
@@ -5381,7 +5262,7 @@
           <a:bodyPr wrap="square" rtlCol="0" anchor="ctr"/>
           <a:lstStyle/>
           <a:p>
-            <a:pPr algn="ctr" indent="0" marL="0">
+            <a:pPr marL="0" indent="0" algn="ctr">
               <a:buNone/>
             </a:pPr>
             <a:r>
@@ -5425,6 +5306,13 @@
             <a:prstDash val="solid"/>
           </a:ln>
         </p:spPr>
+        <p:txBody>
+          <a:bodyPr/>
+          <a:lstStyle/>
+          <a:p>
+            <a:endParaRPr lang="en-US"/>
+          </a:p>
+        </p:txBody>
       </p:sp>
       <p:sp>
         <p:nvSpPr>
@@ -5447,7 +5335,7 @@
           <a:bodyPr wrap="square" rtlCol="0" anchor="ctr"/>
           <a:lstStyle/>
           <a:p>
-            <a:pPr algn="ctr" indent="0" marL="0">
+            <a:pPr marL="0" indent="0" algn="ctr">
               <a:buNone/>
             </a:pPr>
             <a:r>
@@ -5486,7 +5374,7 @@
           <a:bodyPr wrap="square" rtlCol="0" anchor="ctr"/>
           <a:lstStyle/>
           <a:p>
-            <a:pPr algn="ctr" indent="0" marL="0">
+            <a:pPr marL="0" indent="0" algn="ctr">
               <a:buNone/>
             </a:pPr>
             <a:r>
@@ -5530,6 +5418,13 @@
             <a:prstDash val="solid"/>
           </a:ln>
         </p:spPr>
+        <p:txBody>
+          <a:bodyPr/>
+          <a:lstStyle/>
+          <a:p>
+            <a:endParaRPr lang="en-US"/>
+          </a:p>
+        </p:txBody>
       </p:sp>
       <p:sp>
         <p:nvSpPr>
@@ -5552,7 +5447,7 @@
           <a:bodyPr wrap="square" rtlCol="0" anchor="ctr"/>
           <a:lstStyle/>
           <a:p>
-            <a:pPr algn="ctr" indent="0" marL="0">
+            <a:pPr marL="0" indent="0" algn="ctr">
               <a:buNone/>
             </a:pPr>
             <a:r>
@@ -5594,6 +5489,13 @@
             <a:prstDash val="solid"/>
           </a:ln>
         </p:spPr>
+        <p:txBody>
+          <a:bodyPr/>
+          <a:lstStyle/>
+          <a:p>
+            <a:endParaRPr lang="en-US"/>
+          </a:p>
+        </p:txBody>
       </p:sp>
       <p:sp>
         <p:nvSpPr>
@@ -5616,7 +5518,7 @@
           <a:bodyPr wrap="none" rtlCol="0" anchor="t"/>
           <a:lstStyle/>
           <a:p>
-            <a:pPr indent="0" marL="0">
+            <a:pPr marL="0" indent="0">
               <a:buNone/>
             </a:pPr>
             <a:r>
@@ -5633,7 +5535,7 @@
             <a:endParaRPr lang="en-US" sz="1300" dirty="0"/>
           </a:p>
           <a:p>
-            <a:pPr indent="0" marL="0">
+            <a:pPr marL="0" indent="0">
               <a:buNone/>
             </a:pPr>
             <a:r>
@@ -5650,7 +5552,7 @@
             <a:endParaRPr lang="en-US" sz="1300" dirty="0"/>
           </a:p>
           <a:p>
-            <a:pPr indent="0" marL="0">
+            <a:pPr marL="0" indent="0">
               <a:buNone/>
             </a:pPr>
             <a:r>
@@ -5667,7 +5569,7 @@
             <a:endParaRPr lang="en-US" sz="1300" dirty="0"/>
           </a:p>
           <a:p>
-            <a:pPr indent="0" marL="0">
+            <a:pPr marL="0" indent="0">
               <a:buNone/>
             </a:pPr>
             <a:r>
@@ -5684,7 +5586,7 @@
             <a:endParaRPr lang="en-US" sz="1300" dirty="0"/>
           </a:p>
           <a:p>
-            <a:pPr indent="0" marL="0">
+            <a:pPr marL="0" indent="0">
               <a:buNone/>
             </a:pPr>
             <a:r>
@@ -5701,7 +5603,7 @@
             <a:endParaRPr lang="en-US" sz="1300" dirty="0"/>
           </a:p>
           <a:p>
-            <a:pPr indent="0" marL="0">
+            <a:pPr marL="0" indent="0">
               <a:buNone/>
             </a:pPr>
             <a:r>
@@ -5718,7 +5620,7 @@
             <a:endParaRPr lang="en-US" sz="1300" dirty="0"/>
           </a:p>
           <a:p>
-            <a:pPr indent="0" marL="0">
+            <a:pPr marL="0" indent="0">
               <a:buNone/>
             </a:pPr>
             <a:r>
@@ -5735,7 +5637,7 @@
             <a:endParaRPr lang="en-US" sz="1300" dirty="0"/>
           </a:p>
           <a:p>
-            <a:pPr indent="0" marL="0">
+            <a:pPr marL="0" indent="0">
               <a:buNone/>
             </a:pPr>
             <a:r>
@@ -5752,7 +5654,7 @@
             <a:endParaRPr lang="en-US" sz="1300" dirty="0"/>
           </a:p>
           <a:p>
-            <a:pPr indent="0" marL="0">
+            <a:pPr marL="0" indent="0">
               <a:buNone/>
             </a:pPr>
             <a:r>
@@ -5946,6 +5848,7 @@
         <a:solidFill>
           <a:srgbClr val="007A90"/>
         </a:solidFill>
+        <a:effectLst/>
       </p:bgPr>
     </p:bg>
     <p:spTree>
@@ -5986,6 +5889,13 @@
             <a:prstDash val="solid"/>
           </a:ln>
         </p:spPr>
+        <p:txBody>
+          <a:bodyPr/>
+          <a:lstStyle/>
+          <a:p>
+            <a:endParaRPr lang="en-US"/>
+          </a:p>
+        </p:txBody>
       </p:sp>
       <p:sp>
         <p:nvSpPr>
@@ -6008,11 +5918,11 @@
           <a:bodyPr wrap="square" rtlCol="0" anchor="ctr"/>
           <a:lstStyle/>
           <a:p>
-            <a:pPr algn="ctr" indent="0" marL="0">
+            <a:pPr marL="0" indent="0" algn="ctr">
               <a:buNone/>
             </a:pPr>
             <a:r>
-              <a:rPr lang="en-US" sz="4800" b="1" spc="50" kern="0" dirty="0">
+              <a:rPr lang="en-US" sz="4800" b="1" kern="0" spc="50" dirty="0">
                 <a:solidFill>
                   <a:srgbClr val="FFFFFF"/>
                 </a:solidFill>
@@ -6047,7 +5957,7 @@
           <a:bodyPr wrap="square" rtlCol="0" anchor="ctr"/>
           <a:lstStyle/>
           <a:p>
-            <a:pPr algn="ctr" indent="0" marL="0">
+            <a:pPr marL="0" indent="0" algn="ctr">
               <a:buNone/>
             </a:pPr>
             <a:r>
@@ -6083,6 +5993,7 @@
         <a:solidFill>
           <a:srgbClr val="EAFCFF"/>
         </a:solidFill>
+        <a:effectLst/>
       </p:bgPr>
     </p:bg>
     <p:spTree>
@@ -6123,6 +6034,13 @@
             <a:prstDash val="solid"/>
           </a:ln>
         </p:spPr>
+        <p:txBody>
+          <a:bodyPr/>
+          <a:lstStyle/>
+          <a:p>
+            <a:endParaRPr lang="en-US"/>
+          </a:p>
+        </p:txBody>
       </p:sp>
       <p:sp>
         <p:nvSpPr>
@@ -6145,11 +6063,11 @@
           <a:bodyPr wrap="square" rtlCol="0" anchor="ctr"/>
           <a:lstStyle/>
           <a:p>
-            <a:pPr algn="ctr" indent="0" marL="0">
+            <a:pPr marL="0" indent="0" algn="ctr">
               <a:buNone/>
             </a:pPr>
             <a:r>
-              <a:rPr lang="en-US" sz="1200" b="1" spc="50" kern="0" dirty="0">
+              <a:rPr lang="en-US" sz="1200" b="1" kern="0" spc="50" dirty="0">
                 <a:solidFill>
                   <a:srgbClr val="FFFFFF"/>
                 </a:solidFill>
@@ -6184,11 +6102,11 @@
           <a:bodyPr wrap="square" rtlCol="0" anchor="ctr"/>
           <a:lstStyle/>
           <a:p>
-            <a:pPr indent="0" marL="0">
+            <a:pPr marL="0" indent="0">
               <a:buNone/>
             </a:pPr>
             <a:r>
-              <a:rPr lang="en-US" sz="3000" b="1" spc="50" kern="0" dirty="0">
+              <a:rPr lang="en-US" sz="3000" b="1" kern="0" spc="50" dirty="0">
                 <a:solidFill>
                   <a:srgbClr val="0A1A1C"/>
                 </a:solidFill>
@@ -6226,6 +6144,13 @@
             <a:prstDash val="solid"/>
           </a:ln>
         </p:spPr>
+        <p:txBody>
+          <a:bodyPr/>
+          <a:lstStyle/>
+          <a:p>
+            <a:endParaRPr lang="en-US"/>
+          </a:p>
+        </p:txBody>
       </p:sp>
       <p:sp>
         <p:nvSpPr>
@@ -6235,8 +6160,8 @@
         </p:nvSpPr>
         <p:spPr>
           <a:xfrm>
-            <a:off x="457200" y="1572768"/>
-            <a:ext cx="5477256" cy="5010912"/>
+            <a:off x="455676" y="3581880"/>
+            <a:ext cx="5638800" cy="992688"/>
           </a:xfrm>
           <a:prstGeom prst="rect">
             <a:avLst/>
@@ -6251,6 +6176,13 @@
             <a:prstDash val="solid"/>
           </a:ln>
         </p:spPr>
+        <p:txBody>
+          <a:bodyPr/>
+          <a:lstStyle/>
+          <a:p>
+            <a:endParaRPr lang="en-US"/>
+          </a:p>
+        </p:txBody>
       </p:sp>
       <p:sp>
         <p:nvSpPr>
@@ -6260,8 +6192,8 @@
         </p:nvSpPr>
         <p:spPr>
           <a:xfrm>
-            <a:off x="640080" y="1709928"/>
-            <a:ext cx="5111496" cy="4736592"/>
+            <a:off x="577448" y="3682464"/>
+            <a:ext cx="5936085" cy="4713168"/>
           </a:xfrm>
           <a:prstGeom prst="rect">
             <a:avLst/>
@@ -6273,11 +6205,11 @@
           <a:bodyPr wrap="none" rtlCol="0" anchor="t"/>
           <a:lstStyle/>
           <a:p>
-            <a:pPr indent="0" marL="0">
+            <a:pPr marL="0" indent="0">
               <a:buNone/>
             </a:pPr>
             <a:r>
-              <a:rPr lang="en-US" sz="1300" dirty="0">
+              <a:rPr lang="en-US" sz="1200" dirty="0">
                 <a:solidFill>
                   <a:srgbClr val="003848"/>
                 </a:solidFill>
@@ -6287,14 +6219,14 @@
               </a:rPr>
               <a:t>kubectl expose deployment hello-deploy \</a:t>
             </a:r>
-            <a:endParaRPr lang="en-US" sz="1300" dirty="0"/>
-          </a:p>
-          <a:p>
-            <a:pPr indent="0" marL="0">
+            <a:endParaRPr lang="en-US" sz="1200" dirty="0"/>
+          </a:p>
+          <a:p>
+            <a:pPr marL="0" indent="0">
               <a:buNone/>
             </a:pPr>
             <a:r>
-              <a:rPr lang="en-US" sz="1300" dirty="0">
+              <a:rPr lang="en-US" sz="1200" dirty="0">
                 <a:solidFill>
                   <a:srgbClr val="003848"/>
                 </a:solidFill>
@@ -6304,14 +6236,14 @@
               </a:rPr>
               <a:t>  --port=80 --target-port=80 --name=hello-service</a:t>
             </a:r>
-            <a:endParaRPr lang="en-US" sz="1300" dirty="0"/>
-          </a:p>
-          <a:p>
-            <a:pPr indent="0" marL="0">
+            <a:endParaRPr lang="en-US" sz="1200" dirty="0"/>
+          </a:p>
+          <a:p>
+            <a:pPr marL="0" indent="0">
               <a:buNone/>
             </a:pPr>
             <a:r>
-              <a:rPr lang="en-US" sz="1300" dirty="0">
+              <a:rPr lang="en-US" sz="1200" dirty="0">
                 <a:solidFill>
                   <a:srgbClr val="003848"/>
                 </a:solidFill>
@@ -6321,7 +6253,7 @@
               </a:rPr>
               <a:t># → TYPE: ClusterIP   CLUSTER-IP: 10.x.x.x (stays fixed)</a:t>
             </a:r>
-            <a:endParaRPr lang="en-US" sz="1300" dirty="0"/>
+            <a:endParaRPr lang="en-US" sz="1200" dirty="0"/>
           </a:p>
         </p:txBody>
       </p:sp>
@@ -6501,6 +6433,7 @@
         <a:solidFill>
           <a:srgbClr val="EAFCFF"/>
         </a:solidFill>
+        <a:effectLst/>
       </p:bgPr>
     </p:bg>
     <p:spTree>
@@ -6541,6 +6474,13 @@
             <a:prstDash val="solid"/>
           </a:ln>
         </p:spPr>
+        <p:txBody>
+          <a:bodyPr/>
+          <a:lstStyle/>
+          <a:p>
+            <a:endParaRPr lang="en-US"/>
+          </a:p>
+        </p:txBody>
       </p:sp>
       <p:sp>
         <p:nvSpPr>
@@ -6563,11 +6503,11 @@
           <a:bodyPr wrap="square" rtlCol="0" anchor="ctr"/>
           <a:lstStyle/>
           <a:p>
-            <a:pPr algn="ctr" indent="0" marL="0">
+            <a:pPr marL="0" indent="0" algn="ctr">
               <a:buNone/>
             </a:pPr>
             <a:r>
-              <a:rPr lang="en-US" sz="1200" b="1" spc="50" kern="0" dirty="0">
+              <a:rPr lang="en-US" sz="1200" b="1" kern="0" spc="50" dirty="0">
                 <a:solidFill>
                   <a:srgbClr val="FFFFFF"/>
                 </a:solidFill>
@@ -6602,11 +6542,11 @@
           <a:bodyPr wrap="square" rtlCol="0" anchor="ctr"/>
           <a:lstStyle/>
           <a:p>
-            <a:pPr indent="0" marL="0">
+            <a:pPr marL="0" indent="0">
               <a:buNone/>
             </a:pPr>
             <a:r>
-              <a:rPr lang="en-US" sz="3000" b="1" spc="50" kern="0" dirty="0">
+              <a:rPr lang="en-US" sz="3000" b="1" kern="0" spc="50" dirty="0">
                 <a:solidFill>
                   <a:srgbClr val="0A1A1C"/>
                 </a:solidFill>
@@ -6644,6 +6584,13 @@
             <a:prstDash val="solid"/>
           </a:ln>
         </p:spPr>
+        <p:txBody>
+          <a:bodyPr/>
+          <a:lstStyle/>
+          <a:p>
+            <a:endParaRPr lang="en-US"/>
+          </a:p>
+        </p:txBody>
       </p:sp>
       <p:sp>
         <p:nvSpPr>
@@ -6821,6 +6768,7 @@
         <a:solidFill>
           <a:srgbClr val="EAFCFF"/>
         </a:solidFill>
+        <a:effectLst/>
       </p:bgPr>
     </p:bg>
     <p:spTree>
@@ -6861,6 +6809,13 @@
             <a:prstDash val="solid"/>
           </a:ln>
         </p:spPr>
+        <p:txBody>
+          <a:bodyPr/>
+          <a:lstStyle/>
+          <a:p>
+            <a:endParaRPr lang="en-US"/>
+          </a:p>
+        </p:txBody>
       </p:sp>
       <p:sp>
         <p:nvSpPr>
@@ -6883,11 +6838,11 @@
           <a:bodyPr wrap="square" rtlCol="0" anchor="ctr"/>
           <a:lstStyle/>
           <a:p>
-            <a:pPr algn="ctr" indent="0" marL="0">
+            <a:pPr marL="0" indent="0" algn="ctr">
               <a:buNone/>
             </a:pPr>
             <a:r>
-              <a:rPr lang="en-US" sz="1200" b="1" spc="50" kern="0" dirty="0">
+              <a:rPr lang="en-US" sz="1200" b="1" kern="0" spc="50" dirty="0">
                 <a:solidFill>
                   <a:srgbClr val="FFFFFF"/>
                 </a:solidFill>
@@ -6922,11 +6877,11 @@
           <a:bodyPr wrap="square" rtlCol="0" anchor="ctr"/>
           <a:lstStyle/>
           <a:p>
-            <a:pPr indent="0" marL="0">
+            <a:pPr marL="0" indent="0">
               <a:buNone/>
             </a:pPr>
             <a:r>
-              <a:rPr lang="en-US" sz="3000" b="1" spc="50" kern="0" dirty="0">
+              <a:rPr lang="en-US" sz="3000" b="1" kern="0" spc="50" dirty="0">
                 <a:solidFill>
                   <a:srgbClr val="0A1A1C"/>
                 </a:solidFill>
@@ -6964,6 +6919,13 @@
             <a:prstDash val="solid"/>
           </a:ln>
         </p:spPr>
+        <p:txBody>
+          <a:bodyPr/>
+          <a:lstStyle/>
+          <a:p>
+            <a:endParaRPr lang="en-US"/>
+          </a:p>
+        </p:txBody>
       </p:sp>
       <p:sp>
         <p:nvSpPr>
@@ -6991,6 +6953,13 @@
             <a:prstDash val="solid"/>
           </a:ln>
         </p:spPr>
+        <p:txBody>
+          <a:bodyPr/>
+          <a:lstStyle/>
+          <a:p>
+            <a:endParaRPr lang="en-US"/>
+          </a:p>
+        </p:txBody>
       </p:sp>
       <p:sp>
         <p:nvSpPr>
@@ -7013,7 +6982,7 @@
           <a:bodyPr wrap="square" rtlCol="0" anchor="ctr"/>
           <a:lstStyle/>
           <a:p>
-            <a:pPr algn="ctr" indent="0" marL="0">
+            <a:pPr marL="0" indent="0" algn="ctr">
               <a:buNone/>
             </a:pPr>
             <a:r>
@@ -7030,7 +6999,7 @@
             <a:endParaRPr lang="en-US" sz="1100" dirty="0"/>
           </a:p>
           <a:p>
-            <a:pPr algn="ctr" indent="0" marL="0">
+            <a:pPr marL="0" indent="0" algn="ctr">
               <a:buNone/>
             </a:pPr>
             <a:r>
@@ -7069,7 +7038,7 @@
           <a:bodyPr wrap="square" rtlCol="0" anchor="ctr"/>
           <a:lstStyle/>
           <a:p>
-            <a:pPr algn="ctr" indent="0" marL="0">
+            <a:pPr marL="0" indent="0" algn="ctr">
               <a:buNone/>
             </a:pPr>
             <a:r>
@@ -7113,6 +7082,13 @@
             <a:prstDash val="solid"/>
           </a:ln>
         </p:spPr>
+        <p:txBody>
+          <a:bodyPr/>
+          <a:lstStyle/>
+          <a:p>
+            <a:endParaRPr lang="en-US"/>
+          </a:p>
+        </p:txBody>
       </p:sp>
       <p:sp>
         <p:nvSpPr>
@@ -7135,7 +7111,7 @@
           <a:bodyPr wrap="square" rtlCol="0" anchor="ctr"/>
           <a:lstStyle/>
           <a:p>
-            <a:pPr algn="ctr" indent="0" marL="0">
+            <a:pPr marL="0" indent="0" algn="ctr">
               <a:buNone/>
             </a:pPr>
             <a:r>
@@ -7152,7 +7128,7 @@
             <a:endParaRPr lang="en-US" sz="1100" dirty="0"/>
           </a:p>
           <a:p>
-            <a:pPr algn="ctr" indent="0" marL="0">
+            <a:pPr marL="0" indent="0" algn="ctr">
               <a:buNone/>
             </a:pPr>
             <a:r>
@@ -7191,7 +7167,7 @@
           <a:bodyPr wrap="square" rtlCol="0" anchor="ctr"/>
           <a:lstStyle/>
           <a:p>
-            <a:pPr algn="ctr" indent="0" marL="0">
+            <a:pPr marL="0" indent="0" algn="ctr">
               <a:buNone/>
             </a:pPr>
             <a:r>
@@ -7235,6 +7211,13 @@
             <a:prstDash val="solid"/>
           </a:ln>
         </p:spPr>
+        <p:txBody>
+          <a:bodyPr/>
+          <a:lstStyle/>
+          <a:p>
+            <a:endParaRPr lang="en-US"/>
+          </a:p>
+        </p:txBody>
       </p:sp>
       <p:sp>
         <p:nvSpPr>
@@ -7257,7 +7240,7 @@
           <a:bodyPr wrap="square" rtlCol="0" anchor="ctr"/>
           <a:lstStyle/>
           <a:p>
-            <a:pPr algn="ctr" indent="0" marL="0">
+            <a:pPr marL="0" indent="0" algn="ctr">
               <a:buNone/>
             </a:pPr>
             <a:r>
@@ -7274,7 +7257,7 @@
             <a:endParaRPr lang="en-US" sz="1100" dirty="0"/>
           </a:p>
           <a:p>
-            <a:pPr algn="ctr" indent="0" marL="0">
+            <a:pPr marL="0" indent="0" algn="ctr">
               <a:buNone/>
             </a:pPr>
             <a:r>
@@ -7313,7 +7296,7 @@
           <a:bodyPr wrap="square" rtlCol="0" anchor="ctr"/>
           <a:lstStyle/>
           <a:p>
-            <a:pPr algn="ctr" indent="0" marL="0">
+            <a:pPr marL="0" indent="0" algn="ctr">
               <a:buNone/>
             </a:pPr>
             <a:r>
@@ -7357,6 +7340,13 @@
             <a:prstDash val="solid"/>
           </a:ln>
         </p:spPr>
+        <p:txBody>
+          <a:bodyPr/>
+          <a:lstStyle/>
+          <a:p>
+            <a:endParaRPr lang="en-US"/>
+          </a:p>
+        </p:txBody>
       </p:sp>
       <p:sp>
         <p:nvSpPr>
@@ -7379,7 +7369,7 @@
           <a:bodyPr wrap="square" rtlCol="0" anchor="ctr"/>
           <a:lstStyle/>
           <a:p>
-            <a:pPr algn="ctr" indent="0" marL="0">
+            <a:pPr marL="0" indent="0" algn="ctr">
               <a:buNone/>
             </a:pPr>
             <a:r>
@@ -7396,7 +7386,7 @@
             <a:endParaRPr lang="en-US" sz="1100" dirty="0"/>
           </a:p>
           <a:p>
-            <a:pPr algn="ctr" indent="0" marL="0">
+            <a:pPr marL="0" indent="0" algn="ctr">
               <a:buNone/>
             </a:pPr>
             <a:r>
@@ -7435,7 +7425,7 @@
           <a:bodyPr wrap="square" rtlCol="0" anchor="ctr"/>
           <a:lstStyle/>
           <a:p>
-            <a:pPr algn="ctr" indent="0" marL="0">
+            <a:pPr marL="0" indent="0" algn="ctr">
               <a:buNone/>
             </a:pPr>
             <a:r>
@@ -7479,6 +7469,13 @@
             <a:prstDash val="solid"/>
           </a:ln>
         </p:spPr>
+        <p:txBody>
+          <a:bodyPr/>
+          <a:lstStyle/>
+          <a:p>
+            <a:endParaRPr lang="en-US"/>
+          </a:p>
+        </p:txBody>
       </p:sp>
       <p:sp>
         <p:nvSpPr>
@@ -7501,7 +7498,7 @@
           <a:bodyPr wrap="square" rtlCol="0" anchor="ctr"/>
           <a:lstStyle/>
           <a:p>
-            <a:pPr algn="ctr" indent="0" marL="0">
+            <a:pPr marL="0" indent="0" algn="ctr">
               <a:buNone/>
             </a:pPr>
             <a:r>
@@ -7695,6 +7692,7 @@
         <a:solidFill>
           <a:srgbClr val="EAFCFF"/>
         </a:solidFill>
+        <a:effectLst/>
       </p:bgPr>
     </p:bg>
     <p:spTree>
@@ -7735,6 +7733,13 @@
             <a:prstDash val="solid"/>
           </a:ln>
         </p:spPr>
+        <p:txBody>
+          <a:bodyPr/>
+          <a:lstStyle/>
+          <a:p>
+            <a:endParaRPr lang="en-US"/>
+          </a:p>
+        </p:txBody>
       </p:sp>
       <p:sp>
         <p:nvSpPr>
@@ -7757,11 +7762,11 @@
           <a:bodyPr wrap="square" rtlCol="0" anchor="ctr"/>
           <a:lstStyle/>
           <a:p>
-            <a:pPr algn="ctr" indent="0" marL="0">
+            <a:pPr marL="0" indent="0" algn="ctr">
               <a:buNone/>
             </a:pPr>
             <a:r>
-              <a:rPr lang="en-US" sz="1200" b="1" spc="50" kern="0" dirty="0">
+              <a:rPr lang="en-US" sz="1200" b="1" kern="0" spc="50" dirty="0">
                 <a:solidFill>
                   <a:srgbClr val="FFFFFF"/>
                 </a:solidFill>
@@ -7796,11 +7801,11 @@
           <a:bodyPr wrap="square" rtlCol="0" anchor="ctr"/>
           <a:lstStyle/>
           <a:p>
-            <a:pPr indent="0" marL="0">
+            <a:pPr marL="0" indent="0">
               <a:buNone/>
             </a:pPr>
             <a:r>
-              <a:rPr lang="en-US" sz="3000" b="1" spc="50" kern="0" dirty="0">
+              <a:rPr lang="en-US" sz="3000" b="1" kern="0" spc="50" dirty="0">
                 <a:solidFill>
                   <a:srgbClr val="0A1A1C"/>
                 </a:solidFill>
@@ -7838,6 +7843,13 @@
             <a:prstDash val="solid"/>
           </a:ln>
         </p:spPr>
+        <p:txBody>
+          <a:bodyPr/>
+          <a:lstStyle/>
+          <a:p>
+            <a:endParaRPr lang="en-US"/>
+          </a:p>
+        </p:txBody>
       </p:sp>
       <p:sp>
         <p:nvSpPr>
@@ -8015,6 +8027,7 @@
         <a:solidFill>
           <a:srgbClr val="EAFCFF"/>
         </a:solidFill>
+        <a:effectLst/>
       </p:bgPr>
     </p:bg>
     <p:spTree>
@@ -8055,6 +8068,13 @@
             <a:prstDash val="solid"/>
           </a:ln>
         </p:spPr>
+        <p:txBody>
+          <a:bodyPr/>
+          <a:lstStyle/>
+          <a:p>
+            <a:endParaRPr lang="en-US"/>
+          </a:p>
+        </p:txBody>
       </p:sp>
       <p:sp>
         <p:nvSpPr>
@@ -8077,11 +8097,11 @@
           <a:bodyPr wrap="square" rtlCol="0" anchor="ctr"/>
           <a:lstStyle/>
           <a:p>
-            <a:pPr algn="ctr" indent="0" marL="0">
+            <a:pPr marL="0" indent="0" algn="ctr">
               <a:buNone/>
             </a:pPr>
             <a:r>
-              <a:rPr lang="en-US" sz="1200" b="1" spc="50" kern="0" dirty="0">
+              <a:rPr lang="en-US" sz="1200" b="1" kern="0" spc="50" dirty="0">
                 <a:solidFill>
                   <a:srgbClr val="FFFFFF"/>
                 </a:solidFill>
@@ -8116,11 +8136,11 @@
           <a:bodyPr wrap="square" rtlCol="0" anchor="ctr"/>
           <a:lstStyle/>
           <a:p>
-            <a:pPr indent="0" marL="0">
+            <a:pPr marL="0" indent="0">
               <a:buNone/>
             </a:pPr>
             <a:r>
-              <a:rPr lang="en-US" sz="3000" b="1" spc="50" kern="0" dirty="0">
+              <a:rPr lang="en-US" sz="3000" b="1" kern="0" spc="50" dirty="0">
                 <a:solidFill>
                   <a:srgbClr val="0A1A1C"/>
                 </a:solidFill>
@@ -8158,6 +8178,13 @@
             <a:prstDash val="solid"/>
           </a:ln>
         </p:spPr>
+        <p:txBody>
+          <a:bodyPr/>
+          <a:lstStyle/>
+          <a:p>
+            <a:endParaRPr lang="en-US"/>
+          </a:p>
+        </p:txBody>
       </p:sp>
       <p:sp>
         <p:nvSpPr>
@@ -8375,6 +8402,7 @@
         <a:solidFill>
           <a:srgbClr val="EAFCFF"/>
         </a:solidFill>
+        <a:effectLst/>
       </p:bgPr>
     </p:bg>
     <p:spTree>
@@ -8415,6 +8443,13 @@
             <a:prstDash val="solid"/>
           </a:ln>
         </p:spPr>
+        <p:txBody>
+          <a:bodyPr/>
+          <a:lstStyle/>
+          <a:p>
+            <a:endParaRPr lang="en-US"/>
+          </a:p>
+        </p:txBody>
       </p:sp>
       <p:sp>
         <p:nvSpPr>
@@ -8437,11 +8472,11 @@
           <a:bodyPr wrap="square" rtlCol="0" anchor="ctr"/>
           <a:lstStyle/>
           <a:p>
-            <a:pPr algn="ctr" indent="0" marL="0">
+            <a:pPr marL="0" indent="0" algn="ctr">
               <a:buNone/>
             </a:pPr>
             <a:r>
-              <a:rPr lang="en-US" sz="1200" b="1" spc="50" kern="0" dirty="0">
+              <a:rPr lang="en-US" sz="1200" b="1" kern="0" spc="50" dirty="0">
                 <a:solidFill>
                   <a:srgbClr val="FFFFFF"/>
                 </a:solidFill>
@@ -8476,11 +8511,11 @@
           <a:bodyPr wrap="square" rtlCol="0" anchor="ctr"/>
           <a:lstStyle/>
           <a:p>
-            <a:pPr indent="0" marL="0">
+            <a:pPr marL="0" indent="0">
               <a:buNone/>
             </a:pPr>
             <a:r>
-              <a:rPr lang="en-US" sz="3000" b="1" spc="50" kern="0" dirty="0">
+              <a:rPr lang="en-US" sz="3000" b="1" kern="0" spc="50" dirty="0">
                 <a:solidFill>
                   <a:srgbClr val="0A1A1C"/>
                 </a:solidFill>
@@ -8518,6 +8553,13 @@
             <a:prstDash val="solid"/>
           </a:ln>
         </p:spPr>
+        <p:txBody>
+          <a:bodyPr/>
+          <a:lstStyle/>
+          <a:p>
+            <a:endParaRPr lang="en-US"/>
+          </a:p>
+        </p:txBody>
       </p:sp>
       <p:sp>
         <p:nvSpPr>
@@ -8543,6 +8585,13 @@
             <a:prstDash val="solid"/>
           </a:ln>
         </p:spPr>
+        <p:txBody>
+          <a:bodyPr/>
+          <a:lstStyle/>
+          <a:p>
+            <a:endParaRPr lang="en-US"/>
+          </a:p>
+        </p:txBody>
       </p:sp>
       <p:sp>
         <p:nvSpPr>
@@ -8568,6 +8617,13 @@
             <a:prstDash val="solid"/>
           </a:ln>
         </p:spPr>
+        <p:txBody>
+          <a:bodyPr/>
+          <a:lstStyle/>
+          <a:p>
+            <a:endParaRPr lang="en-US"/>
+          </a:p>
+        </p:txBody>
       </p:sp>
       <p:sp>
         <p:nvSpPr>
@@ -8590,7 +8646,7 @@
           <a:bodyPr wrap="square" rtlCol="0" anchor="ctr"/>
           <a:lstStyle/>
           <a:p>
-            <a:pPr indent="0" marL="0">
+            <a:pPr marL="0" indent="0">
               <a:buNone/>
             </a:pPr>
             <a:r>
@@ -8624,6 +8680,7 @@
         <a:solidFill>
           <a:srgbClr val="EAFCFF"/>
         </a:solidFill>
+        <a:effectLst/>
       </p:bgPr>
     </p:bg>
     <p:spTree>
@@ -8664,6 +8721,13 @@
             <a:prstDash val="solid"/>
           </a:ln>
         </p:spPr>
+        <p:txBody>
+          <a:bodyPr/>
+          <a:lstStyle/>
+          <a:p>
+            <a:endParaRPr lang="en-US"/>
+          </a:p>
+        </p:txBody>
       </p:sp>
       <p:sp>
         <p:nvSpPr>
@@ -8686,11 +8750,11 @@
           <a:bodyPr wrap="square" rtlCol="0" anchor="ctr"/>
           <a:lstStyle/>
           <a:p>
-            <a:pPr algn="ctr" indent="0" marL="0">
+            <a:pPr marL="0" indent="0" algn="ctr">
               <a:buNone/>
             </a:pPr>
             <a:r>
-              <a:rPr lang="en-US" sz="1200" b="1" spc="50" kern="0" dirty="0">
+              <a:rPr lang="en-US" sz="1200" b="1" kern="0" spc="50" dirty="0">
                 <a:solidFill>
                   <a:srgbClr val="FFFFFF"/>
                 </a:solidFill>
@@ -8725,11 +8789,11 @@
           <a:bodyPr wrap="square" rtlCol="0" anchor="ctr"/>
           <a:lstStyle/>
           <a:p>
-            <a:pPr indent="0" marL="0">
+            <a:pPr marL="0" indent="0">
               <a:buNone/>
             </a:pPr>
             <a:r>
-              <a:rPr lang="en-US" sz="3000" b="1" spc="50" kern="0" dirty="0">
+              <a:rPr lang="en-US" sz="3000" b="1" kern="0" spc="50" dirty="0">
                 <a:solidFill>
                   <a:srgbClr val="0A1A1C"/>
                 </a:solidFill>
@@ -8767,6 +8831,13 @@
             <a:prstDash val="solid"/>
           </a:ln>
         </p:spPr>
+        <p:txBody>
+          <a:bodyPr/>
+          <a:lstStyle/>
+          <a:p>
+            <a:endParaRPr lang="en-US"/>
+          </a:p>
+        </p:txBody>
       </p:sp>
       <p:sp>
         <p:nvSpPr>
@@ -8944,6 +9015,7 @@
         <a:solidFill>
           <a:srgbClr val="EAFCFF"/>
         </a:solidFill>
+        <a:effectLst/>
       </p:bgPr>
     </p:bg>
     <p:spTree>
@@ -8984,6 +9056,13 @@
             <a:prstDash val="solid"/>
           </a:ln>
         </p:spPr>
+        <p:txBody>
+          <a:bodyPr/>
+          <a:lstStyle/>
+          <a:p>
+            <a:endParaRPr lang="en-US"/>
+          </a:p>
+        </p:txBody>
       </p:sp>
       <p:sp>
         <p:nvSpPr>
@@ -9006,11 +9085,11 @@
           <a:bodyPr wrap="square" rtlCol="0" anchor="ctr"/>
           <a:lstStyle/>
           <a:p>
-            <a:pPr algn="ctr" indent="0" marL="0">
+            <a:pPr marL="0" indent="0" algn="ctr">
               <a:buNone/>
             </a:pPr>
             <a:r>
-              <a:rPr lang="en-US" sz="1200" b="1" spc="50" kern="0" dirty="0">
+              <a:rPr lang="en-US" sz="1200" b="1" kern="0" spc="50" dirty="0">
                 <a:solidFill>
                   <a:srgbClr val="FFFFFF"/>
                 </a:solidFill>
@@ -9045,11 +9124,11 @@
           <a:bodyPr wrap="square" rtlCol="0" anchor="ctr"/>
           <a:lstStyle/>
           <a:p>
-            <a:pPr indent="0" marL="0">
+            <a:pPr marL="0" indent="0">
               <a:buNone/>
             </a:pPr>
             <a:r>
-              <a:rPr lang="en-US" sz="3000" b="1" spc="50" kern="0" dirty="0">
+              <a:rPr lang="en-US" sz="3000" b="1" kern="0" spc="50" dirty="0">
                 <a:solidFill>
                   <a:srgbClr val="0A1A1C"/>
                 </a:solidFill>
@@ -9087,6 +9166,13 @@
             <a:prstDash val="solid"/>
           </a:ln>
         </p:spPr>
+        <p:txBody>
+          <a:bodyPr/>
+          <a:lstStyle/>
+          <a:p>
+            <a:endParaRPr lang="en-US"/>
+          </a:p>
+        </p:txBody>
       </p:sp>
       <p:sp>
         <p:nvSpPr>
@@ -9112,6 +9198,13 @@
             <a:prstDash val="solid"/>
           </a:ln>
         </p:spPr>
+        <p:txBody>
+          <a:bodyPr/>
+          <a:lstStyle/>
+          <a:p>
+            <a:endParaRPr lang="en-US"/>
+          </a:p>
+        </p:txBody>
       </p:sp>
       <p:sp>
         <p:nvSpPr>
@@ -9137,6 +9230,13 @@
             <a:prstDash val="solid"/>
           </a:ln>
         </p:spPr>
+        <p:txBody>
+          <a:bodyPr/>
+          <a:lstStyle/>
+          <a:p>
+            <a:endParaRPr lang="en-US"/>
+          </a:p>
+        </p:txBody>
       </p:sp>
       <p:sp>
         <p:nvSpPr>
@@ -9159,7 +9259,7 @@
           <a:bodyPr wrap="square" rtlCol="0" anchor="ctr"/>
           <a:lstStyle/>
           <a:p>
-            <a:pPr indent="0" marL="0">
+            <a:pPr marL="0" indent="0">
               <a:buNone/>
             </a:pPr>
             <a:r>
@@ -9176,7 +9276,7 @@
             <a:endParaRPr lang="en-US" sz="2000" dirty="0"/>
           </a:p>
           <a:p>
-            <a:pPr indent="0" marL="0">
+            <a:pPr marL="0" indent="0">
               <a:buNone/>
             </a:pPr>
             <a:r>
@@ -9193,7 +9293,7 @@
             <a:endParaRPr lang="en-US" sz="2000" dirty="0"/>
           </a:p>
           <a:p>
-            <a:pPr indent="0" marL="0">
+            <a:pPr marL="0" indent="0">
               <a:buNone/>
             </a:pPr>
             <a:r>
@@ -9227,6 +9327,7 @@
         <a:solidFill>
           <a:srgbClr val="007A90"/>
         </a:solidFill>
+        <a:effectLst/>
       </p:bgPr>
     </p:bg>
     <p:spTree>
@@ -9267,6 +9368,13 @@
             <a:prstDash val="solid"/>
           </a:ln>
         </p:spPr>
+        <p:txBody>
+          <a:bodyPr/>
+          <a:lstStyle/>
+          <a:p>
+            <a:endParaRPr lang="en-US"/>
+          </a:p>
+        </p:txBody>
       </p:sp>
       <p:sp>
         <p:nvSpPr>
@@ -9289,11 +9397,11 @@
           <a:bodyPr wrap="square" rtlCol="0" anchor="ctr"/>
           <a:lstStyle/>
           <a:p>
-            <a:pPr algn="ctr" indent="0" marL="0">
+            <a:pPr marL="0" indent="0" algn="ctr">
               <a:buNone/>
             </a:pPr>
             <a:r>
-              <a:rPr lang="en-US" sz="4800" b="1" spc="50" kern="0" dirty="0">
+              <a:rPr lang="en-US" sz="4800" b="1" kern="0" spc="50" dirty="0">
                 <a:solidFill>
                   <a:srgbClr val="FFFFFF"/>
                 </a:solidFill>
@@ -9328,7 +9436,7 @@
           <a:bodyPr wrap="square" rtlCol="0" anchor="ctr"/>
           <a:lstStyle/>
           <a:p>
-            <a:pPr algn="ctr" indent="0" marL="0">
+            <a:pPr marL="0" indent="0" algn="ctr">
               <a:buNone/>
             </a:pPr>
             <a:r>
@@ -9364,6 +9472,7 @@
         <a:solidFill>
           <a:srgbClr val="EAFCFF"/>
         </a:solidFill>
+        <a:effectLst/>
       </p:bgPr>
     </p:bg>
     <p:spTree>
@@ -9404,6 +9513,13 @@
             <a:prstDash val="solid"/>
           </a:ln>
         </p:spPr>
+        <p:txBody>
+          <a:bodyPr/>
+          <a:lstStyle/>
+          <a:p>
+            <a:endParaRPr lang="en-US"/>
+          </a:p>
+        </p:txBody>
       </p:sp>
       <p:sp>
         <p:nvSpPr>
@@ -9426,11 +9542,11 @@
           <a:bodyPr wrap="square" rtlCol="0" anchor="ctr"/>
           <a:lstStyle/>
           <a:p>
-            <a:pPr algn="ctr" indent="0" marL="0">
+            <a:pPr marL="0" indent="0" algn="ctr">
               <a:buNone/>
             </a:pPr>
             <a:r>
-              <a:rPr lang="en-US" sz="1200" b="1" spc="50" kern="0" dirty="0">
+              <a:rPr lang="en-US" sz="1200" b="1" kern="0" spc="50" dirty="0">
                 <a:solidFill>
                   <a:srgbClr val="FFFFFF"/>
                 </a:solidFill>
@@ -9465,11 +9581,11 @@
           <a:bodyPr wrap="square" rtlCol="0" anchor="ctr"/>
           <a:lstStyle/>
           <a:p>
-            <a:pPr indent="0" marL="0">
+            <a:pPr marL="0" indent="0">
               <a:buNone/>
             </a:pPr>
             <a:r>
-              <a:rPr lang="en-US" sz="3000" b="1" spc="50" kern="0" dirty="0">
+              <a:rPr lang="en-US" sz="3000" b="1" kern="0" spc="50" dirty="0">
                 <a:solidFill>
                   <a:srgbClr val="0A1A1C"/>
                 </a:solidFill>
@@ -9507,6 +9623,13 @@
             <a:prstDash val="solid"/>
           </a:ln>
         </p:spPr>
+        <p:txBody>
+          <a:bodyPr/>
+          <a:lstStyle/>
+          <a:p>
+            <a:endParaRPr lang="en-US"/>
+          </a:p>
+        </p:txBody>
       </p:sp>
       <p:sp>
         <p:nvSpPr>
@@ -9534,6 +9657,13 @@
             <a:prstDash val="solid"/>
           </a:ln>
         </p:spPr>
+        <p:txBody>
+          <a:bodyPr/>
+          <a:lstStyle/>
+          <a:p>
+            <a:endParaRPr lang="en-US"/>
+          </a:p>
+        </p:txBody>
       </p:sp>
       <p:sp>
         <p:nvSpPr>
@@ -9556,7 +9686,7 @@
           <a:bodyPr wrap="square" rtlCol="0" anchor="ctr"/>
           <a:lstStyle/>
           <a:p>
-            <a:pPr algn="ctr" indent="0" marL="0">
+            <a:pPr marL="0" indent="0" algn="ctr">
               <a:buNone/>
             </a:pPr>
             <a:r>
@@ -9573,7 +9703,7 @@
             <a:endParaRPr lang="en-US" sz="1300" dirty="0"/>
           </a:p>
           <a:p>
-            <a:pPr algn="ctr" indent="0" marL="0">
+            <a:pPr marL="0" indent="0" algn="ctr">
               <a:buNone/>
             </a:pPr>
             <a:r>
@@ -9590,7 +9720,7 @@
             <a:endParaRPr lang="en-US" sz="1300" dirty="0"/>
           </a:p>
           <a:p>
-            <a:pPr algn="ctr" indent="0" marL="0">
+            <a:pPr marL="0" indent="0" algn="ctr">
               <a:buNone/>
             </a:pPr>
             <a:r>
@@ -9629,7 +9759,7 @@
           <a:bodyPr wrap="square" rtlCol="0" anchor="ctr"/>
           <a:lstStyle/>
           <a:p>
-            <a:pPr algn="ctr" indent="0" marL="0">
+            <a:pPr marL="0" indent="0" algn="ctr">
               <a:buNone/>
             </a:pPr>
             <a:r>
@@ -9673,6 +9803,13 @@
             <a:prstDash val="solid"/>
           </a:ln>
         </p:spPr>
+        <p:txBody>
+          <a:bodyPr/>
+          <a:lstStyle/>
+          <a:p>
+            <a:endParaRPr lang="en-US"/>
+          </a:p>
+        </p:txBody>
       </p:sp>
       <p:sp>
         <p:nvSpPr>
@@ -9695,7 +9832,7 @@
           <a:bodyPr wrap="square" rtlCol="0" anchor="ctr"/>
           <a:lstStyle/>
           <a:p>
-            <a:pPr algn="ctr" indent="0" marL="0">
+            <a:pPr marL="0" indent="0" algn="ctr">
               <a:buNone/>
             </a:pPr>
             <a:r>
@@ -9712,7 +9849,7 @@
             <a:endParaRPr lang="en-US" sz="1300" dirty="0"/>
           </a:p>
           <a:p>
-            <a:pPr algn="ctr" indent="0" marL="0">
+            <a:pPr marL="0" indent="0" algn="ctr">
               <a:buNone/>
             </a:pPr>
             <a:r>
@@ -9729,7 +9866,7 @@
             <a:endParaRPr lang="en-US" sz="1300" dirty="0"/>
           </a:p>
           <a:p>
-            <a:pPr algn="ctr" indent="0" marL="0">
+            <a:pPr marL="0" indent="0" algn="ctr">
               <a:buNone/>
             </a:pPr>
             <a:r>
@@ -9923,6 +10060,7 @@
         <a:solidFill>
           <a:srgbClr val="EAFCFF"/>
         </a:solidFill>
+        <a:effectLst/>
       </p:bgPr>
     </p:bg>
     <p:spTree>
@@ -9963,6 +10101,13 @@
             <a:prstDash val="solid"/>
           </a:ln>
         </p:spPr>
+        <p:txBody>
+          <a:bodyPr/>
+          <a:lstStyle/>
+          <a:p>
+            <a:endParaRPr lang="en-US"/>
+          </a:p>
+        </p:txBody>
       </p:sp>
       <p:sp>
         <p:nvSpPr>
@@ -9985,11 +10130,11 @@
           <a:bodyPr wrap="square" rtlCol="0" anchor="ctr"/>
           <a:lstStyle/>
           <a:p>
-            <a:pPr algn="ctr" indent="0" marL="0">
+            <a:pPr marL="0" indent="0" algn="ctr">
               <a:buNone/>
             </a:pPr>
             <a:r>
-              <a:rPr lang="en-US" sz="1200" b="1" spc="50" kern="0" dirty="0">
+              <a:rPr lang="en-US" sz="1200" b="1" kern="0" spc="50" dirty="0">
                 <a:solidFill>
                   <a:srgbClr val="FFFFFF"/>
                 </a:solidFill>
@@ -10024,11 +10169,11 @@
           <a:bodyPr wrap="square" rtlCol="0" anchor="ctr"/>
           <a:lstStyle/>
           <a:p>
-            <a:pPr indent="0" marL="0">
+            <a:pPr marL="0" indent="0">
               <a:buNone/>
             </a:pPr>
             <a:r>
-              <a:rPr lang="en-US" sz="3000" b="1" spc="50" kern="0" dirty="0">
+              <a:rPr lang="en-US" sz="3000" b="1" kern="0" spc="50" dirty="0">
                 <a:solidFill>
                   <a:srgbClr val="0A1A1C"/>
                 </a:solidFill>
@@ -10066,6 +10211,13 @@
             <a:prstDash val="solid"/>
           </a:ln>
         </p:spPr>
+        <p:txBody>
+          <a:bodyPr/>
+          <a:lstStyle/>
+          <a:p>
+            <a:endParaRPr lang="en-US"/>
+          </a:p>
+        </p:txBody>
       </p:sp>
       <p:sp>
         <p:nvSpPr>
@@ -10243,6 +10395,7 @@
         <a:solidFill>
           <a:srgbClr val="007A90"/>
         </a:solidFill>
+        <a:effectLst/>
       </p:bgPr>
     </p:bg>
     <p:spTree>
@@ -10283,6 +10436,13 @@
             <a:prstDash val="solid"/>
           </a:ln>
         </p:spPr>
+        <p:txBody>
+          <a:bodyPr/>
+          <a:lstStyle/>
+          <a:p>
+            <a:endParaRPr lang="en-US"/>
+          </a:p>
+        </p:txBody>
       </p:sp>
       <p:sp>
         <p:nvSpPr>
@@ -10305,11 +10465,11 @@
           <a:bodyPr wrap="square" rtlCol="0" anchor="ctr"/>
           <a:lstStyle/>
           <a:p>
-            <a:pPr algn="ctr" indent="0" marL="0">
+            <a:pPr marL="0" indent="0" algn="ctr">
               <a:buNone/>
             </a:pPr>
             <a:r>
-              <a:rPr lang="en-US" sz="4800" b="1" spc="50" kern="0" dirty="0">
+              <a:rPr lang="en-US" sz="4800" b="1" kern="0" spc="50" dirty="0">
                 <a:solidFill>
                   <a:srgbClr val="FFFFFF"/>
                 </a:solidFill>
@@ -10344,7 +10504,7 @@
           <a:bodyPr wrap="square" rtlCol="0" anchor="ctr"/>
           <a:lstStyle/>
           <a:p>
-            <a:pPr algn="ctr" indent="0" marL="0">
+            <a:pPr marL="0" indent="0" algn="ctr">
               <a:buNone/>
             </a:pPr>
             <a:r>
@@ -10380,6 +10540,7 @@
         <a:solidFill>
           <a:srgbClr val="EAFCFF"/>
         </a:solidFill>
+        <a:effectLst/>
       </p:bgPr>
     </p:bg>
     <p:spTree>
@@ -10420,6 +10581,13 @@
             <a:prstDash val="solid"/>
           </a:ln>
         </p:spPr>
+        <p:txBody>
+          <a:bodyPr/>
+          <a:lstStyle/>
+          <a:p>
+            <a:endParaRPr lang="en-US"/>
+          </a:p>
+        </p:txBody>
       </p:sp>
       <p:sp>
         <p:nvSpPr>
@@ -10442,11 +10610,11 @@
           <a:bodyPr wrap="square" rtlCol="0" anchor="ctr"/>
           <a:lstStyle/>
           <a:p>
-            <a:pPr algn="ctr" indent="0" marL="0">
+            <a:pPr marL="0" indent="0" algn="ctr">
               <a:buNone/>
             </a:pPr>
             <a:r>
-              <a:rPr lang="en-US" sz="1200" b="1" spc="50" kern="0" dirty="0">
+              <a:rPr lang="en-US" sz="1200" b="1" kern="0" spc="50" dirty="0">
                 <a:solidFill>
                   <a:srgbClr val="FFFFFF"/>
                 </a:solidFill>
@@ -10481,11 +10649,11 @@
           <a:bodyPr wrap="square" rtlCol="0" anchor="ctr"/>
           <a:lstStyle/>
           <a:p>
-            <a:pPr indent="0" marL="0">
+            <a:pPr marL="0" indent="0">
               <a:buNone/>
             </a:pPr>
             <a:r>
-              <a:rPr lang="en-US" sz="3000" b="1" spc="50" kern="0" dirty="0">
+              <a:rPr lang="en-US" sz="3000" b="1" kern="0" spc="50" dirty="0">
                 <a:solidFill>
                   <a:srgbClr val="0A1A1C"/>
                 </a:solidFill>
@@ -10523,6 +10691,13 @@
             <a:prstDash val="solid"/>
           </a:ln>
         </p:spPr>
+        <p:txBody>
+          <a:bodyPr/>
+          <a:lstStyle/>
+          <a:p>
+            <a:endParaRPr lang="en-US"/>
+          </a:p>
+        </p:txBody>
       </p:sp>
       <p:sp>
         <p:nvSpPr>
@@ -10550,6 +10725,13 @@
             <a:prstDash val="solid"/>
           </a:ln>
         </p:spPr>
+        <p:txBody>
+          <a:bodyPr/>
+          <a:lstStyle/>
+          <a:p>
+            <a:endParaRPr lang="en-US"/>
+          </a:p>
+        </p:txBody>
       </p:sp>
       <p:sp>
         <p:nvSpPr>
@@ -10572,7 +10754,7 @@
           <a:bodyPr wrap="square" rtlCol="0" anchor="b"/>
           <a:lstStyle/>
           <a:p>
-            <a:pPr algn="ctr" indent="0" marL="0">
+            <a:pPr marL="0" indent="0" algn="ctr">
               <a:buNone/>
             </a:pPr>
             <a:r>
@@ -10611,7 +10793,7 @@
           <a:bodyPr wrap="square" rtlCol="0" anchor="t"/>
           <a:lstStyle/>
           <a:p>
-            <a:pPr algn="ctr" indent="0" marL="0">
+            <a:pPr marL="0" indent="0" algn="ctr">
               <a:buNone/>
             </a:pPr>
             <a:r>
@@ -10655,6 +10837,13 @@
             <a:prstDash val="solid"/>
           </a:ln>
         </p:spPr>
+        <p:txBody>
+          <a:bodyPr/>
+          <a:lstStyle/>
+          <a:p>
+            <a:endParaRPr lang="en-US"/>
+          </a:p>
+        </p:txBody>
       </p:sp>
       <p:sp>
         <p:nvSpPr>
@@ -10677,7 +10866,7 @@
           <a:bodyPr wrap="square" rtlCol="0" anchor="b"/>
           <a:lstStyle/>
           <a:p>
-            <a:pPr algn="ctr" indent="0" marL="0">
+            <a:pPr marL="0" indent="0" algn="ctr">
               <a:buNone/>
             </a:pPr>
             <a:r>
@@ -10716,7 +10905,7 @@
           <a:bodyPr wrap="square" rtlCol="0" anchor="t"/>
           <a:lstStyle/>
           <a:p>
-            <a:pPr algn="ctr" indent="0" marL="0">
+            <a:pPr marL="0" indent="0" algn="ctr">
               <a:buNone/>
             </a:pPr>
             <a:r>
@@ -10760,6 +10949,13 @@
             <a:prstDash val="solid"/>
           </a:ln>
         </p:spPr>
+        <p:txBody>
+          <a:bodyPr/>
+          <a:lstStyle/>
+          <a:p>
+            <a:endParaRPr lang="en-US"/>
+          </a:p>
+        </p:txBody>
       </p:sp>
       <p:sp>
         <p:nvSpPr>
@@ -10782,7 +10978,7 @@
           <a:bodyPr wrap="square" rtlCol="0" anchor="b"/>
           <a:lstStyle/>
           <a:p>
-            <a:pPr algn="ctr" indent="0" marL="0">
+            <a:pPr marL="0" indent="0" algn="ctr">
               <a:buNone/>
             </a:pPr>
             <a:r>
@@ -10821,7 +11017,7 @@
           <a:bodyPr wrap="square" rtlCol="0" anchor="t"/>
           <a:lstStyle/>
           <a:p>
-            <a:pPr algn="ctr" indent="0" marL="0">
+            <a:pPr marL="0" indent="0" algn="ctr">
               <a:buNone/>
             </a:pPr>
             <a:r>
@@ -11015,6 +11211,7 @@
         <a:solidFill>
           <a:srgbClr val="EAFCFF"/>
         </a:solidFill>
+        <a:effectLst/>
       </p:bgPr>
     </p:bg>
     <p:spTree>
@@ -11055,6 +11252,13 @@
             <a:prstDash val="solid"/>
           </a:ln>
         </p:spPr>
+        <p:txBody>
+          <a:bodyPr/>
+          <a:lstStyle/>
+          <a:p>
+            <a:endParaRPr lang="en-US"/>
+          </a:p>
+        </p:txBody>
       </p:sp>
       <p:sp>
         <p:nvSpPr>
@@ -11077,11 +11281,11 @@
           <a:bodyPr wrap="square" rtlCol="0" anchor="ctr"/>
           <a:lstStyle/>
           <a:p>
-            <a:pPr algn="ctr" indent="0" marL="0">
+            <a:pPr marL="0" indent="0" algn="ctr">
               <a:buNone/>
             </a:pPr>
             <a:r>
-              <a:rPr lang="en-US" sz="1200" b="1" spc="50" kern="0" dirty="0">
+              <a:rPr lang="en-US" sz="1200" b="1" kern="0" spc="50" dirty="0">
                 <a:solidFill>
                   <a:srgbClr val="FFFFFF"/>
                 </a:solidFill>
@@ -11116,11 +11320,11 @@
           <a:bodyPr wrap="square" rtlCol="0" anchor="ctr"/>
           <a:lstStyle/>
           <a:p>
-            <a:pPr indent="0" marL="0">
+            <a:pPr marL="0" indent="0">
               <a:buNone/>
             </a:pPr>
             <a:r>
-              <a:rPr lang="en-US" sz="3000" b="1" spc="50" kern="0" dirty="0">
+              <a:rPr lang="en-US" sz="3000" b="1" kern="0" spc="50" dirty="0">
                 <a:solidFill>
                   <a:srgbClr val="0A1A1C"/>
                 </a:solidFill>
@@ -11158,6 +11362,13 @@
             <a:prstDash val="solid"/>
           </a:ln>
         </p:spPr>
+        <p:txBody>
+          <a:bodyPr/>
+          <a:lstStyle/>
+          <a:p>
+            <a:endParaRPr lang="en-US"/>
+          </a:p>
+        </p:txBody>
       </p:sp>
       <p:sp>
         <p:nvSpPr>
@@ -11167,8 +11378,8 @@
         </p:nvSpPr>
         <p:spPr>
           <a:xfrm>
-            <a:off x="457200" y="1572768"/>
-            <a:ext cx="5477256" cy="5010912"/>
+            <a:off x="457200" y="3451860"/>
+            <a:ext cx="5638800" cy="1273646"/>
           </a:xfrm>
           <a:prstGeom prst="rect">
             <a:avLst/>
@@ -11183,6 +11394,13 @@
             <a:prstDash val="solid"/>
           </a:ln>
         </p:spPr>
+        <p:txBody>
+          <a:bodyPr/>
+          <a:lstStyle/>
+          <a:p>
+            <a:endParaRPr lang="en-US"/>
+          </a:p>
+        </p:txBody>
       </p:sp>
       <p:sp>
         <p:nvSpPr>
@@ -11192,7 +11410,7 @@
         </p:nvSpPr>
         <p:spPr>
           <a:xfrm>
-            <a:off x="640080" y="1709928"/>
+            <a:off x="602502" y="3589020"/>
             <a:ext cx="5111496" cy="4736592"/>
           </a:xfrm>
           <a:prstGeom prst="rect">
@@ -11205,7 +11423,7 @@
           <a:bodyPr wrap="none" rtlCol="0" anchor="t"/>
           <a:lstStyle/>
           <a:p>
-            <a:pPr indent="0" marL="0">
+            <a:pPr marL="0" indent="0">
               <a:buNone/>
             </a:pPr>
             <a:r>
@@ -11222,7 +11440,7 @@
             <a:endParaRPr lang="en-US" sz="1400" dirty="0"/>
           </a:p>
           <a:p>
-            <a:pPr indent="0" marL="0">
+            <a:pPr marL="0" indent="0">
               <a:buNone/>
             </a:pPr>
             <a:r>
@@ -11239,7 +11457,7 @@
             <a:endParaRPr lang="en-US" sz="1400" dirty="0"/>
           </a:p>
           <a:p>
-            <a:pPr indent="0" marL="0">
+            <a:pPr marL="0" indent="0">
               <a:buNone/>
             </a:pPr>
             <a:r>
@@ -11256,7 +11474,7 @@
             <a:endParaRPr lang="en-US" sz="1400" dirty="0"/>
           </a:p>
           <a:p>
-            <a:pPr indent="0" marL="0">
+            <a:pPr marL="0" indent="0">
               <a:buNone/>
             </a:pPr>
             <a:r>
@@ -11450,6 +11668,7 @@
         <a:solidFill>
           <a:srgbClr val="007A90"/>
         </a:solidFill>
+        <a:effectLst/>
       </p:bgPr>
     </p:bg>
     <p:spTree>
@@ -11490,6 +11709,13 @@
             <a:prstDash val="solid"/>
           </a:ln>
         </p:spPr>
+        <p:txBody>
+          <a:bodyPr/>
+          <a:lstStyle/>
+          <a:p>
+            <a:endParaRPr lang="en-US"/>
+          </a:p>
+        </p:txBody>
       </p:sp>
       <p:sp>
         <p:nvSpPr>
@@ -11512,11 +11738,11 @@
           <a:bodyPr wrap="square" rtlCol="0" anchor="ctr"/>
           <a:lstStyle/>
           <a:p>
-            <a:pPr algn="ctr" indent="0" marL="0">
+            <a:pPr marL="0" indent="0" algn="ctr">
               <a:buNone/>
             </a:pPr>
             <a:r>
-              <a:rPr lang="en-US" sz="4800" b="1" spc="50" kern="0" dirty="0">
+              <a:rPr lang="en-US" sz="4800" b="1" kern="0" spc="50" dirty="0">
                 <a:solidFill>
                   <a:srgbClr val="FFFFFF"/>
                 </a:solidFill>
@@ -11551,7 +11777,7 @@
           <a:bodyPr wrap="square" rtlCol="0" anchor="ctr"/>
           <a:lstStyle/>
           <a:p>
-            <a:pPr algn="ctr" indent="0" marL="0">
+            <a:pPr marL="0" indent="0" algn="ctr">
               <a:buNone/>
             </a:pPr>
             <a:r>
@@ -11872,4 +12098,319 @@
     </a:ext>
   </a:extLst>
 </a:theme>
+</file>
+
+<file path=ppt/theme/theme2.xml><?xml version="1.0" encoding="utf-8"?>
+<a:theme xmlns:a="http://schemas.openxmlformats.org/drawingml/2006/main" name="Office Theme">
+  <a:themeElements>
+    <a:clrScheme name="Office">
+      <a:dk1>
+        <a:sysClr val="windowText" lastClr="000000"/>
+      </a:dk1>
+      <a:lt1>
+        <a:sysClr val="window" lastClr="FFFFFF"/>
+      </a:lt1>
+      <a:dk2>
+        <a:srgbClr val="0E2841"/>
+      </a:dk2>
+      <a:lt2>
+        <a:srgbClr val="E8E8E8"/>
+      </a:lt2>
+      <a:accent1>
+        <a:srgbClr val="156082"/>
+      </a:accent1>
+      <a:accent2>
+        <a:srgbClr val="E97132"/>
+      </a:accent2>
+      <a:accent3>
+        <a:srgbClr val="196B24"/>
+      </a:accent3>
+      <a:accent4>
+        <a:srgbClr val="0F9ED5"/>
+      </a:accent4>
+      <a:accent5>
+        <a:srgbClr val="A02B93"/>
+      </a:accent5>
+      <a:accent6>
+        <a:srgbClr val="4EA72E"/>
+      </a:accent6>
+      <a:hlink>
+        <a:srgbClr val="467886"/>
+      </a:hlink>
+      <a:folHlink>
+        <a:srgbClr val="96607D"/>
+      </a:folHlink>
+    </a:clrScheme>
+    <a:fontScheme name="Office">
+      <a:majorFont>
+        <a:latin typeface="Aptos Display" panose="02110004020202020204"/>
+        <a:ea typeface=""/>
+        <a:cs typeface=""/>
+        <a:font script="Jpan" typeface="游ゴシック Light"/>
+        <a:font script="Hang" typeface="맑은 고딕"/>
+        <a:font script="Hans" typeface="等线 Light"/>
+        <a:font script="Hant" typeface="新細明體"/>
+        <a:font script="Arab" typeface="Times New Roman"/>
+        <a:font script="Hebr" typeface="Times New Roman"/>
+        <a:font script="Thai" typeface="Angsana New"/>
+        <a:font script="Ethi" typeface="Nyala"/>
+        <a:font script="Beng" typeface="Vrinda"/>
+        <a:font script="Gujr" typeface="Shruti"/>
+        <a:font script="Khmr" typeface="MoolBoran"/>
+        <a:font script="Knda" typeface="Tunga"/>
+        <a:font script="Guru" typeface="Raavi"/>
+        <a:font script="Cans" typeface="Euphemia"/>
+        <a:font script="Cher" typeface="Plantagenet Cherokee"/>
+        <a:font script="Yiii" typeface="Microsoft Yi Baiti"/>
+        <a:font script="Tibt" typeface="Microsoft Himalaya"/>
+        <a:font script="Thaa" typeface="MV Boli"/>
+        <a:font script="Deva" typeface="Mangal"/>
+        <a:font script="Telu" typeface="Gautami"/>
+        <a:font script="Taml" typeface="Latha"/>
+        <a:font script="Syrc" typeface="Estrangelo Edessa"/>
+        <a:font script="Orya" typeface="Kalinga"/>
+        <a:font script="Mlym" typeface="Kartika"/>
+        <a:font script="Laoo" typeface="DokChampa"/>
+        <a:font script="Sinh" typeface="Iskoola Pota"/>
+        <a:font script="Mong" typeface="Mongolian Baiti"/>
+        <a:font script="Viet" typeface="Times New Roman"/>
+        <a:font script="Uigh" typeface="Microsoft Uighur"/>
+        <a:font script="Geor" typeface="Sylfaen"/>
+        <a:font script="Armn" typeface="Arial"/>
+        <a:font script="Bugi" typeface="Leelawadee UI"/>
+        <a:font script="Bopo" typeface="Microsoft JhengHei"/>
+        <a:font script="Java" typeface="Javanese Text"/>
+        <a:font script="Lisu" typeface="Segoe UI"/>
+        <a:font script="Mymr" typeface="Myanmar Text"/>
+        <a:font script="Nkoo" typeface="Ebrima"/>
+        <a:font script="Olck" typeface="Nirmala UI"/>
+        <a:font script="Osma" typeface="Ebrima"/>
+        <a:font script="Phag" typeface="Phagspa"/>
+        <a:font script="Syrn" typeface="Estrangelo Edessa"/>
+        <a:font script="Syrj" typeface="Estrangelo Edessa"/>
+        <a:font script="Syre" typeface="Estrangelo Edessa"/>
+        <a:font script="Sora" typeface="Nirmala UI"/>
+        <a:font script="Tale" typeface="Microsoft Tai Le"/>
+        <a:font script="Talu" typeface="Microsoft New Tai Lue"/>
+        <a:font script="Tfng" typeface="Ebrima"/>
+      </a:majorFont>
+      <a:minorFont>
+        <a:latin typeface="Aptos" panose="02110004020202020204"/>
+        <a:ea typeface=""/>
+        <a:cs typeface=""/>
+        <a:font script="Jpan" typeface="游ゴシック"/>
+        <a:font script="Hang" typeface="맑은 고딕"/>
+        <a:font script="Hans" typeface="等线"/>
+        <a:font script="Hant" typeface="新細明體"/>
+        <a:font script="Arab" typeface="Arial"/>
+        <a:font script="Hebr" typeface="Arial"/>
+        <a:font script="Thai" typeface="Cordia New"/>
+        <a:font script="Ethi" typeface="Nyala"/>
+        <a:font script="Beng" typeface="Vrinda"/>
+        <a:font script="Gujr" typeface="Shruti"/>
+        <a:font script="Khmr" typeface="DaunPenh"/>
+        <a:font script="Knda" typeface="Tunga"/>
+        <a:font script="Guru" typeface="Raavi"/>
+        <a:font script="Cans" typeface="Euphemia"/>
+        <a:font script="Cher" typeface="Plantagenet Cherokee"/>
+        <a:font script="Yiii" typeface="Microsoft Yi Baiti"/>
+        <a:font script="Tibt" typeface="Microsoft Himalaya"/>
+        <a:font script="Thaa" typeface="MV Boli"/>
+        <a:font script="Deva" typeface="Mangal"/>
+        <a:font script="Telu" typeface="Gautami"/>
+        <a:font script="Taml" typeface="Latha"/>
+        <a:font script="Syrc" typeface="Estrangelo Edessa"/>
+        <a:font script="Orya" typeface="Kalinga"/>
+        <a:font script="Mlym" typeface="Kartika"/>
+        <a:font script="Laoo" typeface="DokChampa"/>
+        <a:font script="Sinh" typeface="Iskoola Pota"/>
+        <a:font script="Mong" typeface="Mongolian Baiti"/>
+        <a:font script="Viet" typeface="Arial"/>
+        <a:font script="Uigh" typeface="Microsoft Uighur"/>
+        <a:font script="Geor" typeface="Sylfaen"/>
+        <a:font script="Armn" typeface="Arial"/>
+        <a:font script="Bugi" typeface="Leelawadee UI"/>
+        <a:font script="Bopo" typeface="Microsoft JhengHei"/>
+        <a:font script="Java" typeface="Javanese Text"/>
+        <a:font script="Lisu" typeface="Segoe UI"/>
+        <a:font script="Mymr" typeface="Myanmar Text"/>
+        <a:font script="Nkoo" typeface="Ebrima"/>
+        <a:font script="Olck" typeface="Nirmala UI"/>
+        <a:font script="Osma" typeface="Ebrima"/>
+        <a:font script="Phag" typeface="Phagspa"/>
+        <a:font script="Syrn" typeface="Estrangelo Edessa"/>
+        <a:font script="Syrj" typeface="Estrangelo Edessa"/>
+        <a:font script="Syre" typeface="Estrangelo Edessa"/>
+        <a:font script="Sora" typeface="Nirmala UI"/>
+        <a:font script="Tale" typeface="Microsoft Tai Le"/>
+        <a:font script="Talu" typeface="Microsoft New Tai Lue"/>
+        <a:font script="Tfng" typeface="Ebrima"/>
+      </a:minorFont>
+    </a:fontScheme>
+    <a:fmtScheme name="Office">
+      <a:fillStyleLst>
+        <a:solidFill>
+          <a:schemeClr val="phClr"/>
+        </a:solidFill>
+        <a:gradFill rotWithShape="1">
+          <a:gsLst>
+            <a:gs pos="0">
+              <a:schemeClr val="phClr">
+                <a:lumMod val="110000"/>
+                <a:satMod val="105000"/>
+                <a:tint val="67000"/>
+              </a:schemeClr>
+            </a:gs>
+            <a:gs pos="50000">
+              <a:schemeClr val="phClr">
+                <a:lumMod val="105000"/>
+                <a:satMod val="103000"/>
+                <a:tint val="73000"/>
+              </a:schemeClr>
+            </a:gs>
+            <a:gs pos="100000">
+              <a:schemeClr val="phClr">
+                <a:lumMod val="105000"/>
+                <a:satMod val="109000"/>
+                <a:tint val="81000"/>
+              </a:schemeClr>
+            </a:gs>
+          </a:gsLst>
+          <a:lin ang="5400000" scaled="0"/>
+        </a:gradFill>
+        <a:gradFill rotWithShape="1">
+          <a:gsLst>
+            <a:gs pos="0">
+              <a:schemeClr val="phClr">
+                <a:satMod val="103000"/>
+                <a:lumMod val="102000"/>
+                <a:tint val="94000"/>
+              </a:schemeClr>
+            </a:gs>
+            <a:gs pos="50000">
+              <a:schemeClr val="phClr">
+                <a:satMod val="110000"/>
+                <a:lumMod val="100000"/>
+                <a:shade val="100000"/>
+              </a:schemeClr>
+            </a:gs>
+            <a:gs pos="100000">
+              <a:schemeClr val="phClr">
+                <a:lumMod val="99000"/>
+                <a:satMod val="120000"/>
+                <a:shade val="78000"/>
+              </a:schemeClr>
+            </a:gs>
+          </a:gsLst>
+          <a:lin ang="5400000" scaled="0"/>
+        </a:gradFill>
+      </a:fillStyleLst>
+      <a:lnStyleLst>
+        <a:ln w="12700" cap="flat" cmpd="sng" algn="ctr">
+          <a:solidFill>
+            <a:schemeClr val="phClr"/>
+          </a:solidFill>
+          <a:prstDash val="solid"/>
+          <a:miter lim="800000"/>
+        </a:ln>
+        <a:ln w="19050" cap="flat" cmpd="sng" algn="ctr">
+          <a:solidFill>
+            <a:schemeClr val="phClr"/>
+          </a:solidFill>
+          <a:prstDash val="solid"/>
+          <a:miter lim="800000"/>
+        </a:ln>
+        <a:ln w="25400" cap="flat" cmpd="sng" algn="ctr">
+          <a:solidFill>
+            <a:schemeClr val="phClr"/>
+          </a:solidFill>
+          <a:prstDash val="solid"/>
+          <a:miter lim="800000"/>
+        </a:ln>
+      </a:lnStyleLst>
+      <a:effectStyleLst>
+        <a:effectStyle>
+          <a:effectLst/>
+        </a:effectStyle>
+        <a:effectStyle>
+          <a:effectLst/>
+        </a:effectStyle>
+        <a:effectStyle>
+          <a:effectLst>
+            <a:outerShdw blurRad="57150" dist="19050" dir="5400000" algn="ctr" rotWithShape="0">
+              <a:srgbClr val="000000">
+                <a:alpha val="63000"/>
+              </a:srgbClr>
+            </a:outerShdw>
+          </a:effectLst>
+        </a:effectStyle>
+      </a:effectStyleLst>
+      <a:bgFillStyleLst>
+        <a:solidFill>
+          <a:schemeClr val="phClr"/>
+        </a:solidFill>
+        <a:solidFill>
+          <a:schemeClr val="phClr">
+            <a:tint val="95000"/>
+            <a:satMod val="170000"/>
+          </a:schemeClr>
+        </a:solidFill>
+        <a:gradFill rotWithShape="1">
+          <a:gsLst>
+            <a:gs pos="0">
+              <a:schemeClr val="phClr">
+                <a:tint val="93000"/>
+                <a:satMod val="150000"/>
+                <a:shade val="98000"/>
+                <a:lumMod val="102000"/>
+              </a:schemeClr>
+            </a:gs>
+            <a:gs pos="50000">
+              <a:schemeClr val="phClr">
+                <a:tint val="98000"/>
+                <a:satMod val="130000"/>
+                <a:shade val="90000"/>
+                <a:lumMod val="103000"/>
+              </a:schemeClr>
+            </a:gs>
+            <a:gs pos="100000">
+              <a:schemeClr val="phClr">
+                <a:shade val="63000"/>
+                <a:satMod val="120000"/>
+              </a:schemeClr>
+            </a:gs>
+          </a:gsLst>
+          <a:lin ang="5400000" scaled="0"/>
+        </a:gradFill>
+      </a:bgFillStyleLst>
+    </a:fmtScheme>
+  </a:themeElements>
+  <a:objectDefaults>
+    <a:lnDef>
+      <a:spPr/>
+      <a:bodyPr/>
+      <a:lstStyle/>
+      <a:style>
+        <a:lnRef idx="2">
+          <a:schemeClr val="accent1"/>
+        </a:lnRef>
+        <a:fillRef idx="0">
+          <a:schemeClr val="accent1"/>
+        </a:fillRef>
+        <a:effectRef idx="1">
+          <a:schemeClr val="accent1"/>
+        </a:effectRef>
+        <a:fontRef idx="minor">
+          <a:schemeClr val="tx1"/>
+        </a:fontRef>
+      </a:style>
+    </a:lnDef>
+  </a:objectDefaults>
+  <a:extraClrSchemeLst/>
+  <a:extLst>
+    <a:ext uri="{05A4C25C-085E-4340-85A3-A5531E510DB2}">
+      <thm15:themeFamily xmlns:thm15="http://schemas.microsoft.com/office/thememl/2012/main" name="Office Theme" id="{2E142A2C-CD16-42D6-873A-C26D2A0506FA}" vid="{1BDDFF52-6CD6-40A5-AB3C-68EB2F1E4D0A}"/>
+    </a:ext>
+  </a:extLst>
+</a:theme>
 </file>
--- a/docs/presentations/KubernetesFundamentals/KubernetesFundamentals.pptx
+++ b/docs/presentations/KubernetesFundamentals/KubernetesFundamentals.pptx
@@ -4,9 +4,6 @@
   <p:sldMasterIdLst>
     <p:sldMasterId id="2147483648" r:id="rId1"/>
   </p:sldMasterIdLst>
-  <p:notesMasterIdLst>
-    <p:notesMasterId r:id="rId24"/>
-  </p:notesMasterIdLst>
   <p:sldIdLst>
     <p:sldId id="256" r:id="rId2"/>
     <p:sldId id="257" r:id="rId3"/>
@@ -31,6 +28,9 @@
     <p:sldId id="276" r:id="rId22"/>
     <p:sldId id="277" r:id="rId23"/>
   </p:sldIdLst>
+  <p:notesMasterIdLst>
+    <p:notesMasterId r:id="rId24"/>
+  </p:notesMasterIdLst>
   <p:sldSz cx="12192000" cy="6858000"/>
   <p:notesSz cx="6858000" cy="12192000"/>
   <p:defaultTextStyle>
@@ -125,11 +125,6 @@
       </a:defRPr>
     </a:lvl9pPr>
   </p:defaultTextStyle>
-  <p:extLst>
-    <p:ext uri="{EFAFB233-063F-42B5-8137-9DF3F51BA10A}">
-      <p15:sldGuideLst xmlns:p15="http://schemas.microsoft.com/office/powerpoint/2012/main"/>
-    </p:ext>
-  </p:extLst>
 </p:presentation>
 </file>
 
@@ -155,10 +150,234 @@
           <a:chExt cx="0" cy="0"/>
         </a:xfrm>
       </p:grpSpPr>
+      <p:sp>
+        <p:nvSpPr>
+          <p:cNvPr id="2" name="Header Placeholder 1"/>
+          <p:cNvSpPr>
+            <a:spLocks noGrp="1"/>
+          </p:cNvSpPr>
+          <p:nvPr>
+            <p:ph type="hdr" sz="quarter"/>
+          </p:nvPr>
+        </p:nvSpPr>
+        <p:spPr>
+          <a:xfrm>
+            <a:off x="0" y="0"/>
+            <a:ext cx="2971800" cy="458788"/>
+          </a:xfrm>
+          <a:prstGeom prst="rect">
+            <a:avLst/>
+          </a:prstGeom>
+        </p:spPr>
+        <p:txBody>
+          <a:bodyPr vert="horz" lIns="91440" tIns="45720" rIns="91440" bIns="45720" rtlCol="0"/>
+          <a:lstStyle>
+            <a:lvl1pPr algn="l">
+              <a:defRPr sz="1200"/>
+            </a:lvl1pPr>
+          </a:lstStyle>
+          <a:p>
+            <a:endParaRPr lang="en-US"/>
+          </a:p>
+        </p:txBody>
+      </p:sp>
+      <p:sp>
+        <p:nvSpPr>
+          <p:cNvPr id="3" name="Date Placeholder 2"/>
+          <p:cNvSpPr>
+            <a:spLocks noGrp="1"/>
+          </p:cNvSpPr>
+          <p:nvPr>
+            <p:ph type="dt" idx="1"/>
+          </p:nvPr>
+        </p:nvSpPr>
+        <p:spPr>
+          <a:xfrm>
+            <a:off x="3884613" y="0"/>
+            <a:ext cx="2971800" cy="458788"/>
+          </a:xfrm>
+          <a:prstGeom prst="rect">
+            <a:avLst/>
+          </a:prstGeom>
+        </p:spPr>
+        <p:txBody>
+          <a:bodyPr vert="horz" lIns="91440" tIns="45720" rIns="91440" bIns="45720" rtlCol="0"/>
+          <a:lstStyle>
+            <a:lvl1pPr algn="r">
+              <a:defRPr sz="1200"/>
+            </a:lvl1pPr>
+          </a:lstStyle>
+          <a:p>
+            <a:fld id="{5282F153-3F37-0F45-9E97-73ACFA13230C}" type="datetimeFigureOut">
+              <a:rPr lang="en-US"/>
+              <a:t>7/23/19</a:t>
+            </a:fld>
+            <a:endParaRPr lang="en-US"/>
+          </a:p>
+        </p:txBody>
+      </p:sp>
+      <p:sp>
+        <p:nvSpPr>
+          <p:cNvPr id="4" name="Slide Image Placeholder 3"/>
+          <p:cNvSpPr>
+            <a:spLocks noGrp="1" noRot="1" noChangeAspect="1"/>
+          </p:cNvSpPr>
+          <p:nvPr>
+            <p:ph type="sldImg" idx="2"/>
+          </p:nvPr>
+        </p:nvSpPr>
+        <p:spPr>
+          <a:xfrm>
+            <a:off x="685800" y="1143000"/>
+            <a:ext cx="5486400" cy="3086100"/>
+          </a:xfrm>
+          <a:prstGeom prst="rect">
+            <a:avLst/>
+          </a:prstGeom>
+          <a:noFill/>
+          <a:ln w="12700">
+            <a:solidFill>
+              <a:prstClr val="black"/>
+            </a:solidFill>
+          </a:ln>
+        </p:spPr>
+        <p:txBody>
+          <a:bodyPr vert="horz" lIns="91440" tIns="45720" rIns="91440" bIns="45720" rtlCol="0" anchor="ctr"/>
+          <a:lstStyle/>
+          <a:p>
+            <a:endParaRPr lang="en-US"/>
+          </a:p>
+        </p:txBody>
+      </p:sp>
+      <p:sp>
+        <p:nvSpPr>
+          <p:cNvPr id="5" name="Notes Placeholder 4"/>
+          <p:cNvSpPr>
+            <a:spLocks noGrp="1"/>
+          </p:cNvSpPr>
+          <p:nvPr>
+            <p:ph type="body" sz="quarter" idx="3"/>
+          </p:nvPr>
+        </p:nvSpPr>
+        <p:spPr>
+          <a:xfrm>
+            <a:off x="685800" y="4400550"/>
+            <a:ext cx="5486400" cy="3600450"/>
+          </a:xfrm>
+          <a:prstGeom prst="rect">
+            <a:avLst/>
+          </a:prstGeom>
+        </p:spPr>
+        <p:txBody>
+          <a:bodyPr vert="horz" lIns="91440" tIns="45720" rIns="91440" bIns="45720" rtlCol="0"/>
+          <a:lstStyle/>
+          <a:p>
+            <a:pPr lvl="0"/>
+            <a:r>
+              <a:rPr lang="en-US"/>
+              <a:t>Click to edit Master text styles</a:t>
+            </a:r>
+          </a:p>
+          <a:p>
+            <a:pPr lvl="1"/>
+            <a:r>
+              <a:rPr lang="en-US"/>
+              <a:t>Second level</a:t>
+            </a:r>
+          </a:p>
+          <a:p>
+            <a:pPr lvl="2"/>
+            <a:r>
+              <a:rPr lang="en-US"/>
+              <a:t>Third level</a:t>
+            </a:r>
+          </a:p>
+          <a:p>
+            <a:pPr lvl="3"/>
+            <a:r>
+              <a:rPr lang="en-US"/>
+              <a:t>Fourth level</a:t>
+            </a:r>
+          </a:p>
+          <a:p>
+            <a:pPr lvl="4"/>
+            <a:r>
+              <a:rPr lang="en-US"/>
+              <a:t>Fifth level</a:t>
+            </a:r>
+          </a:p>
+        </p:txBody>
+      </p:sp>
+      <p:sp>
+        <p:nvSpPr>
+          <p:cNvPr id="6" name="Footer Placeholder 5"/>
+          <p:cNvSpPr>
+            <a:spLocks noGrp="1"/>
+          </p:cNvSpPr>
+          <p:nvPr>
+            <p:ph type="ftr" sz="quarter" idx="4"/>
+          </p:nvPr>
+        </p:nvSpPr>
+        <p:spPr>
+          <a:xfrm>
+            <a:off x="0" y="8685213"/>
+            <a:ext cx="2971800" cy="458787"/>
+          </a:xfrm>
+          <a:prstGeom prst="rect">
+            <a:avLst/>
+          </a:prstGeom>
+        </p:spPr>
+        <p:txBody>
+          <a:bodyPr vert="horz" lIns="91440" tIns="45720" rIns="91440" bIns="45720" rtlCol="0" anchor="b"/>
+          <a:lstStyle>
+            <a:lvl1pPr algn="l">
+              <a:defRPr sz="1200"/>
+            </a:lvl1pPr>
+          </a:lstStyle>
+          <a:p>
+            <a:endParaRPr lang="en-US"/>
+          </a:p>
+        </p:txBody>
+      </p:sp>
+      <p:sp>
+        <p:nvSpPr>
+          <p:cNvPr id="7" name="Slide Number Placeholder 6"/>
+          <p:cNvSpPr>
+            <a:spLocks noGrp="1"/>
+          </p:cNvSpPr>
+          <p:nvPr>
+            <p:ph type="sldNum" sz="quarter" idx="5"/>
+          </p:nvPr>
+        </p:nvSpPr>
+        <p:spPr>
+          <a:xfrm>
+            <a:off x="3884613" y="8685213"/>
+            <a:ext cx="2971800" cy="458787"/>
+          </a:xfrm>
+          <a:prstGeom prst="rect">
+            <a:avLst/>
+          </a:prstGeom>
+        </p:spPr>
+        <p:txBody>
+          <a:bodyPr vert="horz" lIns="91440" tIns="45720" rIns="91440" bIns="45720" rtlCol="0" anchor="b"/>
+          <a:lstStyle>
+            <a:lvl1pPr algn="r">
+              <a:defRPr sz="1200"/>
+            </a:lvl1pPr>
+          </a:lstStyle>
+          <a:p>
+            <a:fld id="{CE5E9CC1-C706-0F49-92D6-E571CC5EEA8F}" type="slidenum">
+              <a:rPr lang="en-US"/>
+              <a:t>‹#›</a:t>
+            </a:fld>
+            <a:endParaRPr lang="en-US"/>
+          </a:p>
+        </p:txBody>
+      </p:sp>
     </p:spTree>
     <p:extLst>
       <p:ext uri="{BB962C8B-B14F-4D97-AF65-F5344CB8AC3E}">
-        <p14:creationId xmlns:p14="http://schemas.microsoft.com/office/powerpoint/2010/main" val="470938966"/>
+        <p14:creationId xmlns:p14="http://schemas.microsoft.com/office/powerpoint/2010/main" val="1024086991"/>
       </p:ext>
     </p:extLst>
   </p:cSld>
@@ -306,6 +525,7 @@
               <a:rPr lang="en-US" dirty="0"/>
               <a:t>Set the frame immediately: this is the concept deck to watch/read before opening TUTORIAL.md in this same repo, not a standalone reference. Ten to fifteen minutes to build the mental model before the first kubectl command. Companion to this repo's TUTORIAL.md — read/watch this first, then go hands-on. No prior Kubernetes knowledge assumed.</a:t>
             </a:r>
+            <a:endParaRPr lang="en-US" dirty="0"/>
           </a:p>
         </p:txBody>
       </p:sp>
@@ -393,6 +613,7 @@
               <a:rPr lang="en-US" dirty="0"/>
               <a:t>Walk each component's single job in order — API server first since everything else is described relative to it. Land on kubelet since it's the bridge to the worker-node side.</a:t>
             </a:r>
+            <a:endParaRPr lang="en-US" dirty="0"/>
           </a:p>
         </p:txBody>
       </p:sp>
@@ -480,6 +701,7 @@
               <a:rPr lang="en-US" dirty="0"/>
               <a:t>Trace one concrete request end to end so the component table on the previous slide stops being abstract. Call out the pod-before-container ordering explicitly — it's a detail worth remembering.</a:t>
             </a:r>
+            <a:endParaRPr lang="en-US" dirty="0"/>
           </a:p>
         </p:txBody>
       </p:sp>
@@ -567,6 +789,7 @@
               <a:rPr lang="en-US" dirty="0"/>
               <a:t>Third focus area — move from control-plane theory into the actual objects readers will type in Module 1 and Module 2.</a:t>
             </a:r>
+            <a:endParaRPr lang="en-US" dirty="0"/>
           </a:p>
         </p:txBody>
       </p:sp>
@@ -654,6 +877,7 @@
               <a:rPr lang="en-US" dirty="0"/>
               <a:t>This is the "aha" moment of the deck for a first-time reader: run the delete experiment and watch the Pod not come back. Frame it as a problem statement, not a dead end — Slide 14 is the fix.</a:t>
             </a:r>
+            <a:endParaRPr lang="en-US" dirty="0"/>
           </a:p>
         </p:txBody>
       </p:sp>
@@ -741,6 +965,7 @@
               <a:rPr lang="en-US" dirty="0"/>
               <a:t>Repeat the exact delete experiment from Slide 13, but this time on a Deployment-managed Pod — the contrast is the whole point. Tie the self-healing behavior explicitly back to Slide 8's reconciliation loop.</a:t>
             </a:r>
+            <a:endParaRPr lang="en-US" dirty="0"/>
           </a:p>
         </p:txBody>
       </p:sp>
@@ -828,6 +1053,7 @@
               <a:rPr lang="en-US" dirty="0"/>
               <a:t>Fourth and final focus area — the last two object types, then the capstone that wires everything together.</a:t>
             </a:r>
+            <a:endParaRPr lang="en-US" dirty="0"/>
           </a:p>
         </p:txBody>
       </p:sp>
@@ -915,6 +1141,7 @@
               <a:rPr lang="en-US" dirty="0"/>
               <a:t>Anchor this in the fact that the reader just watched a Pod's IP change in the previous section — a Service is the direct answer to that instability.</a:t>
             </a:r>
+            <a:endParaRPr lang="en-US" dirty="0"/>
           </a:p>
         </p:txBody>
       </p:sp>
@@ -1002,6 +1229,7 @@
               <a:rPr lang="en-US" dirty="0"/>
               <a:t>Keep this conceptual per the high-level depth — one short illustrative snippet, not a manifest walkthrough. The base64-is-not-encryption point is the one thing to land hard.</a:t>
             </a:r>
+            <a:endParaRPr lang="en-US" dirty="0"/>
           </a:p>
         </p:txBody>
       </p:sp>
@@ -1089,6 +1317,7 @@
               <a:rPr lang="en-US" dirty="0"/>
               <a:t>This is where all four focus areas visibly compose into TUTORIAL.md's Module 5. The DNS-name-per-Service detail and the deploy-order gotcha are the two things worth remembering here.</a:t>
             </a:r>
+            <a:endParaRPr lang="en-US" dirty="0"/>
           </a:p>
         </p:txBody>
       </p:sp>
@@ -1176,6 +1405,7 @@
               <a:rPr lang="en-US" dirty="0"/>
               <a:t>Frame this as "things that were harder than expected" for an onboarding audience — real failure modes pulled straight from the tutorial's own troubleshooting notes, not hypotheticals.</a:t>
             </a:r>
+            <a:endParaRPr lang="en-US" dirty="0"/>
           </a:p>
         </p:txBody>
       </p:sp>
@@ -1263,6 +1493,7 @@
               <a:rPr lang="en-US" dirty="0"/>
               <a:t>Open with the pain, not the architecture. This is the itch that motivated Kubernetes existing at all — no jargon yet, just "here's what breaks."</a:t>
             </a:r>
+            <a:endParaRPr lang="en-US" dirty="0"/>
           </a:p>
         </p:txBody>
       </p:sp>
@@ -1350,6 +1581,7 @@
               <a:rPr lang="en-US" dirty="0"/>
               <a:t>Land the single unifying idea before handing off to TUTORIAL.md — everything walked through today is one mechanism wearing different hats.</a:t>
             </a:r>
+            <a:endParaRPr lang="en-US" dirty="0"/>
           </a:p>
         </p:txBody>
       </p:sp>
@@ -1437,6 +1669,7 @@
               <a:rPr lang="en-US" dirty="0"/>
               <a:t>Explicit handoff — this is the deck's actual job, to end with the reader opening a terminal and starting Module 0 with the mental model already in place.</a:t>
             </a:r>
+            <a:endParaRPr lang="en-US" dirty="0"/>
           </a:p>
         </p:txBody>
       </p:sp>
@@ -1524,6 +1757,7 @@
               <a:rPr lang="en-US" dirty="0"/>
               <a:t>Three takeaways, no more — the last line is the one thing worth remembering walking into Module 1.</a:t>
             </a:r>
+            <a:endParaRPr lang="en-US" dirty="0"/>
           </a:p>
         </p:txBody>
       </p:sp>
@@ -1611,6 +1845,7 @@
               <a:rPr lang="en-US" dirty="0"/>
               <a:t>Transition from "why" to "how" — zoom out to the two kinds of machines before drilling into any one component.</a:t>
             </a:r>
+            <a:endParaRPr lang="en-US" dirty="0"/>
           </a:p>
         </p:txBody>
       </p:sp>
@@ -1698,6 +1933,7 @@
               <a:rPr lang="en-US" dirty="0"/>
               <a:t>Establish the two-tier model before naming any single component in depth. Emphasize that you never talk to a worker node directly — everything routes through the API server.</a:t>
             </a:r>
+            <a:endParaRPr lang="en-US" dirty="0"/>
           </a:p>
         </p:txBody>
       </p:sp>
@@ -1785,6 +2021,7 @@
               <a:rPr lang="en-US" dirty="0"/>
               <a:t>Orient the reader to exactly what they're about to install in TUTORIAL.md Module 0, and flag the one gotcha (containerd runtime flag) before they hit it themselves.</a:t>
             </a:r>
+            <a:endParaRPr lang="en-US" dirty="0"/>
           </a:p>
         </p:txBody>
       </p:sp>
@@ -1872,6 +2109,7 @@
               <a:rPr lang="en-US" dirty="0"/>
               <a:t>First of the four focus areas — go one level deeper on the motivation now that the architecture is in view.</a:t>
             </a:r>
+            <a:endParaRPr lang="en-US" dirty="0"/>
           </a:p>
         </p:txBody>
       </p:sp>
@@ -1959,6 +2197,7 @@
               <a:rPr lang="en-US" dirty="0"/>
               <a:t>Make each failure mode concrete with what Kubernetes actually does about it, not just the abstract label.</a:t>
             </a:r>
+            <a:endParaRPr lang="en-US" dirty="0"/>
           </a:p>
         </p:txBody>
       </p:sp>
@@ -2046,6 +2285,7 @@
               <a:rPr lang="en-US" dirty="0"/>
               <a:t>This is the single most important concept in the deck — everything downstream (self-healing, scaling) is this same idea running continuously. Spell out declarative vs. imperative explicitly for onboarding.</a:t>
             </a:r>
+            <a:endParaRPr lang="en-US" dirty="0"/>
           </a:p>
         </p:txBody>
       </p:sp>
@@ -2133,6 +2373,7 @@
               <a:rPr lang="en-US" dirty="0"/>
               <a:t>Second focus area — now open the door from Slide 4 and name every piece behind it.</a:t>
             </a:r>
+            <a:endParaRPr lang="en-US" dirty="0"/>
           </a:p>
         </p:txBody>
       </p:sp>
@@ -2205,11 +2446,6 @@
 <file path=ppt/slideMasters/slideMaster1.xml><?xml version="1.0" encoding="utf-8"?>
 <p:sldMaster xmlns:a="http://schemas.openxmlformats.org/drawingml/2006/main" xmlns:r="http://schemas.openxmlformats.org/officeDocument/2006/relationships" xmlns:p="http://schemas.openxmlformats.org/presentationml/2006/main">
   <p:cSld>
-    <p:bg>
-      <p:bgRef idx="1001">
-        <a:schemeClr val="bg1"/>
-      </p:bgRef>
-    </p:bg>
     <p:spTree>
       <p:nvGrpSpPr>
         <p:cNvPr id="1" name=""/>
@@ -2492,7 +2728,6 @@
         <a:solidFill>
           <a:srgbClr val="EAFCFF"/>
         </a:solidFill>
-        <a:effectLst/>
       </p:bgPr>
     </p:bg>
     <p:spTree>
@@ -2530,11 +2765,11 @@
           <a:bodyPr wrap="square" rtlCol="0" anchor="ctr"/>
           <a:lstStyle/>
           <a:p>
-            <a:pPr marL="0" indent="0" algn="ctr">
-              <a:buNone/>
-            </a:pPr>
-            <a:r>
-              <a:rPr lang="en-US" sz="6400" b="1" kern="0" spc="50" dirty="0">
+            <a:pPr algn="ctr" indent="0" marL="0">
+              <a:buNone/>
+            </a:pPr>
+            <a:r>
+              <a:rPr lang="en-US" sz="6400" b="1" spc="50" kern="0" dirty="0">
                 <a:solidFill>
                   <a:srgbClr val="0A1A1C"/>
                 </a:solidFill>
@@ -2569,7 +2804,7 @@
           <a:bodyPr wrap="square" rtlCol="0" anchor="ctr"/>
           <a:lstStyle/>
           <a:p>
-            <a:pPr marL="0" indent="0" algn="ctr">
+            <a:pPr algn="ctr" indent="0" marL="0">
               <a:buNone/>
             </a:pPr>
             <a:r>
@@ -2611,13 +2846,6 @@
             <a:prstDash val="solid"/>
           </a:ln>
         </p:spPr>
-        <p:txBody>
-          <a:bodyPr/>
-          <a:lstStyle/>
-          <a:p>
-            <a:endParaRPr lang="en-US"/>
-          </a:p>
-        </p:txBody>
       </p:sp>
       <p:sp>
         <p:nvSpPr>
@@ -2640,7 +2868,7 @@
           <a:bodyPr wrap="square" rtlCol="0" anchor="ctr"/>
           <a:lstStyle/>
           <a:p>
-            <a:pPr marL="0" indent="0" algn="ctr">
+            <a:pPr algn="ctr" indent="0" marL="0">
               <a:buNone/>
             </a:pPr>
             <a:r>
@@ -2679,11 +2907,11 @@
           <a:bodyPr wrap="square" rtlCol="0" anchor="ctr"/>
           <a:lstStyle/>
           <a:p>
-            <a:pPr marL="0" indent="0" algn="ctr">
-              <a:buNone/>
-            </a:pPr>
-            <a:r>
-              <a:rPr lang="en-US" sz="1400" kern="0" spc="50" dirty="0">
+            <a:pPr algn="ctr" indent="0" marL="0">
+              <a:buNone/>
+            </a:pPr>
+            <a:r>
+              <a:rPr lang="en-US" sz="1400" spc="50" kern="0" dirty="0">
                 <a:solidFill>
                   <a:srgbClr val="306878"/>
                 </a:solidFill>
@@ -2713,7 +2941,6 @@
         <a:solidFill>
           <a:srgbClr val="EAFCFF"/>
         </a:solidFill>
-        <a:effectLst/>
       </p:bgPr>
     </p:bg>
     <p:spTree>
@@ -2754,13 +2981,6 @@
             <a:prstDash val="solid"/>
           </a:ln>
         </p:spPr>
-        <p:txBody>
-          <a:bodyPr/>
-          <a:lstStyle/>
-          <a:p>
-            <a:endParaRPr lang="en-US"/>
-          </a:p>
-        </p:txBody>
       </p:sp>
       <p:sp>
         <p:nvSpPr>
@@ -2783,11 +3003,11 @@
           <a:bodyPr wrap="square" rtlCol="0" anchor="ctr"/>
           <a:lstStyle/>
           <a:p>
-            <a:pPr marL="0" indent="0" algn="ctr">
-              <a:buNone/>
-            </a:pPr>
-            <a:r>
-              <a:rPr lang="en-US" sz="1200" b="1" kern="0" spc="50" dirty="0">
+            <a:pPr algn="ctr" indent="0" marL="0">
+              <a:buNone/>
+            </a:pPr>
+            <a:r>
+              <a:rPr lang="en-US" sz="1200" b="1" spc="50" kern="0" dirty="0">
                 <a:solidFill>
                   <a:srgbClr val="FFFFFF"/>
                 </a:solidFill>
@@ -2822,11 +3042,11 @@
           <a:bodyPr wrap="square" rtlCol="0" anchor="ctr"/>
           <a:lstStyle/>
           <a:p>
-            <a:pPr marL="0" indent="0">
-              <a:buNone/>
-            </a:pPr>
-            <a:r>
-              <a:rPr lang="en-US" sz="3000" b="1" kern="0" spc="50" dirty="0">
+            <a:pPr indent="0" marL="0">
+              <a:buNone/>
+            </a:pPr>
+            <a:r>
+              <a:rPr lang="en-US" sz="3000" b="1" spc="50" kern="0" dirty="0">
                 <a:solidFill>
                   <a:srgbClr val="0A1A1C"/>
                 </a:solidFill>
@@ -2864,13 +3084,6 @@
             <a:prstDash val="solid"/>
           </a:ln>
         </p:spPr>
-        <p:txBody>
-          <a:bodyPr/>
-          <a:lstStyle/>
-          <a:p>
-            <a:endParaRPr lang="en-US"/>
-          </a:p>
-        </p:txBody>
       </p:sp>
       <p:sp>
         <p:nvSpPr>
@@ -2908,6 +3121,9 @@
               </a:rPr>
               <a:t>API server — </a:t>
             </a:r>
+            <a:pPr indent="0" marL="0">
+              <a:buNone/>
+            </a:pPr>
             <a:r>
               <a:rPr lang="en-US" sz="2000" dirty="0">
                 <a:solidFill>
@@ -2959,6 +3175,9 @@
               </a:rPr>
               <a:t>etcd — </a:t>
             </a:r>
+            <a:pPr indent="0" marL="0">
+              <a:buNone/>
+            </a:pPr>
             <a:r>
               <a:rPr lang="en-US" sz="2000" dirty="0">
                 <a:solidFill>
@@ -3010,6 +3229,9 @@
               </a:rPr>
               <a:t>Scheduler — </a:t>
             </a:r>
+            <a:pPr indent="0" marL="0">
+              <a:buNone/>
+            </a:pPr>
             <a:r>
               <a:rPr lang="en-US" sz="2000" dirty="0">
                 <a:solidFill>
@@ -3061,6 +3283,9 @@
               </a:rPr>
               <a:t>Controller manager — </a:t>
             </a:r>
+            <a:pPr indent="0" marL="0">
+              <a:buNone/>
+            </a:pPr>
             <a:r>
               <a:rPr lang="en-US" sz="2000" dirty="0">
                 <a:solidFill>
@@ -3112,6 +3337,9 @@
               </a:rPr>
               <a:t>kubelet — </a:t>
             </a:r>
+            <a:pPr indent="0" marL="0">
+              <a:buNone/>
+            </a:pPr>
             <a:r>
               <a:rPr lang="en-US" sz="2000" dirty="0">
                 <a:solidFill>
@@ -3143,7 +3371,6 @@
         <a:solidFill>
           <a:srgbClr val="EAFCFF"/>
         </a:solidFill>
-        <a:effectLst/>
       </p:bgPr>
     </p:bg>
     <p:spTree>
@@ -3184,13 +3411,6 @@
             <a:prstDash val="solid"/>
           </a:ln>
         </p:spPr>
-        <p:txBody>
-          <a:bodyPr/>
-          <a:lstStyle/>
-          <a:p>
-            <a:endParaRPr lang="en-US"/>
-          </a:p>
-        </p:txBody>
       </p:sp>
       <p:sp>
         <p:nvSpPr>
@@ -3213,11 +3433,11 @@
           <a:bodyPr wrap="square" rtlCol="0" anchor="ctr"/>
           <a:lstStyle/>
           <a:p>
-            <a:pPr marL="0" indent="0" algn="ctr">
-              <a:buNone/>
-            </a:pPr>
-            <a:r>
-              <a:rPr lang="en-US" sz="1200" b="1" kern="0" spc="50" dirty="0">
+            <a:pPr algn="ctr" indent="0" marL="0">
+              <a:buNone/>
+            </a:pPr>
+            <a:r>
+              <a:rPr lang="en-US" sz="1200" b="1" spc="50" kern="0" dirty="0">
                 <a:solidFill>
                   <a:srgbClr val="FFFFFF"/>
                 </a:solidFill>
@@ -3252,11 +3472,11 @@
           <a:bodyPr wrap="square" rtlCol="0" anchor="ctr"/>
           <a:lstStyle/>
           <a:p>
-            <a:pPr marL="0" indent="0">
-              <a:buNone/>
-            </a:pPr>
-            <a:r>
-              <a:rPr lang="en-US" sz="3000" b="1" kern="0" spc="50" dirty="0">
+            <a:pPr indent="0" marL="0">
+              <a:buNone/>
+            </a:pPr>
+            <a:r>
+              <a:rPr lang="en-US" sz="3000" b="1" spc="50" kern="0" dirty="0">
                 <a:solidFill>
                   <a:srgbClr val="0A1A1C"/>
                 </a:solidFill>
@@ -3294,13 +3514,6 @@
             <a:prstDash val="solid"/>
           </a:ln>
         </p:spPr>
-        <p:txBody>
-          <a:bodyPr/>
-          <a:lstStyle/>
-          <a:p>
-            <a:endParaRPr lang="en-US"/>
-          </a:p>
-        </p:txBody>
       </p:sp>
       <p:sp>
         <p:nvSpPr>
@@ -3328,13 +3541,6 @@
             <a:prstDash val="solid"/>
           </a:ln>
         </p:spPr>
-        <p:txBody>
-          <a:bodyPr/>
-          <a:lstStyle/>
-          <a:p>
-            <a:endParaRPr lang="en-US"/>
-          </a:p>
-        </p:txBody>
       </p:sp>
       <p:sp>
         <p:nvSpPr>
@@ -3357,7 +3563,7 @@
           <a:bodyPr wrap="square" rtlCol="0" anchor="ctr"/>
           <a:lstStyle/>
           <a:p>
-            <a:pPr marL="0" indent="0" algn="ctr">
+            <a:pPr algn="ctr" indent="0" marL="0">
               <a:buNone/>
             </a:pPr>
             <a:r>
@@ -3396,7 +3602,7 @@
           <a:bodyPr wrap="square" rtlCol="0" anchor="ctr"/>
           <a:lstStyle/>
           <a:p>
-            <a:pPr marL="0" indent="0" algn="ctr">
+            <a:pPr algn="ctr" indent="0" marL="0">
               <a:buNone/>
             </a:pPr>
             <a:r>
@@ -3440,13 +3646,6 @@
             <a:prstDash val="solid"/>
           </a:ln>
         </p:spPr>
-        <p:txBody>
-          <a:bodyPr/>
-          <a:lstStyle/>
-          <a:p>
-            <a:endParaRPr lang="en-US"/>
-          </a:p>
-        </p:txBody>
       </p:sp>
       <p:sp>
         <p:nvSpPr>
@@ -3469,7 +3668,7 @@
           <a:bodyPr wrap="square" rtlCol="0" anchor="ctr"/>
           <a:lstStyle/>
           <a:p>
-            <a:pPr marL="0" indent="0" algn="ctr">
+            <a:pPr algn="ctr" indent="0" marL="0">
               <a:buNone/>
             </a:pPr>
             <a:r>
@@ -3486,7 +3685,7 @@
             <a:endParaRPr lang="en-US" sz="1100" dirty="0"/>
           </a:p>
           <a:p>
-            <a:pPr marL="0" indent="0" algn="ctr">
+            <a:pPr algn="ctr" indent="0" marL="0">
               <a:buNone/>
             </a:pPr>
             <a:r>
@@ -3525,7 +3724,7 @@
           <a:bodyPr wrap="square" rtlCol="0" anchor="ctr"/>
           <a:lstStyle/>
           <a:p>
-            <a:pPr marL="0" indent="0" algn="ctr">
+            <a:pPr algn="ctr" indent="0" marL="0">
               <a:buNone/>
             </a:pPr>
             <a:r>
@@ -3569,13 +3768,6 @@
             <a:prstDash val="solid"/>
           </a:ln>
         </p:spPr>
-        <p:txBody>
-          <a:bodyPr/>
-          <a:lstStyle/>
-          <a:p>
-            <a:endParaRPr lang="en-US"/>
-          </a:p>
-        </p:txBody>
       </p:sp>
       <p:sp>
         <p:nvSpPr>
@@ -3598,7 +3790,7 @@
           <a:bodyPr wrap="square" rtlCol="0" anchor="ctr"/>
           <a:lstStyle/>
           <a:p>
-            <a:pPr marL="0" indent="0" algn="ctr">
+            <a:pPr algn="ctr" indent="0" marL="0">
               <a:buNone/>
             </a:pPr>
             <a:r>
@@ -3637,7 +3829,7 @@
           <a:bodyPr wrap="square" rtlCol="0" anchor="ctr"/>
           <a:lstStyle/>
           <a:p>
-            <a:pPr marL="0" indent="0" algn="ctr">
+            <a:pPr algn="ctr" indent="0" marL="0">
               <a:buNone/>
             </a:pPr>
             <a:r>
@@ -3681,13 +3873,6 @@
             <a:prstDash val="solid"/>
           </a:ln>
         </p:spPr>
-        <p:txBody>
-          <a:bodyPr/>
-          <a:lstStyle/>
-          <a:p>
-            <a:endParaRPr lang="en-US"/>
-          </a:p>
-        </p:txBody>
       </p:sp>
       <p:sp>
         <p:nvSpPr>
@@ -3710,7 +3895,7 @@
           <a:bodyPr wrap="square" rtlCol="0" anchor="ctr"/>
           <a:lstStyle/>
           <a:p>
-            <a:pPr marL="0" indent="0" algn="ctr">
+            <a:pPr algn="ctr" indent="0" marL="0">
               <a:buNone/>
             </a:pPr>
             <a:r>
@@ -3749,7 +3934,7 @@
           <a:bodyPr wrap="square" rtlCol="0" anchor="ctr"/>
           <a:lstStyle/>
           <a:p>
-            <a:pPr marL="0" indent="0" algn="ctr">
+            <a:pPr algn="ctr" indent="0" marL="0">
               <a:buNone/>
             </a:pPr>
             <a:r>
@@ -3793,13 +3978,6 @@
             <a:prstDash val="solid"/>
           </a:ln>
         </p:spPr>
-        <p:txBody>
-          <a:bodyPr/>
-          <a:lstStyle/>
-          <a:p>
-            <a:endParaRPr lang="en-US"/>
-          </a:p>
-        </p:txBody>
       </p:sp>
       <p:sp>
         <p:nvSpPr>
@@ -3822,7 +4000,7 @@
           <a:bodyPr wrap="square" rtlCol="0" anchor="ctr"/>
           <a:lstStyle/>
           <a:p>
-            <a:pPr marL="0" indent="0" algn="ctr">
+            <a:pPr algn="ctr" indent="0" marL="0">
               <a:buNone/>
             </a:pPr>
             <a:r>
@@ -3861,7 +4039,7 @@
           <a:bodyPr wrap="square" rtlCol="0" anchor="ctr"/>
           <a:lstStyle/>
           <a:p>
-            <a:pPr marL="0" indent="0" algn="ctr">
+            <a:pPr algn="ctr" indent="0" marL="0">
               <a:buNone/>
             </a:pPr>
             <a:r>
@@ -3905,13 +4083,6 @@
             <a:prstDash val="solid"/>
           </a:ln>
         </p:spPr>
-        <p:txBody>
-          <a:bodyPr/>
-          <a:lstStyle/>
-          <a:p>
-            <a:endParaRPr lang="en-US"/>
-          </a:p>
-        </p:txBody>
       </p:sp>
       <p:sp>
         <p:nvSpPr>
@@ -3934,7 +4105,7 @@
           <a:bodyPr wrap="square" rtlCol="0" anchor="ctr"/>
           <a:lstStyle/>
           <a:p>
-            <a:pPr marL="0" indent="0" algn="ctr">
+            <a:pPr algn="ctr" indent="0" marL="0">
               <a:buNone/>
             </a:pPr>
             <a:r>
@@ -3951,7 +4122,7 @@
             <a:endParaRPr lang="en-US" sz="1100" dirty="0"/>
           </a:p>
           <a:p>
-            <a:pPr marL="0" indent="0" algn="ctr">
+            <a:pPr algn="ctr" indent="0" marL="0">
               <a:buNone/>
             </a:pPr>
             <a:r>
@@ -4265,7 +4436,6 @@
         <a:solidFill>
           <a:srgbClr val="007A90"/>
         </a:solidFill>
-        <a:effectLst/>
       </p:bgPr>
     </p:bg>
     <p:spTree>
@@ -4306,13 +4476,6 @@
             <a:prstDash val="solid"/>
           </a:ln>
         </p:spPr>
-        <p:txBody>
-          <a:bodyPr/>
-          <a:lstStyle/>
-          <a:p>
-            <a:endParaRPr lang="en-US"/>
-          </a:p>
-        </p:txBody>
       </p:sp>
       <p:sp>
         <p:nvSpPr>
@@ -4335,11 +4498,11 @@
           <a:bodyPr wrap="square" rtlCol="0" anchor="ctr"/>
           <a:lstStyle/>
           <a:p>
-            <a:pPr marL="0" indent="0" algn="ctr">
-              <a:buNone/>
-            </a:pPr>
-            <a:r>
-              <a:rPr lang="en-US" sz="4800" b="1" kern="0" spc="50" dirty="0">
+            <a:pPr algn="ctr" indent="0" marL="0">
+              <a:buNone/>
+            </a:pPr>
+            <a:r>
+              <a:rPr lang="en-US" sz="4800" b="1" spc="50" kern="0" dirty="0">
                 <a:solidFill>
                   <a:srgbClr val="FFFFFF"/>
                 </a:solidFill>
@@ -4374,7 +4537,7 @@
           <a:bodyPr wrap="square" rtlCol="0" anchor="ctr"/>
           <a:lstStyle/>
           <a:p>
-            <a:pPr marL="0" indent="0" algn="ctr">
+            <a:pPr algn="ctr" indent="0" marL="0">
               <a:buNone/>
             </a:pPr>
             <a:r>
@@ -4410,7 +4573,6 @@
         <a:solidFill>
           <a:srgbClr val="EAFCFF"/>
         </a:solidFill>
-        <a:effectLst/>
       </p:bgPr>
     </p:bg>
     <p:spTree>
@@ -4451,13 +4613,6 @@
             <a:prstDash val="solid"/>
           </a:ln>
         </p:spPr>
-        <p:txBody>
-          <a:bodyPr/>
-          <a:lstStyle/>
-          <a:p>
-            <a:endParaRPr lang="en-US"/>
-          </a:p>
-        </p:txBody>
       </p:sp>
       <p:sp>
         <p:nvSpPr>
@@ -4480,11 +4635,11 @@
           <a:bodyPr wrap="square" rtlCol="0" anchor="ctr"/>
           <a:lstStyle/>
           <a:p>
-            <a:pPr marL="0" indent="0" algn="ctr">
-              <a:buNone/>
-            </a:pPr>
-            <a:r>
-              <a:rPr lang="en-US" sz="1200" b="1" kern="0" spc="50" dirty="0">
+            <a:pPr algn="ctr" indent="0" marL="0">
+              <a:buNone/>
+            </a:pPr>
+            <a:r>
+              <a:rPr lang="en-US" sz="1200" b="1" spc="50" kern="0" dirty="0">
                 <a:solidFill>
                   <a:srgbClr val="FFFFFF"/>
                 </a:solidFill>
@@ -4519,11 +4674,11 @@
           <a:bodyPr wrap="square" rtlCol="0" anchor="ctr"/>
           <a:lstStyle/>
           <a:p>
-            <a:pPr marL="0" indent="0">
-              <a:buNone/>
-            </a:pPr>
-            <a:r>
-              <a:rPr lang="en-US" sz="3000" b="1" kern="0" spc="50" dirty="0">
+            <a:pPr indent="0" marL="0">
+              <a:buNone/>
+            </a:pPr>
+            <a:r>
+              <a:rPr lang="en-US" sz="3000" b="1" spc="50" kern="0" dirty="0">
                 <a:solidFill>
                   <a:srgbClr val="0A1A1C"/>
                 </a:solidFill>
@@ -4561,13 +4716,6 @@
             <a:prstDash val="solid"/>
           </a:ln>
         </p:spPr>
-        <p:txBody>
-          <a:bodyPr/>
-          <a:lstStyle/>
-          <a:p>
-            <a:endParaRPr lang="en-US"/>
-          </a:p>
-        </p:txBody>
       </p:sp>
       <p:sp>
         <p:nvSpPr>
@@ -4577,8 +4725,8 @@
         </p:nvSpPr>
         <p:spPr>
           <a:xfrm>
-            <a:off x="686614" y="2814223"/>
-            <a:ext cx="5204564" cy="2626457"/>
+            <a:off x="457200" y="1572768"/>
+            <a:ext cx="5477256" cy="5010912"/>
           </a:xfrm>
           <a:prstGeom prst="rect">
             <a:avLst/>
@@ -4593,13 +4741,6 @@
             <a:prstDash val="solid"/>
           </a:ln>
         </p:spPr>
-        <p:txBody>
-          <a:bodyPr/>
-          <a:lstStyle/>
-          <a:p>
-            <a:endParaRPr lang="en-US"/>
-          </a:p>
-        </p:txBody>
       </p:sp>
       <p:sp>
         <p:nvSpPr>
@@ -4609,7 +4750,7 @@
         </p:nvSpPr>
         <p:spPr>
           <a:xfrm>
-            <a:off x="914807" y="3007899"/>
+            <a:off x="640080" y="1709928"/>
             <a:ext cx="5111496" cy="4736592"/>
           </a:xfrm>
           <a:prstGeom prst="rect">
@@ -4622,7 +4763,7 @@
           <a:bodyPr wrap="none" rtlCol="0" anchor="t"/>
           <a:lstStyle/>
           <a:p>
-            <a:pPr marL="0" indent="0">
+            <a:pPr indent="0" marL="0">
               <a:buNone/>
             </a:pPr>
             <a:r>
@@ -4639,7 +4780,7 @@
             <a:endParaRPr lang="en-US" sz="1400" dirty="0"/>
           </a:p>
           <a:p>
-            <a:pPr marL="0" indent="0">
+            <a:pPr indent="0" marL="0">
               <a:buNone/>
             </a:pPr>
             <a:r>
@@ -4656,7 +4797,7 @@
             <a:endParaRPr lang="en-US" sz="1400" dirty="0"/>
           </a:p>
           <a:p>
-            <a:pPr marL="0" indent="0">
+            <a:pPr indent="0" marL="0">
               <a:buNone/>
             </a:pPr>
             <a:r>
@@ -4673,7 +4814,7 @@
             <a:endParaRPr lang="en-US" sz="1400" dirty="0"/>
           </a:p>
           <a:p>
-            <a:pPr marL="0" indent="0">
+            <a:pPr indent="0" marL="0">
               <a:buNone/>
             </a:pPr>
             <a:r>
@@ -4690,7 +4831,7 @@
             <a:endParaRPr lang="en-US" sz="1400" dirty="0"/>
           </a:p>
           <a:p>
-            <a:pPr marL="0" indent="0">
+            <a:pPr indent="0" marL="0">
               <a:buNone/>
             </a:pPr>
             <a:r>
@@ -4707,7 +4848,7 @@
             <a:endParaRPr lang="en-US" sz="1400" dirty="0"/>
           </a:p>
           <a:p>
-            <a:pPr marL="0" indent="0">
+            <a:pPr indent="0" marL="0">
               <a:buNone/>
             </a:pPr>
             <a:r>
@@ -4724,7 +4865,7 @@
             <a:endParaRPr lang="en-US" sz="1400" dirty="0"/>
           </a:p>
           <a:p>
-            <a:pPr marL="0" indent="0">
+            <a:pPr indent="0" marL="0">
               <a:buNone/>
             </a:pPr>
             <a:r>
@@ -4741,7 +4882,7 @@
             <a:endParaRPr lang="en-US" sz="1400" dirty="0"/>
           </a:p>
           <a:p>
-            <a:pPr marL="0" indent="0">
+            <a:pPr indent="0" marL="0">
               <a:buNone/>
             </a:pPr>
             <a:r>
@@ -4758,7 +4899,7 @@
             <a:endParaRPr lang="en-US" sz="1400" dirty="0"/>
           </a:p>
           <a:p>
-            <a:pPr marL="0" indent="0">
+            <a:pPr indent="0" marL="0">
               <a:buNone/>
             </a:pPr>
             <a:r>
@@ -4775,7 +4916,7 @@
             <a:endParaRPr lang="en-US" sz="1400" dirty="0"/>
           </a:p>
           <a:p>
-            <a:pPr marL="0" indent="0">
+            <a:pPr indent="0" marL="0">
               <a:buNone/>
             </a:pPr>
             <a:r>
@@ -4987,7 +5128,7 @@
                 <a:ea typeface="Trebuchet MS" pitchFamily="34" charset="-122"/>
                 <a:cs typeface="Trebuchet MS" pitchFamily="34" charset="-120"/>
               </a:rPr>
-              <a:t>It does not come back — a bare Pod has no supervisor</a:t>
+              <a:t>It does not come back — apply already exited; the YAML file is now inert, no controller is watching this Pod</a:t>
             </a:r>
             <a:endParaRPr lang="en-US" sz="1600" dirty="0"/>
           </a:p>
@@ -5009,7 +5150,6 @@
         <a:solidFill>
           <a:srgbClr val="EAFCFF"/>
         </a:solidFill>
-        <a:effectLst/>
       </p:bgPr>
     </p:bg>
     <p:spTree>
@@ -5050,13 +5190,6 @@
             <a:prstDash val="solid"/>
           </a:ln>
         </p:spPr>
-        <p:txBody>
-          <a:bodyPr/>
-          <a:lstStyle/>
-          <a:p>
-            <a:endParaRPr lang="en-US"/>
-          </a:p>
-        </p:txBody>
       </p:sp>
       <p:sp>
         <p:nvSpPr>
@@ -5079,11 +5212,11 @@
           <a:bodyPr wrap="square" rtlCol="0" anchor="ctr"/>
           <a:lstStyle/>
           <a:p>
-            <a:pPr marL="0" indent="0" algn="ctr">
-              <a:buNone/>
-            </a:pPr>
-            <a:r>
-              <a:rPr lang="en-US" sz="1200" b="1" kern="0" spc="50" dirty="0">
+            <a:pPr algn="ctr" indent="0" marL="0">
+              <a:buNone/>
+            </a:pPr>
+            <a:r>
+              <a:rPr lang="en-US" sz="1200" b="1" spc="50" kern="0" dirty="0">
                 <a:solidFill>
                   <a:srgbClr val="FFFFFF"/>
                 </a:solidFill>
@@ -5118,11 +5251,11 @@
           <a:bodyPr wrap="square" rtlCol="0" anchor="ctr"/>
           <a:lstStyle/>
           <a:p>
-            <a:pPr marL="0" indent="0">
-              <a:buNone/>
-            </a:pPr>
-            <a:r>
-              <a:rPr lang="en-US" sz="3000" b="1" kern="0" spc="50" dirty="0">
+            <a:pPr indent="0" marL="0">
+              <a:buNone/>
+            </a:pPr>
+            <a:r>
+              <a:rPr lang="en-US" sz="3000" b="1" spc="50" kern="0" dirty="0">
                 <a:solidFill>
                   <a:srgbClr val="0A1A1C"/>
                 </a:solidFill>
@@ -5160,13 +5293,6 @@
             <a:prstDash val="solid"/>
           </a:ln>
         </p:spPr>
-        <p:txBody>
-          <a:bodyPr/>
-          <a:lstStyle/>
-          <a:p>
-            <a:endParaRPr lang="en-US"/>
-          </a:p>
-        </p:txBody>
       </p:sp>
       <p:sp>
         <p:nvSpPr>
@@ -5194,13 +5320,6 @@
             <a:prstDash val="solid"/>
           </a:ln>
         </p:spPr>
-        <p:txBody>
-          <a:bodyPr/>
-          <a:lstStyle/>
-          <a:p>
-            <a:endParaRPr lang="en-US"/>
-          </a:p>
-        </p:txBody>
       </p:sp>
       <p:sp>
         <p:nvSpPr>
@@ -5223,7 +5342,7 @@
           <a:bodyPr wrap="square" rtlCol="0" anchor="ctr"/>
           <a:lstStyle/>
           <a:p>
-            <a:pPr marL="0" indent="0" algn="ctr">
+            <a:pPr algn="ctr" indent="0" marL="0">
               <a:buNone/>
             </a:pPr>
             <a:r>
@@ -5262,7 +5381,7 @@
           <a:bodyPr wrap="square" rtlCol="0" anchor="ctr"/>
           <a:lstStyle/>
           <a:p>
-            <a:pPr marL="0" indent="0" algn="ctr">
+            <a:pPr algn="ctr" indent="0" marL="0">
               <a:buNone/>
             </a:pPr>
             <a:r>
@@ -5306,13 +5425,6 @@
             <a:prstDash val="solid"/>
           </a:ln>
         </p:spPr>
-        <p:txBody>
-          <a:bodyPr/>
-          <a:lstStyle/>
-          <a:p>
-            <a:endParaRPr lang="en-US"/>
-          </a:p>
-        </p:txBody>
       </p:sp>
       <p:sp>
         <p:nvSpPr>
@@ -5335,7 +5447,7 @@
           <a:bodyPr wrap="square" rtlCol="0" anchor="ctr"/>
           <a:lstStyle/>
           <a:p>
-            <a:pPr marL="0" indent="0" algn="ctr">
+            <a:pPr algn="ctr" indent="0" marL="0">
               <a:buNone/>
             </a:pPr>
             <a:r>
@@ -5374,7 +5486,7 @@
           <a:bodyPr wrap="square" rtlCol="0" anchor="ctr"/>
           <a:lstStyle/>
           <a:p>
-            <a:pPr marL="0" indent="0" algn="ctr">
+            <a:pPr algn="ctr" indent="0" marL="0">
               <a:buNone/>
             </a:pPr>
             <a:r>
@@ -5418,13 +5530,6 @@
             <a:prstDash val="solid"/>
           </a:ln>
         </p:spPr>
-        <p:txBody>
-          <a:bodyPr/>
-          <a:lstStyle/>
-          <a:p>
-            <a:endParaRPr lang="en-US"/>
-          </a:p>
-        </p:txBody>
       </p:sp>
       <p:sp>
         <p:nvSpPr>
@@ -5447,7 +5552,7 @@
           <a:bodyPr wrap="square" rtlCol="0" anchor="ctr"/>
           <a:lstStyle/>
           <a:p>
-            <a:pPr marL="0" indent="0" algn="ctr">
+            <a:pPr algn="ctr" indent="0" marL="0">
               <a:buNone/>
             </a:pPr>
             <a:r>
@@ -5489,13 +5594,6 @@
             <a:prstDash val="solid"/>
           </a:ln>
         </p:spPr>
-        <p:txBody>
-          <a:bodyPr/>
-          <a:lstStyle/>
-          <a:p>
-            <a:endParaRPr lang="en-US"/>
-          </a:p>
-        </p:txBody>
       </p:sp>
       <p:sp>
         <p:nvSpPr>
@@ -5518,7 +5616,7 @@
           <a:bodyPr wrap="none" rtlCol="0" anchor="t"/>
           <a:lstStyle/>
           <a:p>
-            <a:pPr marL="0" indent="0">
+            <a:pPr indent="0" marL="0">
               <a:buNone/>
             </a:pPr>
             <a:r>
@@ -5535,7 +5633,7 @@
             <a:endParaRPr lang="en-US" sz="1300" dirty="0"/>
           </a:p>
           <a:p>
-            <a:pPr marL="0" indent="0">
+            <a:pPr indent="0" marL="0">
               <a:buNone/>
             </a:pPr>
             <a:r>
@@ -5552,7 +5650,7 @@
             <a:endParaRPr lang="en-US" sz="1300" dirty="0"/>
           </a:p>
           <a:p>
-            <a:pPr marL="0" indent="0">
+            <a:pPr indent="0" marL="0">
               <a:buNone/>
             </a:pPr>
             <a:r>
@@ -5569,7 +5667,7 @@
             <a:endParaRPr lang="en-US" sz="1300" dirty="0"/>
           </a:p>
           <a:p>
-            <a:pPr marL="0" indent="0">
+            <a:pPr indent="0" marL="0">
               <a:buNone/>
             </a:pPr>
             <a:r>
@@ -5586,7 +5684,7 @@
             <a:endParaRPr lang="en-US" sz="1300" dirty="0"/>
           </a:p>
           <a:p>
-            <a:pPr marL="0" indent="0">
+            <a:pPr indent="0" marL="0">
               <a:buNone/>
             </a:pPr>
             <a:r>
@@ -5603,7 +5701,7 @@
             <a:endParaRPr lang="en-US" sz="1300" dirty="0"/>
           </a:p>
           <a:p>
-            <a:pPr marL="0" indent="0">
+            <a:pPr indent="0" marL="0">
               <a:buNone/>
             </a:pPr>
             <a:r>
@@ -5620,7 +5718,7 @@
             <a:endParaRPr lang="en-US" sz="1300" dirty="0"/>
           </a:p>
           <a:p>
-            <a:pPr marL="0" indent="0">
+            <a:pPr indent="0" marL="0">
               <a:buNone/>
             </a:pPr>
             <a:r>
@@ -5637,7 +5735,7 @@
             <a:endParaRPr lang="en-US" sz="1300" dirty="0"/>
           </a:p>
           <a:p>
-            <a:pPr marL="0" indent="0">
+            <a:pPr indent="0" marL="0">
               <a:buNone/>
             </a:pPr>
             <a:r>
@@ -5654,7 +5752,7 @@
             <a:endParaRPr lang="en-US" sz="1300" dirty="0"/>
           </a:p>
           <a:p>
-            <a:pPr marL="0" indent="0">
+            <a:pPr indent="0" marL="0">
               <a:buNone/>
             </a:pPr>
             <a:r>
@@ -5706,7 +5804,7 @@
                 <a:ea typeface="Trebuchet MS" pitchFamily="34" charset="-122"/>
                 <a:cs typeface="Trebuchet MS" pitchFamily="34" charset="-120"/>
               </a:rPr>
-              <a:t>Deployment doesn't run containers directly — it manages a ReplicaSet, which maintains a fixed Pod count</a:t>
+              <a:t>Deployment doesn't run containers directly — it manages a ReplicaSet, and the ReplicaSet IS a controller: a background process maintaining a fixed Pod count</a:t>
             </a:r>
             <a:endParaRPr lang="en-US" sz="1500" dirty="0"/>
           </a:p>
@@ -5746,7 +5844,7 @@
                 <a:ea typeface="Trebuchet MS" pitchFamily="34" charset="-122"/>
                 <a:cs typeface="Trebuchet MS" pitchFamily="34" charset="-120"/>
               </a:rPr>
-              <a:t>Delete one managed Pod: it disappears, a brand-new one (new random suffix) appears almost immediately, count never drops below desired</a:t>
+              <a:t>Delete one managed Pod: it disappears, a brand-new one (new random suffix) appears almost immediately — with no re-apply</a:t>
             </a:r>
             <a:endParaRPr lang="en-US" sz="1500" dirty="0"/>
           </a:p>
@@ -5786,7 +5884,7 @@
                 <a:ea typeface="Trebuchet MS" pitchFamily="34" charset="-122"/>
                 <a:cs typeface="Trebuchet MS" pitchFamily="34" charset="-120"/>
               </a:rPr>
-              <a:t>Same declarative reconciliation loop as Slide 8 — just running continuously instead of once</a:t>
+              <a:t>This is the controller piece from Slide 8 made concrete — a bare Pod (Slide 13) has no such process watching it</a:t>
             </a:r>
             <a:endParaRPr lang="en-US" sz="1500" dirty="0"/>
           </a:p>
@@ -5826,7 +5924,7 @@
                 <a:ea typeface="Trebuchet MS" pitchFamily="34" charset="-122"/>
                 <a:cs typeface="Trebuchet MS" pitchFamily="34" charset="-120"/>
               </a:rPr>
-              <a:t>kubectl scale --replicas=5 just changes what "desired" means; the same loop does the rest</a:t>
+              <a:t>kubectl scale --replicas=5 just changes what "desired" means; the same controller loop does the rest</a:t>
             </a:r>
             <a:endParaRPr lang="en-US" sz="1500" dirty="0"/>
           </a:p>
@@ -5848,7 +5946,6 @@
         <a:solidFill>
           <a:srgbClr val="007A90"/>
         </a:solidFill>
-        <a:effectLst/>
       </p:bgPr>
     </p:bg>
     <p:spTree>
@@ -5889,13 +5986,6 @@
             <a:prstDash val="solid"/>
           </a:ln>
         </p:spPr>
-        <p:txBody>
-          <a:bodyPr/>
-          <a:lstStyle/>
-          <a:p>
-            <a:endParaRPr lang="en-US"/>
-          </a:p>
-        </p:txBody>
       </p:sp>
       <p:sp>
         <p:nvSpPr>
@@ -5918,11 +6008,11 @@
           <a:bodyPr wrap="square" rtlCol="0" anchor="ctr"/>
           <a:lstStyle/>
           <a:p>
-            <a:pPr marL="0" indent="0" algn="ctr">
-              <a:buNone/>
-            </a:pPr>
-            <a:r>
-              <a:rPr lang="en-US" sz="4800" b="1" kern="0" spc="50" dirty="0">
+            <a:pPr algn="ctr" indent="0" marL="0">
+              <a:buNone/>
+            </a:pPr>
+            <a:r>
+              <a:rPr lang="en-US" sz="4800" b="1" spc="50" kern="0" dirty="0">
                 <a:solidFill>
                   <a:srgbClr val="FFFFFF"/>
                 </a:solidFill>
@@ -5957,7 +6047,7 @@
           <a:bodyPr wrap="square" rtlCol="0" anchor="ctr"/>
           <a:lstStyle/>
           <a:p>
-            <a:pPr marL="0" indent="0" algn="ctr">
+            <a:pPr algn="ctr" indent="0" marL="0">
               <a:buNone/>
             </a:pPr>
             <a:r>
@@ -5993,7 +6083,6 @@
         <a:solidFill>
           <a:srgbClr val="EAFCFF"/>
         </a:solidFill>
-        <a:effectLst/>
       </p:bgPr>
     </p:bg>
     <p:spTree>
@@ -6034,13 +6123,6 @@
             <a:prstDash val="solid"/>
           </a:ln>
         </p:spPr>
-        <p:txBody>
-          <a:bodyPr/>
-          <a:lstStyle/>
-          <a:p>
-            <a:endParaRPr lang="en-US"/>
-          </a:p>
-        </p:txBody>
       </p:sp>
       <p:sp>
         <p:nvSpPr>
@@ -6063,11 +6145,11 @@
           <a:bodyPr wrap="square" rtlCol="0" anchor="ctr"/>
           <a:lstStyle/>
           <a:p>
-            <a:pPr marL="0" indent="0" algn="ctr">
-              <a:buNone/>
-            </a:pPr>
-            <a:r>
-              <a:rPr lang="en-US" sz="1200" b="1" kern="0" spc="50" dirty="0">
+            <a:pPr algn="ctr" indent="0" marL="0">
+              <a:buNone/>
+            </a:pPr>
+            <a:r>
+              <a:rPr lang="en-US" sz="1200" b="1" spc="50" kern="0" dirty="0">
                 <a:solidFill>
                   <a:srgbClr val="FFFFFF"/>
                 </a:solidFill>
@@ -6102,11 +6184,11 @@
           <a:bodyPr wrap="square" rtlCol="0" anchor="ctr"/>
           <a:lstStyle/>
           <a:p>
-            <a:pPr marL="0" indent="0">
-              <a:buNone/>
-            </a:pPr>
-            <a:r>
-              <a:rPr lang="en-US" sz="3000" b="1" kern="0" spc="50" dirty="0">
+            <a:pPr indent="0" marL="0">
+              <a:buNone/>
+            </a:pPr>
+            <a:r>
+              <a:rPr lang="en-US" sz="3000" b="1" spc="50" kern="0" dirty="0">
                 <a:solidFill>
                   <a:srgbClr val="0A1A1C"/>
                 </a:solidFill>
@@ -6144,13 +6226,6 @@
             <a:prstDash val="solid"/>
           </a:ln>
         </p:spPr>
-        <p:txBody>
-          <a:bodyPr/>
-          <a:lstStyle/>
-          <a:p>
-            <a:endParaRPr lang="en-US"/>
-          </a:p>
-        </p:txBody>
       </p:sp>
       <p:sp>
         <p:nvSpPr>
@@ -6160,8 +6235,8 @@
         </p:nvSpPr>
         <p:spPr>
           <a:xfrm>
-            <a:off x="455676" y="3581880"/>
-            <a:ext cx="5638800" cy="992688"/>
+            <a:off x="457200" y="1572768"/>
+            <a:ext cx="5477256" cy="5010912"/>
           </a:xfrm>
           <a:prstGeom prst="rect">
             <a:avLst/>
@@ -6176,13 +6251,6 @@
             <a:prstDash val="solid"/>
           </a:ln>
         </p:spPr>
-        <p:txBody>
-          <a:bodyPr/>
-          <a:lstStyle/>
-          <a:p>
-            <a:endParaRPr lang="en-US"/>
-          </a:p>
-        </p:txBody>
       </p:sp>
       <p:sp>
         <p:nvSpPr>
@@ -6192,8 +6260,8 @@
         </p:nvSpPr>
         <p:spPr>
           <a:xfrm>
-            <a:off x="577448" y="3682464"/>
-            <a:ext cx="5936085" cy="4713168"/>
+            <a:off x="640080" y="1709928"/>
+            <a:ext cx="5111496" cy="4736592"/>
           </a:xfrm>
           <a:prstGeom prst="rect">
             <a:avLst/>
@@ -6205,11 +6273,11 @@
           <a:bodyPr wrap="none" rtlCol="0" anchor="t"/>
           <a:lstStyle/>
           <a:p>
-            <a:pPr marL="0" indent="0">
-              <a:buNone/>
-            </a:pPr>
-            <a:r>
-              <a:rPr lang="en-US" sz="1200" dirty="0">
+            <a:pPr indent="0" marL="0">
+              <a:buNone/>
+            </a:pPr>
+            <a:r>
+              <a:rPr lang="en-US" sz="1300" dirty="0">
                 <a:solidFill>
                   <a:srgbClr val="003848"/>
                 </a:solidFill>
@@ -6219,14 +6287,14 @@
               </a:rPr>
               <a:t>kubectl expose deployment hello-deploy \</a:t>
             </a:r>
-            <a:endParaRPr lang="en-US" sz="1200" dirty="0"/>
-          </a:p>
-          <a:p>
-            <a:pPr marL="0" indent="0">
-              <a:buNone/>
-            </a:pPr>
-            <a:r>
-              <a:rPr lang="en-US" sz="1200" dirty="0">
+            <a:endParaRPr lang="en-US" sz="1300" dirty="0"/>
+          </a:p>
+          <a:p>
+            <a:pPr indent="0" marL="0">
+              <a:buNone/>
+            </a:pPr>
+            <a:r>
+              <a:rPr lang="en-US" sz="1300" dirty="0">
                 <a:solidFill>
                   <a:srgbClr val="003848"/>
                 </a:solidFill>
@@ -6236,14 +6304,14 @@
               </a:rPr>
               <a:t>  --port=80 --target-port=80 --name=hello-service</a:t>
             </a:r>
-            <a:endParaRPr lang="en-US" sz="1200" dirty="0"/>
-          </a:p>
-          <a:p>
-            <a:pPr marL="0" indent="0">
-              <a:buNone/>
-            </a:pPr>
-            <a:r>
-              <a:rPr lang="en-US" sz="1200" dirty="0">
+            <a:endParaRPr lang="en-US" sz="1300" dirty="0"/>
+          </a:p>
+          <a:p>
+            <a:pPr indent="0" marL="0">
+              <a:buNone/>
+            </a:pPr>
+            <a:r>
+              <a:rPr lang="en-US" sz="1300" dirty="0">
                 <a:solidFill>
                   <a:srgbClr val="003848"/>
                 </a:solidFill>
@@ -6253,7 +6321,7 @@
               </a:rPr>
               <a:t># → TYPE: ClusterIP   CLUSTER-IP: 10.x.x.x (stays fixed)</a:t>
             </a:r>
-            <a:endParaRPr lang="en-US" sz="1200" dirty="0"/>
+            <a:endParaRPr lang="en-US" sz="1300" dirty="0"/>
           </a:p>
         </p:txBody>
       </p:sp>
@@ -6433,7 +6501,6 @@
         <a:solidFill>
           <a:srgbClr val="EAFCFF"/>
         </a:solidFill>
-        <a:effectLst/>
       </p:bgPr>
     </p:bg>
     <p:spTree>
@@ -6474,13 +6541,6 @@
             <a:prstDash val="solid"/>
           </a:ln>
         </p:spPr>
-        <p:txBody>
-          <a:bodyPr/>
-          <a:lstStyle/>
-          <a:p>
-            <a:endParaRPr lang="en-US"/>
-          </a:p>
-        </p:txBody>
       </p:sp>
       <p:sp>
         <p:nvSpPr>
@@ -6503,11 +6563,11 @@
           <a:bodyPr wrap="square" rtlCol="0" anchor="ctr"/>
           <a:lstStyle/>
           <a:p>
-            <a:pPr marL="0" indent="0" algn="ctr">
-              <a:buNone/>
-            </a:pPr>
-            <a:r>
-              <a:rPr lang="en-US" sz="1200" b="1" kern="0" spc="50" dirty="0">
+            <a:pPr algn="ctr" indent="0" marL="0">
+              <a:buNone/>
+            </a:pPr>
+            <a:r>
+              <a:rPr lang="en-US" sz="1200" b="1" spc="50" kern="0" dirty="0">
                 <a:solidFill>
                   <a:srgbClr val="FFFFFF"/>
                 </a:solidFill>
@@ -6542,11 +6602,11 @@
           <a:bodyPr wrap="square" rtlCol="0" anchor="ctr"/>
           <a:lstStyle/>
           <a:p>
-            <a:pPr marL="0" indent="0">
-              <a:buNone/>
-            </a:pPr>
-            <a:r>
-              <a:rPr lang="en-US" sz="3000" b="1" kern="0" spc="50" dirty="0">
+            <a:pPr indent="0" marL="0">
+              <a:buNone/>
+            </a:pPr>
+            <a:r>
+              <a:rPr lang="en-US" sz="3000" b="1" spc="50" kern="0" dirty="0">
                 <a:solidFill>
                   <a:srgbClr val="0A1A1C"/>
                 </a:solidFill>
@@ -6584,13 +6644,6 @@
             <a:prstDash val="solid"/>
           </a:ln>
         </p:spPr>
-        <p:txBody>
-          <a:bodyPr/>
-          <a:lstStyle/>
-          <a:p>
-            <a:endParaRPr lang="en-US"/>
-          </a:p>
-        </p:txBody>
       </p:sp>
       <p:sp>
         <p:nvSpPr>
@@ -6768,7 +6821,6 @@
         <a:solidFill>
           <a:srgbClr val="EAFCFF"/>
         </a:solidFill>
-        <a:effectLst/>
       </p:bgPr>
     </p:bg>
     <p:spTree>
@@ -6809,13 +6861,6 @@
             <a:prstDash val="solid"/>
           </a:ln>
         </p:spPr>
-        <p:txBody>
-          <a:bodyPr/>
-          <a:lstStyle/>
-          <a:p>
-            <a:endParaRPr lang="en-US"/>
-          </a:p>
-        </p:txBody>
       </p:sp>
       <p:sp>
         <p:nvSpPr>
@@ -6838,11 +6883,11 @@
           <a:bodyPr wrap="square" rtlCol="0" anchor="ctr"/>
           <a:lstStyle/>
           <a:p>
-            <a:pPr marL="0" indent="0" algn="ctr">
-              <a:buNone/>
-            </a:pPr>
-            <a:r>
-              <a:rPr lang="en-US" sz="1200" b="1" kern="0" spc="50" dirty="0">
+            <a:pPr algn="ctr" indent="0" marL="0">
+              <a:buNone/>
+            </a:pPr>
+            <a:r>
+              <a:rPr lang="en-US" sz="1200" b="1" spc="50" kern="0" dirty="0">
                 <a:solidFill>
                   <a:srgbClr val="FFFFFF"/>
                 </a:solidFill>
@@ -6877,11 +6922,11 @@
           <a:bodyPr wrap="square" rtlCol="0" anchor="ctr"/>
           <a:lstStyle/>
           <a:p>
-            <a:pPr marL="0" indent="0">
-              <a:buNone/>
-            </a:pPr>
-            <a:r>
-              <a:rPr lang="en-US" sz="3000" b="1" kern="0" spc="50" dirty="0">
+            <a:pPr indent="0" marL="0">
+              <a:buNone/>
+            </a:pPr>
+            <a:r>
+              <a:rPr lang="en-US" sz="3000" b="1" spc="50" kern="0" dirty="0">
                 <a:solidFill>
                   <a:srgbClr val="0A1A1C"/>
                 </a:solidFill>
@@ -6919,13 +6964,6 @@
             <a:prstDash val="solid"/>
           </a:ln>
         </p:spPr>
-        <p:txBody>
-          <a:bodyPr/>
-          <a:lstStyle/>
-          <a:p>
-            <a:endParaRPr lang="en-US"/>
-          </a:p>
-        </p:txBody>
       </p:sp>
       <p:sp>
         <p:nvSpPr>
@@ -6953,13 +6991,6 @@
             <a:prstDash val="solid"/>
           </a:ln>
         </p:spPr>
-        <p:txBody>
-          <a:bodyPr/>
-          <a:lstStyle/>
-          <a:p>
-            <a:endParaRPr lang="en-US"/>
-          </a:p>
-        </p:txBody>
       </p:sp>
       <p:sp>
         <p:nvSpPr>
@@ -6982,7 +7013,7 @@
           <a:bodyPr wrap="square" rtlCol="0" anchor="ctr"/>
           <a:lstStyle/>
           <a:p>
-            <a:pPr marL="0" indent="0" algn="ctr">
+            <a:pPr algn="ctr" indent="0" marL="0">
               <a:buNone/>
             </a:pPr>
             <a:r>
@@ -6999,7 +7030,7 @@
             <a:endParaRPr lang="en-US" sz="1100" dirty="0"/>
           </a:p>
           <a:p>
-            <a:pPr marL="0" indent="0" algn="ctr">
+            <a:pPr algn="ctr" indent="0" marL="0">
               <a:buNone/>
             </a:pPr>
             <a:r>
@@ -7038,7 +7069,7 @@
           <a:bodyPr wrap="square" rtlCol="0" anchor="ctr"/>
           <a:lstStyle/>
           <a:p>
-            <a:pPr marL="0" indent="0" algn="ctr">
+            <a:pPr algn="ctr" indent="0" marL="0">
               <a:buNone/>
             </a:pPr>
             <a:r>
@@ -7082,13 +7113,6 @@
             <a:prstDash val="solid"/>
           </a:ln>
         </p:spPr>
-        <p:txBody>
-          <a:bodyPr/>
-          <a:lstStyle/>
-          <a:p>
-            <a:endParaRPr lang="en-US"/>
-          </a:p>
-        </p:txBody>
       </p:sp>
       <p:sp>
         <p:nvSpPr>
@@ -7111,7 +7135,7 @@
           <a:bodyPr wrap="square" rtlCol="0" anchor="ctr"/>
           <a:lstStyle/>
           <a:p>
-            <a:pPr marL="0" indent="0" algn="ctr">
+            <a:pPr algn="ctr" indent="0" marL="0">
               <a:buNone/>
             </a:pPr>
             <a:r>
@@ -7128,7 +7152,7 @@
             <a:endParaRPr lang="en-US" sz="1100" dirty="0"/>
           </a:p>
           <a:p>
-            <a:pPr marL="0" indent="0" algn="ctr">
+            <a:pPr algn="ctr" indent="0" marL="0">
               <a:buNone/>
             </a:pPr>
             <a:r>
@@ -7167,7 +7191,7 @@
           <a:bodyPr wrap="square" rtlCol="0" anchor="ctr"/>
           <a:lstStyle/>
           <a:p>
-            <a:pPr marL="0" indent="0" algn="ctr">
+            <a:pPr algn="ctr" indent="0" marL="0">
               <a:buNone/>
             </a:pPr>
             <a:r>
@@ -7211,13 +7235,6 @@
             <a:prstDash val="solid"/>
           </a:ln>
         </p:spPr>
-        <p:txBody>
-          <a:bodyPr/>
-          <a:lstStyle/>
-          <a:p>
-            <a:endParaRPr lang="en-US"/>
-          </a:p>
-        </p:txBody>
       </p:sp>
       <p:sp>
         <p:nvSpPr>
@@ -7240,7 +7257,7 @@
           <a:bodyPr wrap="square" rtlCol="0" anchor="ctr"/>
           <a:lstStyle/>
           <a:p>
-            <a:pPr marL="0" indent="0" algn="ctr">
+            <a:pPr algn="ctr" indent="0" marL="0">
               <a:buNone/>
             </a:pPr>
             <a:r>
@@ -7257,7 +7274,7 @@
             <a:endParaRPr lang="en-US" sz="1100" dirty="0"/>
           </a:p>
           <a:p>
-            <a:pPr marL="0" indent="0" algn="ctr">
+            <a:pPr algn="ctr" indent="0" marL="0">
               <a:buNone/>
             </a:pPr>
             <a:r>
@@ -7296,7 +7313,7 @@
           <a:bodyPr wrap="square" rtlCol="0" anchor="ctr"/>
           <a:lstStyle/>
           <a:p>
-            <a:pPr marL="0" indent="0" algn="ctr">
+            <a:pPr algn="ctr" indent="0" marL="0">
               <a:buNone/>
             </a:pPr>
             <a:r>
@@ -7340,13 +7357,6 @@
             <a:prstDash val="solid"/>
           </a:ln>
         </p:spPr>
-        <p:txBody>
-          <a:bodyPr/>
-          <a:lstStyle/>
-          <a:p>
-            <a:endParaRPr lang="en-US"/>
-          </a:p>
-        </p:txBody>
       </p:sp>
       <p:sp>
         <p:nvSpPr>
@@ -7369,7 +7379,7 @@
           <a:bodyPr wrap="square" rtlCol="0" anchor="ctr"/>
           <a:lstStyle/>
           <a:p>
-            <a:pPr marL="0" indent="0" algn="ctr">
+            <a:pPr algn="ctr" indent="0" marL="0">
               <a:buNone/>
             </a:pPr>
             <a:r>
@@ -7386,7 +7396,7 @@
             <a:endParaRPr lang="en-US" sz="1100" dirty="0"/>
           </a:p>
           <a:p>
-            <a:pPr marL="0" indent="0" algn="ctr">
+            <a:pPr algn="ctr" indent="0" marL="0">
               <a:buNone/>
             </a:pPr>
             <a:r>
@@ -7425,7 +7435,7 @@
           <a:bodyPr wrap="square" rtlCol="0" anchor="ctr"/>
           <a:lstStyle/>
           <a:p>
-            <a:pPr marL="0" indent="0" algn="ctr">
+            <a:pPr algn="ctr" indent="0" marL="0">
               <a:buNone/>
             </a:pPr>
             <a:r>
@@ -7469,13 +7479,6 @@
             <a:prstDash val="solid"/>
           </a:ln>
         </p:spPr>
-        <p:txBody>
-          <a:bodyPr/>
-          <a:lstStyle/>
-          <a:p>
-            <a:endParaRPr lang="en-US"/>
-          </a:p>
-        </p:txBody>
       </p:sp>
       <p:sp>
         <p:nvSpPr>
@@ -7498,7 +7501,7 @@
           <a:bodyPr wrap="square" rtlCol="0" anchor="ctr"/>
           <a:lstStyle/>
           <a:p>
-            <a:pPr marL="0" indent="0" algn="ctr">
+            <a:pPr algn="ctr" indent="0" marL="0">
               <a:buNone/>
             </a:pPr>
             <a:r>
@@ -7692,7 +7695,6 @@
         <a:solidFill>
           <a:srgbClr val="EAFCFF"/>
         </a:solidFill>
-        <a:effectLst/>
       </p:bgPr>
     </p:bg>
     <p:spTree>
@@ -7733,13 +7735,6 @@
             <a:prstDash val="solid"/>
           </a:ln>
         </p:spPr>
-        <p:txBody>
-          <a:bodyPr/>
-          <a:lstStyle/>
-          <a:p>
-            <a:endParaRPr lang="en-US"/>
-          </a:p>
-        </p:txBody>
       </p:sp>
       <p:sp>
         <p:nvSpPr>
@@ -7762,11 +7757,11 @@
           <a:bodyPr wrap="square" rtlCol="0" anchor="ctr"/>
           <a:lstStyle/>
           <a:p>
-            <a:pPr marL="0" indent="0" algn="ctr">
-              <a:buNone/>
-            </a:pPr>
-            <a:r>
-              <a:rPr lang="en-US" sz="1200" b="1" kern="0" spc="50" dirty="0">
+            <a:pPr algn="ctr" indent="0" marL="0">
+              <a:buNone/>
+            </a:pPr>
+            <a:r>
+              <a:rPr lang="en-US" sz="1200" b="1" spc="50" kern="0" dirty="0">
                 <a:solidFill>
                   <a:srgbClr val="FFFFFF"/>
                 </a:solidFill>
@@ -7801,11 +7796,11 @@
           <a:bodyPr wrap="square" rtlCol="0" anchor="ctr"/>
           <a:lstStyle/>
           <a:p>
-            <a:pPr marL="0" indent="0">
-              <a:buNone/>
-            </a:pPr>
-            <a:r>
-              <a:rPr lang="en-US" sz="3000" b="1" kern="0" spc="50" dirty="0">
+            <a:pPr indent="0" marL="0">
+              <a:buNone/>
+            </a:pPr>
+            <a:r>
+              <a:rPr lang="en-US" sz="3000" b="1" spc="50" kern="0" dirty="0">
                 <a:solidFill>
                   <a:srgbClr val="0A1A1C"/>
                 </a:solidFill>
@@ -7843,13 +7838,6 @@
             <a:prstDash val="solid"/>
           </a:ln>
         </p:spPr>
-        <p:txBody>
-          <a:bodyPr/>
-          <a:lstStyle/>
-          <a:p>
-            <a:endParaRPr lang="en-US"/>
-          </a:p>
-        </p:txBody>
       </p:sp>
       <p:sp>
         <p:nvSpPr>
@@ -8027,7 +8015,6 @@
         <a:solidFill>
           <a:srgbClr val="EAFCFF"/>
         </a:solidFill>
-        <a:effectLst/>
       </p:bgPr>
     </p:bg>
     <p:spTree>
@@ -8068,13 +8055,6 @@
             <a:prstDash val="solid"/>
           </a:ln>
         </p:spPr>
-        <p:txBody>
-          <a:bodyPr/>
-          <a:lstStyle/>
-          <a:p>
-            <a:endParaRPr lang="en-US"/>
-          </a:p>
-        </p:txBody>
       </p:sp>
       <p:sp>
         <p:nvSpPr>
@@ -8097,11 +8077,11 @@
           <a:bodyPr wrap="square" rtlCol="0" anchor="ctr"/>
           <a:lstStyle/>
           <a:p>
-            <a:pPr marL="0" indent="0" algn="ctr">
-              <a:buNone/>
-            </a:pPr>
-            <a:r>
-              <a:rPr lang="en-US" sz="1200" b="1" kern="0" spc="50" dirty="0">
+            <a:pPr algn="ctr" indent="0" marL="0">
+              <a:buNone/>
+            </a:pPr>
+            <a:r>
+              <a:rPr lang="en-US" sz="1200" b="1" spc="50" kern="0" dirty="0">
                 <a:solidFill>
                   <a:srgbClr val="FFFFFF"/>
                 </a:solidFill>
@@ -8136,11 +8116,11 @@
           <a:bodyPr wrap="square" rtlCol="0" anchor="ctr"/>
           <a:lstStyle/>
           <a:p>
-            <a:pPr marL="0" indent="0">
-              <a:buNone/>
-            </a:pPr>
-            <a:r>
-              <a:rPr lang="en-US" sz="3000" b="1" kern="0" spc="50" dirty="0">
+            <a:pPr indent="0" marL="0">
+              <a:buNone/>
+            </a:pPr>
+            <a:r>
+              <a:rPr lang="en-US" sz="3000" b="1" spc="50" kern="0" dirty="0">
                 <a:solidFill>
                   <a:srgbClr val="0A1A1C"/>
                 </a:solidFill>
@@ -8178,13 +8158,6 @@
             <a:prstDash val="solid"/>
           </a:ln>
         </p:spPr>
-        <p:txBody>
-          <a:bodyPr/>
-          <a:lstStyle/>
-          <a:p>
-            <a:endParaRPr lang="en-US"/>
-          </a:p>
-        </p:txBody>
       </p:sp>
       <p:sp>
         <p:nvSpPr>
@@ -8402,7 +8375,6 @@
         <a:solidFill>
           <a:srgbClr val="EAFCFF"/>
         </a:solidFill>
-        <a:effectLst/>
       </p:bgPr>
     </p:bg>
     <p:spTree>
@@ -8443,13 +8415,6 @@
             <a:prstDash val="solid"/>
           </a:ln>
         </p:spPr>
-        <p:txBody>
-          <a:bodyPr/>
-          <a:lstStyle/>
-          <a:p>
-            <a:endParaRPr lang="en-US"/>
-          </a:p>
-        </p:txBody>
       </p:sp>
       <p:sp>
         <p:nvSpPr>
@@ -8472,11 +8437,11 @@
           <a:bodyPr wrap="square" rtlCol="0" anchor="ctr"/>
           <a:lstStyle/>
           <a:p>
-            <a:pPr marL="0" indent="0" algn="ctr">
-              <a:buNone/>
-            </a:pPr>
-            <a:r>
-              <a:rPr lang="en-US" sz="1200" b="1" kern="0" spc="50" dirty="0">
+            <a:pPr algn="ctr" indent="0" marL="0">
+              <a:buNone/>
+            </a:pPr>
+            <a:r>
+              <a:rPr lang="en-US" sz="1200" b="1" spc="50" kern="0" dirty="0">
                 <a:solidFill>
                   <a:srgbClr val="FFFFFF"/>
                 </a:solidFill>
@@ -8511,11 +8476,11 @@
           <a:bodyPr wrap="square" rtlCol="0" anchor="ctr"/>
           <a:lstStyle/>
           <a:p>
-            <a:pPr marL="0" indent="0">
-              <a:buNone/>
-            </a:pPr>
-            <a:r>
-              <a:rPr lang="en-US" sz="3000" b="1" kern="0" spc="50" dirty="0">
+            <a:pPr indent="0" marL="0">
+              <a:buNone/>
+            </a:pPr>
+            <a:r>
+              <a:rPr lang="en-US" sz="3000" b="1" spc="50" kern="0" dirty="0">
                 <a:solidFill>
                   <a:srgbClr val="0A1A1C"/>
                 </a:solidFill>
@@ -8553,13 +8518,6 @@
             <a:prstDash val="solid"/>
           </a:ln>
         </p:spPr>
-        <p:txBody>
-          <a:bodyPr/>
-          <a:lstStyle/>
-          <a:p>
-            <a:endParaRPr lang="en-US"/>
-          </a:p>
-        </p:txBody>
       </p:sp>
       <p:sp>
         <p:nvSpPr>
@@ -8585,13 +8543,6 @@
             <a:prstDash val="solid"/>
           </a:ln>
         </p:spPr>
-        <p:txBody>
-          <a:bodyPr/>
-          <a:lstStyle/>
-          <a:p>
-            <a:endParaRPr lang="en-US"/>
-          </a:p>
-        </p:txBody>
       </p:sp>
       <p:sp>
         <p:nvSpPr>
@@ -8617,13 +8568,6 @@
             <a:prstDash val="solid"/>
           </a:ln>
         </p:spPr>
-        <p:txBody>
-          <a:bodyPr/>
-          <a:lstStyle/>
-          <a:p>
-            <a:endParaRPr lang="en-US"/>
-          </a:p>
-        </p:txBody>
       </p:sp>
       <p:sp>
         <p:nvSpPr>
@@ -8646,7 +8590,7 @@
           <a:bodyPr wrap="square" rtlCol="0" anchor="ctr"/>
           <a:lstStyle/>
           <a:p>
-            <a:pPr marL="0" indent="0">
+            <a:pPr indent="0" marL="0">
               <a:buNone/>
             </a:pPr>
             <a:r>
@@ -8680,7 +8624,6 @@
         <a:solidFill>
           <a:srgbClr val="EAFCFF"/>
         </a:solidFill>
-        <a:effectLst/>
       </p:bgPr>
     </p:bg>
     <p:spTree>
@@ -8721,13 +8664,6 @@
             <a:prstDash val="solid"/>
           </a:ln>
         </p:spPr>
-        <p:txBody>
-          <a:bodyPr/>
-          <a:lstStyle/>
-          <a:p>
-            <a:endParaRPr lang="en-US"/>
-          </a:p>
-        </p:txBody>
       </p:sp>
       <p:sp>
         <p:nvSpPr>
@@ -8750,11 +8686,11 @@
           <a:bodyPr wrap="square" rtlCol="0" anchor="ctr"/>
           <a:lstStyle/>
           <a:p>
-            <a:pPr marL="0" indent="0" algn="ctr">
-              <a:buNone/>
-            </a:pPr>
-            <a:r>
-              <a:rPr lang="en-US" sz="1200" b="1" kern="0" spc="50" dirty="0">
+            <a:pPr algn="ctr" indent="0" marL="0">
+              <a:buNone/>
+            </a:pPr>
+            <a:r>
+              <a:rPr lang="en-US" sz="1200" b="1" spc="50" kern="0" dirty="0">
                 <a:solidFill>
                   <a:srgbClr val="FFFFFF"/>
                 </a:solidFill>
@@ -8789,11 +8725,11 @@
           <a:bodyPr wrap="square" rtlCol="0" anchor="ctr"/>
           <a:lstStyle/>
           <a:p>
-            <a:pPr marL="0" indent="0">
-              <a:buNone/>
-            </a:pPr>
-            <a:r>
-              <a:rPr lang="en-US" sz="3000" b="1" kern="0" spc="50" dirty="0">
+            <a:pPr indent="0" marL="0">
+              <a:buNone/>
+            </a:pPr>
+            <a:r>
+              <a:rPr lang="en-US" sz="3000" b="1" spc="50" kern="0" dirty="0">
                 <a:solidFill>
                   <a:srgbClr val="0A1A1C"/>
                 </a:solidFill>
@@ -8831,13 +8767,6 @@
             <a:prstDash val="solid"/>
           </a:ln>
         </p:spPr>
-        <p:txBody>
-          <a:bodyPr/>
-          <a:lstStyle/>
-          <a:p>
-            <a:endParaRPr lang="en-US"/>
-          </a:p>
-        </p:txBody>
       </p:sp>
       <p:sp>
         <p:nvSpPr>
@@ -9015,7 +8944,6 @@
         <a:solidFill>
           <a:srgbClr val="EAFCFF"/>
         </a:solidFill>
-        <a:effectLst/>
       </p:bgPr>
     </p:bg>
     <p:spTree>
@@ -9056,13 +8984,6 @@
             <a:prstDash val="solid"/>
           </a:ln>
         </p:spPr>
-        <p:txBody>
-          <a:bodyPr/>
-          <a:lstStyle/>
-          <a:p>
-            <a:endParaRPr lang="en-US"/>
-          </a:p>
-        </p:txBody>
       </p:sp>
       <p:sp>
         <p:nvSpPr>
@@ -9085,11 +9006,11 @@
           <a:bodyPr wrap="square" rtlCol="0" anchor="ctr"/>
           <a:lstStyle/>
           <a:p>
-            <a:pPr marL="0" indent="0" algn="ctr">
-              <a:buNone/>
-            </a:pPr>
-            <a:r>
-              <a:rPr lang="en-US" sz="1200" b="1" kern="0" spc="50" dirty="0">
+            <a:pPr algn="ctr" indent="0" marL="0">
+              <a:buNone/>
+            </a:pPr>
+            <a:r>
+              <a:rPr lang="en-US" sz="1200" b="1" spc="50" kern="0" dirty="0">
                 <a:solidFill>
                   <a:srgbClr val="FFFFFF"/>
                 </a:solidFill>
@@ -9124,11 +9045,11 @@
           <a:bodyPr wrap="square" rtlCol="0" anchor="ctr"/>
           <a:lstStyle/>
           <a:p>
-            <a:pPr marL="0" indent="0">
-              <a:buNone/>
-            </a:pPr>
-            <a:r>
-              <a:rPr lang="en-US" sz="3000" b="1" kern="0" spc="50" dirty="0">
+            <a:pPr indent="0" marL="0">
+              <a:buNone/>
+            </a:pPr>
+            <a:r>
+              <a:rPr lang="en-US" sz="3000" b="1" spc="50" kern="0" dirty="0">
                 <a:solidFill>
                   <a:srgbClr val="0A1A1C"/>
                 </a:solidFill>
@@ -9166,13 +9087,6 @@
             <a:prstDash val="solid"/>
           </a:ln>
         </p:spPr>
-        <p:txBody>
-          <a:bodyPr/>
-          <a:lstStyle/>
-          <a:p>
-            <a:endParaRPr lang="en-US"/>
-          </a:p>
-        </p:txBody>
       </p:sp>
       <p:sp>
         <p:nvSpPr>
@@ -9198,13 +9112,6 @@
             <a:prstDash val="solid"/>
           </a:ln>
         </p:spPr>
-        <p:txBody>
-          <a:bodyPr/>
-          <a:lstStyle/>
-          <a:p>
-            <a:endParaRPr lang="en-US"/>
-          </a:p>
-        </p:txBody>
       </p:sp>
       <p:sp>
         <p:nvSpPr>
@@ -9230,13 +9137,6 @@
             <a:prstDash val="solid"/>
           </a:ln>
         </p:spPr>
-        <p:txBody>
-          <a:bodyPr/>
-          <a:lstStyle/>
-          <a:p>
-            <a:endParaRPr lang="en-US"/>
-          </a:p>
-        </p:txBody>
       </p:sp>
       <p:sp>
         <p:nvSpPr>
@@ -9259,7 +9159,7 @@
           <a:bodyPr wrap="square" rtlCol="0" anchor="ctr"/>
           <a:lstStyle/>
           <a:p>
-            <a:pPr marL="0" indent="0">
+            <a:pPr indent="0" marL="0">
               <a:buNone/>
             </a:pPr>
             <a:r>
@@ -9276,7 +9176,7 @@
             <a:endParaRPr lang="en-US" sz="2000" dirty="0"/>
           </a:p>
           <a:p>
-            <a:pPr marL="0" indent="0">
+            <a:pPr indent="0" marL="0">
               <a:buNone/>
             </a:pPr>
             <a:r>
@@ -9293,7 +9193,7 @@
             <a:endParaRPr lang="en-US" sz="2000" dirty="0"/>
           </a:p>
           <a:p>
-            <a:pPr marL="0" indent="0">
+            <a:pPr indent="0" marL="0">
               <a:buNone/>
             </a:pPr>
             <a:r>
@@ -9327,7 +9227,6 @@
         <a:solidFill>
           <a:srgbClr val="007A90"/>
         </a:solidFill>
-        <a:effectLst/>
       </p:bgPr>
     </p:bg>
     <p:spTree>
@@ -9368,13 +9267,6 @@
             <a:prstDash val="solid"/>
           </a:ln>
         </p:spPr>
-        <p:txBody>
-          <a:bodyPr/>
-          <a:lstStyle/>
-          <a:p>
-            <a:endParaRPr lang="en-US"/>
-          </a:p>
-        </p:txBody>
       </p:sp>
       <p:sp>
         <p:nvSpPr>
@@ -9397,11 +9289,11 @@
           <a:bodyPr wrap="square" rtlCol="0" anchor="ctr"/>
           <a:lstStyle/>
           <a:p>
-            <a:pPr marL="0" indent="0" algn="ctr">
-              <a:buNone/>
-            </a:pPr>
-            <a:r>
-              <a:rPr lang="en-US" sz="4800" b="1" kern="0" spc="50" dirty="0">
+            <a:pPr algn="ctr" indent="0" marL="0">
+              <a:buNone/>
+            </a:pPr>
+            <a:r>
+              <a:rPr lang="en-US" sz="4800" b="1" spc="50" kern="0" dirty="0">
                 <a:solidFill>
                   <a:srgbClr val="FFFFFF"/>
                 </a:solidFill>
@@ -9436,7 +9328,7 @@
           <a:bodyPr wrap="square" rtlCol="0" anchor="ctr"/>
           <a:lstStyle/>
           <a:p>
-            <a:pPr marL="0" indent="0" algn="ctr">
+            <a:pPr algn="ctr" indent="0" marL="0">
               <a:buNone/>
             </a:pPr>
             <a:r>
@@ -9472,7 +9364,6 @@
         <a:solidFill>
           <a:srgbClr val="EAFCFF"/>
         </a:solidFill>
-        <a:effectLst/>
       </p:bgPr>
     </p:bg>
     <p:spTree>
@@ -9513,13 +9404,6 @@
             <a:prstDash val="solid"/>
           </a:ln>
         </p:spPr>
-        <p:txBody>
-          <a:bodyPr/>
-          <a:lstStyle/>
-          <a:p>
-            <a:endParaRPr lang="en-US"/>
-          </a:p>
-        </p:txBody>
       </p:sp>
       <p:sp>
         <p:nvSpPr>
@@ -9542,11 +9426,11 @@
           <a:bodyPr wrap="square" rtlCol="0" anchor="ctr"/>
           <a:lstStyle/>
           <a:p>
-            <a:pPr marL="0" indent="0" algn="ctr">
-              <a:buNone/>
-            </a:pPr>
-            <a:r>
-              <a:rPr lang="en-US" sz="1200" b="1" kern="0" spc="50" dirty="0">
+            <a:pPr algn="ctr" indent="0" marL="0">
+              <a:buNone/>
+            </a:pPr>
+            <a:r>
+              <a:rPr lang="en-US" sz="1200" b="1" spc="50" kern="0" dirty="0">
                 <a:solidFill>
                   <a:srgbClr val="FFFFFF"/>
                 </a:solidFill>
@@ -9581,11 +9465,11 @@
           <a:bodyPr wrap="square" rtlCol="0" anchor="ctr"/>
           <a:lstStyle/>
           <a:p>
-            <a:pPr marL="0" indent="0">
-              <a:buNone/>
-            </a:pPr>
-            <a:r>
-              <a:rPr lang="en-US" sz="3000" b="1" kern="0" spc="50" dirty="0">
+            <a:pPr indent="0" marL="0">
+              <a:buNone/>
+            </a:pPr>
+            <a:r>
+              <a:rPr lang="en-US" sz="3000" b="1" spc="50" kern="0" dirty="0">
                 <a:solidFill>
                   <a:srgbClr val="0A1A1C"/>
                 </a:solidFill>
@@ -9623,13 +9507,6 @@
             <a:prstDash val="solid"/>
           </a:ln>
         </p:spPr>
-        <p:txBody>
-          <a:bodyPr/>
-          <a:lstStyle/>
-          <a:p>
-            <a:endParaRPr lang="en-US"/>
-          </a:p>
-        </p:txBody>
       </p:sp>
       <p:sp>
         <p:nvSpPr>
@@ -9657,13 +9534,6 @@
             <a:prstDash val="solid"/>
           </a:ln>
         </p:spPr>
-        <p:txBody>
-          <a:bodyPr/>
-          <a:lstStyle/>
-          <a:p>
-            <a:endParaRPr lang="en-US"/>
-          </a:p>
-        </p:txBody>
       </p:sp>
       <p:sp>
         <p:nvSpPr>
@@ -9686,7 +9556,7 @@
           <a:bodyPr wrap="square" rtlCol="0" anchor="ctr"/>
           <a:lstStyle/>
           <a:p>
-            <a:pPr marL="0" indent="0" algn="ctr">
+            <a:pPr algn="ctr" indent="0" marL="0">
               <a:buNone/>
             </a:pPr>
             <a:r>
@@ -9703,7 +9573,7 @@
             <a:endParaRPr lang="en-US" sz="1300" dirty="0"/>
           </a:p>
           <a:p>
-            <a:pPr marL="0" indent="0" algn="ctr">
+            <a:pPr algn="ctr" indent="0" marL="0">
               <a:buNone/>
             </a:pPr>
             <a:r>
@@ -9720,7 +9590,7 @@
             <a:endParaRPr lang="en-US" sz="1300" dirty="0"/>
           </a:p>
           <a:p>
-            <a:pPr marL="0" indent="0" algn="ctr">
+            <a:pPr algn="ctr" indent="0" marL="0">
               <a:buNone/>
             </a:pPr>
             <a:r>
@@ -9759,7 +9629,7 @@
           <a:bodyPr wrap="square" rtlCol="0" anchor="ctr"/>
           <a:lstStyle/>
           <a:p>
-            <a:pPr marL="0" indent="0" algn="ctr">
+            <a:pPr algn="ctr" indent="0" marL="0">
               <a:buNone/>
             </a:pPr>
             <a:r>
@@ -9803,13 +9673,6 @@
             <a:prstDash val="solid"/>
           </a:ln>
         </p:spPr>
-        <p:txBody>
-          <a:bodyPr/>
-          <a:lstStyle/>
-          <a:p>
-            <a:endParaRPr lang="en-US"/>
-          </a:p>
-        </p:txBody>
       </p:sp>
       <p:sp>
         <p:nvSpPr>
@@ -9832,7 +9695,7 @@
           <a:bodyPr wrap="square" rtlCol="0" anchor="ctr"/>
           <a:lstStyle/>
           <a:p>
-            <a:pPr marL="0" indent="0" algn="ctr">
+            <a:pPr algn="ctr" indent="0" marL="0">
               <a:buNone/>
             </a:pPr>
             <a:r>
@@ -9849,7 +9712,7 @@
             <a:endParaRPr lang="en-US" sz="1300" dirty="0"/>
           </a:p>
           <a:p>
-            <a:pPr marL="0" indent="0" algn="ctr">
+            <a:pPr algn="ctr" indent="0" marL="0">
               <a:buNone/>
             </a:pPr>
             <a:r>
@@ -9866,7 +9729,7 @@
             <a:endParaRPr lang="en-US" sz="1300" dirty="0"/>
           </a:p>
           <a:p>
-            <a:pPr marL="0" indent="0" algn="ctr">
+            <a:pPr algn="ctr" indent="0" marL="0">
               <a:buNone/>
             </a:pPr>
             <a:r>
@@ -10060,7 +9923,6 @@
         <a:solidFill>
           <a:srgbClr val="EAFCFF"/>
         </a:solidFill>
-        <a:effectLst/>
       </p:bgPr>
     </p:bg>
     <p:spTree>
@@ -10101,13 +9963,6 @@
             <a:prstDash val="solid"/>
           </a:ln>
         </p:spPr>
-        <p:txBody>
-          <a:bodyPr/>
-          <a:lstStyle/>
-          <a:p>
-            <a:endParaRPr lang="en-US"/>
-          </a:p>
-        </p:txBody>
       </p:sp>
       <p:sp>
         <p:nvSpPr>
@@ -10130,11 +9985,11 @@
           <a:bodyPr wrap="square" rtlCol="0" anchor="ctr"/>
           <a:lstStyle/>
           <a:p>
-            <a:pPr marL="0" indent="0" algn="ctr">
-              <a:buNone/>
-            </a:pPr>
-            <a:r>
-              <a:rPr lang="en-US" sz="1200" b="1" kern="0" spc="50" dirty="0">
+            <a:pPr algn="ctr" indent="0" marL="0">
+              <a:buNone/>
+            </a:pPr>
+            <a:r>
+              <a:rPr lang="en-US" sz="1200" b="1" spc="50" kern="0" dirty="0">
                 <a:solidFill>
                   <a:srgbClr val="FFFFFF"/>
                 </a:solidFill>
@@ -10169,11 +10024,11 @@
           <a:bodyPr wrap="square" rtlCol="0" anchor="ctr"/>
           <a:lstStyle/>
           <a:p>
-            <a:pPr marL="0" indent="0">
-              <a:buNone/>
-            </a:pPr>
-            <a:r>
-              <a:rPr lang="en-US" sz="3000" b="1" kern="0" spc="50" dirty="0">
+            <a:pPr indent="0" marL="0">
+              <a:buNone/>
+            </a:pPr>
+            <a:r>
+              <a:rPr lang="en-US" sz="3000" b="1" spc="50" kern="0" dirty="0">
                 <a:solidFill>
                   <a:srgbClr val="0A1A1C"/>
                 </a:solidFill>
@@ -10211,13 +10066,6 @@
             <a:prstDash val="solid"/>
           </a:ln>
         </p:spPr>
-        <p:txBody>
-          <a:bodyPr/>
-          <a:lstStyle/>
-          <a:p>
-            <a:endParaRPr lang="en-US"/>
-          </a:p>
-        </p:txBody>
       </p:sp>
       <p:sp>
         <p:nvSpPr>
@@ -10395,7 +10243,6 @@
         <a:solidFill>
           <a:srgbClr val="007A90"/>
         </a:solidFill>
-        <a:effectLst/>
       </p:bgPr>
     </p:bg>
     <p:spTree>
@@ -10436,13 +10283,6 @@
             <a:prstDash val="solid"/>
           </a:ln>
         </p:spPr>
-        <p:txBody>
-          <a:bodyPr/>
-          <a:lstStyle/>
-          <a:p>
-            <a:endParaRPr lang="en-US"/>
-          </a:p>
-        </p:txBody>
       </p:sp>
       <p:sp>
         <p:nvSpPr>
@@ -10465,11 +10305,11 @@
           <a:bodyPr wrap="square" rtlCol="0" anchor="ctr"/>
           <a:lstStyle/>
           <a:p>
-            <a:pPr marL="0" indent="0" algn="ctr">
-              <a:buNone/>
-            </a:pPr>
-            <a:r>
-              <a:rPr lang="en-US" sz="4800" b="1" kern="0" spc="50" dirty="0">
+            <a:pPr algn="ctr" indent="0" marL="0">
+              <a:buNone/>
+            </a:pPr>
+            <a:r>
+              <a:rPr lang="en-US" sz="4800" b="1" spc="50" kern="0" dirty="0">
                 <a:solidFill>
                   <a:srgbClr val="FFFFFF"/>
                 </a:solidFill>
@@ -10504,7 +10344,7 @@
           <a:bodyPr wrap="square" rtlCol="0" anchor="ctr"/>
           <a:lstStyle/>
           <a:p>
-            <a:pPr marL="0" indent="0" algn="ctr">
+            <a:pPr algn="ctr" indent="0" marL="0">
               <a:buNone/>
             </a:pPr>
             <a:r>
@@ -10540,7 +10380,6 @@
         <a:solidFill>
           <a:srgbClr val="EAFCFF"/>
         </a:solidFill>
-        <a:effectLst/>
       </p:bgPr>
     </p:bg>
     <p:spTree>
@@ -10581,13 +10420,6 @@
             <a:prstDash val="solid"/>
           </a:ln>
         </p:spPr>
-        <p:txBody>
-          <a:bodyPr/>
-          <a:lstStyle/>
-          <a:p>
-            <a:endParaRPr lang="en-US"/>
-          </a:p>
-        </p:txBody>
       </p:sp>
       <p:sp>
         <p:nvSpPr>
@@ -10610,11 +10442,11 @@
           <a:bodyPr wrap="square" rtlCol="0" anchor="ctr"/>
           <a:lstStyle/>
           <a:p>
-            <a:pPr marL="0" indent="0" algn="ctr">
-              <a:buNone/>
-            </a:pPr>
-            <a:r>
-              <a:rPr lang="en-US" sz="1200" b="1" kern="0" spc="50" dirty="0">
+            <a:pPr algn="ctr" indent="0" marL="0">
+              <a:buNone/>
+            </a:pPr>
+            <a:r>
+              <a:rPr lang="en-US" sz="1200" b="1" spc="50" kern="0" dirty="0">
                 <a:solidFill>
                   <a:srgbClr val="FFFFFF"/>
                 </a:solidFill>
@@ -10649,11 +10481,11 @@
           <a:bodyPr wrap="square" rtlCol="0" anchor="ctr"/>
           <a:lstStyle/>
           <a:p>
-            <a:pPr marL="0" indent="0">
-              <a:buNone/>
-            </a:pPr>
-            <a:r>
-              <a:rPr lang="en-US" sz="3000" b="1" kern="0" spc="50" dirty="0">
+            <a:pPr indent="0" marL="0">
+              <a:buNone/>
+            </a:pPr>
+            <a:r>
+              <a:rPr lang="en-US" sz="3000" b="1" spc="50" kern="0" dirty="0">
                 <a:solidFill>
                   <a:srgbClr val="0A1A1C"/>
                 </a:solidFill>
@@ -10691,13 +10523,6 @@
             <a:prstDash val="solid"/>
           </a:ln>
         </p:spPr>
-        <p:txBody>
-          <a:bodyPr/>
-          <a:lstStyle/>
-          <a:p>
-            <a:endParaRPr lang="en-US"/>
-          </a:p>
-        </p:txBody>
       </p:sp>
       <p:sp>
         <p:nvSpPr>
@@ -10725,13 +10550,6 @@
             <a:prstDash val="solid"/>
           </a:ln>
         </p:spPr>
-        <p:txBody>
-          <a:bodyPr/>
-          <a:lstStyle/>
-          <a:p>
-            <a:endParaRPr lang="en-US"/>
-          </a:p>
-        </p:txBody>
       </p:sp>
       <p:sp>
         <p:nvSpPr>
@@ -10754,7 +10572,7 @@
           <a:bodyPr wrap="square" rtlCol="0" anchor="b"/>
           <a:lstStyle/>
           <a:p>
-            <a:pPr marL="0" indent="0" algn="ctr">
+            <a:pPr algn="ctr" indent="0" marL="0">
               <a:buNone/>
             </a:pPr>
             <a:r>
@@ -10793,7 +10611,7 @@
           <a:bodyPr wrap="square" rtlCol="0" anchor="t"/>
           <a:lstStyle/>
           <a:p>
-            <a:pPr marL="0" indent="0" algn="ctr">
+            <a:pPr algn="ctr" indent="0" marL="0">
               <a:buNone/>
             </a:pPr>
             <a:r>
@@ -10837,13 +10655,6 @@
             <a:prstDash val="solid"/>
           </a:ln>
         </p:spPr>
-        <p:txBody>
-          <a:bodyPr/>
-          <a:lstStyle/>
-          <a:p>
-            <a:endParaRPr lang="en-US"/>
-          </a:p>
-        </p:txBody>
       </p:sp>
       <p:sp>
         <p:nvSpPr>
@@ -10866,7 +10677,7 @@
           <a:bodyPr wrap="square" rtlCol="0" anchor="b"/>
           <a:lstStyle/>
           <a:p>
-            <a:pPr marL="0" indent="0" algn="ctr">
+            <a:pPr algn="ctr" indent="0" marL="0">
               <a:buNone/>
             </a:pPr>
             <a:r>
@@ -10905,7 +10716,7 @@
           <a:bodyPr wrap="square" rtlCol="0" anchor="t"/>
           <a:lstStyle/>
           <a:p>
-            <a:pPr marL="0" indent="0" algn="ctr">
+            <a:pPr algn="ctr" indent="0" marL="0">
               <a:buNone/>
             </a:pPr>
             <a:r>
@@ -10949,13 +10760,6 @@
             <a:prstDash val="solid"/>
           </a:ln>
         </p:spPr>
-        <p:txBody>
-          <a:bodyPr/>
-          <a:lstStyle/>
-          <a:p>
-            <a:endParaRPr lang="en-US"/>
-          </a:p>
-        </p:txBody>
       </p:sp>
       <p:sp>
         <p:nvSpPr>
@@ -10978,7 +10782,7 @@
           <a:bodyPr wrap="square" rtlCol="0" anchor="b"/>
           <a:lstStyle/>
           <a:p>
-            <a:pPr marL="0" indent="0" algn="ctr">
+            <a:pPr algn="ctr" indent="0" marL="0">
               <a:buNone/>
             </a:pPr>
             <a:r>
@@ -11017,7 +10821,7 @@
           <a:bodyPr wrap="square" rtlCol="0" anchor="t"/>
           <a:lstStyle/>
           <a:p>
-            <a:pPr marL="0" indent="0" algn="ctr">
+            <a:pPr algn="ctr" indent="0" marL="0">
               <a:buNone/>
             </a:pPr>
             <a:r>
@@ -11211,7 +11015,6 @@
         <a:solidFill>
           <a:srgbClr val="EAFCFF"/>
         </a:solidFill>
-        <a:effectLst/>
       </p:bgPr>
     </p:bg>
     <p:spTree>
@@ -11252,13 +11055,6 @@
             <a:prstDash val="solid"/>
           </a:ln>
         </p:spPr>
-        <p:txBody>
-          <a:bodyPr/>
-          <a:lstStyle/>
-          <a:p>
-            <a:endParaRPr lang="en-US"/>
-          </a:p>
-        </p:txBody>
       </p:sp>
       <p:sp>
         <p:nvSpPr>
@@ -11281,11 +11077,11 @@
           <a:bodyPr wrap="square" rtlCol="0" anchor="ctr"/>
           <a:lstStyle/>
           <a:p>
-            <a:pPr marL="0" indent="0" algn="ctr">
-              <a:buNone/>
-            </a:pPr>
-            <a:r>
-              <a:rPr lang="en-US" sz="1200" b="1" kern="0" spc="50" dirty="0">
+            <a:pPr algn="ctr" indent="0" marL="0">
+              <a:buNone/>
+            </a:pPr>
+            <a:r>
+              <a:rPr lang="en-US" sz="1200" b="1" spc="50" kern="0" dirty="0">
                 <a:solidFill>
                   <a:srgbClr val="FFFFFF"/>
                 </a:solidFill>
@@ -11320,11 +11116,11 @@
           <a:bodyPr wrap="square" rtlCol="0" anchor="ctr"/>
           <a:lstStyle/>
           <a:p>
-            <a:pPr marL="0" indent="0">
-              <a:buNone/>
-            </a:pPr>
-            <a:r>
-              <a:rPr lang="en-US" sz="3000" b="1" kern="0" spc="50" dirty="0">
+            <a:pPr indent="0" marL="0">
+              <a:buNone/>
+            </a:pPr>
+            <a:r>
+              <a:rPr lang="en-US" sz="3000" b="1" spc="50" kern="0" dirty="0">
                 <a:solidFill>
                   <a:srgbClr val="0A1A1C"/>
                 </a:solidFill>
@@ -11362,13 +11158,6 @@
             <a:prstDash val="solid"/>
           </a:ln>
         </p:spPr>
-        <p:txBody>
-          <a:bodyPr/>
-          <a:lstStyle/>
-          <a:p>
-            <a:endParaRPr lang="en-US"/>
-          </a:p>
-        </p:txBody>
       </p:sp>
       <p:sp>
         <p:nvSpPr>
@@ -11378,8 +11167,8 @@
         </p:nvSpPr>
         <p:spPr>
           <a:xfrm>
-            <a:off x="457200" y="3451860"/>
-            <a:ext cx="5638800" cy="1273646"/>
+            <a:off x="457200" y="1572768"/>
+            <a:ext cx="5477256" cy="5010912"/>
           </a:xfrm>
           <a:prstGeom prst="rect">
             <a:avLst/>
@@ -11394,13 +11183,6 @@
             <a:prstDash val="solid"/>
           </a:ln>
         </p:spPr>
-        <p:txBody>
-          <a:bodyPr/>
-          <a:lstStyle/>
-          <a:p>
-            <a:endParaRPr lang="en-US"/>
-          </a:p>
-        </p:txBody>
       </p:sp>
       <p:sp>
         <p:nvSpPr>
@@ -11410,7 +11192,7 @@
         </p:nvSpPr>
         <p:spPr>
           <a:xfrm>
-            <a:off x="602502" y="3589020"/>
+            <a:off x="640080" y="1709928"/>
             <a:ext cx="5111496" cy="4736592"/>
           </a:xfrm>
           <a:prstGeom prst="rect">
@@ -11423,7 +11205,7 @@
           <a:bodyPr wrap="none" rtlCol="0" anchor="t"/>
           <a:lstStyle/>
           <a:p>
-            <a:pPr marL="0" indent="0">
+            <a:pPr indent="0" marL="0">
               <a:buNone/>
             </a:pPr>
             <a:r>
@@ -11440,7 +11222,7 @@
             <a:endParaRPr lang="en-US" sz="1400" dirty="0"/>
           </a:p>
           <a:p>
-            <a:pPr marL="0" indent="0">
+            <a:pPr indent="0" marL="0">
               <a:buNone/>
             </a:pPr>
             <a:r>
@@ -11457,7 +11239,7 @@
             <a:endParaRPr lang="en-US" sz="1400" dirty="0"/>
           </a:p>
           <a:p>
-            <a:pPr marL="0" indent="0">
+            <a:pPr indent="0" marL="0">
               <a:buNone/>
             </a:pPr>
             <a:r>
@@ -11474,7 +11256,7 @@
             <a:endParaRPr lang="en-US" sz="1400" dirty="0"/>
           </a:p>
           <a:p>
-            <a:pPr marL="0" indent="0">
+            <a:pPr indent="0" marL="0">
               <a:buNone/>
             </a:pPr>
             <a:r>
@@ -11566,7 +11348,7 @@
                 <a:ea typeface="Trebuchet MS" pitchFamily="34" charset="-122"/>
                 <a:cs typeface="Trebuchet MS" pitchFamily="34" charset="-120"/>
               </a:rPr>
-              <a:t>kubectl apply means "make the cluster match this file" — and keep it matching</a:t>
+              <a:t>kubectl apply means "make the cluster match this file" — once, then it exits</a:t>
             </a:r>
             <a:endParaRPr lang="en-US" sz="1700" dirty="0"/>
           </a:p>
@@ -11606,7 +11388,7 @@
                 <a:ea typeface="Trebuchet MS" pitchFamily="34" charset="-122"/>
                 <a:cs typeface="Trebuchet MS" pitchFamily="34" charset="-120"/>
               </a:rPr>
-              <a:t>Re-running apply with no changes reports unchanged because reality already matches</a:t>
+              <a:t>Re-running apply reports unchanged — a fresh one-time diff, not proof of an ongoing watch</a:t>
             </a:r>
             <a:endParaRPr lang="en-US" sz="1700" dirty="0"/>
           </a:p>
@@ -11646,7 +11428,7 @@
                 <a:ea typeface="Trebuchet MS" pitchFamily="34" charset="-122"/>
                 <a:cs typeface="Trebuchet MS" pitchFamily="34" charset="-120"/>
               </a:rPr>
-              <a:t>This loop, running continuously instead of once, is exactly what makes a Deployment self-heal a deleted Pod</a:t>
+              <a:t>Continuous enforcement comes from a controller, not from apply — a bare Pod has none, a Deployment does</a:t>
             </a:r>
             <a:endParaRPr lang="en-US" sz="1700" dirty="0"/>
           </a:p>
@@ -11668,7 +11450,6 @@
         <a:solidFill>
           <a:srgbClr val="007A90"/>
         </a:solidFill>
-        <a:effectLst/>
       </p:bgPr>
     </p:bg>
     <p:spTree>
@@ -11709,13 +11490,6 @@
             <a:prstDash val="solid"/>
           </a:ln>
         </p:spPr>
-        <p:txBody>
-          <a:bodyPr/>
-          <a:lstStyle/>
-          <a:p>
-            <a:endParaRPr lang="en-US"/>
-          </a:p>
-        </p:txBody>
       </p:sp>
       <p:sp>
         <p:nvSpPr>
@@ -11738,11 +11512,11 @@
           <a:bodyPr wrap="square" rtlCol="0" anchor="ctr"/>
           <a:lstStyle/>
           <a:p>
-            <a:pPr marL="0" indent="0" algn="ctr">
-              <a:buNone/>
-            </a:pPr>
-            <a:r>
-              <a:rPr lang="en-US" sz="4800" b="1" kern="0" spc="50" dirty="0">
+            <a:pPr algn="ctr" indent="0" marL="0">
+              <a:buNone/>
+            </a:pPr>
+            <a:r>
+              <a:rPr lang="en-US" sz="4800" b="1" spc="50" kern="0" dirty="0">
                 <a:solidFill>
                   <a:srgbClr val="FFFFFF"/>
                 </a:solidFill>
@@ -11777,7 +11551,7 @@
           <a:bodyPr wrap="square" rtlCol="0" anchor="ctr"/>
           <a:lstStyle/>
           <a:p>
-            <a:pPr marL="0" indent="0" algn="ctr">
+            <a:pPr algn="ctr" indent="0" marL="0">
               <a:buNone/>
             </a:pPr>
             <a:r>
@@ -12098,319 +11872,4 @@
     </a:ext>
   </a:extLst>
 </a:theme>
-</file>
-
-<file path=ppt/theme/theme2.xml><?xml version="1.0" encoding="utf-8"?>
-<a:theme xmlns:a="http://schemas.openxmlformats.org/drawingml/2006/main" name="Office Theme">
-  <a:themeElements>
-    <a:clrScheme name="Office">
-      <a:dk1>
-        <a:sysClr val="windowText" lastClr="000000"/>
-      </a:dk1>
-      <a:lt1>
-        <a:sysClr val="window" lastClr="FFFFFF"/>
-      </a:lt1>
-      <a:dk2>
-        <a:srgbClr val="0E2841"/>
-      </a:dk2>
-      <a:lt2>
-        <a:srgbClr val="E8E8E8"/>
-      </a:lt2>
-      <a:accent1>
-        <a:srgbClr val="156082"/>
-      </a:accent1>
-      <a:accent2>
-        <a:srgbClr val="E97132"/>
-      </a:accent2>
-      <a:accent3>
-        <a:srgbClr val="196B24"/>
-      </a:accent3>
-      <a:accent4>
-        <a:srgbClr val="0F9ED5"/>
-      </a:accent4>
-      <a:accent5>
-        <a:srgbClr val="A02B93"/>
-      </a:accent5>
-      <a:accent6>
-        <a:srgbClr val="4EA72E"/>
-      </a:accent6>
-      <a:hlink>
-        <a:srgbClr val="467886"/>
-      </a:hlink>
-      <a:folHlink>
-        <a:srgbClr val="96607D"/>
-      </a:folHlink>
-    </a:clrScheme>
-    <a:fontScheme name="Office">
-      <a:majorFont>
-        <a:latin typeface="Aptos Display" panose="02110004020202020204"/>
-        <a:ea typeface=""/>
-        <a:cs typeface=""/>
-        <a:font script="Jpan" typeface="游ゴシック Light"/>
-        <a:font script="Hang" typeface="맑은 고딕"/>
-        <a:font script="Hans" typeface="等线 Light"/>
-        <a:font script="Hant" typeface="新細明體"/>
-        <a:font script="Arab" typeface="Times New Roman"/>
-        <a:font script="Hebr" typeface="Times New Roman"/>
-        <a:font script="Thai" typeface="Angsana New"/>
-        <a:font script="Ethi" typeface="Nyala"/>
-        <a:font script="Beng" typeface="Vrinda"/>
-        <a:font script="Gujr" typeface="Shruti"/>
-        <a:font script="Khmr" typeface="MoolBoran"/>
-        <a:font script="Knda" typeface="Tunga"/>
-        <a:font script="Guru" typeface="Raavi"/>
-        <a:font script="Cans" typeface="Euphemia"/>
-        <a:font script="Cher" typeface="Plantagenet Cherokee"/>
-        <a:font script="Yiii" typeface="Microsoft Yi Baiti"/>
-        <a:font script="Tibt" typeface="Microsoft Himalaya"/>
-        <a:font script="Thaa" typeface="MV Boli"/>
-        <a:font script="Deva" typeface="Mangal"/>
-        <a:font script="Telu" typeface="Gautami"/>
-        <a:font script="Taml" typeface="Latha"/>
-        <a:font script="Syrc" typeface="Estrangelo Edessa"/>
-        <a:font script="Orya" typeface="Kalinga"/>
-        <a:font script="Mlym" typeface="Kartika"/>
-        <a:font script="Laoo" typeface="DokChampa"/>
-        <a:font script="Sinh" typeface="Iskoola Pota"/>
-        <a:font script="Mong" typeface="Mongolian Baiti"/>
-        <a:font script="Viet" typeface="Times New Roman"/>
-        <a:font script="Uigh" typeface="Microsoft Uighur"/>
-        <a:font script="Geor" typeface="Sylfaen"/>
-        <a:font script="Armn" typeface="Arial"/>
-        <a:font script="Bugi" typeface="Leelawadee UI"/>
-        <a:font script="Bopo" typeface="Microsoft JhengHei"/>
-        <a:font script="Java" typeface="Javanese Text"/>
-        <a:font script="Lisu" typeface="Segoe UI"/>
-        <a:font script="Mymr" typeface="Myanmar Text"/>
-        <a:font script="Nkoo" typeface="Ebrima"/>
-        <a:font script="Olck" typeface="Nirmala UI"/>
-        <a:font script="Osma" typeface="Ebrima"/>
-        <a:font script="Phag" typeface="Phagspa"/>
-        <a:font script="Syrn" typeface="Estrangelo Edessa"/>
-        <a:font script="Syrj" typeface="Estrangelo Edessa"/>
-        <a:font script="Syre" typeface="Estrangelo Edessa"/>
-        <a:font script="Sora" typeface="Nirmala UI"/>
-        <a:font script="Tale" typeface="Microsoft Tai Le"/>
-        <a:font script="Talu" typeface="Microsoft New Tai Lue"/>
-        <a:font script="Tfng" typeface="Ebrima"/>
-      </a:majorFont>
-      <a:minorFont>
-        <a:latin typeface="Aptos" panose="02110004020202020204"/>
-        <a:ea typeface=""/>
-        <a:cs typeface=""/>
-        <a:font script="Jpan" typeface="游ゴシック"/>
-        <a:font script="Hang" typeface="맑은 고딕"/>
-        <a:font script="Hans" typeface="等线"/>
-        <a:font script="Hant" typeface="新細明體"/>
-        <a:font script="Arab" typeface="Arial"/>
-        <a:font script="Hebr" typeface="Arial"/>
-        <a:font script="Thai" typeface="Cordia New"/>
-        <a:font script="Ethi" typeface="Nyala"/>
-        <a:font script="Beng" typeface="Vrinda"/>
-        <a:font script="Gujr" typeface="Shruti"/>
-        <a:font script="Khmr" typeface="DaunPenh"/>
-        <a:font script="Knda" typeface="Tunga"/>
-        <a:font script="Guru" typeface="Raavi"/>
-        <a:font script="Cans" typeface="Euphemia"/>
-        <a:font script="Cher" typeface="Plantagenet Cherokee"/>
-        <a:font script="Yiii" typeface="Microsoft Yi Baiti"/>
-        <a:font script="Tibt" typeface="Microsoft Himalaya"/>
-        <a:font script="Thaa" typeface="MV Boli"/>
-        <a:font script="Deva" typeface="Mangal"/>
-        <a:font script="Telu" typeface="Gautami"/>
-        <a:font script="Taml" typeface="Latha"/>
-        <a:font script="Syrc" typeface="Estrangelo Edessa"/>
-        <a:font script="Orya" typeface="Kalinga"/>
-        <a:font script="Mlym" typeface="Kartika"/>
-        <a:font script="Laoo" typeface="DokChampa"/>
-        <a:font script="Sinh" typeface="Iskoola Pota"/>
-        <a:font script="Mong" typeface="Mongolian Baiti"/>
-        <a:font script="Viet" typeface="Arial"/>
-        <a:font script="Uigh" typeface="Microsoft Uighur"/>
-        <a:font script="Geor" typeface="Sylfaen"/>
-        <a:font script="Armn" typeface="Arial"/>
-        <a:font script="Bugi" typeface="Leelawadee UI"/>
-        <a:font script="Bopo" typeface="Microsoft JhengHei"/>
-        <a:font script="Java" typeface="Javanese Text"/>
-        <a:font script="Lisu" typeface="Segoe UI"/>
-        <a:font script="Mymr" typeface="Myanmar Text"/>
-        <a:font script="Nkoo" typeface="Ebrima"/>
-        <a:font script="Olck" typeface="Nirmala UI"/>
-        <a:font script="Osma" typeface="Ebrima"/>
-        <a:font script="Phag" typeface="Phagspa"/>
-        <a:font script="Syrn" typeface="Estrangelo Edessa"/>
-        <a:font script="Syrj" typeface="Estrangelo Edessa"/>
-        <a:font script="Syre" typeface="Estrangelo Edessa"/>
-        <a:font script="Sora" typeface="Nirmala UI"/>
-        <a:font script="Tale" typeface="Microsoft Tai Le"/>
-        <a:font script="Talu" typeface="Microsoft New Tai Lue"/>
-        <a:font script="Tfng" typeface="Ebrima"/>
-      </a:minorFont>
-    </a:fontScheme>
-    <a:fmtScheme name="Office">
-      <a:fillStyleLst>
-        <a:solidFill>
-          <a:schemeClr val="phClr"/>
-        </a:solidFill>
-        <a:gradFill rotWithShape="1">
-          <a:gsLst>
-            <a:gs pos="0">
-              <a:schemeClr val="phClr">
-                <a:lumMod val="110000"/>
-                <a:satMod val="105000"/>
-                <a:tint val="67000"/>
-              </a:schemeClr>
-            </a:gs>
-            <a:gs pos="50000">
-              <a:schemeClr val="phClr">
-                <a:lumMod val="105000"/>
-                <a:satMod val="103000"/>
-                <a:tint val="73000"/>
-              </a:schemeClr>
-            </a:gs>
-            <a:gs pos="100000">
-              <a:schemeClr val="phClr">
-                <a:lumMod val="105000"/>
-                <a:satMod val="109000"/>
-                <a:tint val="81000"/>
-              </a:schemeClr>
-            </a:gs>
-          </a:gsLst>
-          <a:lin ang="5400000" scaled="0"/>
-        </a:gradFill>
-        <a:gradFill rotWithShape="1">
-          <a:gsLst>
-            <a:gs pos="0">
-              <a:schemeClr val="phClr">
-                <a:satMod val="103000"/>
-                <a:lumMod val="102000"/>
-                <a:tint val="94000"/>
-              </a:schemeClr>
-            </a:gs>
-            <a:gs pos="50000">
-              <a:schemeClr val="phClr">
-                <a:satMod val="110000"/>
-                <a:lumMod val="100000"/>
-                <a:shade val="100000"/>
-              </a:schemeClr>
-            </a:gs>
-            <a:gs pos="100000">
-              <a:schemeClr val="phClr">
-                <a:lumMod val="99000"/>
-                <a:satMod val="120000"/>
-                <a:shade val="78000"/>
-              </a:schemeClr>
-            </a:gs>
-          </a:gsLst>
-          <a:lin ang="5400000" scaled="0"/>
-        </a:gradFill>
-      </a:fillStyleLst>
-      <a:lnStyleLst>
-        <a:ln w="12700" cap="flat" cmpd="sng" algn="ctr">
-          <a:solidFill>
-            <a:schemeClr val="phClr"/>
-          </a:solidFill>
-          <a:prstDash val="solid"/>
-          <a:miter lim="800000"/>
-        </a:ln>
-        <a:ln w="19050" cap="flat" cmpd="sng" algn="ctr">
-          <a:solidFill>
-            <a:schemeClr val="phClr"/>
-          </a:solidFill>
-          <a:prstDash val="solid"/>
-          <a:miter lim="800000"/>
-        </a:ln>
-        <a:ln w="25400" cap="flat" cmpd="sng" algn="ctr">
-          <a:solidFill>
-            <a:schemeClr val="phClr"/>
-          </a:solidFill>
-          <a:prstDash val="solid"/>
-          <a:miter lim="800000"/>
-        </a:ln>
-      </a:lnStyleLst>
-      <a:effectStyleLst>
-        <a:effectStyle>
-          <a:effectLst/>
-        </a:effectStyle>
-        <a:effectStyle>
-          <a:effectLst/>
-        </a:effectStyle>
-        <a:effectStyle>
-          <a:effectLst>
-            <a:outerShdw blurRad="57150" dist="19050" dir="5400000" algn="ctr" rotWithShape="0">
-              <a:srgbClr val="000000">
-                <a:alpha val="63000"/>
-              </a:srgbClr>
-            </a:outerShdw>
-          </a:effectLst>
-        </a:effectStyle>
-      </a:effectStyleLst>
-      <a:bgFillStyleLst>
-        <a:solidFill>
-          <a:schemeClr val="phClr"/>
-        </a:solidFill>
-        <a:solidFill>
-          <a:schemeClr val="phClr">
-            <a:tint val="95000"/>
-            <a:satMod val="170000"/>
-          </a:schemeClr>
-        </a:solidFill>
-        <a:gradFill rotWithShape="1">
-          <a:gsLst>
-            <a:gs pos="0">
-              <a:schemeClr val="phClr">
-                <a:tint val="93000"/>
-                <a:satMod val="150000"/>
-                <a:shade val="98000"/>
-                <a:lumMod val="102000"/>
-              </a:schemeClr>
-            </a:gs>
-            <a:gs pos="50000">
-              <a:schemeClr val="phClr">
-                <a:tint val="98000"/>
-                <a:satMod val="130000"/>
-                <a:shade val="90000"/>
-                <a:lumMod val="103000"/>
-              </a:schemeClr>
-            </a:gs>
-            <a:gs pos="100000">
-              <a:schemeClr val="phClr">
-                <a:shade val="63000"/>
-                <a:satMod val="120000"/>
-              </a:schemeClr>
-            </a:gs>
-          </a:gsLst>
-          <a:lin ang="5400000" scaled="0"/>
-        </a:gradFill>
-      </a:bgFillStyleLst>
-    </a:fmtScheme>
-  </a:themeElements>
-  <a:objectDefaults>
-    <a:lnDef>
-      <a:spPr/>
-      <a:bodyPr/>
-      <a:lstStyle/>
-      <a:style>
-        <a:lnRef idx="2">
-          <a:schemeClr val="accent1"/>
-        </a:lnRef>
-        <a:fillRef idx="0">
-          <a:schemeClr val="accent1"/>
-        </a:fillRef>
-        <a:effectRef idx="1">
-          <a:schemeClr val="accent1"/>
-        </a:effectRef>
-        <a:fontRef idx="minor">
-          <a:schemeClr val="tx1"/>
-        </a:fontRef>
-      </a:style>
-    </a:lnDef>
-  </a:objectDefaults>
-  <a:extraClrSchemeLst/>
-  <a:extLst>
-    <a:ext uri="{05A4C25C-085E-4340-85A3-A5531E510DB2}">
-      <thm15:themeFamily xmlns:thm15="http://schemas.microsoft.com/office/thememl/2012/main" name="Office Theme" id="{2E142A2C-CD16-42D6-873A-C26D2A0506FA}" vid="{1BDDFF52-6CD6-40A5-AB3C-68EB2F1E4D0A}"/>
-    </a:ext>
-  </a:extLst>
-</a:theme>
 </file>
--- a/docs/presentations/KubernetesFundamentals/KubernetesFundamentals.pptx
+++ b/docs/presentations/KubernetesFundamentals/KubernetesFundamentals.pptx
@@ -27,9 +27,10 @@
     <p:sldId id="275" r:id="rId21"/>
     <p:sldId id="276" r:id="rId22"/>
     <p:sldId id="277" r:id="rId23"/>
+    <p:sldId id="278" r:id="rId24"/>
   </p:sldIdLst>
   <p:notesMasterIdLst>
-    <p:notesMasterId r:id="rId24"/>
+    <p:notesMasterId r:id="rId25"/>
   </p:notesMasterIdLst>
   <p:sldSz cx="12192000" cy="6858000"/>
   <p:notesSz cx="6858000" cy="12192000"/>
@@ -699,7 +700,7 @@
           <a:p>
             <a:r>
               <a:rPr lang="en-US" dirty="0"/>
-              <a:t>Trace one concrete request end to end so the component table on the previous slide stops being abstract. Call out the pod-before-container ordering explicitly — it's a detail worth remembering.</a:t>
+              <a:t>Trace one concrete request end to end so the control-plane components stop being abstract. Call out the pod-before-container ordering explicitly — it's a detail worth remembering.</a:t>
             </a:r>
             <a:endParaRPr lang="en-US" dirty="0"/>
           </a:p>
@@ -875,7 +876,7 @@
           <a:p>
             <a:r>
               <a:rPr lang="en-US" dirty="0"/>
-              <a:t>This is the "aha" moment of the deck for a first-time reader: run the delete experiment and watch the Pod not come back. Frame it as a problem statement, not a dead end — Slide 14 is the fix.</a:t>
+              <a:t>This is the "aha" moment of the deck for a first-time reader: run the delete experiment and watch the Pod not come back. Frame it as a problem statement, not a dead end — the breakdown of why follows immediately.</a:t>
             </a:r>
             <a:endParaRPr lang="en-US" dirty="0"/>
           </a:p>
@@ -963,7 +964,7 @@
           <a:p>
             <a:r>
               <a:rPr lang="en-US" dirty="0"/>
-              <a:t>Repeat the exact delete experiment from Slide 13, but this time on a Deployment-managed Pod — the contrast is the whole point. Tie the self-healing behavior explicitly back to Slide 8's reconciliation loop.</a:t>
+              <a:t>This is the direct answer to "but I defined it in YAML" — the payoff for the whole deck's declarative-vs-controller distinction. Land it slowly; this is the moment that makes everything else click.</a:t>
             </a:r>
             <a:endParaRPr lang="en-US" dirty="0"/>
           </a:p>
@@ -1051,7 +1052,7 @@
           <a:p>
             <a:r>
               <a:rPr lang="en-US" dirty="0"/>
-              <a:t>Fourth and final focus area — the last two object types, then the capstone that wires everything together.</a:t>
+              <a:t>Repeat the exact delete experiment, but this time on a Deployment-managed Pod — the contrast with the bare-Pod case is the whole point. This is the concrete payoff: the ReplicaSet controller, not apply, is what runs the loop.</a:t>
             </a:r>
             <a:endParaRPr lang="en-US" dirty="0"/>
           </a:p>
@@ -1139,7 +1140,7 @@
           <a:p>
             <a:r>
               <a:rPr lang="en-US" dirty="0"/>
-              <a:t>Anchor this in the fact that the reader just watched a Pod's IP change in the previous section — a Service is the direct answer to that instability.</a:t>
+              <a:t>Fourth and final focus area — the last two object types, then the capstone that wires everything together.</a:t>
             </a:r>
             <a:endParaRPr lang="en-US" dirty="0"/>
           </a:p>
@@ -1227,7 +1228,7 @@
           <a:p>
             <a:r>
               <a:rPr lang="en-US" dirty="0"/>
-              <a:t>Keep this conceptual per the high-level depth — one short illustrative snippet, not a manifest walkthrough. The base64-is-not-encryption point is the one thing to land hard.</a:t>
+              <a:t>Anchor this in the fact that Pod IPs change on every delete/recreate — a Service is the direct answer to that instability.</a:t>
             </a:r>
             <a:endParaRPr lang="en-US" dirty="0"/>
           </a:p>
@@ -1315,7 +1316,7 @@
           <a:p>
             <a:r>
               <a:rPr lang="en-US" dirty="0"/>
-              <a:t>This is where all four focus areas visibly compose into TUTORIAL.md's Module 5. The DNS-name-per-Service detail and the deploy-order gotcha are the two things worth remembering here.</a:t>
+              <a:t>Keep this conceptual per the high-level depth — one short illustrative snippet, not a manifest walkthrough. The base64-is-not-encryption point is the one thing to land hard.</a:t>
             </a:r>
             <a:endParaRPr lang="en-US" dirty="0"/>
           </a:p>
@@ -1403,7 +1404,7 @@
           <a:p>
             <a:r>
               <a:rPr lang="en-US" dirty="0"/>
-              <a:t>Frame this as "things that were harder than expected" for an onboarding audience — real failure modes pulled straight from the tutorial's own troubleshooting notes, not hypotheticals.</a:t>
+              <a:t>This is where all four focus areas visibly compose into TUTORIAL.md's Module 5. The DNS-name-per-Service detail and the deploy-order gotcha are the two things worth remembering here.</a:t>
             </a:r>
             <a:endParaRPr lang="en-US" dirty="0"/>
           </a:p>
@@ -1579,7 +1580,7 @@
           <a:p>
             <a:r>
               <a:rPr lang="en-US" dirty="0"/>
-              <a:t>Land the single unifying idea before handing off to TUTORIAL.md — everything walked through today is one mechanism wearing different hats.</a:t>
+              <a:t>Frame this as "things that were harder than expected" for an onboarding audience — real failure modes pulled straight from the tutorial's own troubleshooting notes, not hypotheticals.</a:t>
             </a:r>
             <a:endParaRPr lang="en-US" dirty="0"/>
           </a:p>
@@ -1667,7 +1668,7 @@
           <a:p>
             <a:r>
               <a:rPr lang="en-US" dirty="0"/>
-              <a:t>Explicit handoff — this is the deck's actual job, to end with the reader opening a terminal and starting Module 0 with the mental model already in place.</a:t>
+              <a:t>Land the single unifying idea before handing off to TUTORIAL.md — everything walked through today is one mechanism wearing different hats.</a:t>
             </a:r>
             <a:endParaRPr lang="en-US" dirty="0"/>
           </a:p>
@@ -1755,7 +1756,7 @@
           <a:p>
             <a:r>
               <a:rPr lang="en-US" dirty="0"/>
-              <a:t>Three takeaways, no more — the last line is the one thing worth remembering walking into Module 1.</a:t>
+              <a:t>Explicit handoff — this is the deck's actual job, to end with the reader opening a terminal and starting Module 0 with the mental model already in place.</a:t>
             </a:r>
             <a:endParaRPr lang="en-US" dirty="0"/>
           </a:p>
@@ -1779,6 +1780,94 @@
             <a:fld id="{F7021451-1387-4CA6-816F-3879F97B5CBC}" type="slidenum">
               <a:rPr lang="en-US"/>
               <a:t>22</a:t>
+            </a:fld>
+            <a:endParaRPr lang="en-US"/>
+          </a:p>
+        </p:txBody>
+      </p:sp>
+    </p:spTree>
+    <p:extLst>
+      <p:ext uri="{BB962C8B-B14F-4D97-AF65-F5344CB8AC3E}">
+        <p14:creationId xmlns:p14="http://schemas.microsoft.com/office/powerpoint/2010/main" val="1024086991"/>
+      </p:ext>
+    </p:extLst>
+  </p:cSld>
+  <p:clrMapOvr>
+    <a:masterClrMapping/>
+  </p:clrMapOvr>
+</p:notes>
+</file>
+
+<file path=ppt/notesSlides/notesSlide23.xml><?xml version="1.0" encoding="utf-8"?>
+<p:notes xmlns:a="http://schemas.openxmlformats.org/drawingml/2006/main" xmlns:r="http://schemas.openxmlformats.org/officeDocument/2006/relationships" xmlns:p="http://schemas.openxmlformats.org/presentationml/2006/main">
+  <p:cSld>
+    <p:spTree>
+      <p:nvGrpSpPr>
+        <p:cNvPr id="1" name=""/>
+        <p:cNvGrpSpPr/>
+        <p:nvPr/>
+      </p:nvGrpSpPr>
+      <p:grpSpPr>
+        <a:xfrm>
+          <a:off x="0" y="0"/>
+          <a:ext cx="0" cy="0"/>
+          <a:chOff x="0" y="0"/>
+          <a:chExt cx="0" cy="0"/>
+        </a:xfrm>
+      </p:grpSpPr>
+      <p:sp>
+        <p:nvSpPr>
+          <p:cNvPr id="2" name="Slide Image Placeholder 1"/>
+          <p:cNvSpPr>
+            <a:spLocks noGrp="1" noRot="1" noChangeAspect="1"/>
+          </p:cNvSpPr>
+          <p:nvPr>
+            <p:ph type="sldImg"/>
+          </p:nvPr>
+        </p:nvSpPr>
+        <p:spPr/>
+      </p:sp>
+      <p:sp>
+        <p:nvSpPr>
+          <p:cNvPr id="3" name="Notes Placeholder 2"/>
+          <p:cNvSpPr>
+            <a:spLocks noGrp="1"/>
+          </p:cNvSpPr>
+          <p:nvPr>
+            <p:ph type="body" idx="1"/>
+          </p:nvPr>
+        </p:nvSpPr>
+        <p:spPr/>
+        <p:txBody>
+          <a:bodyPr/>
+          <a:lstStyle/>
+          <a:p>
+            <a:r>
+              <a:rPr lang="en-US" dirty="0"/>
+              <a:t>Three takeaways, no more — the last line is the one thing worth remembering walking into Module 1.</a:t>
+            </a:r>
+            <a:endParaRPr lang="en-US" dirty="0"/>
+          </a:p>
+        </p:txBody>
+      </p:sp>
+      <p:sp>
+        <p:nvSpPr>
+          <p:cNvPr id="4" name="Slide Number Placeholder 3"/>
+          <p:cNvSpPr>
+            <a:spLocks noGrp="1"/>
+          </p:cNvSpPr>
+          <p:nvPr>
+            <p:ph type="sldNum" sz="quarter" idx="10"/>
+          </p:nvPr>
+        </p:nvSpPr>
+        <p:spPr/>
+        <p:txBody>
+          <a:bodyPr/>
+          <a:lstStyle/>
+          <a:p>
+            <a:fld id="{F7021451-1387-4CA6-816F-3879F97B5CBC}" type="slidenum">
+              <a:rPr lang="en-US"/>
+              <a:t>23</a:t>
             </a:fld>
             <a:endParaRPr lang="en-US"/>
           </a:p>
@@ -2371,7 +2460,7 @@
           <a:p>
             <a:r>
               <a:rPr lang="en-US" dirty="0"/>
-              <a:t>Second focus area — now open the door from Slide 4 and name every piece behind it.</a:t>
+              <a:t>Second focus area — open the API server door and name every piece behind it.</a:t>
             </a:r>
             <a:endParaRPr lang="en-US" dirty="0"/>
           </a:p>
@@ -5048,7 +5137,7 @@
                 <a:ea typeface="Trebuchet MS" pitchFamily="34" charset="-122"/>
                 <a:cs typeface="Trebuchet MS" pitchFamily="34" charset="-120"/>
               </a:rPr>
-              <a:t>labels do nothing by themselves yet — but the next slide depends entirely on them</a:t>
+              <a:t>labels are just a tag on the object — inert until something else reads them</a:t>
             </a:r>
             <a:endParaRPr lang="en-US" sz="1600" dirty="0"/>
           </a:p>
@@ -5128,7 +5217,7 @@
                 <a:ea typeface="Trebuchet MS" pitchFamily="34" charset="-122"/>
                 <a:cs typeface="Trebuchet MS" pitchFamily="34" charset="-120"/>
               </a:rPr>
-              <a:t>It does not come back — apply already exited; the YAML file is now inert, no controller is watching this Pod</a:t>
+              <a:t>It does not come back, even though you defined it in pod.yaml</a:t>
             </a:r>
             <a:endParaRPr lang="en-US" sz="1600" dirty="0"/>
           </a:p>
@@ -5263,7 +5352,7 @@
                 <a:ea typeface="Arial Black" pitchFamily="34" charset="-122"/>
                 <a:cs typeface="Arial Black" pitchFamily="34" charset="-120"/>
               </a:rPr>
-              <a:t>Deployment → ReplicaSet → Pod</a:t>
+              <a:t>Why Doesn't It Come Back?</a:t>
             </a:r>
             <a:endParaRPr lang="en-US" sz="3000" dirty="0"/>
           </a:p>
@@ -5302,12 +5391,12 @@
         </p:nvSpPr>
         <p:spPr>
           <a:xfrm>
-            <a:off x="457200" y="1840230"/>
-            <a:ext cx="3526536" cy="653796"/>
+            <a:off x="457200" y="1901952"/>
+            <a:ext cx="3526536" cy="804672"/>
           </a:xfrm>
           <a:prstGeom prst="roundRect">
             <a:avLst>
-              <a:gd name="adj" fmla="val 13986"/>
+              <a:gd name="adj" fmla="val 11364"/>
             </a:avLst>
           </a:prstGeom>
           <a:solidFill>
@@ -5329,8 +5418,8 @@
         </p:nvSpPr>
         <p:spPr>
           <a:xfrm>
-            <a:off x="457200" y="1840230"/>
-            <a:ext cx="3526536" cy="653796"/>
+            <a:off x="457200" y="1901952"/>
+            <a:ext cx="3526536" cy="804672"/>
           </a:xfrm>
           <a:prstGeom prst="rect">
             <a:avLst/>
@@ -5354,7 +5443,7 @@
                 <a:ea typeface="Trebuchet MS" pitchFamily="34" charset="-122"/>
                 <a:cs typeface="Trebuchet MS" pitchFamily="34" charset="-120"/>
               </a:rPr>
-              <a:t>Deployment</a:t>
+              <a:t>kubectl apply</a:t>
             </a:r>
             <a:endParaRPr lang="en-US" sz="1200" dirty="0"/>
           </a:p>
@@ -5368,8 +5457,8 @@
         </p:nvSpPr>
         <p:spPr>
           <a:xfrm>
-            <a:off x="3983736" y="1840230"/>
-            <a:ext cx="347472" cy="653796"/>
+            <a:off x="3983736" y="1901952"/>
+            <a:ext cx="347472" cy="804672"/>
           </a:xfrm>
           <a:prstGeom prst="rect">
             <a:avLst/>
@@ -5407,12 +5496,12 @@
         </p:nvSpPr>
         <p:spPr>
           <a:xfrm>
-            <a:off x="4331208" y="1840230"/>
-            <a:ext cx="3526536" cy="653796"/>
+            <a:off x="4331208" y="1901952"/>
+            <a:ext cx="3526536" cy="804672"/>
           </a:xfrm>
           <a:prstGeom prst="roundRect">
             <a:avLst>
-              <a:gd name="adj" fmla="val 13986"/>
+              <a:gd name="adj" fmla="val 11364"/>
             </a:avLst>
           </a:prstGeom>
           <a:solidFill>
@@ -5434,8 +5523,8 @@
         </p:nvSpPr>
         <p:spPr>
           <a:xfrm>
-            <a:off x="4331208" y="1840230"/>
-            <a:ext cx="3526536" cy="653796"/>
+            <a:off x="4331208" y="1901952"/>
+            <a:ext cx="3526536" cy="804672"/>
           </a:xfrm>
           <a:prstGeom prst="rect">
             <a:avLst/>
@@ -5459,7 +5548,7 @@
                 <a:ea typeface="Trebuchet MS" pitchFamily="34" charset="-122"/>
                 <a:cs typeface="Trebuchet MS" pitchFamily="34" charset="-120"/>
               </a:rPr>
-              <a:t>ReplicaSet</a:t>
+              <a:t>Pod created</a:t>
             </a:r>
             <a:endParaRPr lang="en-US" sz="1200" dirty="0"/>
           </a:p>
@@ -5473,8 +5562,8 @@
         </p:nvSpPr>
         <p:spPr>
           <a:xfrm>
-            <a:off x="7857744" y="1840230"/>
-            <a:ext cx="347472" cy="653796"/>
+            <a:off x="7857744" y="1901952"/>
+            <a:ext cx="347472" cy="804672"/>
           </a:xfrm>
           <a:prstGeom prst="rect">
             <a:avLst/>
@@ -5512,18 +5601,18 @@
         </p:nvSpPr>
         <p:spPr>
           <a:xfrm>
-            <a:off x="8205216" y="1840230"/>
-            <a:ext cx="3526536" cy="653796"/>
+            <a:off x="8205216" y="1901952"/>
+            <a:ext cx="3526536" cy="804672"/>
           </a:xfrm>
           <a:prstGeom prst="roundRect">
             <a:avLst>
-              <a:gd name="adj" fmla="val 13986"/>
+              <a:gd name="adj" fmla="val 11364"/>
             </a:avLst>
           </a:prstGeom>
           <a:solidFill>
-            <a:srgbClr val="B8ECF5"/>
+            <a:srgbClr val="007A90"/>
           </a:solidFill>
-          <a:ln w="19050">
+          <a:ln w="31750">
             <a:solidFill>
               <a:srgbClr val="007A90"/>
             </a:solidFill>
@@ -5539,8 +5628,8 @@
         </p:nvSpPr>
         <p:spPr>
           <a:xfrm>
-            <a:off x="8205216" y="1840230"/>
-            <a:ext cx="3526536" cy="653796"/>
+            <a:off x="8205216" y="1901952"/>
+            <a:ext cx="3526536" cy="804672"/>
           </a:xfrm>
           <a:prstGeom prst="rect">
             <a:avLst/>
@@ -5558,228 +5647,45 @@
             <a:r>
               <a:rPr lang="en-US" sz="1200" b="1" dirty="0">
                 <a:solidFill>
-                  <a:srgbClr val="0A1A1C"/>
-                </a:solidFill>
-                <a:latin typeface="Trebuchet MS" pitchFamily="34" charset="0"/>
-                <a:ea typeface="Trebuchet MS" pitchFamily="34" charset="-122"/>
-                <a:cs typeface="Trebuchet MS" pitchFamily="34" charset="-120"/>
-              </a:rPr>
-              <a:t>Pod(s)</a:t>
+                  <a:srgbClr val="FFFFFF"/>
+                </a:solidFill>
+                <a:latin typeface="Trebuchet MS" pitchFamily="34" charset="0"/>
+                <a:ea typeface="Trebuchet MS" pitchFamily="34" charset="-122"/>
+                <a:cs typeface="Trebuchet MS" pitchFamily="34" charset="-120"/>
+              </a:rPr>
+              <a:t>apply exits</a:t>
             </a:r>
             <a:endParaRPr lang="en-US" sz="1200" dirty="0"/>
           </a:p>
-        </p:txBody>
-      </p:sp>
-      <p:sp>
-        <p:nvSpPr>
-          <p:cNvPr id="14" name="Shape 12"/>
-          <p:cNvSpPr/>
-          <p:nvPr/>
-        </p:nvSpPr>
-        <p:spPr>
-          <a:xfrm>
-            <a:off x="457200" y="2944368"/>
-            <a:ext cx="6040984" cy="3639312"/>
-          </a:xfrm>
-          <a:prstGeom prst="rect">
-            <a:avLst/>
-          </a:prstGeom>
-          <a:solidFill>
-            <a:srgbClr val="C0EDF5"/>
-          </a:solidFill>
-          <a:ln w="9525">
-            <a:solidFill>
-              <a:srgbClr val="007A90"/>
-            </a:solidFill>
-            <a:prstDash val="solid"/>
-          </a:ln>
-        </p:spPr>
-      </p:sp>
-      <p:sp>
-        <p:nvSpPr>
-          <p:cNvPr id="15" name="Text 13"/>
-          <p:cNvSpPr/>
-          <p:nvPr/>
-        </p:nvSpPr>
-        <p:spPr>
-          <a:xfrm>
-            <a:off x="640080" y="3081528"/>
-            <a:ext cx="5675224" cy="3364992"/>
-          </a:xfrm>
-          <a:prstGeom prst="rect">
-            <a:avLst/>
-          </a:prstGeom>
-          <a:noFill/>
-          <a:ln/>
-        </p:spPr>
-        <p:txBody>
-          <a:bodyPr wrap="none" rtlCol="0" anchor="t"/>
-          <a:lstStyle/>
-          <a:p>
-            <a:pPr indent="0" marL="0">
-              <a:buNone/>
-            </a:pPr>
-            <a:r>
-              <a:rPr lang="en-US" sz="1300" dirty="0">
-                <a:solidFill>
-                  <a:srgbClr val="003848"/>
-                </a:solidFill>
-                <a:latin typeface="Courier New" pitchFamily="34" charset="0"/>
-                <a:ea typeface="Courier New" pitchFamily="34" charset="-122"/>
-                <a:cs typeface="Courier New" pitchFamily="34" charset="-120"/>
-              </a:rPr>
-              <a:t>spec:</a:t>
-            </a:r>
-            <a:endParaRPr lang="en-US" sz="1300" dirty="0"/>
-          </a:p>
-          <a:p>
-            <a:pPr indent="0" marL="0">
-              <a:buNone/>
-            </a:pPr>
-            <a:r>
-              <a:rPr lang="en-US" sz="1300" dirty="0">
-                <a:solidFill>
-                  <a:srgbClr val="003848"/>
-                </a:solidFill>
-                <a:latin typeface="Courier New" pitchFamily="34" charset="0"/>
-                <a:ea typeface="Courier New" pitchFamily="34" charset="-122"/>
-                <a:cs typeface="Courier New" pitchFamily="34" charset="-120"/>
-              </a:rPr>
-              <a:t>  replicas: 3</a:t>
-            </a:r>
-            <a:endParaRPr lang="en-US" sz="1300" dirty="0"/>
-          </a:p>
-          <a:p>
-            <a:pPr indent="0" marL="0">
-              <a:buNone/>
-            </a:pPr>
-            <a:r>
-              <a:rPr lang="en-US" sz="1300" dirty="0">
-                <a:solidFill>
-                  <a:srgbClr val="003848"/>
-                </a:solidFill>
-                <a:latin typeface="Courier New" pitchFamily="34" charset="0"/>
-                <a:ea typeface="Courier New" pitchFamily="34" charset="-122"/>
-                <a:cs typeface="Courier New" pitchFamily="34" charset="-120"/>
-              </a:rPr>
-              <a:t>  selector:</a:t>
-            </a:r>
-            <a:endParaRPr lang="en-US" sz="1300" dirty="0"/>
-          </a:p>
-          <a:p>
-            <a:pPr indent="0" marL="0">
-              <a:buNone/>
-            </a:pPr>
-            <a:r>
-              <a:rPr lang="en-US" sz="1300" dirty="0">
-                <a:solidFill>
-                  <a:srgbClr val="003848"/>
-                </a:solidFill>
-                <a:latin typeface="Courier New" pitchFamily="34" charset="0"/>
-                <a:ea typeface="Courier New" pitchFamily="34" charset="-122"/>
-                <a:cs typeface="Courier New" pitchFamily="34" charset="-120"/>
-              </a:rPr>
-              <a:t>    matchLabels:</a:t>
-            </a:r>
-            <a:endParaRPr lang="en-US" sz="1300" dirty="0"/>
-          </a:p>
-          <a:p>
-            <a:pPr indent="0" marL="0">
-              <a:buNone/>
-            </a:pPr>
-            <a:r>
-              <a:rPr lang="en-US" sz="1300" dirty="0">
-                <a:solidFill>
-                  <a:srgbClr val="003848"/>
-                </a:solidFill>
-                <a:latin typeface="Courier New" pitchFamily="34" charset="0"/>
-                <a:ea typeface="Courier New" pitchFamily="34" charset="-122"/>
-                <a:cs typeface="Courier New" pitchFamily="34" charset="-120"/>
-              </a:rPr>
-              <a:t>      app: hello</a:t>
-            </a:r>
-            <a:endParaRPr lang="en-US" sz="1300" dirty="0"/>
-          </a:p>
-          <a:p>
-            <a:pPr indent="0" marL="0">
-              <a:buNone/>
-            </a:pPr>
-            <a:r>
-              <a:rPr lang="en-US" sz="1300" dirty="0">
-                <a:solidFill>
-                  <a:srgbClr val="003848"/>
-                </a:solidFill>
-                <a:latin typeface="Courier New" pitchFamily="34" charset="0"/>
-                <a:ea typeface="Courier New" pitchFamily="34" charset="-122"/>
-                <a:cs typeface="Courier New" pitchFamily="34" charset="-120"/>
-              </a:rPr>
-              <a:t>  template:      # a full Pod spec, nested one level deeper</a:t>
-            </a:r>
-            <a:endParaRPr lang="en-US" sz="1300" dirty="0"/>
-          </a:p>
-          <a:p>
-            <a:pPr indent="0" marL="0">
-              <a:buNone/>
-            </a:pPr>
-            <a:r>
-              <a:rPr lang="en-US" sz="1300" dirty="0">
-                <a:solidFill>
-                  <a:srgbClr val="003848"/>
-                </a:solidFill>
-                <a:latin typeface="Courier New" pitchFamily="34" charset="0"/>
-                <a:ea typeface="Courier New" pitchFamily="34" charset="-122"/>
-                <a:cs typeface="Courier New" pitchFamily="34" charset="-120"/>
-              </a:rPr>
-              <a:t>    metadata:</a:t>
-            </a:r>
-            <a:endParaRPr lang="en-US" sz="1300" dirty="0"/>
-          </a:p>
-          <a:p>
-            <a:pPr indent="0" marL="0">
-              <a:buNone/>
-            </a:pPr>
-            <a:r>
-              <a:rPr lang="en-US" sz="1300" dirty="0">
-                <a:solidFill>
-                  <a:srgbClr val="003848"/>
-                </a:solidFill>
-                <a:latin typeface="Courier New" pitchFamily="34" charset="0"/>
-                <a:ea typeface="Courier New" pitchFamily="34" charset="-122"/>
-                <a:cs typeface="Courier New" pitchFamily="34" charset="-120"/>
-              </a:rPr>
-              <a:t>      labels:</a:t>
-            </a:r>
-            <a:endParaRPr lang="en-US" sz="1300" dirty="0"/>
-          </a:p>
-          <a:p>
-            <a:pPr indent="0" marL="0">
-              <a:buNone/>
-            </a:pPr>
-            <a:r>
-              <a:rPr lang="en-US" sz="1300" dirty="0">
-                <a:solidFill>
-                  <a:srgbClr val="003848"/>
-                </a:solidFill>
-                <a:latin typeface="Courier New" pitchFamily="34" charset="0"/>
-                <a:ea typeface="Courier New" pitchFamily="34" charset="-122"/>
-                <a:cs typeface="Courier New" pitchFamily="34" charset="-120"/>
-              </a:rPr>
-              <a:t>        app: hello</a:t>
-            </a:r>
-            <a:endParaRPr lang="en-US" sz="1300" dirty="0"/>
-          </a:p>
-        </p:txBody>
-      </p:sp>
-      <p:sp>
-        <p:nvSpPr>
-          <p:cNvPr id="16" name="Text 14"/>
-          <p:cNvSpPr/>
-          <p:nvPr/>
-        </p:nvSpPr>
-        <p:spPr>
-          <a:xfrm>
-            <a:off x="6818224" y="2944368"/>
-            <a:ext cx="4913528" cy="909828"/>
+          <a:p>
+            <a:pPr algn="ctr" indent="0" marL="0">
+              <a:buNone/>
+            </a:pPr>
+            <a:r>
+              <a:rPr lang="en-US" sz="1200" b="1" dirty="0">
+                <a:solidFill>
+                  <a:srgbClr val="FFFFFF"/>
+                </a:solidFill>
+                <a:latin typeface="Trebuchet MS" pitchFamily="34" charset="0"/>
+                <a:ea typeface="Trebuchet MS" pitchFamily="34" charset="-122"/>
+                <a:cs typeface="Trebuchet MS" pitchFamily="34" charset="-120"/>
+              </a:rPr>
+              <a:t>(nothing left running)</a:t>
+            </a:r>
+            <a:endParaRPr lang="en-US" sz="1200" dirty="0"/>
+          </a:p>
+        </p:txBody>
+      </p:sp>
+      <p:sp>
+        <p:nvSpPr>
+          <p:cNvPr id="14" name="Text 12"/>
+          <p:cNvSpPr/>
+          <p:nvPr/>
+        </p:nvSpPr>
+        <p:spPr>
+          <a:xfrm>
+            <a:off x="457200" y="3218688"/>
+            <a:ext cx="11274552" cy="672998"/>
           </a:xfrm>
           <a:prstGeom prst="rect">
             <a:avLst/>
@@ -5796,7 +5702,7 @@
               <a:buChar char="•"/>
             </a:pPr>
             <a:r>
-              <a:rPr lang="en-US" sz="1500" dirty="0">
+              <a:rPr lang="en-US" sz="1700" dirty="0">
                 <a:solidFill>
                   <a:srgbClr val="0A1A1C"/>
                 </a:solidFill>
@@ -5804,22 +5710,22 @@
                 <a:ea typeface="Trebuchet MS" pitchFamily="34" charset="-122"/>
                 <a:cs typeface="Trebuchet MS" pitchFamily="34" charset="-120"/>
               </a:rPr>
-              <a:t>Deployment doesn't run containers directly — it manages a ReplicaSet, and the ReplicaSet IS a controller: a background process maintaining a fixed Pod count</a:t>
-            </a:r>
-            <a:endParaRPr lang="en-US" sz="1500" dirty="0"/>
-          </a:p>
-        </p:txBody>
-      </p:sp>
-      <p:sp>
-        <p:nvSpPr>
-          <p:cNvPr id="17" name="Text 15"/>
-          <p:cNvSpPr/>
-          <p:nvPr/>
-        </p:nvSpPr>
-        <p:spPr>
-          <a:xfrm>
-            <a:off x="6818224" y="3854196"/>
-            <a:ext cx="4913528" cy="909828"/>
+              <a:t>apply runs exactly once: read the file, create the Pod, exit — nothing stays behind to keep enforcing it</a:t>
+            </a:r>
+            <a:endParaRPr lang="en-US" sz="1700" dirty="0"/>
+          </a:p>
+        </p:txBody>
+      </p:sp>
+      <p:sp>
+        <p:nvSpPr>
+          <p:cNvPr id="15" name="Text 13"/>
+          <p:cNvSpPr/>
+          <p:nvPr/>
+        </p:nvSpPr>
+        <p:spPr>
+          <a:xfrm>
+            <a:off x="457200" y="3891686"/>
+            <a:ext cx="11274552" cy="672998"/>
           </a:xfrm>
           <a:prstGeom prst="rect">
             <a:avLst/>
@@ -5836,7 +5742,7 @@
               <a:buChar char="•"/>
             </a:pPr>
             <a:r>
-              <a:rPr lang="en-US" sz="1500" dirty="0">
+              <a:rPr lang="en-US" sz="1700" dirty="0">
                 <a:solidFill>
                   <a:srgbClr val="0A1A1C"/>
                 </a:solidFill>
@@ -5844,22 +5750,22 @@
                 <a:ea typeface="Trebuchet MS" pitchFamily="34" charset="-122"/>
                 <a:cs typeface="Trebuchet MS" pitchFamily="34" charset="-120"/>
               </a:rPr>
-              <a:t>Delete one managed Pod: it disappears, a brand-new one (new random suffix) appears almost immediately — with no re-apply</a:t>
-            </a:r>
-            <a:endParaRPr lang="en-US" sz="1500" dirty="0"/>
-          </a:p>
-        </p:txBody>
-      </p:sp>
-      <p:sp>
-        <p:nvSpPr>
-          <p:cNvPr id="18" name="Text 16"/>
-          <p:cNvSpPr/>
-          <p:nvPr/>
-        </p:nvSpPr>
-        <p:spPr>
-          <a:xfrm>
-            <a:off x="6818224" y="4764024"/>
-            <a:ext cx="4913528" cy="909828"/>
+              <a:t>The Pod becomes a plain record in etcd with no controller attached to it</a:t>
+            </a:r>
+            <a:endParaRPr lang="en-US" sz="1700" dirty="0"/>
+          </a:p>
+        </p:txBody>
+      </p:sp>
+      <p:sp>
+        <p:nvSpPr>
+          <p:cNvPr id="16" name="Text 14"/>
+          <p:cNvSpPr/>
+          <p:nvPr/>
+        </p:nvSpPr>
+        <p:spPr>
+          <a:xfrm>
+            <a:off x="457200" y="4564685"/>
+            <a:ext cx="11274552" cy="672998"/>
           </a:xfrm>
           <a:prstGeom prst="rect">
             <a:avLst/>
@@ -5876,7 +5782,7 @@
               <a:buChar char="•"/>
             </a:pPr>
             <a:r>
-              <a:rPr lang="en-US" sz="1500" dirty="0">
+              <a:rPr lang="en-US" sz="1700" dirty="0">
                 <a:solidFill>
                   <a:srgbClr val="0A1A1C"/>
                 </a:solidFill>
@@ -5884,22 +5790,22 @@
                 <a:ea typeface="Trebuchet MS" pitchFamily="34" charset="-122"/>
                 <a:cs typeface="Trebuchet MS" pitchFamily="34" charset="-120"/>
               </a:rPr>
-              <a:t>This is the controller piece from Slide 8 made concrete — a bare Pod (Slide 13) has no such process watching it</a:t>
-            </a:r>
-            <a:endParaRPr lang="en-US" sz="1500" dirty="0"/>
-          </a:p>
-        </p:txBody>
-      </p:sp>
-      <p:sp>
-        <p:nvSpPr>
-          <p:cNvPr id="19" name="Text 17"/>
-          <p:cNvSpPr/>
-          <p:nvPr/>
-        </p:nvSpPr>
-        <p:spPr>
-          <a:xfrm>
-            <a:off x="6818224" y="5673852"/>
-            <a:ext cx="4913528" cy="909828"/>
+              <a:t>Nothing is asking "does hello-pod still exist?" on a loop, so nothing notices when the answer becomes no</a:t>
+            </a:r>
+            <a:endParaRPr lang="en-US" sz="1700" dirty="0"/>
+          </a:p>
+        </p:txBody>
+      </p:sp>
+      <p:sp>
+        <p:nvSpPr>
+          <p:cNvPr id="17" name="Text 15"/>
+          <p:cNvSpPr/>
+          <p:nvPr/>
+        </p:nvSpPr>
+        <p:spPr>
+          <a:xfrm>
+            <a:off x="457200" y="5237683"/>
+            <a:ext cx="11274552" cy="672998"/>
           </a:xfrm>
           <a:prstGeom prst="rect">
             <a:avLst/>
@@ -5916,7 +5822,7 @@
               <a:buChar char="•"/>
             </a:pPr>
             <a:r>
-              <a:rPr lang="en-US" sz="1500" dirty="0">
+              <a:rPr lang="en-US" sz="1700" dirty="0">
                 <a:solidFill>
                   <a:srgbClr val="0A1A1C"/>
                 </a:solidFill>
@@ -5924,9 +5830,49 @@
                 <a:ea typeface="Trebuchet MS" pitchFamily="34" charset="-122"/>
                 <a:cs typeface="Trebuchet MS" pitchFamily="34" charset="-120"/>
               </a:rPr>
-              <a:t>kubectl scale --replicas=5 just changes what "desired" means; the same controller loop does the rest</a:t>
-            </a:r>
-            <a:endParaRPr lang="en-US" sz="1500" dirty="0"/>
+              <a:t>pod.yaml on your laptop only mattered at the moment you ran apply — after that it has no ongoing connection to the cluster</a:t>
+            </a:r>
+            <a:endParaRPr lang="en-US" sz="1700" dirty="0"/>
+          </a:p>
+        </p:txBody>
+      </p:sp>
+      <p:sp>
+        <p:nvSpPr>
+          <p:cNvPr id="18" name="Text 16"/>
+          <p:cNvSpPr/>
+          <p:nvPr/>
+        </p:nvSpPr>
+        <p:spPr>
+          <a:xfrm>
+            <a:off x="457200" y="5910682"/>
+            <a:ext cx="11274552" cy="672998"/>
+          </a:xfrm>
+          <a:prstGeom prst="rect">
+            <a:avLst/>
+          </a:prstGeom>
+          <a:noFill/>
+          <a:ln/>
+        </p:spPr>
+        <p:txBody>
+          <a:bodyPr wrap="square" rtlCol="0" anchor="ctr"/>
+          <a:lstStyle/>
+          <a:p>
+            <a:pPr marL="254000" indent="-254000">
+              <a:buSzPct val="100000"/>
+              <a:buChar char="•"/>
+            </a:pPr>
+            <a:r>
+              <a:rPr lang="en-US" sz="1700" dirty="0">
+                <a:solidFill>
+                  <a:srgbClr val="0A1A1C"/>
+                </a:solidFill>
+                <a:latin typeface="Trebuchet MS" pitchFamily="34" charset="0"/>
+                <a:ea typeface="Trebuchet MS" pitchFamily="34" charset="-122"/>
+                <a:cs typeface="Trebuchet MS" pitchFamily="34" charset="-120"/>
+              </a:rPr>
+              <a:t>Not a bug — it's the exact gap a controller is built to close, which is exactly what a Deployment adds</a:t>
+            </a:r>
+            <a:endParaRPr lang="en-US" sz="1700" dirty="0"/>
           </a:p>
         </p:txBody>
       </p:sp>
@@ -5941,6 +5887,802 @@
 <file path=ppt/slides/slide15.xml><?xml version="1.0" encoding="utf-8"?>
 <p:sld xmlns:a="http://schemas.openxmlformats.org/drawingml/2006/main" xmlns:r="http://schemas.openxmlformats.org/officeDocument/2006/relationships" xmlns:p="http://schemas.openxmlformats.org/presentationml/2006/main">
   <p:cSld name="Slide 15">
+    <p:bg>
+      <p:bgPr>
+        <a:solidFill>
+          <a:srgbClr val="EAFCFF"/>
+        </a:solidFill>
+      </p:bgPr>
+    </p:bg>
+    <p:spTree>
+      <p:nvGrpSpPr>
+        <p:cNvPr id="1" name=""/>
+        <p:cNvGrpSpPr/>
+        <p:nvPr/>
+      </p:nvGrpSpPr>
+      <p:grpSpPr>
+        <a:xfrm>
+          <a:off x="0" y="0"/>
+          <a:ext cx="0" cy="0"/>
+          <a:chOff x="0" y="0"/>
+          <a:chExt cx="0" cy="0"/>
+        </a:xfrm>
+      </p:grpSpPr>
+      <p:sp>
+        <p:nvSpPr>
+          <p:cNvPr id="2" name="Shape 0"/>
+          <p:cNvSpPr/>
+          <p:nvPr/>
+        </p:nvSpPr>
+        <p:spPr>
+          <a:xfrm>
+            <a:off x="457200" y="201168"/>
+            <a:ext cx="1828800" cy="347472"/>
+          </a:xfrm>
+          <a:prstGeom prst="rect">
+            <a:avLst/>
+          </a:prstGeom>
+          <a:solidFill>
+            <a:srgbClr val="007A90"/>
+          </a:solidFill>
+          <a:ln w="9525">
+            <a:solidFill>
+              <a:srgbClr val="007A90"/>
+            </a:solidFill>
+            <a:prstDash val="solid"/>
+          </a:ln>
+        </p:spPr>
+      </p:sp>
+      <p:sp>
+        <p:nvSpPr>
+          <p:cNvPr id="3" name="Text 1"/>
+          <p:cNvSpPr/>
+          <p:nvPr/>
+        </p:nvSpPr>
+        <p:spPr>
+          <a:xfrm>
+            <a:off x="457200" y="201168"/>
+            <a:ext cx="1828800" cy="347472"/>
+          </a:xfrm>
+          <a:prstGeom prst="rect">
+            <a:avLst/>
+          </a:prstGeom>
+          <a:noFill/>
+          <a:ln/>
+        </p:spPr>
+        <p:txBody>
+          <a:bodyPr wrap="square" rtlCol="0" anchor="ctr"/>
+          <a:lstStyle/>
+          <a:p>
+            <a:pPr algn="ctr" indent="0" marL="0">
+              <a:buNone/>
+            </a:pPr>
+            <a:r>
+              <a:rPr lang="en-US" sz="1200" b="1" spc="50" kern="0" dirty="0">
+                <a:solidFill>
+                  <a:srgbClr val="FFFFFF"/>
+                </a:solidFill>
+                <a:latin typeface="Trebuchet MS" pitchFamily="34" charset="0"/>
+                <a:ea typeface="Trebuchet MS" pitchFamily="34" charset="-122"/>
+                <a:cs typeface="Trebuchet MS" pitchFamily="34" charset="-120"/>
+              </a:rPr>
+              <a:t>KUBERNETES</a:t>
+            </a:r>
+            <a:endParaRPr lang="en-US" sz="1200" dirty="0"/>
+          </a:p>
+        </p:txBody>
+      </p:sp>
+      <p:sp>
+        <p:nvSpPr>
+          <p:cNvPr id="4" name="Text 2"/>
+          <p:cNvSpPr/>
+          <p:nvPr/>
+        </p:nvSpPr>
+        <p:spPr>
+          <a:xfrm>
+            <a:off x="457200" y="658368"/>
+            <a:ext cx="11274552" cy="685800"/>
+          </a:xfrm>
+          <a:prstGeom prst="rect">
+            <a:avLst/>
+          </a:prstGeom>
+          <a:noFill/>
+          <a:ln/>
+        </p:spPr>
+        <p:txBody>
+          <a:bodyPr wrap="square" rtlCol="0" anchor="ctr"/>
+          <a:lstStyle/>
+          <a:p>
+            <a:pPr indent="0" marL="0">
+              <a:buNone/>
+            </a:pPr>
+            <a:r>
+              <a:rPr lang="en-US" sz="3000" b="1" spc="50" kern="0" dirty="0">
+                <a:solidFill>
+                  <a:srgbClr val="0A1A1C"/>
+                </a:solidFill>
+                <a:latin typeface="Arial Black" pitchFamily="34" charset="0"/>
+                <a:ea typeface="Arial Black" pitchFamily="34" charset="-122"/>
+                <a:cs typeface="Arial Black" pitchFamily="34" charset="-120"/>
+              </a:rPr>
+              <a:t>Deployment → ReplicaSet → Pod</a:t>
+            </a:r>
+            <a:endParaRPr lang="en-US" sz="3000" dirty="0"/>
+          </a:p>
+        </p:txBody>
+      </p:sp>
+      <p:sp>
+        <p:nvSpPr>
+          <p:cNvPr id="5" name="Shape 3"/>
+          <p:cNvSpPr/>
+          <p:nvPr/>
+        </p:nvSpPr>
+        <p:spPr>
+          <a:xfrm>
+            <a:off x="457200" y="1417320"/>
+            <a:ext cx="11274552" cy="27432"/>
+          </a:xfrm>
+          <a:prstGeom prst="rect">
+            <a:avLst/>
+          </a:prstGeom>
+          <a:solidFill>
+            <a:srgbClr val="007A90"/>
+          </a:solidFill>
+          <a:ln w="12700">
+            <a:solidFill>
+              <a:srgbClr val="007A90"/>
+            </a:solidFill>
+            <a:prstDash val="solid"/>
+          </a:ln>
+        </p:spPr>
+      </p:sp>
+      <p:sp>
+        <p:nvSpPr>
+          <p:cNvPr id="6" name="Shape 4"/>
+          <p:cNvSpPr/>
+          <p:nvPr/>
+        </p:nvSpPr>
+        <p:spPr>
+          <a:xfrm>
+            <a:off x="457200" y="1840230"/>
+            <a:ext cx="3526536" cy="653796"/>
+          </a:xfrm>
+          <a:prstGeom prst="roundRect">
+            <a:avLst>
+              <a:gd name="adj" fmla="val 13986"/>
+            </a:avLst>
+          </a:prstGeom>
+          <a:solidFill>
+            <a:srgbClr val="B8ECF5"/>
+          </a:solidFill>
+          <a:ln w="19050">
+            <a:solidFill>
+              <a:srgbClr val="007A90"/>
+            </a:solidFill>
+            <a:prstDash val="solid"/>
+          </a:ln>
+        </p:spPr>
+      </p:sp>
+      <p:sp>
+        <p:nvSpPr>
+          <p:cNvPr id="7" name="Text 5"/>
+          <p:cNvSpPr/>
+          <p:nvPr/>
+        </p:nvSpPr>
+        <p:spPr>
+          <a:xfrm>
+            <a:off x="457200" y="1840230"/>
+            <a:ext cx="3526536" cy="653796"/>
+          </a:xfrm>
+          <a:prstGeom prst="rect">
+            <a:avLst/>
+          </a:prstGeom>
+          <a:noFill/>
+          <a:ln/>
+        </p:spPr>
+        <p:txBody>
+          <a:bodyPr wrap="square" rtlCol="0" anchor="ctr"/>
+          <a:lstStyle/>
+          <a:p>
+            <a:pPr algn="ctr" indent="0" marL="0">
+              <a:buNone/>
+            </a:pPr>
+            <a:r>
+              <a:rPr lang="en-US" sz="1200" b="1" dirty="0">
+                <a:solidFill>
+                  <a:srgbClr val="0A1A1C"/>
+                </a:solidFill>
+                <a:latin typeface="Trebuchet MS" pitchFamily="34" charset="0"/>
+                <a:ea typeface="Trebuchet MS" pitchFamily="34" charset="-122"/>
+                <a:cs typeface="Trebuchet MS" pitchFamily="34" charset="-120"/>
+              </a:rPr>
+              <a:t>Deployment</a:t>
+            </a:r>
+            <a:endParaRPr lang="en-US" sz="1200" dirty="0"/>
+          </a:p>
+        </p:txBody>
+      </p:sp>
+      <p:sp>
+        <p:nvSpPr>
+          <p:cNvPr id="8" name="Text 6"/>
+          <p:cNvSpPr/>
+          <p:nvPr/>
+        </p:nvSpPr>
+        <p:spPr>
+          <a:xfrm>
+            <a:off x="3983736" y="1840230"/>
+            <a:ext cx="347472" cy="653796"/>
+          </a:xfrm>
+          <a:prstGeom prst="rect">
+            <a:avLst/>
+          </a:prstGeom>
+          <a:noFill/>
+          <a:ln/>
+        </p:spPr>
+        <p:txBody>
+          <a:bodyPr wrap="square" rtlCol="0" anchor="ctr"/>
+          <a:lstStyle/>
+          <a:p>
+            <a:pPr algn="ctr" indent="0" marL="0">
+              <a:buNone/>
+            </a:pPr>
+            <a:r>
+              <a:rPr lang="en-US" sz="2200" dirty="0">
+                <a:solidFill>
+                  <a:srgbClr val="007A90"/>
+                </a:solidFill>
+                <a:latin typeface="Trebuchet MS" pitchFamily="34" charset="0"/>
+                <a:ea typeface="Trebuchet MS" pitchFamily="34" charset="-122"/>
+                <a:cs typeface="Trebuchet MS" pitchFamily="34" charset="-120"/>
+              </a:rPr>
+              <a:t>→</a:t>
+            </a:r>
+            <a:endParaRPr lang="en-US" sz="2200" dirty="0"/>
+          </a:p>
+        </p:txBody>
+      </p:sp>
+      <p:sp>
+        <p:nvSpPr>
+          <p:cNvPr id="9" name="Shape 7"/>
+          <p:cNvSpPr/>
+          <p:nvPr/>
+        </p:nvSpPr>
+        <p:spPr>
+          <a:xfrm>
+            <a:off x="4331208" y="1840230"/>
+            <a:ext cx="3526536" cy="653796"/>
+          </a:xfrm>
+          <a:prstGeom prst="roundRect">
+            <a:avLst>
+              <a:gd name="adj" fmla="val 13986"/>
+            </a:avLst>
+          </a:prstGeom>
+          <a:solidFill>
+            <a:srgbClr val="B8ECF5"/>
+          </a:solidFill>
+          <a:ln w="19050">
+            <a:solidFill>
+              <a:srgbClr val="007A90"/>
+            </a:solidFill>
+            <a:prstDash val="solid"/>
+          </a:ln>
+        </p:spPr>
+      </p:sp>
+      <p:sp>
+        <p:nvSpPr>
+          <p:cNvPr id="10" name="Text 8"/>
+          <p:cNvSpPr/>
+          <p:nvPr/>
+        </p:nvSpPr>
+        <p:spPr>
+          <a:xfrm>
+            <a:off x="4331208" y="1840230"/>
+            <a:ext cx="3526536" cy="653796"/>
+          </a:xfrm>
+          <a:prstGeom prst="rect">
+            <a:avLst/>
+          </a:prstGeom>
+          <a:noFill/>
+          <a:ln/>
+        </p:spPr>
+        <p:txBody>
+          <a:bodyPr wrap="square" rtlCol="0" anchor="ctr"/>
+          <a:lstStyle/>
+          <a:p>
+            <a:pPr algn="ctr" indent="0" marL="0">
+              <a:buNone/>
+            </a:pPr>
+            <a:r>
+              <a:rPr lang="en-US" sz="1200" dirty="0">
+                <a:solidFill>
+                  <a:srgbClr val="0A1A1C"/>
+                </a:solidFill>
+                <a:latin typeface="Trebuchet MS" pitchFamily="34" charset="0"/>
+                <a:ea typeface="Trebuchet MS" pitchFamily="34" charset="-122"/>
+                <a:cs typeface="Trebuchet MS" pitchFamily="34" charset="-120"/>
+              </a:rPr>
+              <a:t>ReplicaSet</a:t>
+            </a:r>
+            <a:endParaRPr lang="en-US" sz="1200" dirty="0"/>
+          </a:p>
+        </p:txBody>
+      </p:sp>
+      <p:sp>
+        <p:nvSpPr>
+          <p:cNvPr id="11" name="Text 9"/>
+          <p:cNvSpPr/>
+          <p:nvPr/>
+        </p:nvSpPr>
+        <p:spPr>
+          <a:xfrm>
+            <a:off x="7857744" y="1840230"/>
+            <a:ext cx="347472" cy="653796"/>
+          </a:xfrm>
+          <a:prstGeom prst="rect">
+            <a:avLst/>
+          </a:prstGeom>
+          <a:noFill/>
+          <a:ln/>
+        </p:spPr>
+        <p:txBody>
+          <a:bodyPr wrap="square" rtlCol="0" anchor="ctr"/>
+          <a:lstStyle/>
+          <a:p>
+            <a:pPr algn="ctr" indent="0" marL="0">
+              <a:buNone/>
+            </a:pPr>
+            <a:r>
+              <a:rPr lang="en-US" sz="2200" dirty="0">
+                <a:solidFill>
+                  <a:srgbClr val="007A90"/>
+                </a:solidFill>
+                <a:latin typeface="Trebuchet MS" pitchFamily="34" charset="0"/>
+                <a:ea typeface="Trebuchet MS" pitchFamily="34" charset="-122"/>
+                <a:cs typeface="Trebuchet MS" pitchFamily="34" charset="-120"/>
+              </a:rPr>
+              <a:t>→</a:t>
+            </a:r>
+            <a:endParaRPr lang="en-US" sz="2200" dirty="0"/>
+          </a:p>
+        </p:txBody>
+      </p:sp>
+      <p:sp>
+        <p:nvSpPr>
+          <p:cNvPr id="12" name="Shape 10"/>
+          <p:cNvSpPr/>
+          <p:nvPr/>
+        </p:nvSpPr>
+        <p:spPr>
+          <a:xfrm>
+            <a:off x="8205216" y="1840230"/>
+            <a:ext cx="3526536" cy="653796"/>
+          </a:xfrm>
+          <a:prstGeom prst="roundRect">
+            <a:avLst>
+              <a:gd name="adj" fmla="val 13986"/>
+            </a:avLst>
+          </a:prstGeom>
+          <a:solidFill>
+            <a:srgbClr val="B8ECF5"/>
+          </a:solidFill>
+          <a:ln w="19050">
+            <a:solidFill>
+              <a:srgbClr val="007A90"/>
+            </a:solidFill>
+            <a:prstDash val="solid"/>
+          </a:ln>
+        </p:spPr>
+      </p:sp>
+      <p:sp>
+        <p:nvSpPr>
+          <p:cNvPr id="13" name="Text 11"/>
+          <p:cNvSpPr/>
+          <p:nvPr/>
+        </p:nvSpPr>
+        <p:spPr>
+          <a:xfrm>
+            <a:off x="8205216" y="1840230"/>
+            <a:ext cx="3526536" cy="653796"/>
+          </a:xfrm>
+          <a:prstGeom prst="rect">
+            <a:avLst/>
+          </a:prstGeom>
+          <a:noFill/>
+          <a:ln/>
+        </p:spPr>
+        <p:txBody>
+          <a:bodyPr wrap="square" rtlCol="0" anchor="ctr"/>
+          <a:lstStyle/>
+          <a:p>
+            <a:pPr algn="ctr" indent="0" marL="0">
+              <a:buNone/>
+            </a:pPr>
+            <a:r>
+              <a:rPr lang="en-US" sz="1200" b="1" dirty="0">
+                <a:solidFill>
+                  <a:srgbClr val="0A1A1C"/>
+                </a:solidFill>
+                <a:latin typeface="Trebuchet MS" pitchFamily="34" charset="0"/>
+                <a:ea typeface="Trebuchet MS" pitchFamily="34" charset="-122"/>
+                <a:cs typeface="Trebuchet MS" pitchFamily="34" charset="-120"/>
+              </a:rPr>
+              <a:t>Pod(s)</a:t>
+            </a:r>
+            <a:endParaRPr lang="en-US" sz="1200" dirty="0"/>
+          </a:p>
+        </p:txBody>
+      </p:sp>
+      <p:sp>
+        <p:nvSpPr>
+          <p:cNvPr id="14" name="Shape 12"/>
+          <p:cNvSpPr/>
+          <p:nvPr/>
+        </p:nvSpPr>
+        <p:spPr>
+          <a:xfrm>
+            <a:off x="457200" y="2944368"/>
+            <a:ext cx="6040984" cy="3639312"/>
+          </a:xfrm>
+          <a:prstGeom prst="rect">
+            <a:avLst/>
+          </a:prstGeom>
+          <a:solidFill>
+            <a:srgbClr val="C0EDF5"/>
+          </a:solidFill>
+          <a:ln w="9525">
+            <a:solidFill>
+              <a:srgbClr val="007A90"/>
+            </a:solidFill>
+            <a:prstDash val="solid"/>
+          </a:ln>
+        </p:spPr>
+      </p:sp>
+      <p:sp>
+        <p:nvSpPr>
+          <p:cNvPr id="15" name="Text 13"/>
+          <p:cNvSpPr/>
+          <p:nvPr/>
+        </p:nvSpPr>
+        <p:spPr>
+          <a:xfrm>
+            <a:off x="640080" y="3081528"/>
+            <a:ext cx="5675224" cy="3364992"/>
+          </a:xfrm>
+          <a:prstGeom prst="rect">
+            <a:avLst/>
+          </a:prstGeom>
+          <a:noFill/>
+          <a:ln/>
+        </p:spPr>
+        <p:txBody>
+          <a:bodyPr wrap="none" rtlCol="0" anchor="t"/>
+          <a:lstStyle/>
+          <a:p>
+            <a:pPr indent="0" marL="0">
+              <a:buNone/>
+            </a:pPr>
+            <a:r>
+              <a:rPr lang="en-US" sz="1300" dirty="0">
+                <a:solidFill>
+                  <a:srgbClr val="003848"/>
+                </a:solidFill>
+                <a:latin typeface="Courier New" pitchFamily="34" charset="0"/>
+                <a:ea typeface="Courier New" pitchFamily="34" charset="-122"/>
+                <a:cs typeface="Courier New" pitchFamily="34" charset="-120"/>
+              </a:rPr>
+              <a:t>spec:</a:t>
+            </a:r>
+            <a:endParaRPr lang="en-US" sz="1300" dirty="0"/>
+          </a:p>
+          <a:p>
+            <a:pPr indent="0" marL="0">
+              <a:buNone/>
+            </a:pPr>
+            <a:r>
+              <a:rPr lang="en-US" sz="1300" dirty="0">
+                <a:solidFill>
+                  <a:srgbClr val="003848"/>
+                </a:solidFill>
+                <a:latin typeface="Courier New" pitchFamily="34" charset="0"/>
+                <a:ea typeface="Courier New" pitchFamily="34" charset="-122"/>
+                <a:cs typeface="Courier New" pitchFamily="34" charset="-120"/>
+              </a:rPr>
+              <a:t>  replicas: 3</a:t>
+            </a:r>
+            <a:endParaRPr lang="en-US" sz="1300" dirty="0"/>
+          </a:p>
+          <a:p>
+            <a:pPr indent="0" marL="0">
+              <a:buNone/>
+            </a:pPr>
+            <a:r>
+              <a:rPr lang="en-US" sz="1300" dirty="0">
+                <a:solidFill>
+                  <a:srgbClr val="003848"/>
+                </a:solidFill>
+                <a:latin typeface="Courier New" pitchFamily="34" charset="0"/>
+                <a:ea typeface="Courier New" pitchFamily="34" charset="-122"/>
+                <a:cs typeface="Courier New" pitchFamily="34" charset="-120"/>
+              </a:rPr>
+              <a:t>  selector:</a:t>
+            </a:r>
+            <a:endParaRPr lang="en-US" sz="1300" dirty="0"/>
+          </a:p>
+          <a:p>
+            <a:pPr indent="0" marL="0">
+              <a:buNone/>
+            </a:pPr>
+            <a:r>
+              <a:rPr lang="en-US" sz="1300" dirty="0">
+                <a:solidFill>
+                  <a:srgbClr val="003848"/>
+                </a:solidFill>
+                <a:latin typeface="Courier New" pitchFamily="34" charset="0"/>
+                <a:ea typeface="Courier New" pitchFamily="34" charset="-122"/>
+                <a:cs typeface="Courier New" pitchFamily="34" charset="-120"/>
+              </a:rPr>
+              <a:t>    matchLabels:</a:t>
+            </a:r>
+            <a:endParaRPr lang="en-US" sz="1300" dirty="0"/>
+          </a:p>
+          <a:p>
+            <a:pPr indent="0" marL="0">
+              <a:buNone/>
+            </a:pPr>
+            <a:r>
+              <a:rPr lang="en-US" sz="1300" dirty="0">
+                <a:solidFill>
+                  <a:srgbClr val="003848"/>
+                </a:solidFill>
+                <a:latin typeface="Courier New" pitchFamily="34" charset="0"/>
+                <a:ea typeface="Courier New" pitchFamily="34" charset="-122"/>
+                <a:cs typeface="Courier New" pitchFamily="34" charset="-120"/>
+              </a:rPr>
+              <a:t>      app: hello</a:t>
+            </a:r>
+            <a:endParaRPr lang="en-US" sz="1300" dirty="0"/>
+          </a:p>
+          <a:p>
+            <a:pPr indent="0" marL="0">
+              <a:buNone/>
+            </a:pPr>
+            <a:r>
+              <a:rPr lang="en-US" sz="1300" dirty="0">
+                <a:solidFill>
+                  <a:srgbClr val="003848"/>
+                </a:solidFill>
+                <a:latin typeface="Courier New" pitchFamily="34" charset="0"/>
+                <a:ea typeface="Courier New" pitchFamily="34" charset="-122"/>
+                <a:cs typeface="Courier New" pitchFamily="34" charset="-120"/>
+              </a:rPr>
+              <a:t>  template:      # a full Pod spec, nested one level deeper</a:t>
+            </a:r>
+            <a:endParaRPr lang="en-US" sz="1300" dirty="0"/>
+          </a:p>
+          <a:p>
+            <a:pPr indent="0" marL="0">
+              <a:buNone/>
+            </a:pPr>
+            <a:r>
+              <a:rPr lang="en-US" sz="1300" dirty="0">
+                <a:solidFill>
+                  <a:srgbClr val="003848"/>
+                </a:solidFill>
+                <a:latin typeface="Courier New" pitchFamily="34" charset="0"/>
+                <a:ea typeface="Courier New" pitchFamily="34" charset="-122"/>
+                <a:cs typeface="Courier New" pitchFamily="34" charset="-120"/>
+              </a:rPr>
+              <a:t>    metadata:</a:t>
+            </a:r>
+            <a:endParaRPr lang="en-US" sz="1300" dirty="0"/>
+          </a:p>
+          <a:p>
+            <a:pPr indent="0" marL="0">
+              <a:buNone/>
+            </a:pPr>
+            <a:r>
+              <a:rPr lang="en-US" sz="1300" dirty="0">
+                <a:solidFill>
+                  <a:srgbClr val="003848"/>
+                </a:solidFill>
+                <a:latin typeface="Courier New" pitchFamily="34" charset="0"/>
+                <a:ea typeface="Courier New" pitchFamily="34" charset="-122"/>
+                <a:cs typeface="Courier New" pitchFamily="34" charset="-120"/>
+              </a:rPr>
+              <a:t>      labels:</a:t>
+            </a:r>
+            <a:endParaRPr lang="en-US" sz="1300" dirty="0"/>
+          </a:p>
+          <a:p>
+            <a:pPr indent="0" marL="0">
+              <a:buNone/>
+            </a:pPr>
+            <a:r>
+              <a:rPr lang="en-US" sz="1300" dirty="0">
+                <a:solidFill>
+                  <a:srgbClr val="003848"/>
+                </a:solidFill>
+                <a:latin typeface="Courier New" pitchFamily="34" charset="0"/>
+                <a:ea typeface="Courier New" pitchFamily="34" charset="-122"/>
+                <a:cs typeface="Courier New" pitchFamily="34" charset="-120"/>
+              </a:rPr>
+              <a:t>        app: hello</a:t>
+            </a:r>
+            <a:endParaRPr lang="en-US" sz="1300" dirty="0"/>
+          </a:p>
+        </p:txBody>
+      </p:sp>
+      <p:sp>
+        <p:nvSpPr>
+          <p:cNvPr id="16" name="Text 14"/>
+          <p:cNvSpPr/>
+          <p:nvPr/>
+        </p:nvSpPr>
+        <p:spPr>
+          <a:xfrm>
+            <a:off x="6818224" y="2944368"/>
+            <a:ext cx="4913528" cy="909828"/>
+          </a:xfrm>
+          <a:prstGeom prst="rect">
+            <a:avLst/>
+          </a:prstGeom>
+          <a:noFill/>
+          <a:ln/>
+        </p:spPr>
+        <p:txBody>
+          <a:bodyPr wrap="square" rtlCol="0" anchor="ctr"/>
+          <a:lstStyle/>
+          <a:p>
+            <a:pPr marL="254000" indent="-254000">
+              <a:buSzPct val="100000"/>
+              <a:buChar char="•"/>
+            </a:pPr>
+            <a:r>
+              <a:rPr lang="en-US" sz="1500" dirty="0">
+                <a:solidFill>
+                  <a:srgbClr val="0A1A1C"/>
+                </a:solidFill>
+                <a:latin typeface="Trebuchet MS" pitchFamily="34" charset="0"/>
+                <a:ea typeface="Trebuchet MS" pitchFamily="34" charset="-122"/>
+                <a:cs typeface="Trebuchet MS" pitchFamily="34" charset="-120"/>
+              </a:rPr>
+              <a:t>Deployment doesn't run containers directly — it manages a ReplicaSet, and the ReplicaSet IS a controller: a background process maintaining a fixed Pod count</a:t>
+            </a:r>
+            <a:endParaRPr lang="en-US" sz="1500" dirty="0"/>
+          </a:p>
+        </p:txBody>
+      </p:sp>
+      <p:sp>
+        <p:nvSpPr>
+          <p:cNvPr id="17" name="Text 15"/>
+          <p:cNvSpPr/>
+          <p:nvPr/>
+        </p:nvSpPr>
+        <p:spPr>
+          <a:xfrm>
+            <a:off x="6818224" y="3854196"/>
+            <a:ext cx="4913528" cy="909828"/>
+          </a:xfrm>
+          <a:prstGeom prst="rect">
+            <a:avLst/>
+          </a:prstGeom>
+          <a:noFill/>
+          <a:ln/>
+        </p:spPr>
+        <p:txBody>
+          <a:bodyPr wrap="square" rtlCol="0" anchor="ctr"/>
+          <a:lstStyle/>
+          <a:p>
+            <a:pPr marL="254000" indent="-254000">
+              <a:buSzPct val="100000"/>
+              <a:buChar char="•"/>
+            </a:pPr>
+            <a:r>
+              <a:rPr lang="en-US" sz="1500" dirty="0">
+                <a:solidFill>
+                  <a:srgbClr val="0A1A1C"/>
+                </a:solidFill>
+                <a:latin typeface="Trebuchet MS" pitchFamily="34" charset="0"/>
+                <a:ea typeface="Trebuchet MS" pitchFamily="34" charset="-122"/>
+                <a:cs typeface="Trebuchet MS" pitchFamily="34" charset="-120"/>
+              </a:rPr>
+              <a:t>Delete one managed Pod: it disappears, a brand-new one (new random suffix) appears almost immediately — with no re-apply</a:t>
+            </a:r>
+            <a:endParaRPr lang="en-US" sz="1500" dirty="0"/>
+          </a:p>
+        </p:txBody>
+      </p:sp>
+      <p:sp>
+        <p:nvSpPr>
+          <p:cNvPr id="18" name="Text 16"/>
+          <p:cNvSpPr/>
+          <p:nvPr/>
+        </p:nvSpPr>
+        <p:spPr>
+          <a:xfrm>
+            <a:off x="6818224" y="4764024"/>
+            <a:ext cx="4913528" cy="909828"/>
+          </a:xfrm>
+          <a:prstGeom prst="rect">
+            <a:avLst/>
+          </a:prstGeom>
+          <a:noFill/>
+          <a:ln/>
+        </p:spPr>
+        <p:txBody>
+          <a:bodyPr wrap="square" rtlCol="0" anchor="ctr"/>
+          <a:lstStyle/>
+          <a:p>
+            <a:pPr marL="254000" indent="-254000">
+              <a:buSzPct val="100000"/>
+              <a:buChar char="•"/>
+            </a:pPr>
+            <a:r>
+              <a:rPr lang="en-US" sz="1500" dirty="0">
+                <a:solidFill>
+                  <a:srgbClr val="0A1A1C"/>
+                </a:solidFill>
+                <a:latin typeface="Trebuchet MS" pitchFamily="34" charset="0"/>
+                <a:ea typeface="Trebuchet MS" pitchFamily="34" charset="-122"/>
+                <a:cs typeface="Trebuchet MS" pitchFamily="34" charset="-120"/>
+              </a:rPr>
+              <a:t>A bare Pod has no such process watching it; a Deployment-managed Pod does — that's the entire difference</a:t>
+            </a:r>
+            <a:endParaRPr lang="en-US" sz="1500" dirty="0"/>
+          </a:p>
+        </p:txBody>
+      </p:sp>
+      <p:sp>
+        <p:nvSpPr>
+          <p:cNvPr id="19" name="Text 17"/>
+          <p:cNvSpPr/>
+          <p:nvPr/>
+        </p:nvSpPr>
+        <p:spPr>
+          <a:xfrm>
+            <a:off x="6818224" y="5673852"/>
+            <a:ext cx="4913528" cy="909828"/>
+          </a:xfrm>
+          <a:prstGeom prst="rect">
+            <a:avLst/>
+          </a:prstGeom>
+          <a:noFill/>
+          <a:ln/>
+        </p:spPr>
+        <p:txBody>
+          <a:bodyPr wrap="square" rtlCol="0" anchor="ctr"/>
+          <a:lstStyle/>
+          <a:p>
+            <a:pPr marL="254000" indent="-254000">
+              <a:buSzPct val="100000"/>
+              <a:buChar char="•"/>
+            </a:pPr>
+            <a:r>
+              <a:rPr lang="en-US" sz="1500" dirty="0">
+                <a:solidFill>
+                  <a:srgbClr val="0A1A1C"/>
+                </a:solidFill>
+                <a:latin typeface="Trebuchet MS" pitchFamily="34" charset="0"/>
+                <a:ea typeface="Trebuchet MS" pitchFamily="34" charset="-122"/>
+                <a:cs typeface="Trebuchet MS" pitchFamily="34" charset="-120"/>
+              </a:rPr>
+              <a:t>kubectl scale --replicas=5 just changes what "desired" means; the same controller loop does the rest</a:t>
+            </a:r>
+            <a:endParaRPr lang="en-US" sz="1500" dirty="0"/>
+          </a:p>
+        </p:txBody>
+      </p:sp>
+    </p:spTree>
+  </p:cSld>
+  <p:clrMapOvr>
+    <a:masterClrMapping/>
+  </p:clrMapOvr>
+</p:sld>
+</file>
+
+<file path=ppt/slides/slide16.xml><?xml version="1.0" encoding="utf-8"?>
+<p:sld xmlns:a="http://schemas.openxmlformats.org/drawingml/2006/main" xmlns:r="http://schemas.openxmlformats.org/officeDocument/2006/relationships" xmlns:p="http://schemas.openxmlformats.org/presentationml/2006/main">
+  <p:cSld name="Slide 16">
     <p:bg>
       <p:bgPr>
         <a:solidFill>
@@ -6064,424 +6806,6 @@
               <a:t>Stable networking, externalized config, and how it all composes.</a:t>
             </a:r>
             <a:endParaRPr lang="en-US" sz="2200" dirty="0"/>
-          </a:p>
-        </p:txBody>
-      </p:sp>
-    </p:spTree>
-  </p:cSld>
-  <p:clrMapOvr>
-    <a:masterClrMapping/>
-  </p:clrMapOvr>
-</p:sld>
-</file>
-
-<file path=ppt/slides/slide16.xml><?xml version="1.0" encoding="utf-8"?>
-<p:sld xmlns:a="http://schemas.openxmlformats.org/drawingml/2006/main" xmlns:r="http://schemas.openxmlformats.org/officeDocument/2006/relationships" xmlns:p="http://schemas.openxmlformats.org/presentationml/2006/main">
-  <p:cSld name="Slide 16">
-    <p:bg>
-      <p:bgPr>
-        <a:solidFill>
-          <a:srgbClr val="EAFCFF"/>
-        </a:solidFill>
-      </p:bgPr>
-    </p:bg>
-    <p:spTree>
-      <p:nvGrpSpPr>
-        <p:cNvPr id="1" name=""/>
-        <p:cNvGrpSpPr/>
-        <p:nvPr/>
-      </p:nvGrpSpPr>
-      <p:grpSpPr>
-        <a:xfrm>
-          <a:off x="0" y="0"/>
-          <a:ext cx="0" cy="0"/>
-          <a:chOff x="0" y="0"/>
-          <a:chExt cx="0" cy="0"/>
-        </a:xfrm>
-      </p:grpSpPr>
-      <p:sp>
-        <p:nvSpPr>
-          <p:cNvPr id="2" name="Shape 0"/>
-          <p:cNvSpPr/>
-          <p:nvPr/>
-        </p:nvSpPr>
-        <p:spPr>
-          <a:xfrm>
-            <a:off x="457200" y="201168"/>
-            <a:ext cx="1828800" cy="347472"/>
-          </a:xfrm>
-          <a:prstGeom prst="rect">
-            <a:avLst/>
-          </a:prstGeom>
-          <a:solidFill>
-            <a:srgbClr val="007A90"/>
-          </a:solidFill>
-          <a:ln w="9525">
-            <a:solidFill>
-              <a:srgbClr val="007A90"/>
-            </a:solidFill>
-            <a:prstDash val="solid"/>
-          </a:ln>
-        </p:spPr>
-      </p:sp>
-      <p:sp>
-        <p:nvSpPr>
-          <p:cNvPr id="3" name="Text 1"/>
-          <p:cNvSpPr/>
-          <p:nvPr/>
-        </p:nvSpPr>
-        <p:spPr>
-          <a:xfrm>
-            <a:off x="457200" y="201168"/>
-            <a:ext cx="1828800" cy="347472"/>
-          </a:xfrm>
-          <a:prstGeom prst="rect">
-            <a:avLst/>
-          </a:prstGeom>
-          <a:noFill/>
-          <a:ln/>
-        </p:spPr>
-        <p:txBody>
-          <a:bodyPr wrap="square" rtlCol="0" anchor="ctr"/>
-          <a:lstStyle/>
-          <a:p>
-            <a:pPr algn="ctr" indent="0" marL="0">
-              <a:buNone/>
-            </a:pPr>
-            <a:r>
-              <a:rPr lang="en-US" sz="1200" b="1" spc="50" kern="0" dirty="0">
-                <a:solidFill>
-                  <a:srgbClr val="FFFFFF"/>
-                </a:solidFill>
-                <a:latin typeface="Trebuchet MS" pitchFamily="34" charset="0"/>
-                <a:ea typeface="Trebuchet MS" pitchFamily="34" charset="-122"/>
-                <a:cs typeface="Trebuchet MS" pitchFamily="34" charset="-120"/>
-              </a:rPr>
-              <a:t>KUBERNETES</a:t>
-            </a:r>
-            <a:endParaRPr lang="en-US" sz="1200" dirty="0"/>
-          </a:p>
-        </p:txBody>
-      </p:sp>
-      <p:sp>
-        <p:nvSpPr>
-          <p:cNvPr id="4" name="Text 2"/>
-          <p:cNvSpPr/>
-          <p:nvPr/>
-        </p:nvSpPr>
-        <p:spPr>
-          <a:xfrm>
-            <a:off x="457200" y="658368"/>
-            <a:ext cx="11274552" cy="685800"/>
-          </a:xfrm>
-          <a:prstGeom prst="rect">
-            <a:avLst/>
-          </a:prstGeom>
-          <a:noFill/>
-          <a:ln/>
-        </p:spPr>
-        <p:txBody>
-          <a:bodyPr wrap="square" rtlCol="0" anchor="ctr"/>
-          <a:lstStyle/>
-          <a:p>
-            <a:pPr indent="0" marL="0">
-              <a:buNone/>
-            </a:pPr>
-            <a:r>
-              <a:rPr lang="en-US" sz="3000" b="1" spc="50" kern="0" dirty="0">
-                <a:solidFill>
-                  <a:srgbClr val="0A1A1C"/>
-                </a:solidFill>
-                <a:latin typeface="Arial Black" pitchFamily="34" charset="0"/>
-                <a:ea typeface="Arial Black" pitchFamily="34" charset="-122"/>
-                <a:cs typeface="Arial Black" pitchFamily="34" charset="-120"/>
-              </a:rPr>
-              <a:t>Services: Stable Addresses Over Disposable Pods</a:t>
-            </a:r>
-            <a:endParaRPr lang="en-US" sz="3000" dirty="0"/>
-          </a:p>
-        </p:txBody>
-      </p:sp>
-      <p:sp>
-        <p:nvSpPr>
-          <p:cNvPr id="5" name="Shape 3"/>
-          <p:cNvSpPr/>
-          <p:nvPr/>
-        </p:nvSpPr>
-        <p:spPr>
-          <a:xfrm>
-            <a:off x="457200" y="1417320"/>
-            <a:ext cx="11274552" cy="27432"/>
-          </a:xfrm>
-          <a:prstGeom prst="rect">
-            <a:avLst/>
-          </a:prstGeom>
-          <a:solidFill>
-            <a:srgbClr val="007A90"/>
-          </a:solidFill>
-          <a:ln w="12700">
-            <a:solidFill>
-              <a:srgbClr val="007A90"/>
-            </a:solidFill>
-            <a:prstDash val="solid"/>
-          </a:ln>
-        </p:spPr>
-      </p:sp>
-      <p:sp>
-        <p:nvSpPr>
-          <p:cNvPr id="6" name="Shape 4"/>
-          <p:cNvSpPr/>
-          <p:nvPr/>
-        </p:nvSpPr>
-        <p:spPr>
-          <a:xfrm>
-            <a:off x="457200" y="1572768"/>
-            <a:ext cx="5477256" cy="5010912"/>
-          </a:xfrm>
-          <a:prstGeom prst="rect">
-            <a:avLst/>
-          </a:prstGeom>
-          <a:solidFill>
-            <a:srgbClr val="C0EDF5"/>
-          </a:solidFill>
-          <a:ln w="9525">
-            <a:solidFill>
-              <a:srgbClr val="007A90"/>
-            </a:solidFill>
-            <a:prstDash val="solid"/>
-          </a:ln>
-        </p:spPr>
-      </p:sp>
-      <p:sp>
-        <p:nvSpPr>
-          <p:cNvPr id="7" name="Text 5"/>
-          <p:cNvSpPr/>
-          <p:nvPr/>
-        </p:nvSpPr>
-        <p:spPr>
-          <a:xfrm>
-            <a:off x="640080" y="1709928"/>
-            <a:ext cx="5111496" cy="4736592"/>
-          </a:xfrm>
-          <a:prstGeom prst="rect">
-            <a:avLst/>
-          </a:prstGeom>
-          <a:noFill/>
-          <a:ln/>
-        </p:spPr>
-        <p:txBody>
-          <a:bodyPr wrap="none" rtlCol="0" anchor="t"/>
-          <a:lstStyle/>
-          <a:p>
-            <a:pPr indent="0" marL="0">
-              <a:buNone/>
-            </a:pPr>
-            <a:r>
-              <a:rPr lang="en-US" sz="1300" dirty="0">
-                <a:solidFill>
-                  <a:srgbClr val="003848"/>
-                </a:solidFill>
-                <a:latin typeface="Courier New" pitchFamily="34" charset="0"/>
-                <a:ea typeface="Courier New" pitchFamily="34" charset="-122"/>
-                <a:cs typeface="Courier New" pitchFamily="34" charset="-120"/>
-              </a:rPr>
-              <a:t>kubectl expose deployment hello-deploy \</a:t>
-            </a:r>
-            <a:endParaRPr lang="en-US" sz="1300" dirty="0"/>
-          </a:p>
-          <a:p>
-            <a:pPr indent="0" marL="0">
-              <a:buNone/>
-            </a:pPr>
-            <a:r>
-              <a:rPr lang="en-US" sz="1300" dirty="0">
-                <a:solidFill>
-                  <a:srgbClr val="003848"/>
-                </a:solidFill>
-                <a:latin typeface="Courier New" pitchFamily="34" charset="0"/>
-                <a:ea typeface="Courier New" pitchFamily="34" charset="-122"/>
-                <a:cs typeface="Courier New" pitchFamily="34" charset="-120"/>
-              </a:rPr>
-              <a:t>  --port=80 --target-port=80 --name=hello-service</a:t>
-            </a:r>
-            <a:endParaRPr lang="en-US" sz="1300" dirty="0"/>
-          </a:p>
-          <a:p>
-            <a:pPr indent="0" marL="0">
-              <a:buNone/>
-            </a:pPr>
-            <a:r>
-              <a:rPr lang="en-US" sz="1300" dirty="0">
-                <a:solidFill>
-                  <a:srgbClr val="003848"/>
-                </a:solidFill>
-                <a:latin typeface="Courier New" pitchFamily="34" charset="0"/>
-                <a:ea typeface="Courier New" pitchFamily="34" charset="-122"/>
-                <a:cs typeface="Courier New" pitchFamily="34" charset="-120"/>
-              </a:rPr>
-              <a:t># → TYPE: ClusterIP   CLUSTER-IP: 10.x.x.x (stays fixed)</a:t>
-            </a:r>
-            <a:endParaRPr lang="en-US" sz="1300" dirty="0"/>
-          </a:p>
-        </p:txBody>
-      </p:sp>
-      <p:sp>
-        <p:nvSpPr>
-          <p:cNvPr id="8" name="Text 6"/>
-          <p:cNvSpPr/>
-          <p:nvPr/>
-        </p:nvSpPr>
-        <p:spPr>
-          <a:xfrm>
-            <a:off x="6254496" y="1572768"/>
-            <a:ext cx="5477256" cy="1252728"/>
-          </a:xfrm>
-          <a:prstGeom prst="rect">
-            <a:avLst/>
-          </a:prstGeom>
-          <a:noFill/>
-          <a:ln/>
-        </p:spPr>
-        <p:txBody>
-          <a:bodyPr wrap="square" rtlCol="0" anchor="ctr"/>
-          <a:lstStyle/>
-          <a:p>
-            <a:pPr marL="254000" indent="-254000">
-              <a:buSzPct val="100000"/>
-              <a:buChar char="•"/>
-            </a:pPr>
-            <a:r>
-              <a:rPr lang="en-US" sz="1700" dirty="0">
-                <a:solidFill>
-                  <a:srgbClr val="0A1A1C"/>
-                </a:solidFill>
-                <a:latin typeface="Trebuchet MS" pitchFamily="34" charset="0"/>
-                <a:ea typeface="Trebuchet MS" pitchFamily="34" charset="-122"/>
-                <a:cs typeface="Trebuchet MS" pitchFamily="34" charset="-120"/>
-              </a:rPr>
-              <a:t>Every Pod gets its own IP, but Pods are disposable — you just proved that</a:t>
-            </a:r>
-            <a:endParaRPr lang="en-US" sz="1700" dirty="0"/>
-          </a:p>
-        </p:txBody>
-      </p:sp>
-      <p:sp>
-        <p:nvSpPr>
-          <p:cNvPr id="9" name="Text 7"/>
-          <p:cNvSpPr/>
-          <p:nvPr/>
-        </p:nvSpPr>
-        <p:spPr>
-          <a:xfrm>
-            <a:off x="6254496" y="2825496"/>
-            <a:ext cx="5477256" cy="1252728"/>
-          </a:xfrm>
-          <a:prstGeom prst="rect">
-            <a:avLst/>
-          </a:prstGeom>
-          <a:noFill/>
-          <a:ln/>
-        </p:spPr>
-        <p:txBody>
-          <a:bodyPr wrap="square" rtlCol="0" anchor="ctr"/>
-          <a:lstStyle/>
-          <a:p>
-            <a:pPr marL="254000" indent="-254000">
-              <a:buSzPct val="100000"/>
-              <a:buChar char="•"/>
-            </a:pPr>
-            <a:r>
-              <a:rPr lang="en-US" sz="1700" dirty="0">
-                <a:solidFill>
-                  <a:srgbClr val="0A1A1C"/>
-                </a:solidFill>
-                <a:latin typeface="Trebuchet MS" pitchFamily="34" charset="0"/>
-                <a:ea typeface="Trebuchet MS" pitchFamily="34" charset="-122"/>
-                <a:cs typeface="Trebuchet MS" pitchFamily="34" charset="-120"/>
-              </a:rPr>
-              <a:t>A Service is a permanent address that tracks whichever Pods match its label selector</a:t>
-            </a:r>
-            <a:endParaRPr lang="en-US" sz="1700" dirty="0"/>
-          </a:p>
-        </p:txBody>
-      </p:sp>
-      <p:sp>
-        <p:nvSpPr>
-          <p:cNvPr id="10" name="Text 8"/>
-          <p:cNvSpPr/>
-          <p:nvPr/>
-        </p:nvSpPr>
-        <p:spPr>
-          <a:xfrm>
-            <a:off x="6254496" y="4078224"/>
-            <a:ext cx="5477256" cy="1252728"/>
-          </a:xfrm>
-          <a:prstGeom prst="rect">
-            <a:avLst/>
-          </a:prstGeom>
-          <a:noFill/>
-          <a:ln/>
-        </p:spPr>
-        <p:txBody>
-          <a:bodyPr wrap="square" rtlCol="0" anchor="ctr"/>
-          <a:lstStyle/>
-          <a:p>
-            <a:pPr marL="254000" indent="-254000">
-              <a:buSzPct val="100000"/>
-              <a:buChar char="•"/>
-            </a:pPr>
-            <a:r>
-              <a:rPr lang="en-US" sz="1700" dirty="0">
-                <a:solidFill>
-                  <a:srgbClr val="0A1A1C"/>
-                </a:solidFill>
-                <a:latin typeface="Trebuchet MS" pitchFamily="34" charset="0"/>
-                <a:ea typeface="Trebuchet MS" pitchFamily="34" charset="-122"/>
-                <a:cs typeface="Trebuchet MS" pitchFamily="34" charset="-120"/>
-              </a:rPr>
-              <a:t>ClusterIP (default) — internal-only; NodePort — opens a port in the 30000–32767 range for external access</a:t>
-            </a:r>
-            <a:endParaRPr lang="en-US" sz="1700" dirty="0"/>
-          </a:p>
-        </p:txBody>
-      </p:sp>
-      <p:sp>
-        <p:nvSpPr>
-          <p:cNvPr id="11" name="Text 9"/>
-          <p:cNvSpPr/>
-          <p:nvPr/>
-        </p:nvSpPr>
-        <p:spPr>
-          <a:xfrm>
-            <a:off x="6254496" y="5330952"/>
-            <a:ext cx="5477256" cy="1252728"/>
-          </a:xfrm>
-          <a:prstGeom prst="rect">
-            <a:avLst/>
-          </a:prstGeom>
-          <a:noFill/>
-          <a:ln/>
-        </p:spPr>
-        <p:txBody>
-          <a:bodyPr wrap="square" rtlCol="0" anchor="ctr"/>
-          <a:lstStyle/>
-          <a:p>
-            <a:pPr marL="254000" indent="-254000">
-              <a:buSzPct val="100000"/>
-              <a:buChar char="•"/>
-            </a:pPr>
-            <a:r>
-              <a:rPr lang="en-US" sz="1700" dirty="0">
-                <a:solidFill>
-                  <a:srgbClr val="0A1A1C"/>
-                </a:solidFill>
-                <a:latin typeface="Trebuchet MS" pitchFamily="34" charset="0"/>
-                <a:ea typeface="Trebuchet MS" pitchFamily="34" charset="-122"/>
-                <a:cs typeface="Trebuchet MS" pitchFamily="34" charset="-120"/>
-              </a:rPr>
-              <a:t>Proof: delete a Pod behind a Service — CLUSTER-IP stays exactly the same the whole time</a:t>
-            </a:r>
-            <a:endParaRPr lang="en-US" sz="1700" dirty="0"/>
           </a:p>
         </p:txBody>
       </p:sp>
@@ -6614,7 +6938,7 @@
                 <a:ea typeface="Arial Black" pitchFamily="34" charset="-122"/>
                 <a:cs typeface="Arial Black" pitchFamily="34" charset="-120"/>
               </a:rPr>
-              <a:t>ConfigMaps &amp; Secrets: Externalizing Config</a:t>
+              <a:t>Services: Stable Addresses Over Disposable Pods</a:t>
             </a:r>
             <a:endParaRPr lang="en-US" sz="3000" dirty="0"/>
           </a:p>
@@ -6647,14 +6971,112 @@
       </p:sp>
       <p:sp>
         <p:nvSpPr>
-          <p:cNvPr id="6" name="Text 4"/>
+          <p:cNvPr id="6" name="Shape 4"/>
           <p:cNvSpPr/>
           <p:nvPr/>
         </p:nvSpPr>
         <p:spPr>
           <a:xfrm>
             <a:off x="457200" y="1572768"/>
-            <a:ext cx="11274552" cy="1252728"/>
+            <a:ext cx="5477256" cy="5010912"/>
+          </a:xfrm>
+          <a:prstGeom prst="rect">
+            <a:avLst/>
+          </a:prstGeom>
+          <a:solidFill>
+            <a:srgbClr val="C0EDF5"/>
+          </a:solidFill>
+          <a:ln w="9525">
+            <a:solidFill>
+              <a:srgbClr val="007A90"/>
+            </a:solidFill>
+            <a:prstDash val="solid"/>
+          </a:ln>
+        </p:spPr>
+      </p:sp>
+      <p:sp>
+        <p:nvSpPr>
+          <p:cNvPr id="7" name="Text 5"/>
+          <p:cNvSpPr/>
+          <p:nvPr/>
+        </p:nvSpPr>
+        <p:spPr>
+          <a:xfrm>
+            <a:off x="640080" y="1709928"/>
+            <a:ext cx="5111496" cy="4736592"/>
+          </a:xfrm>
+          <a:prstGeom prst="rect">
+            <a:avLst/>
+          </a:prstGeom>
+          <a:noFill/>
+          <a:ln/>
+        </p:spPr>
+        <p:txBody>
+          <a:bodyPr wrap="none" rtlCol="0" anchor="t"/>
+          <a:lstStyle/>
+          <a:p>
+            <a:pPr indent="0" marL="0">
+              <a:buNone/>
+            </a:pPr>
+            <a:r>
+              <a:rPr lang="en-US" sz="1300" dirty="0">
+                <a:solidFill>
+                  <a:srgbClr val="003848"/>
+                </a:solidFill>
+                <a:latin typeface="Courier New" pitchFamily="34" charset="0"/>
+                <a:ea typeface="Courier New" pitchFamily="34" charset="-122"/>
+                <a:cs typeface="Courier New" pitchFamily="34" charset="-120"/>
+              </a:rPr>
+              <a:t>kubectl expose deployment hello-deploy \</a:t>
+            </a:r>
+            <a:endParaRPr lang="en-US" sz="1300" dirty="0"/>
+          </a:p>
+          <a:p>
+            <a:pPr indent="0" marL="0">
+              <a:buNone/>
+            </a:pPr>
+            <a:r>
+              <a:rPr lang="en-US" sz="1300" dirty="0">
+                <a:solidFill>
+                  <a:srgbClr val="003848"/>
+                </a:solidFill>
+                <a:latin typeface="Courier New" pitchFamily="34" charset="0"/>
+                <a:ea typeface="Courier New" pitchFamily="34" charset="-122"/>
+                <a:cs typeface="Courier New" pitchFamily="34" charset="-120"/>
+              </a:rPr>
+              <a:t>  --port=80 --target-port=80 --name=hello-service</a:t>
+            </a:r>
+            <a:endParaRPr lang="en-US" sz="1300" dirty="0"/>
+          </a:p>
+          <a:p>
+            <a:pPr indent="0" marL="0">
+              <a:buNone/>
+            </a:pPr>
+            <a:r>
+              <a:rPr lang="en-US" sz="1300" dirty="0">
+                <a:solidFill>
+                  <a:srgbClr val="003848"/>
+                </a:solidFill>
+                <a:latin typeface="Courier New" pitchFamily="34" charset="0"/>
+                <a:ea typeface="Courier New" pitchFamily="34" charset="-122"/>
+                <a:cs typeface="Courier New" pitchFamily="34" charset="-120"/>
+              </a:rPr>
+              <a:t># → TYPE: ClusterIP   CLUSTER-IP: 10.x.x.x (stays fixed)</a:t>
+            </a:r>
+            <a:endParaRPr lang="en-US" sz="1300" dirty="0"/>
+          </a:p>
+        </p:txBody>
+      </p:sp>
+      <p:sp>
+        <p:nvSpPr>
+          <p:cNvPr id="8" name="Text 6"/>
+          <p:cNvSpPr/>
+          <p:nvPr/>
+        </p:nvSpPr>
+        <p:spPr>
+          <a:xfrm>
+            <a:off x="6254496" y="1572768"/>
+            <a:ext cx="5477256" cy="1252728"/>
           </a:xfrm>
           <a:prstGeom prst="rect">
             <a:avLst/>
@@ -6671,7 +7093,7 @@
               <a:buChar char="•"/>
             </a:pPr>
             <a:r>
-              <a:rPr lang="en-US" sz="2200" dirty="0">
+              <a:rPr lang="en-US" sz="1700" dirty="0">
                 <a:solidFill>
                   <a:srgbClr val="0A1A1C"/>
                 </a:solidFill>
@@ -6679,22 +7101,22 @@
                 <a:ea typeface="Trebuchet MS" pitchFamily="34" charset="-122"/>
                 <a:cs typeface="Trebuchet MS" pitchFamily="34" charset="-120"/>
               </a:rPr>
-              <a:t>Same container image should run unmodified across dev, staging, prod — only config and credentials should differ</a:t>
-            </a:r>
-            <a:endParaRPr lang="en-US" sz="2200" dirty="0"/>
-          </a:p>
-        </p:txBody>
-      </p:sp>
-      <p:sp>
-        <p:nvSpPr>
-          <p:cNvPr id="7" name="Text 5"/>
-          <p:cNvSpPr/>
-          <p:nvPr/>
-        </p:nvSpPr>
-        <p:spPr>
-          <a:xfrm>
-            <a:off x="457200" y="2825496"/>
-            <a:ext cx="11274552" cy="1252728"/>
+              <a:t>Every Pod gets its own IP, but Pods are disposable — you just proved that</a:t>
+            </a:r>
+            <a:endParaRPr lang="en-US" sz="1700" dirty="0"/>
+          </a:p>
+        </p:txBody>
+      </p:sp>
+      <p:sp>
+        <p:nvSpPr>
+          <p:cNvPr id="9" name="Text 7"/>
+          <p:cNvSpPr/>
+          <p:nvPr/>
+        </p:nvSpPr>
+        <p:spPr>
+          <a:xfrm>
+            <a:off x="6254496" y="2825496"/>
+            <a:ext cx="5477256" cy="1252728"/>
           </a:xfrm>
           <a:prstGeom prst="rect">
             <a:avLst/>
@@ -6711,7 +7133,7 @@
               <a:buChar char="•"/>
             </a:pPr>
             <a:r>
-              <a:rPr lang="en-US" sz="2200" dirty="0">
+              <a:rPr lang="en-US" sz="1700" dirty="0">
                 <a:solidFill>
                   <a:srgbClr val="0A1A1C"/>
                 </a:solidFill>
@@ -6719,22 +7141,22 @@
                 <a:ea typeface="Trebuchet MS" pitchFamily="34" charset="-122"/>
                 <a:cs typeface="Trebuchet MS" pitchFamily="34" charset="-120"/>
               </a:rPr>
-              <a:t>ConfigMap = plain configuration; Secret = sensitive values — same injection mechanism for both</a:t>
-            </a:r>
-            <a:endParaRPr lang="en-US" sz="2200" dirty="0"/>
-          </a:p>
-        </p:txBody>
-      </p:sp>
-      <p:sp>
-        <p:nvSpPr>
-          <p:cNvPr id="8" name="Text 6"/>
-          <p:cNvSpPr/>
-          <p:nvPr/>
-        </p:nvSpPr>
-        <p:spPr>
-          <a:xfrm>
-            <a:off x="457200" y="4078224"/>
-            <a:ext cx="11274552" cy="1252728"/>
+              <a:t>A Service is a permanent address that tracks whichever Pods match its label selector</a:t>
+            </a:r>
+            <a:endParaRPr lang="en-US" sz="1700" dirty="0"/>
+          </a:p>
+        </p:txBody>
+      </p:sp>
+      <p:sp>
+        <p:nvSpPr>
+          <p:cNvPr id="10" name="Text 8"/>
+          <p:cNvSpPr/>
+          <p:nvPr/>
+        </p:nvSpPr>
+        <p:spPr>
+          <a:xfrm>
+            <a:off x="6254496" y="4078224"/>
+            <a:ext cx="5477256" cy="1252728"/>
           </a:xfrm>
           <a:prstGeom prst="rect">
             <a:avLst/>
@@ -6751,7 +7173,7 @@
               <a:buChar char="•"/>
             </a:pPr>
             <a:r>
-              <a:rPr lang="en-US" sz="2200" dirty="0">
+              <a:rPr lang="en-US" sz="1700" dirty="0">
                 <a:solidFill>
                   <a:srgbClr val="0A1A1C"/>
                 </a:solidFill>
@@ -6759,22 +7181,22 @@
                 <a:ea typeface="Trebuchet MS" pitchFamily="34" charset="-122"/>
                 <a:cs typeface="Trebuchet MS" pitchFamily="34" charset="-120"/>
               </a:rPr>
-              <a:t>Both referenced from a Pod via valueFrom.configMapKeyRef / valueFrom.secretKeyRef, injected as env vars at startup</a:t>
-            </a:r>
-            <a:endParaRPr lang="en-US" sz="2200" dirty="0"/>
-          </a:p>
-        </p:txBody>
-      </p:sp>
-      <p:sp>
-        <p:nvSpPr>
-          <p:cNvPr id="9" name="Text 7"/>
-          <p:cNvSpPr/>
-          <p:nvPr/>
-        </p:nvSpPr>
-        <p:spPr>
-          <a:xfrm>
-            <a:off x="457200" y="5330952"/>
-            <a:ext cx="11274552" cy="1252728"/>
+              <a:t>ClusterIP (default) — internal-only; NodePort — opens a port in the 30000–32767 range for external access</a:t>
+            </a:r>
+            <a:endParaRPr lang="en-US" sz="1700" dirty="0"/>
+          </a:p>
+        </p:txBody>
+      </p:sp>
+      <p:sp>
+        <p:nvSpPr>
+          <p:cNvPr id="11" name="Text 9"/>
+          <p:cNvSpPr/>
+          <p:nvPr/>
+        </p:nvSpPr>
+        <p:spPr>
+          <a:xfrm>
+            <a:off x="6254496" y="5330952"/>
+            <a:ext cx="5477256" cy="1252728"/>
           </a:xfrm>
           <a:prstGeom prst="rect">
             <a:avLst/>
@@ -6791,7 +7213,7 @@
               <a:buChar char="•"/>
             </a:pPr>
             <a:r>
-              <a:rPr lang="en-US" sz="2200" dirty="0">
+              <a:rPr lang="en-US" sz="1700" dirty="0">
                 <a:solidFill>
                   <a:srgbClr val="0A1A1C"/>
                 </a:solidFill>
@@ -6799,9 +7221,9 @@
                 <a:ea typeface="Trebuchet MS" pitchFamily="34" charset="-122"/>
                 <a:cs typeface="Trebuchet MS" pitchFamily="34" charset="-120"/>
               </a:rPr>
-              <a:t>Secrets are base64 encoded, not encrypted — anyone with API access can trivially decode them; fine for practice, not for production as-is</a:t>
-            </a:r>
-            <a:endParaRPr lang="en-US" sz="2200" dirty="0"/>
+              <a:t>Proof: delete a Pod behind a Service — CLUSTER-IP stays exactly the same the whole time</a:t>
+            </a:r>
+            <a:endParaRPr lang="en-US" sz="1700" dirty="0"/>
           </a:p>
         </p:txBody>
       </p:sp>
@@ -6934,7 +7356,7 @@
                 <a:ea typeface="Arial Black" pitchFamily="34" charset="-122"/>
                 <a:cs typeface="Arial Black" pitchFamily="34" charset="-120"/>
               </a:rPr>
-              <a:t>The Capstone: Wiring It All Together</a:t>
+              <a:t>ConfigMaps &amp; Secrets: Externalizing Config</a:t>
             </a:r>
             <a:endParaRPr lang="en-US" sz="3000" dirty="0"/>
           </a:p>
@@ -6967,568 +7389,14 @@
       </p:sp>
       <p:sp>
         <p:nvSpPr>
-          <p:cNvPr id="6" name="Shape 4"/>
-          <p:cNvSpPr/>
-          <p:nvPr/>
-        </p:nvSpPr>
-        <p:spPr>
-          <a:xfrm>
-            <a:off x="457200" y="1922526"/>
-            <a:ext cx="1976933" cy="854964"/>
-          </a:xfrm>
-          <a:prstGeom prst="roundRect">
-            <a:avLst>
-              <a:gd name="adj" fmla="val 10695"/>
-            </a:avLst>
-          </a:prstGeom>
-          <a:solidFill>
-            <a:srgbClr val="B8ECF5"/>
-          </a:solidFill>
-          <a:ln w="19050">
-            <a:solidFill>
-              <a:srgbClr val="007A90"/>
-            </a:solidFill>
-            <a:prstDash val="solid"/>
-          </a:ln>
-        </p:spPr>
-      </p:sp>
-      <p:sp>
-        <p:nvSpPr>
-          <p:cNvPr id="7" name="Text 5"/>
-          <p:cNvSpPr/>
-          <p:nvPr/>
-        </p:nvSpPr>
-        <p:spPr>
-          <a:xfrm>
-            <a:off x="457200" y="1922526"/>
-            <a:ext cx="1976933" cy="854964"/>
-          </a:xfrm>
-          <a:prstGeom prst="rect">
-            <a:avLst/>
-          </a:prstGeom>
-          <a:noFill/>
-          <a:ln/>
-        </p:spPr>
-        <p:txBody>
-          <a:bodyPr wrap="square" rtlCol="0" anchor="ctr"/>
-          <a:lstStyle/>
-          <a:p>
-            <a:pPr algn="ctr" indent="0" marL="0">
-              <a:buNone/>
-            </a:pPr>
-            <a:r>
-              <a:rPr lang="en-US" sz="1100" b="1" dirty="0">
-                <a:solidFill>
-                  <a:srgbClr val="0A1A1C"/>
-                </a:solidFill>
-                <a:latin typeface="Trebuchet MS" pitchFamily="34" charset="0"/>
-                <a:ea typeface="Trebuchet MS" pitchFamily="34" charset="-122"/>
-                <a:cs typeface="Trebuchet MS" pitchFamily="34" charset="-120"/>
-              </a:rPr>
-              <a:t>Secret</a:t>
-            </a:r>
-            <a:endParaRPr lang="en-US" sz="1100" dirty="0"/>
-          </a:p>
-          <a:p>
-            <a:pPr algn="ctr" indent="0" marL="0">
-              <a:buNone/>
-            </a:pPr>
-            <a:r>
-              <a:rPr lang="en-US" sz="1100" b="1" dirty="0">
-                <a:solidFill>
-                  <a:srgbClr val="0A1A1C"/>
-                </a:solidFill>
-                <a:latin typeface="Trebuchet MS" pitchFamily="34" charset="0"/>
-                <a:ea typeface="Trebuchet MS" pitchFamily="34" charset="-122"/>
-                <a:cs typeface="Trebuchet MS" pitchFamily="34" charset="-120"/>
-              </a:rPr>
-              <a:t>(mongo creds)</a:t>
-            </a:r>
-            <a:endParaRPr lang="en-US" sz="1100" dirty="0"/>
-          </a:p>
-        </p:txBody>
-      </p:sp>
-      <p:sp>
-        <p:nvSpPr>
-          <p:cNvPr id="8" name="Text 6"/>
-          <p:cNvSpPr/>
-          <p:nvPr/>
-        </p:nvSpPr>
-        <p:spPr>
-          <a:xfrm>
-            <a:off x="2434133" y="1922526"/>
-            <a:ext cx="347472" cy="854964"/>
-          </a:xfrm>
-          <a:prstGeom prst="rect">
-            <a:avLst/>
-          </a:prstGeom>
-          <a:noFill/>
-          <a:ln/>
-        </p:spPr>
-        <p:txBody>
-          <a:bodyPr wrap="square" rtlCol="0" anchor="ctr"/>
-          <a:lstStyle/>
-          <a:p>
-            <a:pPr algn="ctr" indent="0" marL="0">
-              <a:buNone/>
-            </a:pPr>
-            <a:r>
-              <a:rPr lang="en-US" sz="2200" dirty="0">
-                <a:solidFill>
-                  <a:srgbClr val="007A90"/>
-                </a:solidFill>
-                <a:latin typeface="Trebuchet MS" pitchFamily="34" charset="0"/>
-                <a:ea typeface="Trebuchet MS" pitchFamily="34" charset="-122"/>
-                <a:cs typeface="Trebuchet MS" pitchFamily="34" charset="-120"/>
-              </a:rPr>
-              <a:t>→</a:t>
-            </a:r>
-            <a:endParaRPr lang="en-US" sz="2200" dirty="0"/>
-          </a:p>
-        </p:txBody>
-      </p:sp>
-      <p:sp>
-        <p:nvSpPr>
-          <p:cNvPr id="9" name="Shape 7"/>
-          <p:cNvSpPr/>
-          <p:nvPr/>
-        </p:nvSpPr>
-        <p:spPr>
-          <a:xfrm>
-            <a:off x="2781605" y="1922526"/>
-            <a:ext cx="1976933" cy="854964"/>
-          </a:xfrm>
-          <a:prstGeom prst="roundRect">
-            <a:avLst>
-              <a:gd name="adj" fmla="val 10695"/>
-            </a:avLst>
-          </a:prstGeom>
-          <a:solidFill>
-            <a:srgbClr val="B8ECF5"/>
-          </a:solidFill>
-          <a:ln w="19050">
-            <a:solidFill>
-              <a:srgbClr val="007A90"/>
-            </a:solidFill>
-            <a:prstDash val="solid"/>
-          </a:ln>
-        </p:spPr>
-      </p:sp>
-      <p:sp>
-        <p:nvSpPr>
-          <p:cNvPr id="10" name="Text 8"/>
-          <p:cNvSpPr/>
-          <p:nvPr/>
-        </p:nvSpPr>
-        <p:spPr>
-          <a:xfrm>
-            <a:off x="2781605" y="1922526"/>
-            <a:ext cx="1976933" cy="854964"/>
-          </a:xfrm>
-          <a:prstGeom prst="rect">
-            <a:avLst/>
-          </a:prstGeom>
-          <a:noFill/>
-          <a:ln/>
-        </p:spPr>
-        <p:txBody>
-          <a:bodyPr wrap="square" rtlCol="0" anchor="ctr"/>
-          <a:lstStyle/>
-          <a:p>
-            <a:pPr algn="ctr" indent="0" marL="0">
-              <a:buNone/>
-            </a:pPr>
-            <a:r>
-              <a:rPr lang="en-US" sz="1100" dirty="0">
-                <a:solidFill>
-                  <a:srgbClr val="0A1A1C"/>
-                </a:solidFill>
-                <a:latin typeface="Trebuchet MS" pitchFamily="34" charset="0"/>
-                <a:ea typeface="Trebuchet MS" pitchFamily="34" charset="-122"/>
-                <a:cs typeface="Trebuchet MS" pitchFamily="34" charset="-120"/>
-              </a:rPr>
-              <a:t>MongoDB Deploy</a:t>
-            </a:r>
-            <a:endParaRPr lang="en-US" sz="1100" dirty="0"/>
-          </a:p>
-          <a:p>
-            <a:pPr algn="ctr" indent="0" marL="0">
-              <a:buNone/>
-            </a:pPr>
-            <a:r>
-              <a:rPr lang="en-US" sz="1100" dirty="0">
-                <a:solidFill>
-                  <a:srgbClr val="0A1A1C"/>
-                </a:solidFill>
-                <a:latin typeface="Trebuchet MS" pitchFamily="34" charset="0"/>
-                <a:ea typeface="Trebuchet MS" pitchFamily="34" charset="-122"/>
-                <a:cs typeface="Trebuchet MS" pitchFamily="34" charset="-120"/>
-              </a:rPr>
-              <a:t>+ ClusterIP Svc</a:t>
-            </a:r>
-            <a:endParaRPr lang="en-US" sz="1100" dirty="0"/>
-          </a:p>
-        </p:txBody>
-      </p:sp>
-      <p:sp>
-        <p:nvSpPr>
-          <p:cNvPr id="11" name="Text 9"/>
-          <p:cNvSpPr/>
-          <p:nvPr/>
-        </p:nvSpPr>
-        <p:spPr>
-          <a:xfrm>
-            <a:off x="4758538" y="1922526"/>
-            <a:ext cx="347472" cy="854964"/>
-          </a:xfrm>
-          <a:prstGeom prst="rect">
-            <a:avLst/>
-          </a:prstGeom>
-          <a:noFill/>
-          <a:ln/>
-        </p:spPr>
-        <p:txBody>
-          <a:bodyPr wrap="square" rtlCol="0" anchor="ctr"/>
-          <a:lstStyle/>
-          <a:p>
-            <a:pPr algn="ctr" indent="0" marL="0">
-              <a:buNone/>
-            </a:pPr>
-            <a:r>
-              <a:rPr lang="en-US" sz="2200" dirty="0">
-                <a:solidFill>
-                  <a:srgbClr val="007A90"/>
-                </a:solidFill>
-                <a:latin typeface="Trebuchet MS" pitchFamily="34" charset="0"/>
-                <a:ea typeface="Trebuchet MS" pitchFamily="34" charset="-122"/>
-                <a:cs typeface="Trebuchet MS" pitchFamily="34" charset="-120"/>
-              </a:rPr>
-              <a:t>→</a:t>
-            </a:r>
-            <a:endParaRPr lang="en-US" sz="2200" dirty="0"/>
-          </a:p>
-        </p:txBody>
-      </p:sp>
-      <p:sp>
-        <p:nvSpPr>
-          <p:cNvPr id="12" name="Shape 10"/>
-          <p:cNvSpPr/>
-          <p:nvPr/>
-        </p:nvSpPr>
-        <p:spPr>
-          <a:xfrm>
-            <a:off x="5106010" y="1922526"/>
-            <a:ext cx="1976933" cy="854964"/>
-          </a:xfrm>
-          <a:prstGeom prst="roundRect">
-            <a:avLst>
-              <a:gd name="adj" fmla="val 10695"/>
-            </a:avLst>
-          </a:prstGeom>
-          <a:solidFill>
-            <a:srgbClr val="B8ECF5"/>
-          </a:solidFill>
-          <a:ln w="19050">
-            <a:solidFill>
-              <a:srgbClr val="007A90"/>
-            </a:solidFill>
-            <a:prstDash val="solid"/>
-          </a:ln>
-        </p:spPr>
-      </p:sp>
-      <p:sp>
-        <p:nvSpPr>
-          <p:cNvPr id="13" name="Text 11"/>
-          <p:cNvSpPr/>
-          <p:nvPr/>
-        </p:nvSpPr>
-        <p:spPr>
-          <a:xfrm>
-            <a:off x="5106010" y="1922526"/>
-            <a:ext cx="1976933" cy="854964"/>
-          </a:xfrm>
-          <a:prstGeom prst="rect">
-            <a:avLst/>
-          </a:prstGeom>
-          <a:noFill/>
-          <a:ln/>
-        </p:spPr>
-        <p:txBody>
-          <a:bodyPr wrap="square" rtlCol="0" anchor="ctr"/>
-          <a:lstStyle/>
-          <a:p>
-            <a:pPr algn="ctr" indent="0" marL="0">
-              <a:buNone/>
-            </a:pPr>
-            <a:r>
-              <a:rPr lang="en-US" sz="1100" dirty="0">
-                <a:solidFill>
-                  <a:srgbClr val="0A1A1C"/>
-                </a:solidFill>
-                <a:latin typeface="Trebuchet MS" pitchFamily="34" charset="0"/>
-                <a:ea typeface="Trebuchet MS" pitchFamily="34" charset="-122"/>
-                <a:cs typeface="Trebuchet MS" pitchFamily="34" charset="-120"/>
-              </a:rPr>
-              <a:t>ConfigMap</a:t>
-            </a:r>
-            <a:endParaRPr lang="en-US" sz="1100" dirty="0"/>
-          </a:p>
-          <a:p>
-            <a:pPr algn="ctr" indent="0" marL="0">
-              <a:buNone/>
-            </a:pPr>
-            <a:r>
-              <a:rPr lang="en-US" sz="1100" dirty="0">
-                <a:solidFill>
-                  <a:srgbClr val="0A1A1C"/>
-                </a:solidFill>
-                <a:latin typeface="Trebuchet MS" pitchFamily="34" charset="0"/>
-                <a:ea typeface="Trebuchet MS" pitchFamily="34" charset="-122"/>
-                <a:cs typeface="Trebuchet MS" pitchFamily="34" charset="-120"/>
-              </a:rPr>
-              <a:t>(mongo URL)</a:t>
-            </a:r>
-            <a:endParaRPr lang="en-US" sz="1100" dirty="0"/>
-          </a:p>
-        </p:txBody>
-      </p:sp>
-      <p:sp>
-        <p:nvSpPr>
-          <p:cNvPr id="14" name="Text 12"/>
-          <p:cNvSpPr/>
-          <p:nvPr/>
-        </p:nvSpPr>
-        <p:spPr>
-          <a:xfrm>
-            <a:off x="7082942" y="1922526"/>
-            <a:ext cx="347472" cy="854964"/>
-          </a:xfrm>
-          <a:prstGeom prst="rect">
-            <a:avLst/>
-          </a:prstGeom>
-          <a:noFill/>
-          <a:ln/>
-        </p:spPr>
-        <p:txBody>
-          <a:bodyPr wrap="square" rtlCol="0" anchor="ctr"/>
-          <a:lstStyle/>
-          <a:p>
-            <a:pPr algn="ctr" indent="0" marL="0">
-              <a:buNone/>
-            </a:pPr>
-            <a:r>
-              <a:rPr lang="en-US" sz="2200" dirty="0">
-                <a:solidFill>
-                  <a:srgbClr val="007A90"/>
-                </a:solidFill>
-                <a:latin typeface="Trebuchet MS" pitchFamily="34" charset="0"/>
-                <a:ea typeface="Trebuchet MS" pitchFamily="34" charset="-122"/>
-                <a:cs typeface="Trebuchet MS" pitchFamily="34" charset="-120"/>
-              </a:rPr>
-              <a:t>→</a:t>
-            </a:r>
-            <a:endParaRPr lang="en-US" sz="2200" dirty="0"/>
-          </a:p>
-        </p:txBody>
-      </p:sp>
-      <p:sp>
-        <p:nvSpPr>
-          <p:cNvPr id="15" name="Shape 13"/>
-          <p:cNvSpPr/>
-          <p:nvPr/>
-        </p:nvSpPr>
-        <p:spPr>
-          <a:xfrm>
-            <a:off x="7430414" y="1922526"/>
-            <a:ext cx="1976933" cy="854964"/>
-          </a:xfrm>
-          <a:prstGeom prst="roundRect">
-            <a:avLst>
-              <a:gd name="adj" fmla="val 10695"/>
-            </a:avLst>
-          </a:prstGeom>
-          <a:solidFill>
-            <a:srgbClr val="B8ECF5"/>
-          </a:solidFill>
-          <a:ln w="19050">
-            <a:solidFill>
-              <a:srgbClr val="007A90"/>
-            </a:solidFill>
-            <a:prstDash val="solid"/>
-          </a:ln>
-        </p:spPr>
-      </p:sp>
-      <p:sp>
-        <p:nvSpPr>
-          <p:cNvPr id="16" name="Text 14"/>
-          <p:cNvSpPr/>
-          <p:nvPr/>
-        </p:nvSpPr>
-        <p:spPr>
-          <a:xfrm>
-            <a:off x="7430414" y="1922526"/>
-            <a:ext cx="1976933" cy="854964"/>
-          </a:xfrm>
-          <a:prstGeom prst="rect">
-            <a:avLst/>
-          </a:prstGeom>
-          <a:noFill/>
-          <a:ln/>
-        </p:spPr>
-        <p:txBody>
-          <a:bodyPr wrap="square" rtlCol="0" anchor="ctr"/>
-          <a:lstStyle/>
-          <a:p>
-            <a:pPr algn="ctr" indent="0" marL="0">
-              <a:buNone/>
-            </a:pPr>
-            <a:r>
-              <a:rPr lang="en-US" sz="1100" dirty="0">
-                <a:solidFill>
-                  <a:srgbClr val="0A1A1C"/>
-                </a:solidFill>
-                <a:latin typeface="Trebuchet MS" pitchFamily="34" charset="0"/>
-                <a:ea typeface="Trebuchet MS" pitchFamily="34" charset="-122"/>
-                <a:cs typeface="Trebuchet MS" pitchFamily="34" charset="-120"/>
-              </a:rPr>
-              <a:t>Web App Deploy</a:t>
-            </a:r>
-            <a:endParaRPr lang="en-US" sz="1100" dirty="0"/>
-          </a:p>
-          <a:p>
-            <a:pPr algn="ctr" indent="0" marL="0">
-              <a:buNone/>
-            </a:pPr>
-            <a:r>
-              <a:rPr lang="en-US" sz="1100" dirty="0">
-                <a:solidFill>
-                  <a:srgbClr val="0A1A1C"/>
-                </a:solidFill>
-                <a:latin typeface="Trebuchet MS" pitchFamily="34" charset="0"/>
-                <a:ea typeface="Trebuchet MS" pitchFamily="34" charset="-122"/>
-                <a:cs typeface="Trebuchet MS" pitchFamily="34" charset="-120"/>
-              </a:rPr>
-              <a:t>+ NodePort Svc</a:t>
-            </a:r>
-            <a:endParaRPr lang="en-US" sz="1100" dirty="0"/>
-          </a:p>
-        </p:txBody>
-      </p:sp>
-      <p:sp>
-        <p:nvSpPr>
-          <p:cNvPr id="17" name="Text 15"/>
-          <p:cNvSpPr/>
-          <p:nvPr/>
-        </p:nvSpPr>
-        <p:spPr>
-          <a:xfrm>
-            <a:off x="9407347" y="1922526"/>
-            <a:ext cx="347472" cy="854964"/>
-          </a:xfrm>
-          <a:prstGeom prst="rect">
-            <a:avLst/>
-          </a:prstGeom>
-          <a:noFill/>
-          <a:ln/>
-        </p:spPr>
-        <p:txBody>
-          <a:bodyPr wrap="square" rtlCol="0" anchor="ctr"/>
-          <a:lstStyle/>
-          <a:p>
-            <a:pPr algn="ctr" indent="0" marL="0">
-              <a:buNone/>
-            </a:pPr>
-            <a:r>
-              <a:rPr lang="en-US" sz="2200" dirty="0">
-                <a:solidFill>
-                  <a:srgbClr val="007A90"/>
-                </a:solidFill>
-                <a:latin typeface="Trebuchet MS" pitchFamily="34" charset="0"/>
-                <a:ea typeface="Trebuchet MS" pitchFamily="34" charset="-122"/>
-                <a:cs typeface="Trebuchet MS" pitchFamily="34" charset="-120"/>
-              </a:rPr>
-              <a:t>→</a:t>
-            </a:r>
-            <a:endParaRPr lang="en-US" sz="2200" dirty="0"/>
-          </a:p>
-        </p:txBody>
-      </p:sp>
-      <p:sp>
-        <p:nvSpPr>
-          <p:cNvPr id="18" name="Shape 16"/>
-          <p:cNvSpPr/>
-          <p:nvPr/>
-        </p:nvSpPr>
-        <p:spPr>
-          <a:xfrm>
-            <a:off x="9754819" y="1922526"/>
-            <a:ext cx="1976933" cy="854964"/>
-          </a:xfrm>
-          <a:prstGeom prst="roundRect">
-            <a:avLst>
-              <a:gd name="adj" fmla="val 10695"/>
-            </a:avLst>
-          </a:prstGeom>
-          <a:solidFill>
-            <a:srgbClr val="B8ECF5"/>
-          </a:solidFill>
-          <a:ln w="19050">
-            <a:solidFill>
-              <a:srgbClr val="007A90"/>
-            </a:solidFill>
-            <a:prstDash val="solid"/>
-          </a:ln>
-        </p:spPr>
-      </p:sp>
-      <p:sp>
-        <p:nvSpPr>
-          <p:cNvPr id="19" name="Text 17"/>
-          <p:cNvSpPr/>
-          <p:nvPr/>
-        </p:nvSpPr>
-        <p:spPr>
-          <a:xfrm>
-            <a:off x="9754819" y="1922526"/>
-            <a:ext cx="1976933" cy="854964"/>
-          </a:xfrm>
-          <a:prstGeom prst="rect">
-            <a:avLst/>
-          </a:prstGeom>
-          <a:noFill/>
-          <a:ln/>
-        </p:spPr>
-        <p:txBody>
-          <a:bodyPr wrap="square" rtlCol="0" anchor="ctr"/>
-          <a:lstStyle/>
-          <a:p>
-            <a:pPr algn="ctr" indent="0" marL="0">
-              <a:buNone/>
-            </a:pPr>
-            <a:r>
-              <a:rPr lang="en-US" sz="1100" b="1" dirty="0">
-                <a:solidFill>
-                  <a:srgbClr val="0A1A1C"/>
-                </a:solidFill>
-                <a:latin typeface="Trebuchet MS" pitchFamily="34" charset="0"/>
-                <a:ea typeface="Trebuchet MS" pitchFamily="34" charset="-122"/>
-                <a:cs typeface="Trebuchet MS" pitchFamily="34" charset="-120"/>
-              </a:rPr>
-              <a:t>Browser</a:t>
-            </a:r>
-            <a:endParaRPr lang="en-US" sz="1100" dirty="0"/>
-          </a:p>
-        </p:txBody>
-      </p:sp>
-      <p:sp>
-        <p:nvSpPr>
-          <p:cNvPr id="20" name="Text 18"/>
-          <p:cNvSpPr/>
-          <p:nvPr/>
-        </p:nvSpPr>
-        <p:spPr>
-          <a:xfrm>
-            <a:off x="457200" y="3310128"/>
-            <a:ext cx="11274552" cy="818388"/>
+          <p:cNvPr id="6" name="Text 4"/>
+          <p:cNvSpPr/>
+          <p:nvPr/>
+        </p:nvSpPr>
+        <p:spPr>
+          <a:xfrm>
+            <a:off x="457200" y="1572768"/>
+            <a:ext cx="11274552" cy="1252728"/>
           </a:xfrm>
           <a:prstGeom prst="rect">
             <a:avLst/>
@@ -7545,7 +7413,7 @@
               <a:buChar char="•"/>
             </a:pPr>
             <a:r>
-              <a:rPr lang="en-US" sz="1600" dirty="0">
+              <a:rPr lang="en-US" sz="2200" dirty="0">
                 <a:solidFill>
                   <a:srgbClr val="0A1A1C"/>
                 </a:solidFill>
@@ -7553,22 +7421,22 @@
                 <a:ea typeface="Trebuchet MS" pitchFamily="34" charset="-122"/>
                 <a:cs typeface="Trebuchet MS" pitchFamily="34" charset="-120"/>
               </a:rPr>
-              <a:t>Every concept from the last four sections combines into one two-tier system (web app + MongoDB)</a:t>
-            </a:r>
-            <a:endParaRPr lang="en-US" sz="1600" dirty="0"/>
-          </a:p>
-        </p:txBody>
-      </p:sp>
-      <p:sp>
-        <p:nvSpPr>
-          <p:cNvPr id="21" name="Text 19"/>
-          <p:cNvSpPr/>
-          <p:nvPr/>
-        </p:nvSpPr>
-        <p:spPr>
-          <a:xfrm>
-            <a:off x="457200" y="4128516"/>
-            <a:ext cx="11274552" cy="818388"/>
+              <a:t>Same container image should run unmodified across dev, staging, prod — only config and credentials should differ</a:t>
+            </a:r>
+            <a:endParaRPr lang="en-US" sz="2200" dirty="0"/>
+          </a:p>
+        </p:txBody>
+      </p:sp>
+      <p:sp>
+        <p:nvSpPr>
+          <p:cNvPr id="7" name="Text 5"/>
+          <p:cNvSpPr/>
+          <p:nvPr/>
+        </p:nvSpPr>
+        <p:spPr>
+          <a:xfrm>
+            <a:off x="457200" y="2825496"/>
+            <a:ext cx="11274552" cy="1252728"/>
           </a:xfrm>
           <a:prstGeom prst="rect">
             <a:avLst/>
@@ -7585,7 +7453,7 @@
               <a:buChar char="•"/>
             </a:pPr>
             <a:r>
-              <a:rPr lang="en-US" sz="1600" dirty="0">
+              <a:rPr lang="en-US" sz="2200" dirty="0">
                 <a:solidFill>
                   <a:srgbClr val="0A1A1C"/>
                 </a:solidFill>
@@ -7593,22 +7461,22 @@
                 <a:ea typeface="Trebuchet MS" pitchFamily="34" charset="-122"/>
                 <a:cs typeface="Trebuchet MS" pitchFamily="34" charset="-120"/>
               </a:rPr>
-              <a:t>Kubernetes gives every Service a DNS name matching its metadata.name — mongo-service resolves automatically, no IP involved</a:t>
-            </a:r>
-            <a:endParaRPr lang="en-US" sz="1600" dirty="0"/>
-          </a:p>
-        </p:txBody>
-      </p:sp>
-      <p:sp>
-        <p:nvSpPr>
-          <p:cNvPr id="22" name="Text 20"/>
-          <p:cNvSpPr/>
-          <p:nvPr/>
-        </p:nvSpPr>
-        <p:spPr>
-          <a:xfrm>
-            <a:off x="457200" y="4946904"/>
-            <a:ext cx="11274552" cy="818388"/>
+              <a:t>ConfigMap = plain configuration; Secret = sensitive values — same injection mechanism for both</a:t>
+            </a:r>
+            <a:endParaRPr lang="en-US" sz="2200" dirty="0"/>
+          </a:p>
+        </p:txBody>
+      </p:sp>
+      <p:sp>
+        <p:nvSpPr>
+          <p:cNvPr id="8" name="Text 6"/>
+          <p:cNvSpPr/>
+          <p:nvPr/>
+        </p:nvSpPr>
+        <p:spPr>
+          <a:xfrm>
+            <a:off x="457200" y="4078224"/>
+            <a:ext cx="11274552" cy="1252728"/>
           </a:xfrm>
           <a:prstGeom prst="rect">
             <a:avLst/>
@@ -7625,7 +7493,7 @@
               <a:buChar char="•"/>
             </a:pPr>
             <a:r>
-              <a:rPr lang="en-US" sz="1600" dirty="0">
+              <a:rPr lang="en-US" sz="2200" dirty="0">
                 <a:solidFill>
                   <a:srgbClr val="0A1A1C"/>
                 </a:solidFill>
@@ -7633,22 +7501,22 @@
                 <a:ea typeface="Trebuchet MS" pitchFamily="34" charset="-122"/>
                 <a:cs typeface="Trebuchet MS" pitchFamily="34" charset="-120"/>
               </a:rPr>
-              <a:t>Deploy order matters: the database's config must exist before the app that depends on it</a:t>
-            </a:r>
-            <a:endParaRPr lang="en-US" sz="1600" dirty="0"/>
-          </a:p>
-        </p:txBody>
-      </p:sp>
-      <p:sp>
-        <p:nvSpPr>
-          <p:cNvPr id="23" name="Text 21"/>
-          <p:cNvSpPr/>
-          <p:nvPr/>
-        </p:nvSpPr>
-        <p:spPr>
-          <a:xfrm>
-            <a:off x="457200" y="5765292"/>
-            <a:ext cx="11274552" cy="818388"/>
+              <a:t>Both referenced from a Pod via valueFrom.configMapKeyRef / valueFrom.secretKeyRef, injected as env vars at startup</a:t>
+            </a:r>
+            <a:endParaRPr lang="en-US" sz="2200" dirty="0"/>
+          </a:p>
+        </p:txBody>
+      </p:sp>
+      <p:sp>
+        <p:nvSpPr>
+          <p:cNvPr id="9" name="Text 7"/>
+          <p:cNvSpPr/>
+          <p:nvPr/>
+        </p:nvSpPr>
+        <p:spPr>
+          <a:xfrm>
+            <a:off x="457200" y="5330952"/>
+            <a:ext cx="11274552" cy="1252728"/>
           </a:xfrm>
           <a:prstGeom prst="rect">
             <a:avLst/>
@@ -7665,7 +7533,7 @@
               <a:buChar char="•"/>
             </a:pPr>
             <a:r>
-              <a:rPr lang="en-US" sz="1600" dirty="0">
+              <a:rPr lang="en-US" sz="2200" dirty="0">
                 <a:solidFill>
                   <a:srgbClr val="0A1A1C"/>
                 </a:solidFill>
@@ -7673,9 +7541,9 @@
                 <a:ea typeface="Trebuchet MS" pitchFamily="34" charset="-122"/>
                 <a:cs typeface="Trebuchet MS" pitchFamily="34" charset="-120"/>
               </a:rPr>
-              <a:t>Proof of wiring: kubectl exec deploy/webapp-deploy -- printenv MONGO_URL prints the full connection string, assembled purely from cluster objects</a:t>
-            </a:r>
-            <a:endParaRPr lang="en-US" sz="1600" dirty="0"/>
+              <a:t>Secrets are base64 encoded, not encrypted — anyone with API access can trivially decode them; fine for practice, not for production as-is</a:t>
+            </a:r>
+            <a:endParaRPr lang="en-US" sz="2200" dirty="0"/>
           </a:p>
         </p:txBody>
       </p:sp>
@@ -7808,7 +7676,7 @@
                 <a:ea typeface="Arial Black" pitchFamily="34" charset="-122"/>
                 <a:cs typeface="Arial Black" pitchFamily="34" charset="-120"/>
               </a:rPr>
-              <a:t>Gotchas &amp; Lessons</a:t>
+              <a:t>The Capstone: Wiring It All Together</a:t>
             </a:r>
             <a:endParaRPr lang="en-US" sz="3000" dirty="0"/>
           </a:p>
@@ -7841,14 +7709,568 @@
       </p:sp>
       <p:sp>
         <p:nvSpPr>
-          <p:cNvPr id="6" name="Text 4"/>
-          <p:cNvSpPr/>
-          <p:nvPr/>
-        </p:nvSpPr>
-        <p:spPr>
-          <a:xfrm>
-            <a:off x="457200" y="1572768"/>
-            <a:ext cx="11274552" cy="1252728"/>
+          <p:cNvPr id="6" name="Shape 4"/>
+          <p:cNvSpPr/>
+          <p:nvPr/>
+        </p:nvSpPr>
+        <p:spPr>
+          <a:xfrm>
+            <a:off x="457200" y="1922526"/>
+            <a:ext cx="1976933" cy="854964"/>
+          </a:xfrm>
+          <a:prstGeom prst="roundRect">
+            <a:avLst>
+              <a:gd name="adj" fmla="val 10695"/>
+            </a:avLst>
+          </a:prstGeom>
+          <a:solidFill>
+            <a:srgbClr val="B8ECF5"/>
+          </a:solidFill>
+          <a:ln w="19050">
+            <a:solidFill>
+              <a:srgbClr val="007A90"/>
+            </a:solidFill>
+            <a:prstDash val="solid"/>
+          </a:ln>
+        </p:spPr>
+      </p:sp>
+      <p:sp>
+        <p:nvSpPr>
+          <p:cNvPr id="7" name="Text 5"/>
+          <p:cNvSpPr/>
+          <p:nvPr/>
+        </p:nvSpPr>
+        <p:spPr>
+          <a:xfrm>
+            <a:off x="457200" y="1922526"/>
+            <a:ext cx="1976933" cy="854964"/>
+          </a:xfrm>
+          <a:prstGeom prst="rect">
+            <a:avLst/>
+          </a:prstGeom>
+          <a:noFill/>
+          <a:ln/>
+        </p:spPr>
+        <p:txBody>
+          <a:bodyPr wrap="square" rtlCol="0" anchor="ctr"/>
+          <a:lstStyle/>
+          <a:p>
+            <a:pPr algn="ctr" indent="0" marL="0">
+              <a:buNone/>
+            </a:pPr>
+            <a:r>
+              <a:rPr lang="en-US" sz="1100" b="1" dirty="0">
+                <a:solidFill>
+                  <a:srgbClr val="0A1A1C"/>
+                </a:solidFill>
+                <a:latin typeface="Trebuchet MS" pitchFamily="34" charset="0"/>
+                <a:ea typeface="Trebuchet MS" pitchFamily="34" charset="-122"/>
+                <a:cs typeface="Trebuchet MS" pitchFamily="34" charset="-120"/>
+              </a:rPr>
+              <a:t>Secret</a:t>
+            </a:r>
+            <a:endParaRPr lang="en-US" sz="1100" dirty="0"/>
+          </a:p>
+          <a:p>
+            <a:pPr algn="ctr" indent="0" marL="0">
+              <a:buNone/>
+            </a:pPr>
+            <a:r>
+              <a:rPr lang="en-US" sz="1100" b="1" dirty="0">
+                <a:solidFill>
+                  <a:srgbClr val="0A1A1C"/>
+                </a:solidFill>
+                <a:latin typeface="Trebuchet MS" pitchFamily="34" charset="0"/>
+                <a:ea typeface="Trebuchet MS" pitchFamily="34" charset="-122"/>
+                <a:cs typeface="Trebuchet MS" pitchFamily="34" charset="-120"/>
+              </a:rPr>
+              <a:t>(mongo creds)</a:t>
+            </a:r>
+            <a:endParaRPr lang="en-US" sz="1100" dirty="0"/>
+          </a:p>
+        </p:txBody>
+      </p:sp>
+      <p:sp>
+        <p:nvSpPr>
+          <p:cNvPr id="8" name="Text 6"/>
+          <p:cNvSpPr/>
+          <p:nvPr/>
+        </p:nvSpPr>
+        <p:spPr>
+          <a:xfrm>
+            <a:off x="2434133" y="1922526"/>
+            <a:ext cx="347472" cy="854964"/>
+          </a:xfrm>
+          <a:prstGeom prst="rect">
+            <a:avLst/>
+          </a:prstGeom>
+          <a:noFill/>
+          <a:ln/>
+        </p:spPr>
+        <p:txBody>
+          <a:bodyPr wrap="square" rtlCol="0" anchor="ctr"/>
+          <a:lstStyle/>
+          <a:p>
+            <a:pPr algn="ctr" indent="0" marL="0">
+              <a:buNone/>
+            </a:pPr>
+            <a:r>
+              <a:rPr lang="en-US" sz="2200" dirty="0">
+                <a:solidFill>
+                  <a:srgbClr val="007A90"/>
+                </a:solidFill>
+                <a:latin typeface="Trebuchet MS" pitchFamily="34" charset="0"/>
+                <a:ea typeface="Trebuchet MS" pitchFamily="34" charset="-122"/>
+                <a:cs typeface="Trebuchet MS" pitchFamily="34" charset="-120"/>
+              </a:rPr>
+              <a:t>→</a:t>
+            </a:r>
+            <a:endParaRPr lang="en-US" sz="2200" dirty="0"/>
+          </a:p>
+        </p:txBody>
+      </p:sp>
+      <p:sp>
+        <p:nvSpPr>
+          <p:cNvPr id="9" name="Shape 7"/>
+          <p:cNvSpPr/>
+          <p:nvPr/>
+        </p:nvSpPr>
+        <p:spPr>
+          <a:xfrm>
+            <a:off x="2781605" y="1922526"/>
+            <a:ext cx="1976933" cy="854964"/>
+          </a:xfrm>
+          <a:prstGeom prst="roundRect">
+            <a:avLst>
+              <a:gd name="adj" fmla="val 10695"/>
+            </a:avLst>
+          </a:prstGeom>
+          <a:solidFill>
+            <a:srgbClr val="B8ECF5"/>
+          </a:solidFill>
+          <a:ln w="19050">
+            <a:solidFill>
+              <a:srgbClr val="007A90"/>
+            </a:solidFill>
+            <a:prstDash val="solid"/>
+          </a:ln>
+        </p:spPr>
+      </p:sp>
+      <p:sp>
+        <p:nvSpPr>
+          <p:cNvPr id="10" name="Text 8"/>
+          <p:cNvSpPr/>
+          <p:nvPr/>
+        </p:nvSpPr>
+        <p:spPr>
+          <a:xfrm>
+            <a:off x="2781605" y="1922526"/>
+            <a:ext cx="1976933" cy="854964"/>
+          </a:xfrm>
+          <a:prstGeom prst="rect">
+            <a:avLst/>
+          </a:prstGeom>
+          <a:noFill/>
+          <a:ln/>
+        </p:spPr>
+        <p:txBody>
+          <a:bodyPr wrap="square" rtlCol="0" anchor="ctr"/>
+          <a:lstStyle/>
+          <a:p>
+            <a:pPr algn="ctr" indent="0" marL="0">
+              <a:buNone/>
+            </a:pPr>
+            <a:r>
+              <a:rPr lang="en-US" sz="1100" dirty="0">
+                <a:solidFill>
+                  <a:srgbClr val="0A1A1C"/>
+                </a:solidFill>
+                <a:latin typeface="Trebuchet MS" pitchFamily="34" charset="0"/>
+                <a:ea typeface="Trebuchet MS" pitchFamily="34" charset="-122"/>
+                <a:cs typeface="Trebuchet MS" pitchFamily="34" charset="-120"/>
+              </a:rPr>
+              <a:t>MongoDB Deploy</a:t>
+            </a:r>
+            <a:endParaRPr lang="en-US" sz="1100" dirty="0"/>
+          </a:p>
+          <a:p>
+            <a:pPr algn="ctr" indent="0" marL="0">
+              <a:buNone/>
+            </a:pPr>
+            <a:r>
+              <a:rPr lang="en-US" sz="1100" dirty="0">
+                <a:solidFill>
+                  <a:srgbClr val="0A1A1C"/>
+                </a:solidFill>
+                <a:latin typeface="Trebuchet MS" pitchFamily="34" charset="0"/>
+                <a:ea typeface="Trebuchet MS" pitchFamily="34" charset="-122"/>
+                <a:cs typeface="Trebuchet MS" pitchFamily="34" charset="-120"/>
+              </a:rPr>
+              <a:t>+ ClusterIP Svc</a:t>
+            </a:r>
+            <a:endParaRPr lang="en-US" sz="1100" dirty="0"/>
+          </a:p>
+        </p:txBody>
+      </p:sp>
+      <p:sp>
+        <p:nvSpPr>
+          <p:cNvPr id="11" name="Text 9"/>
+          <p:cNvSpPr/>
+          <p:nvPr/>
+        </p:nvSpPr>
+        <p:spPr>
+          <a:xfrm>
+            <a:off x="4758538" y="1922526"/>
+            <a:ext cx="347472" cy="854964"/>
+          </a:xfrm>
+          <a:prstGeom prst="rect">
+            <a:avLst/>
+          </a:prstGeom>
+          <a:noFill/>
+          <a:ln/>
+        </p:spPr>
+        <p:txBody>
+          <a:bodyPr wrap="square" rtlCol="0" anchor="ctr"/>
+          <a:lstStyle/>
+          <a:p>
+            <a:pPr algn="ctr" indent="0" marL="0">
+              <a:buNone/>
+            </a:pPr>
+            <a:r>
+              <a:rPr lang="en-US" sz="2200" dirty="0">
+                <a:solidFill>
+                  <a:srgbClr val="007A90"/>
+                </a:solidFill>
+                <a:latin typeface="Trebuchet MS" pitchFamily="34" charset="0"/>
+                <a:ea typeface="Trebuchet MS" pitchFamily="34" charset="-122"/>
+                <a:cs typeface="Trebuchet MS" pitchFamily="34" charset="-120"/>
+              </a:rPr>
+              <a:t>→</a:t>
+            </a:r>
+            <a:endParaRPr lang="en-US" sz="2200" dirty="0"/>
+          </a:p>
+        </p:txBody>
+      </p:sp>
+      <p:sp>
+        <p:nvSpPr>
+          <p:cNvPr id="12" name="Shape 10"/>
+          <p:cNvSpPr/>
+          <p:nvPr/>
+        </p:nvSpPr>
+        <p:spPr>
+          <a:xfrm>
+            <a:off x="5106010" y="1922526"/>
+            <a:ext cx="1976933" cy="854964"/>
+          </a:xfrm>
+          <a:prstGeom prst="roundRect">
+            <a:avLst>
+              <a:gd name="adj" fmla="val 10695"/>
+            </a:avLst>
+          </a:prstGeom>
+          <a:solidFill>
+            <a:srgbClr val="B8ECF5"/>
+          </a:solidFill>
+          <a:ln w="19050">
+            <a:solidFill>
+              <a:srgbClr val="007A90"/>
+            </a:solidFill>
+            <a:prstDash val="solid"/>
+          </a:ln>
+        </p:spPr>
+      </p:sp>
+      <p:sp>
+        <p:nvSpPr>
+          <p:cNvPr id="13" name="Text 11"/>
+          <p:cNvSpPr/>
+          <p:nvPr/>
+        </p:nvSpPr>
+        <p:spPr>
+          <a:xfrm>
+            <a:off x="5106010" y="1922526"/>
+            <a:ext cx="1976933" cy="854964"/>
+          </a:xfrm>
+          <a:prstGeom prst="rect">
+            <a:avLst/>
+          </a:prstGeom>
+          <a:noFill/>
+          <a:ln/>
+        </p:spPr>
+        <p:txBody>
+          <a:bodyPr wrap="square" rtlCol="0" anchor="ctr"/>
+          <a:lstStyle/>
+          <a:p>
+            <a:pPr algn="ctr" indent="0" marL="0">
+              <a:buNone/>
+            </a:pPr>
+            <a:r>
+              <a:rPr lang="en-US" sz="1100" dirty="0">
+                <a:solidFill>
+                  <a:srgbClr val="0A1A1C"/>
+                </a:solidFill>
+                <a:latin typeface="Trebuchet MS" pitchFamily="34" charset="0"/>
+                <a:ea typeface="Trebuchet MS" pitchFamily="34" charset="-122"/>
+                <a:cs typeface="Trebuchet MS" pitchFamily="34" charset="-120"/>
+              </a:rPr>
+              <a:t>ConfigMap</a:t>
+            </a:r>
+            <a:endParaRPr lang="en-US" sz="1100" dirty="0"/>
+          </a:p>
+          <a:p>
+            <a:pPr algn="ctr" indent="0" marL="0">
+              <a:buNone/>
+            </a:pPr>
+            <a:r>
+              <a:rPr lang="en-US" sz="1100" dirty="0">
+                <a:solidFill>
+                  <a:srgbClr val="0A1A1C"/>
+                </a:solidFill>
+                <a:latin typeface="Trebuchet MS" pitchFamily="34" charset="0"/>
+                <a:ea typeface="Trebuchet MS" pitchFamily="34" charset="-122"/>
+                <a:cs typeface="Trebuchet MS" pitchFamily="34" charset="-120"/>
+              </a:rPr>
+              <a:t>(mongo URL)</a:t>
+            </a:r>
+            <a:endParaRPr lang="en-US" sz="1100" dirty="0"/>
+          </a:p>
+        </p:txBody>
+      </p:sp>
+      <p:sp>
+        <p:nvSpPr>
+          <p:cNvPr id="14" name="Text 12"/>
+          <p:cNvSpPr/>
+          <p:nvPr/>
+        </p:nvSpPr>
+        <p:spPr>
+          <a:xfrm>
+            <a:off x="7082942" y="1922526"/>
+            <a:ext cx="347472" cy="854964"/>
+          </a:xfrm>
+          <a:prstGeom prst="rect">
+            <a:avLst/>
+          </a:prstGeom>
+          <a:noFill/>
+          <a:ln/>
+        </p:spPr>
+        <p:txBody>
+          <a:bodyPr wrap="square" rtlCol="0" anchor="ctr"/>
+          <a:lstStyle/>
+          <a:p>
+            <a:pPr algn="ctr" indent="0" marL="0">
+              <a:buNone/>
+            </a:pPr>
+            <a:r>
+              <a:rPr lang="en-US" sz="2200" dirty="0">
+                <a:solidFill>
+                  <a:srgbClr val="007A90"/>
+                </a:solidFill>
+                <a:latin typeface="Trebuchet MS" pitchFamily="34" charset="0"/>
+                <a:ea typeface="Trebuchet MS" pitchFamily="34" charset="-122"/>
+                <a:cs typeface="Trebuchet MS" pitchFamily="34" charset="-120"/>
+              </a:rPr>
+              <a:t>→</a:t>
+            </a:r>
+            <a:endParaRPr lang="en-US" sz="2200" dirty="0"/>
+          </a:p>
+        </p:txBody>
+      </p:sp>
+      <p:sp>
+        <p:nvSpPr>
+          <p:cNvPr id="15" name="Shape 13"/>
+          <p:cNvSpPr/>
+          <p:nvPr/>
+        </p:nvSpPr>
+        <p:spPr>
+          <a:xfrm>
+            <a:off x="7430414" y="1922526"/>
+            <a:ext cx="1976933" cy="854964"/>
+          </a:xfrm>
+          <a:prstGeom prst="roundRect">
+            <a:avLst>
+              <a:gd name="adj" fmla="val 10695"/>
+            </a:avLst>
+          </a:prstGeom>
+          <a:solidFill>
+            <a:srgbClr val="B8ECF5"/>
+          </a:solidFill>
+          <a:ln w="19050">
+            <a:solidFill>
+              <a:srgbClr val="007A90"/>
+            </a:solidFill>
+            <a:prstDash val="solid"/>
+          </a:ln>
+        </p:spPr>
+      </p:sp>
+      <p:sp>
+        <p:nvSpPr>
+          <p:cNvPr id="16" name="Text 14"/>
+          <p:cNvSpPr/>
+          <p:nvPr/>
+        </p:nvSpPr>
+        <p:spPr>
+          <a:xfrm>
+            <a:off x="7430414" y="1922526"/>
+            <a:ext cx="1976933" cy="854964"/>
+          </a:xfrm>
+          <a:prstGeom prst="rect">
+            <a:avLst/>
+          </a:prstGeom>
+          <a:noFill/>
+          <a:ln/>
+        </p:spPr>
+        <p:txBody>
+          <a:bodyPr wrap="square" rtlCol="0" anchor="ctr"/>
+          <a:lstStyle/>
+          <a:p>
+            <a:pPr algn="ctr" indent="0" marL="0">
+              <a:buNone/>
+            </a:pPr>
+            <a:r>
+              <a:rPr lang="en-US" sz="1100" dirty="0">
+                <a:solidFill>
+                  <a:srgbClr val="0A1A1C"/>
+                </a:solidFill>
+                <a:latin typeface="Trebuchet MS" pitchFamily="34" charset="0"/>
+                <a:ea typeface="Trebuchet MS" pitchFamily="34" charset="-122"/>
+                <a:cs typeface="Trebuchet MS" pitchFamily="34" charset="-120"/>
+              </a:rPr>
+              <a:t>Web App Deploy</a:t>
+            </a:r>
+            <a:endParaRPr lang="en-US" sz="1100" dirty="0"/>
+          </a:p>
+          <a:p>
+            <a:pPr algn="ctr" indent="0" marL="0">
+              <a:buNone/>
+            </a:pPr>
+            <a:r>
+              <a:rPr lang="en-US" sz="1100" dirty="0">
+                <a:solidFill>
+                  <a:srgbClr val="0A1A1C"/>
+                </a:solidFill>
+                <a:latin typeface="Trebuchet MS" pitchFamily="34" charset="0"/>
+                <a:ea typeface="Trebuchet MS" pitchFamily="34" charset="-122"/>
+                <a:cs typeface="Trebuchet MS" pitchFamily="34" charset="-120"/>
+              </a:rPr>
+              <a:t>+ NodePort Svc</a:t>
+            </a:r>
+            <a:endParaRPr lang="en-US" sz="1100" dirty="0"/>
+          </a:p>
+        </p:txBody>
+      </p:sp>
+      <p:sp>
+        <p:nvSpPr>
+          <p:cNvPr id="17" name="Text 15"/>
+          <p:cNvSpPr/>
+          <p:nvPr/>
+        </p:nvSpPr>
+        <p:spPr>
+          <a:xfrm>
+            <a:off x="9407347" y="1922526"/>
+            <a:ext cx="347472" cy="854964"/>
+          </a:xfrm>
+          <a:prstGeom prst="rect">
+            <a:avLst/>
+          </a:prstGeom>
+          <a:noFill/>
+          <a:ln/>
+        </p:spPr>
+        <p:txBody>
+          <a:bodyPr wrap="square" rtlCol="0" anchor="ctr"/>
+          <a:lstStyle/>
+          <a:p>
+            <a:pPr algn="ctr" indent="0" marL="0">
+              <a:buNone/>
+            </a:pPr>
+            <a:r>
+              <a:rPr lang="en-US" sz="2200" dirty="0">
+                <a:solidFill>
+                  <a:srgbClr val="007A90"/>
+                </a:solidFill>
+                <a:latin typeface="Trebuchet MS" pitchFamily="34" charset="0"/>
+                <a:ea typeface="Trebuchet MS" pitchFamily="34" charset="-122"/>
+                <a:cs typeface="Trebuchet MS" pitchFamily="34" charset="-120"/>
+              </a:rPr>
+              <a:t>→</a:t>
+            </a:r>
+            <a:endParaRPr lang="en-US" sz="2200" dirty="0"/>
+          </a:p>
+        </p:txBody>
+      </p:sp>
+      <p:sp>
+        <p:nvSpPr>
+          <p:cNvPr id="18" name="Shape 16"/>
+          <p:cNvSpPr/>
+          <p:nvPr/>
+        </p:nvSpPr>
+        <p:spPr>
+          <a:xfrm>
+            <a:off x="9754819" y="1922526"/>
+            <a:ext cx="1976933" cy="854964"/>
+          </a:xfrm>
+          <a:prstGeom prst="roundRect">
+            <a:avLst>
+              <a:gd name="adj" fmla="val 10695"/>
+            </a:avLst>
+          </a:prstGeom>
+          <a:solidFill>
+            <a:srgbClr val="B8ECF5"/>
+          </a:solidFill>
+          <a:ln w="19050">
+            <a:solidFill>
+              <a:srgbClr val="007A90"/>
+            </a:solidFill>
+            <a:prstDash val="solid"/>
+          </a:ln>
+        </p:spPr>
+      </p:sp>
+      <p:sp>
+        <p:nvSpPr>
+          <p:cNvPr id="19" name="Text 17"/>
+          <p:cNvSpPr/>
+          <p:nvPr/>
+        </p:nvSpPr>
+        <p:spPr>
+          <a:xfrm>
+            <a:off x="9754819" y="1922526"/>
+            <a:ext cx="1976933" cy="854964"/>
+          </a:xfrm>
+          <a:prstGeom prst="rect">
+            <a:avLst/>
+          </a:prstGeom>
+          <a:noFill/>
+          <a:ln/>
+        </p:spPr>
+        <p:txBody>
+          <a:bodyPr wrap="square" rtlCol="0" anchor="ctr"/>
+          <a:lstStyle/>
+          <a:p>
+            <a:pPr algn="ctr" indent="0" marL="0">
+              <a:buNone/>
+            </a:pPr>
+            <a:r>
+              <a:rPr lang="en-US" sz="1100" b="1" dirty="0">
+                <a:solidFill>
+                  <a:srgbClr val="0A1A1C"/>
+                </a:solidFill>
+                <a:latin typeface="Trebuchet MS" pitchFamily="34" charset="0"/>
+                <a:ea typeface="Trebuchet MS" pitchFamily="34" charset="-122"/>
+                <a:cs typeface="Trebuchet MS" pitchFamily="34" charset="-120"/>
+              </a:rPr>
+              <a:t>Browser</a:t>
+            </a:r>
+            <a:endParaRPr lang="en-US" sz="1100" dirty="0"/>
+          </a:p>
+        </p:txBody>
+      </p:sp>
+      <p:sp>
+        <p:nvSpPr>
+          <p:cNvPr id="20" name="Text 18"/>
+          <p:cNvSpPr/>
+          <p:nvPr/>
+        </p:nvSpPr>
+        <p:spPr>
+          <a:xfrm>
+            <a:off x="457200" y="3310128"/>
+            <a:ext cx="11274552" cy="818388"/>
           </a:xfrm>
           <a:prstGeom prst="rect">
             <a:avLst/>
@@ -7865,7 +8287,7 @@
               <a:buChar char="•"/>
             </a:pPr>
             <a:r>
-              <a:rPr lang="en-US" sz="2200" dirty="0">
+              <a:rPr lang="en-US" sz="1600" dirty="0">
                 <a:solidFill>
                   <a:srgbClr val="0A1A1C"/>
                 </a:solidFill>
@@ -7873,22 +8295,22 @@
                 <a:ea typeface="Trebuchet MS" pitchFamily="34" charset="-122"/>
                 <a:cs typeface="Trebuchet MS" pitchFamily="34" charset="-120"/>
               </a:rPr>
-              <a:t>Most common real failure across Modules 1–5: a typo in key: or name: inside a configMapKeyRef/secretKeyRef → shows up as CreateContainerConfigError</a:t>
-            </a:r>
-            <a:endParaRPr lang="en-US" sz="2200" dirty="0"/>
-          </a:p>
-        </p:txBody>
-      </p:sp>
-      <p:sp>
-        <p:nvSpPr>
-          <p:cNvPr id="7" name="Text 5"/>
-          <p:cNvSpPr/>
-          <p:nvPr/>
-        </p:nvSpPr>
-        <p:spPr>
-          <a:xfrm>
-            <a:off x="457200" y="2825496"/>
-            <a:ext cx="11274552" cy="1252728"/>
+              <a:t>Every object type covered so far combines into one two-tier system (web app + MongoDB)</a:t>
+            </a:r>
+            <a:endParaRPr lang="en-US" sz="1600" dirty="0"/>
+          </a:p>
+        </p:txBody>
+      </p:sp>
+      <p:sp>
+        <p:nvSpPr>
+          <p:cNvPr id="21" name="Text 19"/>
+          <p:cNvSpPr/>
+          <p:nvPr/>
+        </p:nvSpPr>
+        <p:spPr>
+          <a:xfrm>
+            <a:off x="457200" y="4128516"/>
+            <a:ext cx="11274552" cy="818388"/>
           </a:xfrm>
           <a:prstGeom prst="rect">
             <a:avLst/>
@@ -7905,7 +8327,7 @@
               <a:buChar char="•"/>
             </a:pPr>
             <a:r>
-              <a:rPr lang="en-US" sz="2200" dirty="0">
+              <a:rPr lang="en-US" sz="1600" dirty="0">
                 <a:solidFill>
                   <a:srgbClr val="0A1A1C"/>
                 </a:solidFill>
@@ -7913,22 +8335,22 @@
                 <a:ea typeface="Trebuchet MS" pitchFamily="34" charset="-122"/>
                 <a:cs typeface="Trebuchet MS" pitchFamily="34" charset="-120"/>
               </a:rPr>
-              <a:t>kubectl describe pod → the Events section is always the first move to diagnose a broken Pod</a:t>
-            </a:r>
-            <a:endParaRPr lang="en-US" sz="2200" dirty="0"/>
-          </a:p>
-        </p:txBody>
-      </p:sp>
-      <p:sp>
-        <p:nvSpPr>
-          <p:cNvPr id="8" name="Text 6"/>
-          <p:cNvSpPr/>
-          <p:nvPr/>
-        </p:nvSpPr>
-        <p:spPr>
-          <a:xfrm>
-            <a:off x="457200" y="4078224"/>
-            <a:ext cx="11274552" cy="1252728"/>
+              <a:t>Kubernetes gives every Service a DNS name matching its metadata.name — mongo-service resolves automatically, no IP involved</a:t>
+            </a:r>
+            <a:endParaRPr lang="en-US" sz="1600" dirty="0"/>
+          </a:p>
+        </p:txBody>
+      </p:sp>
+      <p:sp>
+        <p:nvSpPr>
+          <p:cNvPr id="22" name="Text 20"/>
+          <p:cNvSpPr/>
+          <p:nvPr/>
+        </p:nvSpPr>
+        <p:spPr>
+          <a:xfrm>
+            <a:off x="457200" y="4946904"/>
+            <a:ext cx="11274552" cy="818388"/>
           </a:xfrm>
           <a:prstGeom prst="rect">
             <a:avLst/>
@@ -7945,7 +8367,7 @@
               <a:buChar char="•"/>
             </a:pPr>
             <a:r>
-              <a:rPr lang="en-US" sz="2200" dirty="0">
+              <a:rPr lang="en-US" sz="1600" dirty="0">
                 <a:solidFill>
                   <a:srgbClr val="0A1A1C"/>
                 </a:solidFill>
@@ -7953,22 +8375,22 @@
                 <a:ea typeface="Trebuchet MS" pitchFamily="34" charset="-122"/>
                 <a:cs typeface="Trebuchet MS" pitchFamily="34" charset="-120"/>
               </a:rPr>
-              <a:t>Podman's Minikube driver is explicitly experimental — --driver=docker is the fallback if you hit an uncovered wall</a:t>
-            </a:r>
-            <a:endParaRPr lang="en-US" sz="2200" dirty="0"/>
-          </a:p>
-        </p:txBody>
-      </p:sp>
-      <p:sp>
-        <p:nvSpPr>
-          <p:cNvPr id="9" name="Text 7"/>
-          <p:cNvSpPr/>
-          <p:nvPr/>
-        </p:nvSpPr>
-        <p:spPr>
-          <a:xfrm>
-            <a:off x="457200" y="5330952"/>
-            <a:ext cx="11274552" cy="1252728"/>
+              <a:t>Deploy order matters: the database's config must exist before the app that depends on it</a:t>
+            </a:r>
+            <a:endParaRPr lang="en-US" sz="1600" dirty="0"/>
+          </a:p>
+        </p:txBody>
+      </p:sp>
+      <p:sp>
+        <p:nvSpPr>
+          <p:cNvPr id="23" name="Text 21"/>
+          <p:cNvSpPr/>
+          <p:nvPr/>
+        </p:nvSpPr>
+        <p:spPr>
+          <a:xfrm>
+            <a:off x="457200" y="5765292"/>
+            <a:ext cx="11274552" cy="818388"/>
           </a:xfrm>
           <a:prstGeom prst="rect">
             <a:avLst/>
@@ -7985,7 +8407,7 @@
               <a:buChar char="•"/>
             </a:pPr>
             <a:r>
-              <a:rPr lang="en-US" sz="2200" dirty="0">
+              <a:rPr lang="en-US" sz="1600" dirty="0">
                 <a:solidFill>
                   <a:srgbClr val="0A1A1C"/>
                 </a:solidFill>
@@ -7993,9 +8415,9 @@
                 <a:ea typeface="Trebuchet MS" pitchFamily="34" charset="-122"/>
                 <a:cs typeface="Trebuchet MS" pitchFamily="34" charset="-120"/>
               </a:rPr>
-              <a:t>Base64 is encoding, not encryption — don't mistake a Secret for something actually secured</a:t>
-            </a:r>
-            <a:endParaRPr lang="en-US" sz="2200" dirty="0"/>
+              <a:t>Proof of wiring: kubectl exec deploy/webapp-deploy -- printenv MONGO_URL prints the full connection string, assembled purely from cluster objects</a:t>
+            </a:r>
+            <a:endParaRPr lang="en-US" sz="1600" dirty="0"/>
           </a:p>
         </p:txBody>
       </p:sp>
@@ -8488,7 +8910,7 @@
                 <a:ea typeface="Arial Black" pitchFamily="34" charset="-122"/>
                 <a:cs typeface="Arial Black" pitchFamily="34" charset="-120"/>
               </a:rPr>
-              <a:t>Key Insight</a:t>
+              <a:t>Gotchas &amp; Lessons</a:t>
             </a:r>
             <a:endParaRPr lang="en-US" sz="3000" dirty="0"/>
           </a:p>
@@ -8521,53 +8943,83 @@
       </p:sp>
       <p:sp>
         <p:nvSpPr>
-          <p:cNvPr id="6" name="Shape 4"/>
-          <p:cNvSpPr/>
-          <p:nvPr/>
-        </p:nvSpPr>
-        <p:spPr>
-          <a:xfrm>
-            <a:off x="457200" y="2029968"/>
-            <a:ext cx="11274552" cy="4096512"/>
-          </a:xfrm>
-          <a:prstGeom prst="rect">
-            <a:avLst/>
-          </a:prstGeom>
-          <a:solidFill>
-            <a:srgbClr val="B8ECF5"/>
-          </a:solidFill>
-          <a:ln w="25400">
-            <a:solidFill>
-              <a:srgbClr val="007A90"/>
-            </a:solidFill>
-            <a:prstDash val="solid"/>
-          </a:ln>
-        </p:spPr>
-      </p:sp>
-      <p:sp>
-        <p:nvSpPr>
-          <p:cNvPr id="7" name="Shape 5"/>
-          <p:cNvSpPr/>
-          <p:nvPr/>
-        </p:nvSpPr>
-        <p:spPr>
-          <a:xfrm>
-            <a:off x="457200" y="2029968"/>
-            <a:ext cx="73152" cy="4096512"/>
-          </a:xfrm>
-          <a:prstGeom prst="rect">
-            <a:avLst/>
-          </a:prstGeom>
-          <a:solidFill>
-            <a:srgbClr val="007A90"/>
-          </a:solidFill>
-          <a:ln w="12700">
-            <a:solidFill>
-              <a:srgbClr val="007A90"/>
-            </a:solidFill>
-            <a:prstDash val="solid"/>
-          </a:ln>
-        </p:spPr>
+          <p:cNvPr id="6" name="Text 4"/>
+          <p:cNvSpPr/>
+          <p:nvPr/>
+        </p:nvSpPr>
+        <p:spPr>
+          <a:xfrm>
+            <a:off x="457200" y="1572768"/>
+            <a:ext cx="11274552" cy="1252728"/>
+          </a:xfrm>
+          <a:prstGeom prst="rect">
+            <a:avLst/>
+          </a:prstGeom>
+          <a:noFill/>
+          <a:ln/>
+        </p:spPr>
+        <p:txBody>
+          <a:bodyPr wrap="square" rtlCol="0" anchor="ctr"/>
+          <a:lstStyle/>
+          <a:p>
+            <a:pPr marL="254000" indent="-254000">
+              <a:buSzPct val="100000"/>
+              <a:buChar char="•"/>
+            </a:pPr>
+            <a:r>
+              <a:rPr lang="en-US" sz="2200" dirty="0">
+                <a:solidFill>
+                  <a:srgbClr val="0A1A1C"/>
+                </a:solidFill>
+                <a:latin typeface="Trebuchet MS" pitchFamily="34" charset="0"/>
+                <a:ea typeface="Trebuchet MS" pitchFamily="34" charset="-122"/>
+                <a:cs typeface="Trebuchet MS" pitchFamily="34" charset="-120"/>
+              </a:rPr>
+              <a:t>Most common real failure across Modules 1–5: a typo in key: or name: inside a configMapKeyRef/secretKeyRef → shows up as CreateContainerConfigError</a:t>
+            </a:r>
+            <a:endParaRPr lang="en-US" sz="2200" dirty="0"/>
+          </a:p>
+        </p:txBody>
+      </p:sp>
+      <p:sp>
+        <p:nvSpPr>
+          <p:cNvPr id="7" name="Text 5"/>
+          <p:cNvSpPr/>
+          <p:nvPr/>
+        </p:nvSpPr>
+        <p:spPr>
+          <a:xfrm>
+            <a:off x="457200" y="2825496"/>
+            <a:ext cx="11274552" cy="1252728"/>
+          </a:xfrm>
+          <a:prstGeom prst="rect">
+            <a:avLst/>
+          </a:prstGeom>
+          <a:noFill/>
+          <a:ln/>
+        </p:spPr>
+        <p:txBody>
+          <a:bodyPr wrap="square" rtlCol="0" anchor="ctr"/>
+          <a:lstStyle/>
+          <a:p>
+            <a:pPr marL="254000" indent="-254000">
+              <a:buSzPct val="100000"/>
+              <a:buChar char="•"/>
+            </a:pPr>
+            <a:r>
+              <a:rPr lang="en-US" sz="2200" dirty="0">
+                <a:solidFill>
+                  <a:srgbClr val="0A1A1C"/>
+                </a:solidFill>
+                <a:latin typeface="Trebuchet MS" pitchFamily="34" charset="0"/>
+                <a:ea typeface="Trebuchet MS" pitchFamily="34" charset="-122"/>
+                <a:cs typeface="Trebuchet MS" pitchFamily="34" charset="-120"/>
+              </a:rPr>
+              <a:t>kubectl describe pod → the Events section is always the first move to diagnose a broken Pod</a:t>
+            </a:r>
+            <a:endParaRPr lang="en-US" sz="2200" dirty="0"/>
+          </a:p>
+        </p:txBody>
       </p:sp>
       <p:sp>
         <p:nvSpPr>
@@ -8577,24 +9029,25 @@
         </p:nvSpPr>
         <p:spPr>
           <a:xfrm>
-            <a:off x="685800" y="2167128"/>
-            <a:ext cx="10954512" cy="3822192"/>
-          </a:xfrm>
-          <a:prstGeom prst="rect">
-            <a:avLst/>
-          </a:prstGeom>
-          <a:noFill/>
-          <a:ln/>
-        </p:spPr>
-        <p:txBody>
-          <a:bodyPr wrap="square" rtlCol="0" anchor="ctr"/>
-          <a:lstStyle/>
-          <a:p>
-            <a:pPr indent="0" marL="0">
-              <a:buNone/>
-            </a:pPr>
-            <a:r>
-              <a:rPr lang="en-US" sz="2600" b="1" dirty="0">
+            <a:off x="457200" y="4078224"/>
+            <a:ext cx="11274552" cy="1252728"/>
+          </a:xfrm>
+          <a:prstGeom prst="rect">
+            <a:avLst/>
+          </a:prstGeom>
+          <a:noFill/>
+          <a:ln/>
+        </p:spPr>
+        <p:txBody>
+          <a:bodyPr wrap="square" rtlCol="0" anchor="ctr"/>
+          <a:lstStyle/>
+          <a:p>
+            <a:pPr marL="254000" indent="-254000">
+              <a:buSzPct val="100000"/>
+              <a:buChar char="•"/>
+            </a:pPr>
+            <a:r>
+              <a:rPr lang="en-US" sz="2200" dirty="0">
                 <a:solidFill>
                   <a:srgbClr val="0A1A1C"/>
                 </a:solidFill>
@@ -8602,9 +9055,49 @@
                 <a:ea typeface="Trebuchet MS" pitchFamily="34" charset="-122"/>
                 <a:cs typeface="Trebuchet MS" pitchFamily="34" charset="-120"/>
               </a:rPr>
-              <a:t>Every guarantee Kubernetes makes — self-healing, scaling, zero-downtime rollout — reduces to one idea: you declare desired state, and a control loop never stops trying to make reality match it</a:t>
-            </a:r>
-            <a:endParaRPr lang="en-US" sz="2600" dirty="0"/>
+              <a:t>Podman's Minikube driver is explicitly experimental — --driver=docker is the fallback if you hit an uncovered wall</a:t>
+            </a:r>
+            <a:endParaRPr lang="en-US" sz="2200" dirty="0"/>
+          </a:p>
+        </p:txBody>
+      </p:sp>
+      <p:sp>
+        <p:nvSpPr>
+          <p:cNvPr id="9" name="Text 7"/>
+          <p:cNvSpPr/>
+          <p:nvPr/>
+        </p:nvSpPr>
+        <p:spPr>
+          <a:xfrm>
+            <a:off x="457200" y="5330952"/>
+            <a:ext cx="11274552" cy="1252728"/>
+          </a:xfrm>
+          <a:prstGeom prst="rect">
+            <a:avLst/>
+          </a:prstGeom>
+          <a:noFill/>
+          <a:ln/>
+        </p:spPr>
+        <p:txBody>
+          <a:bodyPr wrap="square" rtlCol="0" anchor="ctr"/>
+          <a:lstStyle/>
+          <a:p>
+            <a:pPr marL="254000" indent="-254000">
+              <a:buSzPct val="100000"/>
+              <a:buChar char="•"/>
+            </a:pPr>
+            <a:r>
+              <a:rPr lang="en-US" sz="2200" dirty="0">
+                <a:solidFill>
+                  <a:srgbClr val="0A1A1C"/>
+                </a:solidFill>
+                <a:latin typeface="Trebuchet MS" pitchFamily="34" charset="0"/>
+                <a:ea typeface="Trebuchet MS" pitchFamily="34" charset="-122"/>
+                <a:cs typeface="Trebuchet MS" pitchFamily="34" charset="-120"/>
+              </a:rPr>
+              <a:t>Base64 is encoding, not encryption — don't mistake a Secret for something actually secured</a:t>
+            </a:r>
+            <a:endParaRPr lang="en-US" sz="2200" dirty="0"/>
           </a:p>
         </p:txBody>
       </p:sp>
@@ -8737,7 +9230,7 @@
                 <a:ea typeface="Arial Black" pitchFamily="34" charset="-122"/>
                 <a:cs typeface="Arial Black" pitchFamily="34" charset="-120"/>
               </a:rPr>
-              <a:t>What's Next: Open TUTORIAL.md</a:t>
+              <a:t>Key Insight</a:t>
             </a:r>
             <a:endParaRPr lang="en-US" sz="3000" dirty="0"/>
           </a:p>
@@ -8770,31 +9263,80 @@
       </p:sp>
       <p:sp>
         <p:nvSpPr>
-          <p:cNvPr id="6" name="Text 4"/>
-          <p:cNvSpPr/>
-          <p:nvPr/>
-        </p:nvSpPr>
-        <p:spPr>
-          <a:xfrm>
-            <a:off x="457200" y="1572768"/>
-            <a:ext cx="11274552" cy="1252728"/>
-          </a:xfrm>
-          <a:prstGeom prst="rect">
-            <a:avLst/>
-          </a:prstGeom>
-          <a:noFill/>
-          <a:ln/>
-        </p:spPr>
-        <p:txBody>
-          <a:bodyPr wrap="square" rtlCol="0" anchor="ctr"/>
-          <a:lstStyle/>
-          <a:p>
-            <a:pPr marL="254000" indent="-254000">
-              <a:buSzPct val="100000"/>
-              <a:buChar char="•"/>
-            </a:pPr>
-            <a:r>
-              <a:rPr lang="en-US" sz="2200" dirty="0">
+          <p:cNvPr id="6" name="Shape 4"/>
+          <p:cNvSpPr/>
+          <p:nvPr/>
+        </p:nvSpPr>
+        <p:spPr>
+          <a:xfrm>
+            <a:off x="457200" y="2029968"/>
+            <a:ext cx="11274552" cy="4096512"/>
+          </a:xfrm>
+          <a:prstGeom prst="rect">
+            <a:avLst/>
+          </a:prstGeom>
+          <a:solidFill>
+            <a:srgbClr val="B8ECF5"/>
+          </a:solidFill>
+          <a:ln w="25400">
+            <a:solidFill>
+              <a:srgbClr val="007A90"/>
+            </a:solidFill>
+            <a:prstDash val="solid"/>
+          </a:ln>
+        </p:spPr>
+      </p:sp>
+      <p:sp>
+        <p:nvSpPr>
+          <p:cNvPr id="7" name="Shape 5"/>
+          <p:cNvSpPr/>
+          <p:nvPr/>
+        </p:nvSpPr>
+        <p:spPr>
+          <a:xfrm>
+            <a:off x="457200" y="2029968"/>
+            <a:ext cx="73152" cy="4096512"/>
+          </a:xfrm>
+          <a:prstGeom prst="rect">
+            <a:avLst/>
+          </a:prstGeom>
+          <a:solidFill>
+            <a:srgbClr val="007A90"/>
+          </a:solidFill>
+          <a:ln w="12700">
+            <a:solidFill>
+              <a:srgbClr val="007A90"/>
+            </a:solidFill>
+            <a:prstDash val="solid"/>
+          </a:ln>
+        </p:spPr>
+      </p:sp>
+      <p:sp>
+        <p:nvSpPr>
+          <p:cNvPr id="8" name="Text 6"/>
+          <p:cNvSpPr/>
+          <p:nvPr/>
+        </p:nvSpPr>
+        <p:spPr>
+          <a:xfrm>
+            <a:off x="685800" y="2167128"/>
+            <a:ext cx="10954512" cy="3822192"/>
+          </a:xfrm>
+          <a:prstGeom prst="rect">
+            <a:avLst/>
+          </a:prstGeom>
+          <a:noFill/>
+          <a:ln/>
+        </p:spPr>
+        <p:txBody>
+          <a:bodyPr wrap="square" rtlCol="0" anchor="ctr"/>
+          <a:lstStyle/>
+          <a:p>
+            <a:pPr indent="0" marL="0">
+              <a:buNone/>
+            </a:pPr>
+            <a:r>
+              <a:rPr lang="en-US" sz="2600" b="1" dirty="0">
                 <a:solidFill>
                   <a:srgbClr val="0A1A1C"/>
                 </a:solidFill>
@@ -8802,129 +9344,9 @@
                 <a:ea typeface="Trebuchet MS" pitchFamily="34" charset="-122"/>
                 <a:cs typeface="Trebuchet MS" pitchFamily="34" charset="-120"/>
               </a:rPr>
-              <a:t>This deck was the map — the territory starts now</a:t>
-            </a:r>
-            <a:endParaRPr lang="en-US" sz="2200" dirty="0"/>
-          </a:p>
-        </p:txBody>
-      </p:sp>
-      <p:sp>
-        <p:nvSpPr>
-          <p:cNvPr id="7" name="Text 5"/>
-          <p:cNvSpPr/>
-          <p:nvPr/>
-        </p:nvSpPr>
-        <p:spPr>
-          <a:xfrm>
-            <a:off x="457200" y="2825496"/>
-            <a:ext cx="11274552" cy="1252728"/>
-          </a:xfrm>
-          <a:prstGeom prst="rect">
-            <a:avLst/>
-          </a:prstGeom>
-          <a:noFill/>
-          <a:ln/>
-        </p:spPr>
-        <p:txBody>
-          <a:bodyPr wrap="square" rtlCol="0" anchor="ctr"/>
-          <a:lstStyle/>
-          <a:p>
-            <a:pPr marL="254000" indent="-254000">
-              <a:buSzPct val="100000"/>
-              <a:buChar char="•"/>
-            </a:pPr>
-            <a:r>
-              <a:rPr lang="en-US" sz="2200" dirty="0">
-                <a:solidFill>
-                  <a:srgbClr val="0A1A1C"/>
-                </a:solidFill>
-                <a:latin typeface="Trebuchet MS" pitchFamily="34" charset="0"/>
-                <a:ea typeface="Trebuchet MS" pitchFamily="34" charset="-122"/>
-                <a:cs typeface="Trebuchet MS" pitchFamily="34" charset="-120"/>
-              </a:rPr>
-              <a:t>Open TUTORIAL.md, start at Module 0 (Setup &amp; Orientation): install Podman, start Minikube, run your first real kubectl get nodes</a:t>
-            </a:r>
-            <a:endParaRPr lang="en-US" sz="2200" dirty="0"/>
-          </a:p>
-        </p:txBody>
-      </p:sp>
-      <p:sp>
-        <p:nvSpPr>
-          <p:cNvPr id="8" name="Text 6"/>
-          <p:cNvSpPr/>
-          <p:nvPr/>
-        </p:nvSpPr>
-        <p:spPr>
-          <a:xfrm>
-            <a:off x="457200" y="4078224"/>
-            <a:ext cx="11274552" cy="1252728"/>
-          </a:xfrm>
-          <a:prstGeom prst="rect">
-            <a:avLst/>
-          </a:prstGeom>
-          <a:noFill/>
-          <a:ln/>
-        </p:spPr>
-        <p:txBody>
-          <a:bodyPr wrap="square" rtlCol="0" anchor="ctr"/>
-          <a:lstStyle/>
-          <a:p>
-            <a:pPr marL="254000" indent="-254000">
-              <a:buSzPct val="100000"/>
-              <a:buChar char="•"/>
-            </a:pPr>
-            <a:r>
-              <a:rPr lang="en-US" sz="2200" dirty="0">
-                <a:solidFill>
-                  <a:srgbClr val="0A1A1C"/>
-                </a:solidFill>
-                <a:latin typeface="Trebuchet MS" pitchFamily="34" charset="0"/>
-                <a:ea typeface="Trebuchet MS" pitchFamily="34" charset="-122"/>
-                <a:cs typeface="Trebuchet MS" pitchFamily="34" charset="-120"/>
-              </a:rPr>
-              <a:t>Modules 1–6 build in exactly today's order: Pods → Deployments → Services → Config/Secrets → Capstone → Cleanup</a:t>
-            </a:r>
-            <a:endParaRPr lang="en-US" sz="2200" dirty="0"/>
-          </a:p>
-        </p:txBody>
-      </p:sp>
-      <p:sp>
-        <p:nvSpPr>
-          <p:cNvPr id="9" name="Text 7"/>
-          <p:cNvSpPr/>
-          <p:nvPr/>
-        </p:nvSpPr>
-        <p:spPr>
-          <a:xfrm>
-            <a:off x="457200" y="5330952"/>
-            <a:ext cx="11274552" cy="1252728"/>
-          </a:xfrm>
-          <a:prstGeom prst="rect">
-            <a:avLst/>
-          </a:prstGeom>
-          <a:noFill/>
-          <a:ln/>
-        </p:spPr>
-        <p:txBody>
-          <a:bodyPr wrap="square" rtlCol="0" anchor="ctr"/>
-          <a:lstStyle/>
-          <a:p>
-            <a:pPr marL="254000" indent="-254000">
-              <a:buSzPct val="100000"/>
-              <a:buChar char="•"/>
-            </a:pPr>
-            <a:r>
-              <a:rPr lang="en-US" sz="2200" dirty="0">
-                <a:solidFill>
-                  <a:srgbClr val="0A1A1C"/>
-                </a:solidFill>
-                <a:latin typeface="Trebuchet MS" pitchFamily="34" charset="0"/>
-                <a:ea typeface="Trebuchet MS" pitchFamily="34" charset="-122"/>
-                <a:cs typeface="Trebuchet MS" pitchFamily="34" charset="-120"/>
-              </a:rPr>
-              <a:t>docs/kubernetes-fundamentals-notes.md has the CKA/CKAD-style deeper reference once a concept clicks</a:t>
-            </a:r>
-            <a:endParaRPr lang="en-US" sz="2200" dirty="0"/>
+              <a:t>Every guarantee Kubernetes makes — self-healing, scaling, zero-downtime rollout — reduces to one idea: you declare desired state, and a control loop never stops trying to make reality match it</a:t>
+            </a:r>
+            <a:endParaRPr lang="en-US" sz="2600" dirty="0"/>
           </a:p>
         </p:txBody>
       </p:sp>
@@ -8939,6 +9361,326 @@
 <file path=ppt/slides/slide22.xml><?xml version="1.0" encoding="utf-8"?>
 <p:sld xmlns:a="http://schemas.openxmlformats.org/drawingml/2006/main" xmlns:r="http://schemas.openxmlformats.org/officeDocument/2006/relationships" xmlns:p="http://schemas.openxmlformats.org/presentationml/2006/main">
   <p:cSld name="Slide 22">
+    <p:bg>
+      <p:bgPr>
+        <a:solidFill>
+          <a:srgbClr val="EAFCFF"/>
+        </a:solidFill>
+      </p:bgPr>
+    </p:bg>
+    <p:spTree>
+      <p:nvGrpSpPr>
+        <p:cNvPr id="1" name=""/>
+        <p:cNvGrpSpPr/>
+        <p:nvPr/>
+      </p:nvGrpSpPr>
+      <p:grpSpPr>
+        <a:xfrm>
+          <a:off x="0" y="0"/>
+          <a:ext cx="0" cy="0"/>
+          <a:chOff x="0" y="0"/>
+          <a:chExt cx="0" cy="0"/>
+        </a:xfrm>
+      </p:grpSpPr>
+      <p:sp>
+        <p:nvSpPr>
+          <p:cNvPr id="2" name="Shape 0"/>
+          <p:cNvSpPr/>
+          <p:nvPr/>
+        </p:nvSpPr>
+        <p:spPr>
+          <a:xfrm>
+            <a:off x="457200" y="201168"/>
+            <a:ext cx="1828800" cy="347472"/>
+          </a:xfrm>
+          <a:prstGeom prst="rect">
+            <a:avLst/>
+          </a:prstGeom>
+          <a:solidFill>
+            <a:srgbClr val="007A90"/>
+          </a:solidFill>
+          <a:ln w="9525">
+            <a:solidFill>
+              <a:srgbClr val="007A90"/>
+            </a:solidFill>
+            <a:prstDash val="solid"/>
+          </a:ln>
+        </p:spPr>
+      </p:sp>
+      <p:sp>
+        <p:nvSpPr>
+          <p:cNvPr id="3" name="Text 1"/>
+          <p:cNvSpPr/>
+          <p:nvPr/>
+        </p:nvSpPr>
+        <p:spPr>
+          <a:xfrm>
+            <a:off x="457200" y="201168"/>
+            <a:ext cx="1828800" cy="347472"/>
+          </a:xfrm>
+          <a:prstGeom prst="rect">
+            <a:avLst/>
+          </a:prstGeom>
+          <a:noFill/>
+          <a:ln/>
+        </p:spPr>
+        <p:txBody>
+          <a:bodyPr wrap="square" rtlCol="0" anchor="ctr"/>
+          <a:lstStyle/>
+          <a:p>
+            <a:pPr algn="ctr" indent="0" marL="0">
+              <a:buNone/>
+            </a:pPr>
+            <a:r>
+              <a:rPr lang="en-US" sz="1200" b="1" spc="50" kern="0" dirty="0">
+                <a:solidFill>
+                  <a:srgbClr val="FFFFFF"/>
+                </a:solidFill>
+                <a:latin typeface="Trebuchet MS" pitchFamily="34" charset="0"/>
+                <a:ea typeface="Trebuchet MS" pitchFamily="34" charset="-122"/>
+                <a:cs typeface="Trebuchet MS" pitchFamily="34" charset="-120"/>
+              </a:rPr>
+              <a:t>KUBERNETES</a:t>
+            </a:r>
+            <a:endParaRPr lang="en-US" sz="1200" dirty="0"/>
+          </a:p>
+        </p:txBody>
+      </p:sp>
+      <p:sp>
+        <p:nvSpPr>
+          <p:cNvPr id="4" name="Text 2"/>
+          <p:cNvSpPr/>
+          <p:nvPr/>
+        </p:nvSpPr>
+        <p:spPr>
+          <a:xfrm>
+            <a:off x="457200" y="658368"/>
+            <a:ext cx="11274552" cy="685800"/>
+          </a:xfrm>
+          <a:prstGeom prst="rect">
+            <a:avLst/>
+          </a:prstGeom>
+          <a:noFill/>
+          <a:ln/>
+        </p:spPr>
+        <p:txBody>
+          <a:bodyPr wrap="square" rtlCol="0" anchor="ctr"/>
+          <a:lstStyle/>
+          <a:p>
+            <a:pPr indent="0" marL="0">
+              <a:buNone/>
+            </a:pPr>
+            <a:r>
+              <a:rPr lang="en-US" sz="3000" b="1" spc="50" kern="0" dirty="0">
+                <a:solidFill>
+                  <a:srgbClr val="0A1A1C"/>
+                </a:solidFill>
+                <a:latin typeface="Arial Black" pitchFamily="34" charset="0"/>
+                <a:ea typeface="Arial Black" pitchFamily="34" charset="-122"/>
+                <a:cs typeface="Arial Black" pitchFamily="34" charset="-120"/>
+              </a:rPr>
+              <a:t>What's Next: Open TUTORIAL.md</a:t>
+            </a:r>
+            <a:endParaRPr lang="en-US" sz="3000" dirty="0"/>
+          </a:p>
+        </p:txBody>
+      </p:sp>
+      <p:sp>
+        <p:nvSpPr>
+          <p:cNvPr id="5" name="Shape 3"/>
+          <p:cNvSpPr/>
+          <p:nvPr/>
+        </p:nvSpPr>
+        <p:spPr>
+          <a:xfrm>
+            <a:off x="457200" y="1417320"/>
+            <a:ext cx="11274552" cy="27432"/>
+          </a:xfrm>
+          <a:prstGeom prst="rect">
+            <a:avLst/>
+          </a:prstGeom>
+          <a:solidFill>
+            <a:srgbClr val="007A90"/>
+          </a:solidFill>
+          <a:ln w="12700">
+            <a:solidFill>
+              <a:srgbClr val="007A90"/>
+            </a:solidFill>
+            <a:prstDash val="solid"/>
+          </a:ln>
+        </p:spPr>
+      </p:sp>
+      <p:sp>
+        <p:nvSpPr>
+          <p:cNvPr id="6" name="Text 4"/>
+          <p:cNvSpPr/>
+          <p:nvPr/>
+        </p:nvSpPr>
+        <p:spPr>
+          <a:xfrm>
+            <a:off x="457200" y="1572768"/>
+            <a:ext cx="11274552" cy="1252728"/>
+          </a:xfrm>
+          <a:prstGeom prst="rect">
+            <a:avLst/>
+          </a:prstGeom>
+          <a:noFill/>
+          <a:ln/>
+        </p:spPr>
+        <p:txBody>
+          <a:bodyPr wrap="square" rtlCol="0" anchor="ctr"/>
+          <a:lstStyle/>
+          <a:p>
+            <a:pPr marL="254000" indent="-254000">
+              <a:buSzPct val="100000"/>
+              <a:buChar char="•"/>
+            </a:pPr>
+            <a:r>
+              <a:rPr lang="en-US" sz="2200" dirty="0">
+                <a:solidFill>
+                  <a:srgbClr val="0A1A1C"/>
+                </a:solidFill>
+                <a:latin typeface="Trebuchet MS" pitchFamily="34" charset="0"/>
+                <a:ea typeface="Trebuchet MS" pitchFamily="34" charset="-122"/>
+                <a:cs typeface="Trebuchet MS" pitchFamily="34" charset="-120"/>
+              </a:rPr>
+              <a:t>This deck was the map — the territory starts now</a:t>
+            </a:r>
+            <a:endParaRPr lang="en-US" sz="2200" dirty="0"/>
+          </a:p>
+        </p:txBody>
+      </p:sp>
+      <p:sp>
+        <p:nvSpPr>
+          <p:cNvPr id="7" name="Text 5"/>
+          <p:cNvSpPr/>
+          <p:nvPr/>
+        </p:nvSpPr>
+        <p:spPr>
+          <a:xfrm>
+            <a:off x="457200" y="2825496"/>
+            <a:ext cx="11274552" cy="1252728"/>
+          </a:xfrm>
+          <a:prstGeom prst="rect">
+            <a:avLst/>
+          </a:prstGeom>
+          <a:noFill/>
+          <a:ln/>
+        </p:spPr>
+        <p:txBody>
+          <a:bodyPr wrap="square" rtlCol="0" anchor="ctr"/>
+          <a:lstStyle/>
+          <a:p>
+            <a:pPr marL="254000" indent="-254000">
+              <a:buSzPct val="100000"/>
+              <a:buChar char="•"/>
+            </a:pPr>
+            <a:r>
+              <a:rPr lang="en-US" sz="2200" dirty="0">
+                <a:solidFill>
+                  <a:srgbClr val="0A1A1C"/>
+                </a:solidFill>
+                <a:latin typeface="Trebuchet MS" pitchFamily="34" charset="0"/>
+                <a:ea typeface="Trebuchet MS" pitchFamily="34" charset="-122"/>
+                <a:cs typeface="Trebuchet MS" pitchFamily="34" charset="-120"/>
+              </a:rPr>
+              <a:t>Open TUTORIAL.md, start at Module 0 (Setup &amp; Orientation): install Podman, start Minikube, run your first real kubectl get nodes</a:t>
+            </a:r>
+            <a:endParaRPr lang="en-US" sz="2200" dirty="0"/>
+          </a:p>
+        </p:txBody>
+      </p:sp>
+      <p:sp>
+        <p:nvSpPr>
+          <p:cNvPr id="8" name="Text 6"/>
+          <p:cNvSpPr/>
+          <p:nvPr/>
+        </p:nvSpPr>
+        <p:spPr>
+          <a:xfrm>
+            <a:off x="457200" y="4078224"/>
+            <a:ext cx="11274552" cy="1252728"/>
+          </a:xfrm>
+          <a:prstGeom prst="rect">
+            <a:avLst/>
+          </a:prstGeom>
+          <a:noFill/>
+          <a:ln/>
+        </p:spPr>
+        <p:txBody>
+          <a:bodyPr wrap="square" rtlCol="0" anchor="ctr"/>
+          <a:lstStyle/>
+          <a:p>
+            <a:pPr marL="254000" indent="-254000">
+              <a:buSzPct val="100000"/>
+              <a:buChar char="•"/>
+            </a:pPr>
+            <a:r>
+              <a:rPr lang="en-US" sz="2200" dirty="0">
+                <a:solidFill>
+                  <a:srgbClr val="0A1A1C"/>
+                </a:solidFill>
+                <a:latin typeface="Trebuchet MS" pitchFamily="34" charset="0"/>
+                <a:ea typeface="Trebuchet MS" pitchFamily="34" charset="-122"/>
+                <a:cs typeface="Trebuchet MS" pitchFamily="34" charset="-120"/>
+              </a:rPr>
+              <a:t>Modules 1–6 build in exactly today's order: Pods → Deployments → Services → Config/Secrets → Capstone → Cleanup</a:t>
+            </a:r>
+            <a:endParaRPr lang="en-US" sz="2200" dirty="0"/>
+          </a:p>
+        </p:txBody>
+      </p:sp>
+      <p:sp>
+        <p:nvSpPr>
+          <p:cNvPr id="9" name="Text 7"/>
+          <p:cNvSpPr/>
+          <p:nvPr/>
+        </p:nvSpPr>
+        <p:spPr>
+          <a:xfrm>
+            <a:off x="457200" y="5330952"/>
+            <a:ext cx="11274552" cy="1252728"/>
+          </a:xfrm>
+          <a:prstGeom prst="rect">
+            <a:avLst/>
+          </a:prstGeom>
+          <a:noFill/>
+          <a:ln/>
+        </p:spPr>
+        <p:txBody>
+          <a:bodyPr wrap="square" rtlCol="0" anchor="ctr"/>
+          <a:lstStyle/>
+          <a:p>
+            <a:pPr marL="254000" indent="-254000">
+              <a:buSzPct val="100000"/>
+              <a:buChar char="•"/>
+            </a:pPr>
+            <a:r>
+              <a:rPr lang="en-US" sz="2200" dirty="0">
+                <a:solidFill>
+                  <a:srgbClr val="0A1A1C"/>
+                </a:solidFill>
+                <a:latin typeface="Trebuchet MS" pitchFamily="34" charset="0"/>
+                <a:ea typeface="Trebuchet MS" pitchFamily="34" charset="-122"/>
+                <a:cs typeface="Trebuchet MS" pitchFamily="34" charset="-120"/>
+              </a:rPr>
+              <a:t>docs/kubernetes-fundamentals-notes.md has the CKA/CKAD-style deeper reference once a concept clicks</a:t>
+            </a:r>
+            <a:endParaRPr lang="en-US" sz="2200" dirty="0"/>
+          </a:p>
+        </p:txBody>
+      </p:sp>
+    </p:spTree>
+  </p:cSld>
+  <p:clrMapOvr>
+    <a:masterClrMapping/>
+  </p:clrMapOvr>
+</p:sld>
+</file>
+
+<file path=ppt/slides/slide23.xml><?xml version="1.0" encoding="utf-8"?>
+<p:sld xmlns:a="http://schemas.openxmlformats.org/drawingml/2006/main" xmlns:r="http://schemas.openxmlformats.org/officeDocument/2006/relationships" xmlns:p="http://schemas.openxmlformats.org/presentationml/2006/main">
+  <p:cSld name="Slide 23">
     <p:bg>
       <p:bgPr>
         <a:solidFill>

--- a/docs/presentations/KubernetesFundamentals/KubernetesFundamentals.pptx
+++ b/docs/presentations/KubernetesFundamentals/KubernetesFundamentals.pptx
@@ -876,7 +876,7 @@
           <a:p>
             <a:r>
               <a:rPr lang="en-US" dirty="0"/>
-              <a:t>This is the "aha" moment of the deck for a first-time reader: run the delete experiment and watch the Pod not come back. Frame it as a problem statement, not a dead end — the breakdown of why follows immediately.</a:t>
+              <a:t>This is the "aha" moment of the deck for a first-time reader: run the delete experiment and watch the Pod not come back. Before running delete, be explicit about what it does and doesn't touch — that's the detail that makes the result land instead of feeling like a magic trick. Frame it as a problem statement, not a dead end — the breakdown of why follows immediately.</a:t>
             </a:r>
             <a:endParaRPr lang="en-US" dirty="0"/>
           </a:p>
@@ -5049,7 +5049,7 @@
               <a:buChar char="•"/>
             </a:pPr>
             <a:r>
-              <a:rPr lang="en-US" sz="1600" dirty="0">
+              <a:rPr lang="en-US" sz="1400" dirty="0">
                 <a:solidFill>
                   <a:srgbClr val="0A1A1C"/>
                 </a:solidFill>
@@ -5059,7 +5059,7 @@
               </a:rPr>
               <a:t>Smallest deployable unit — a thin wrapper around one or more containers</a:t>
             </a:r>
-            <a:endParaRPr lang="en-US" sz="1600" dirty="0"/>
+            <a:endParaRPr lang="en-US" sz="1400" dirty="0"/>
           </a:p>
         </p:txBody>
       </p:sp>
@@ -5089,7 +5089,7 @@
               <a:buChar char="•"/>
             </a:pPr>
             <a:r>
-              <a:rPr lang="en-US" sz="1600" dirty="0">
+              <a:rPr lang="en-US" sz="1400" dirty="0">
                 <a:solidFill>
                   <a:srgbClr val="0A1A1C"/>
                 </a:solidFill>
@@ -5099,7 +5099,7 @@
               </a:rPr>
               <a:t>kind: Pod is case-sensitive; lowercase pod fails outright</a:t>
             </a:r>
-            <a:endParaRPr lang="en-US" sz="1600" dirty="0"/>
+            <a:endParaRPr lang="en-US" sz="1400" dirty="0"/>
           </a:p>
         </p:txBody>
       </p:sp>
@@ -5129,7 +5129,7 @@
               <a:buChar char="•"/>
             </a:pPr>
             <a:r>
-              <a:rPr lang="en-US" sz="1600" dirty="0">
+              <a:rPr lang="en-US" sz="1400" dirty="0">
                 <a:solidFill>
                   <a:srgbClr val="0A1A1C"/>
                 </a:solidFill>
@@ -5137,9 +5137,9 @@
                 <a:ea typeface="Trebuchet MS" pitchFamily="34" charset="-122"/>
                 <a:cs typeface="Trebuchet MS" pitchFamily="34" charset="-120"/>
               </a:rPr>
-              <a:t>labels are just a tag on the object — inert until something else reads them</a:t>
-            </a:r>
-            <a:endParaRPr lang="en-US" sz="1600" dirty="0"/>
+              <a:t>The full experiment, in order: apply -f pod.yaml (creates it) → get pods (confirms Running) → delete pod hello-pod (removes the live object — not the file) → get pods again</a:t>
+            </a:r>
+            <a:endParaRPr lang="en-US" sz="1400" dirty="0"/>
           </a:p>
         </p:txBody>
       </p:sp>
@@ -5169,7 +5169,7 @@
               <a:buChar char="•"/>
             </a:pPr>
             <a:r>
-              <a:rPr lang="en-US" sz="1600" dirty="0">
+              <a:rPr lang="en-US" sz="1400" dirty="0">
                 <a:solidFill>
                   <a:srgbClr val="0A1A1C"/>
                 </a:solidFill>
@@ -5177,9 +5177,9 @@
                 <a:ea typeface="Trebuchet MS" pitchFamily="34" charset="-122"/>
                 <a:cs typeface="Trebuchet MS" pitchFamily="34" charset="-120"/>
               </a:rPr>
-              <a:t>The experiment: kubectl delete pod hello-pod → kubectl get pods → No resources found in default namespace.</a:t>
-            </a:r>
-            <a:endParaRPr lang="en-US" sz="1600" dirty="0"/>
+              <a:t>pod.yaml sits on your laptop the whole time, completely untouched by that delete — a file and a cluster object are two separate things</a:t>
+            </a:r>
+            <a:endParaRPr lang="en-US" sz="1400" dirty="0"/>
           </a:p>
         </p:txBody>
       </p:sp>
@@ -5209,7 +5209,7 @@
               <a:buChar char="•"/>
             </a:pPr>
             <a:r>
-              <a:rPr lang="en-US" sz="1600" dirty="0">
+              <a:rPr lang="en-US" sz="1400" dirty="0">
                 <a:solidFill>
                   <a:srgbClr val="0A1A1C"/>
                 </a:solidFill>
@@ -5217,9 +5217,9 @@
                 <a:ea typeface="Trebuchet MS" pitchFamily="34" charset="-122"/>
                 <a:cs typeface="Trebuchet MS" pitchFamily="34" charset="-120"/>
               </a:rPr>
-              <a:t>It does not come back, even though you defined it in pod.yaml</a:t>
-            </a:r>
-            <a:endParaRPr lang="en-US" sz="1600" dirty="0"/>
+              <a:t>Result: No resources found in default namespace. — it does not come back</a:t>
+            </a:r>
+            <a:endParaRPr lang="en-US" sz="1400" dirty="0"/>
           </a:p>
         </p:txBody>
       </p:sp>
@@ -5685,7 +5685,7 @@
         <p:spPr>
           <a:xfrm>
             <a:off x="457200" y="3218688"/>
-            <a:ext cx="11274552" cy="672998"/>
+            <a:ext cx="11274552" cy="560832"/>
           </a:xfrm>
           <a:prstGeom prst="rect">
             <a:avLst/>
@@ -5702,7 +5702,7 @@
               <a:buChar char="•"/>
             </a:pPr>
             <a:r>
-              <a:rPr lang="en-US" sz="1700" dirty="0">
+              <a:rPr lang="en-US" sz="1500" dirty="0">
                 <a:solidFill>
                   <a:srgbClr val="0A1A1C"/>
                 </a:solidFill>
@@ -5712,7 +5712,7 @@
               </a:rPr>
               <a:t>apply runs exactly once: read the file, create the Pod, exit — nothing stays behind to keep enforcing it</a:t>
             </a:r>
-            <a:endParaRPr lang="en-US" sz="1700" dirty="0"/>
+            <a:endParaRPr lang="en-US" sz="1500" dirty="0"/>
           </a:p>
         </p:txBody>
       </p:sp>
@@ -5724,8 +5724,8 @@
         </p:nvSpPr>
         <p:spPr>
           <a:xfrm>
-            <a:off x="457200" y="3891686"/>
-            <a:ext cx="11274552" cy="672998"/>
+            <a:off x="457200" y="3779520"/>
+            <a:ext cx="11274552" cy="560832"/>
           </a:xfrm>
           <a:prstGeom prst="rect">
             <a:avLst/>
@@ -5742,7 +5742,7 @@
               <a:buChar char="•"/>
             </a:pPr>
             <a:r>
-              <a:rPr lang="en-US" sz="1700" dirty="0">
+              <a:rPr lang="en-US" sz="1500" dirty="0">
                 <a:solidFill>
                   <a:srgbClr val="0A1A1C"/>
                 </a:solidFill>
@@ -5750,9 +5750,9 @@
                 <a:ea typeface="Trebuchet MS" pitchFamily="34" charset="-122"/>
                 <a:cs typeface="Trebuchet MS" pitchFamily="34" charset="-120"/>
               </a:rPr>
-              <a:t>The Pod becomes a plain record in etcd with no controller attached to it</a:t>
-            </a:r>
-            <a:endParaRPr lang="en-US" sz="1700" dirty="0"/>
+              <a:t>delete only ever removes the live object in the cluster — pod.yaml on disk is never read, touched, or invalidated by it</a:t>
+            </a:r>
+            <a:endParaRPr lang="en-US" sz="1500" dirty="0"/>
           </a:p>
         </p:txBody>
       </p:sp>
@@ -5764,8 +5764,8 @@
         </p:nvSpPr>
         <p:spPr>
           <a:xfrm>
-            <a:off x="457200" y="4564685"/>
-            <a:ext cx="11274552" cy="672998"/>
+            <a:off x="457200" y="4340352"/>
+            <a:ext cx="11274552" cy="560832"/>
           </a:xfrm>
           <a:prstGeom prst="rect">
             <a:avLst/>
@@ -5782,7 +5782,7 @@
               <a:buChar char="•"/>
             </a:pPr>
             <a:r>
-              <a:rPr lang="en-US" sz="1700" dirty="0">
+              <a:rPr lang="en-US" sz="1500" dirty="0">
                 <a:solidFill>
                   <a:srgbClr val="0A1A1C"/>
                 </a:solidFill>
@@ -5790,9 +5790,9 @@
                 <a:ea typeface="Trebuchet MS" pitchFamily="34" charset="-122"/>
                 <a:cs typeface="Trebuchet MS" pitchFamily="34" charset="-120"/>
               </a:rPr>
-              <a:t>Nothing is asking "does hello-pod still exist?" on a loop, so nothing notices when the answer becomes no</a:t>
-            </a:r>
-            <a:endParaRPr lang="en-US" sz="1700" dirty="0"/>
+              <a:t>The Pod becomes a plain record in etcd with no controller attached to it</a:t>
+            </a:r>
+            <a:endParaRPr lang="en-US" sz="1500" dirty="0"/>
           </a:p>
         </p:txBody>
       </p:sp>
@@ -5804,8 +5804,8 @@
         </p:nvSpPr>
         <p:spPr>
           <a:xfrm>
-            <a:off x="457200" y="5237683"/>
-            <a:ext cx="11274552" cy="672998"/>
+            <a:off x="457200" y="4901184"/>
+            <a:ext cx="11274552" cy="560832"/>
           </a:xfrm>
           <a:prstGeom prst="rect">
             <a:avLst/>
@@ -5822,7 +5822,7 @@
               <a:buChar char="•"/>
             </a:pPr>
             <a:r>
-              <a:rPr lang="en-US" sz="1700" dirty="0">
+              <a:rPr lang="en-US" sz="1500" dirty="0">
                 <a:solidFill>
                   <a:srgbClr val="0A1A1C"/>
                 </a:solidFill>
@@ -5830,9 +5830,9 @@
                 <a:ea typeface="Trebuchet MS" pitchFamily="34" charset="-122"/>
                 <a:cs typeface="Trebuchet MS" pitchFamily="34" charset="-120"/>
               </a:rPr>
-              <a:t>pod.yaml on your laptop only mattered at the moment you ran apply — after that it has no ongoing connection to the cluster</a:t>
-            </a:r>
-            <a:endParaRPr lang="en-US" sz="1700" dirty="0"/>
+              <a:t>Nothing is asking "does hello-pod still exist?" on a loop, so nothing notices when the answer becomes no</a:t>
+            </a:r>
+            <a:endParaRPr lang="en-US" sz="1500" dirty="0"/>
           </a:p>
         </p:txBody>
       </p:sp>
@@ -5844,8 +5844,8 @@
         </p:nvSpPr>
         <p:spPr>
           <a:xfrm>
-            <a:off x="457200" y="5910682"/>
-            <a:ext cx="11274552" cy="672998"/>
+            <a:off x="457200" y="5462016"/>
+            <a:ext cx="11274552" cy="560832"/>
           </a:xfrm>
           <a:prstGeom prst="rect">
             <a:avLst/>
@@ -5862,7 +5862,7 @@
               <a:buChar char="•"/>
             </a:pPr>
             <a:r>
-              <a:rPr lang="en-US" sz="1700" dirty="0">
+              <a:rPr lang="en-US" sz="1500" dirty="0">
                 <a:solidFill>
                   <a:srgbClr val="0A1A1C"/>
                 </a:solidFill>
@@ -5870,9 +5870,49 @@
                 <a:ea typeface="Trebuchet MS" pitchFamily="34" charset="-122"/>
                 <a:cs typeface="Trebuchet MS" pitchFamily="34" charset="-120"/>
               </a:rPr>
+              <a:t>A file and a cluster object are linked only for the instant apply runs — after that, editing or deleting one has zero effect on the other</a:t>
+            </a:r>
+            <a:endParaRPr lang="en-US" sz="1500" dirty="0"/>
+          </a:p>
+        </p:txBody>
+      </p:sp>
+      <p:sp>
+        <p:nvSpPr>
+          <p:cNvPr id="19" name="Text 17"/>
+          <p:cNvSpPr/>
+          <p:nvPr/>
+        </p:nvSpPr>
+        <p:spPr>
+          <a:xfrm>
+            <a:off x="457200" y="6022848"/>
+            <a:ext cx="11274552" cy="560832"/>
+          </a:xfrm>
+          <a:prstGeom prst="rect">
+            <a:avLst/>
+          </a:prstGeom>
+          <a:noFill/>
+          <a:ln/>
+        </p:spPr>
+        <p:txBody>
+          <a:bodyPr wrap="square" rtlCol="0" anchor="ctr"/>
+          <a:lstStyle/>
+          <a:p>
+            <a:pPr marL="254000" indent="-254000">
+              <a:buSzPct val="100000"/>
+              <a:buChar char="•"/>
+            </a:pPr>
+            <a:r>
+              <a:rPr lang="en-US" sz="1500" dirty="0">
+                <a:solidFill>
+                  <a:srgbClr val="0A1A1C"/>
+                </a:solidFill>
+                <a:latin typeface="Trebuchet MS" pitchFamily="34" charset="0"/>
+                <a:ea typeface="Trebuchet MS" pitchFamily="34" charset="-122"/>
+                <a:cs typeface="Trebuchet MS" pitchFamily="34" charset="-120"/>
+              </a:rPr>
               <a:t>Not a bug — it's the exact gap a controller is built to close, which is exactly what a Deployment adds</a:t>
             </a:r>
-            <a:endParaRPr lang="en-US" sz="1700" dirty="0"/>
+            <a:endParaRPr lang="en-US" sz="1500" dirty="0"/>
           </a:p>
         </p:txBody>
       </p:sp>

--- a/docs/presentations/KubernetesFundamentals/KubernetesFundamentals.pptx
+++ b/docs/presentations/KubernetesFundamentals/KubernetesFundamentals.pptx
@@ -28,9 +28,11 @@
     <p:sldId id="276" r:id="rId22"/>
     <p:sldId id="277" r:id="rId23"/>
     <p:sldId id="278" r:id="rId24"/>
+    <p:sldId id="279" r:id="rId25"/>
+    <p:sldId id="280" r:id="rId26"/>
   </p:sldIdLst>
   <p:notesMasterIdLst>
-    <p:notesMasterId r:id="rId25"/>
+    <p:notesMasterId r:id="rId27"/>
   </p:notesMasterIdLst>
   <p:sldSz cx="12192000" cy="6858000"/>
   <p:notesSz cx="6858000" cy="12192000"/>
@@ -876,7 +878,7 @@
           <a:p>
             <a:r>
               <a:rPr lang="en-US" dirty="0"/>
-              <a:t>This is the "aha" moment of the deck for a first-time reader: run the delete experiment and watch the Pod not come back. Before running delete, be explicit about what it does and doesn't touch — that's the detail that makes the result land instead of feeling like a magic trick. Frame it as a problem statement, not a dead end — the breakdown of why follows immediately.</a:t>
+              <a:t>First real manifest of the deck — walk kind/metadata/spec so the fields aren't mysterious yet. Don't run anything yet; the mechanics of what apply actually does with this file get their own slide next.</a:t>
             </a:r>
             <a:endParaRPr lang="en-US" dirty="0"/>
           </a:p>
@@ -964,7 +966,7 @@
           <a:p>
             <a:r>
               <a:rPr lang="en-US" dirty="0"/>
-              <a:t>This is the direct answer to "but I defined it in YAML" — the payoff for the whole deck's declarative-vs-controller distinction. Land it slowly; this is the moment that makes everything else click.</a:t>
+              <a:t>Directly answers the natural question — "so does apply actually deploy the Pod, or just record it?" Answer: both, in sequence, automatically. Walk each arrow against this exact manifest so it isn't abstract.</a:t>
             </a:r>
             <a:endParaRPr lang="en-US" dirty="0"/>
           </a:p>
@@ -1052,7 +1054,7 @@
           <a:p>
             <a:r>
               <a:rPr lang="en-US" dirty="0"/>
-              <a:t>Repeat the exact delete experiment, but this time on a Deployment-managed Pod — the contrast with the bare-Pod case is the whole point. This is the concrete payoff: the ReplicaSet controller, not apply, is what runs the loop.</a:t>
+              <a:t>This is the "aha" moment of the deck for a first-time reader. Before running step 3, be explicit about what it does and doesn't touch — that's the detail that makes the result land instead of feeling like a magic trick. Frame it as a problem statement, not a dead end — the breakdown of why follows immediately.</a:t>
             </a:r>
             <a:endParaRPr lang="en-US" dirty="0"/>
           </a:p>
@@ -1140,7 +1142,7 @@
           <a:p>
             <a:r>
               <a:rPr lang="en-US" dirty="0"/>
-              <a:t>Fourth and final focus area — the last two object types, then the capstone that wires everything together.</a:t>
+              <a:t>This is the direct answer to "but I defined it in YAML" — the payoff for the whole deck's declarative-vs-controller distinction. Land it slowly; this is the moment that makes everything else click.</a:t>
             </a:r>
             <a:endParaRPr lang="en-US" dirty="0"/>
           </a:p>
@@ -1228,7 +1230,7 @@
           <a:p>
             <a:r>
               <a:rPr lang="en-US" dirty="0"/>
-              <a:t>Anchor this in the fact that Pod IPs change on every delete/recreate — a Service is the direct answer to that instability.</a:t>
+              <a:t>Repeat the exact delete experiment, but this time on a Deployment-managed Pod — the contrast with the bare-Pod case is the whole point. This is the concrete payoff: the ReplicaSet controller, not apply, is what runs the loop.</a:t>
             </a:r>
             <a:endParaRPr lang="en-US" dirty="0"/>
           </a:p>
@@ -1316,7 +1318,7 @@
           <a:p>
             <a:r>
               <a:rPr lang="en-US" dirty="0"/>
-              <a:t>Keep this conceptual per the high-level depth — one short illustrative snippet, not a manifest walkthrough. The base64-is-not-encryption point is the one thing to land hard.</a:t>
+              <a:t>Fourth and final focus area — the last two object types, then the capstone that wires everything together.</a:t>
             </a:r>
             <a:endParaRPr lang="en-US" dirty="0"/>
           </a:p>
@@ -1404,7 +1406,7 @@
           <a:p>
             <a:r>
               <a:rPr lang="en-US" dirty="0"/>
-              <a:t>This is where all four focus areas visibly compose into TUTORIAL.md's Module 5. The DNS-name-per-Service detail and the deploy-order gotcha are the two things worth remembering here.</a:t>
+              <a:t>Anchor this in the fact that Pod IPs change on every delete/recreate — a Service is the direct answer to that instability.</a:t>
             </a:r>
             <a:endParaRPr lang="en-US" dirty="0"/>
           </a:p>
@@ -1580,7 +1582,7 @@
           <a:p>
             <a:r>
               <a:rPr lang="en-US" dirty="0"/>
-              <a:t>Frame this as "things that were harder than expected" for an onboarding audience — real failure modes pulled straight from the tutorial's own troubleshooting notes, not hypotheticals.</a:t>
+              <a:t>Keep this conceptual per the high-level depth — one short illustrative snippet, not a manifest walkthrough. The base64-is-not-encryption point is the one thing to land hard.</a:t>
             </a:r>
             <a:endParaRPr lang="en-US" dirty="0"/>
           </a:p>
@@ -1668,7 +1670,7 @@
           <a:p>
             <a:r>
               <a:rPr lang="en-US" dirty="0"/>
-              <a:t>Land the single unifying idea before handing off to TUTORIAL.md — everything walked through today is one mechanism wearing different hats.</a:t>
+              <a:t>This is where all four focus areas visibly compose into TUTORIAL.md's Module 5. The DNS-name-per-Service detail and the deploy-order gotcha are the two things worth remembering here.</a:t>
             </a:r>
             <a:endParaRPr lang="en-US" dirty="0"/>
           </a:p>
@@ -1756,7 +1758,7 @@
           <a:p>
             <a:r>
               <a:rPr lang="en-US" dirty="0"/>
-              <a:t>Explicit handoff — this is the deck's actual job, to end with the reader opening a terminal and starting Module 0 with the mental model already in place.</a:t>
+              <a:t>Frame this as "things that were harder than expected" for an onboarding audience — real failure modes pulled straight from the tutorial's own troubleshooting notes, not hypotheticals.</a:t>
             </a:r>
             <a:endParaRPr lang="en-US" dirty="0"/>
           </a:p>
@@ -1844,7 +1846,7 @@
           <a:p>
             <a:r>
               <a:rPr lang="en-US" dirty="0"/>
-              <a:t>Three takeaways, no more — the last line is the one thing worth remembering walking into Module 1.</a:t>
+              <a:t>Land the single unifying idea before handing off to TUTORIAL.md — everything walked through today is one mechanism wearing different hats.</a:t>
             </a:r>
             <a:endParaRPr lang="en-US" dirty="0"/>
           </a:p>
@@ -1868,6 +1870,182 @@
             <a:fld id="{F7021451-1387-4CA6-816F-3879F97B5CBC}" type="slidenum">
               <a:rPr lang="en-US"/>
               <a:t>23</a:t>
+            </a:fld>
+            <a:endParaRPr lang="en-US"/>
+          </a:p>
+        </p:txBody>
+      </p:sp>
+    </p:spTree>
+    <p:extLst>
+      <p:ext uri="{BB962C8B-B14F-4D97-AF65-F5344CB8AC3E}">
+        <p14:creationId xmlns:p14="http://schemas.microsoft.com/office/powerpoint/2010/main" val="1024086991"/>
+      </p:ext>
+    </p:extLst>
+  </p:cSld>
+  <p:clrMapOvr>
+    <a:masterClrMapping/>
+  </p:clrMapOvr>
+</p:notes>
+</file>
+
+<file path=ppt/notesSlides/notesSlide24.xml><?xml version="1.0" encoding="utf-8"?>
+<p:notes xmlns:a="http://schemas.openxmlformats.org/drawingml/2006/main" xmlns:r="http://schemas.openxmlformats.org/officeDocument/2006/relationships" xmlns:p="http://schemas.openxmlformats.org/presentationml/2006/main">
+  <p:cSld>
+    <p:spTree>
+      <p:nvGrpSpPr>
+        <p:cNvPr id="1" name=""/>
+        <p:cNvGrpSpPr/>
+        <p:nvPr/>
+      </p:nvGrpSpPr>
+      <p:grpSpPr>
+        <a:xfrm>
+          <a:off x="0" y="0"/>
+          <a:ext cx="0" cy="0"/>
+          <a:chOff x="0" y="0"/>
+          <a:chExt cx="0" cy="0"/>
+        </a:xfrm>
+      </p:grpSpPr>
+      <p:sp>
+        <p:nvSpPr>
+          <p:cNvPr id="2" name="Slide Image Placeholder 1"/>
+          <p:cNvSpPr>
+            <a:spLocks noGrp="1" noRot="1" noChangeAspect="1"/>
+          </p:cNvSpPr>
+          <p:nvPr>
+            <p:ph type="sldImg"/>
+          </p:nvPr>
+        </p:nvSpPr>
+        <p:spPr/>
+      </p:sp>
+      <p:sp>
+        <p:nvSpPr>
+          <p:cNvPr id="3" name="Notes Placeholder 2"/>
+          <p:cNvSpPr>
+            <a:spLocks noGrp="1"/>
+          </p:cNvSpPr>
+          <p:nvPr>
+            <p:ph type="body" idx="1"/>
+          </p:nvPr>
+        </p:nvSpPr>
+        <p:spPr/>
+        <p:txBody>
+          <a:bodyPr/>
+          <a:lstStyle/>
+          <a:p>
+            <a:r>
+              <a:rPr lang="en-US" dirty="0"/>
+              <a:t>Explicit handoff — this is the deck's actual job, to end with the reader opening a terminal and starting Module 0 with the mental model already in place.</a:t>
+            </a:r>
+            <a:endParaRPr lang="en-US" dirty="0"/>
+          </a:p>
+        </p:txBody>
+      </p:sp>
+      <p:sp>
+        <p:nvSpPr>
+          <p:cNvPr id="4" name="Slide Number Placeholder 3"/>
+          <p:cNvSpPr>
+            <a:spLocks noGrp="1"/>
+          </p:cNvSpPr>
+          <p:nvPr>
+            <p:ph type="sldNum" sz="quarter" idx="10"/>
+          </p:nvPr>
+        </p:nvSpPr>
+        <p:spPr/>
+        <p:txBody>
+          <a:bodyPr/>
+          <a:lstStyle/>
+          <a:p>
+            <a:fld id="{F7021451-1387-4CA6-816F-3879F97B5CBC}" type="slidenum">
+              <a:rPr lang="en-US"/>
+              <a:t>24</a:t>
+            </a:fld>
+            <a:endParaRPr lang="en-US"/>
+          </a:p>
+        </p:txBody>
+      </p:sp>
+    </p:spTree>
+    <p:extLst>
+      <p:ext uri="{BB962C8B-B14F-4D97-AF65-F5344CB8AC3E}">
+        <p14:creationId xmlns:p14="http://schemas.microsoft.com/office/powerpoint/2010/main" val="1024086991"/>
+      </p:ext>
+    </p:extLst>
+  </p:cSld>
+  <p:clrMapOvr>
+    <a:masterClrMapping/>
+  </p:clrMapOvr>
+</p:notes>
+</file>
+
+<file path=ppt/notesSlides/notesSlide25.xml><?xml version="1.0" encoding="utf-8"?>
+<p:notes xmlns:a="http://schemas.openxmlformats.org/drawingml/2006/main" xmlns:r="http://schemas.openxmlformats.org/officeDocument/2006/relationships" xmlns:p="http://schemas.openxmlformats.org/presentationml/2006/main">
+  <p:cSld>
+    <p:spTree>
+      <p:nvGrpSpPr>
+        <p:cNvPr id="1" name=""/>
+        <p:cNvGrpSpPr/>
+        <p:nvPr/>
+      </p:nvGrpSpPr>
+      <p:grpSpPr>
+        <a:xfrm>
+          <a:off x="0" y="0"/>
+          <a:ext cx="0" cy="0"/>
+          <a:chOff x="0" y="0"/>
+          <a:chExt cx="0" cy="0"/>
+        </a:xfrm>
+      </p:grpSpPr>
+      <p:sp>
+        <p:nvSpPr>
+          <p:cNvPr id="2" name="Slide Image Placeholder 1"/>
+          <p:cNvSpPr>
+            <a:spLocks noGrp="1" noRot="1" noChangeAspect="1"/>
+          </p:cNvSpPr>
+          <p:nvPr>
+            <p:ph type="sldImg"/>
+          </p:nvPr>
+        </p:nvSpPr>
+        <p:spPr/>
+      </p:sp>
+      <p:sp>
+        <p:nvSpPr>
+          <p:cNvPr id="3" name="Notes Placeholder 2"/>
+          <p:cNvSpPr>
+            <a:spLocks noGrp="1"/>
+          </p:cNvSpPr>
+          <p:nvPr>
+            <p:ph type="body" idx="1"/>
+          </p:nvPr>
+        </p:nvSpPr>
+        <p:spPr/>
+        <p:txBody>
+          <a:bodyPr/>
+          <a:lstStyle/>
+          <a:p>
+            <a:r>
+              <a:rPr lang="en-US" dirty="0"/>
+              <a:t>Three takeaways, no more — the last line is the one thing worth remembering walking into Module 1.</a:t>
+            </a:r>
+            <a:endParaRPr lang="en-US" dirty="0"/>
+          </a:p>
+        </p:txBody>
+      </p:sp>
+      <p:sp>
+        <p:nvSpPr>
+          <p:cNvPr id="4" name="Slide Number Placeholder 3"/>
+          <p:cNvSpPr>
+            <a:spLocks noGrp="1"/>
+          </p:cNvSpPr>
+          <p:nvPr>
+            <p:ph type="sldNum" sz="quarter" idx="10"/>
+          </p:nvPr>
+        </p:nvSpPr>
+        <p:spPr/>
+        <p:txBody>
+          <a:bodyPr/>
+          <a:lstStyle/>
+          <a:p>
+            <a:fld id="{F7021451-1387-4CA6-816F-3879F97B5CBC}" type="slidenum">
+              <a:rPr lang="en-US"/>
+              <a:t>25</a:t>
             </a:fld>
             <a:endParaRPr lang="en-US"/>
           </a:p>
@@ -5032,7 +5210,7 @@
         <p:spPr>
           <a:xfrm>
             <a:off x="6254496" y="1572768"/>
-            <a:ext cx="5477256" cy="1002182"/>
+            <a:ext cx="5477256" cy="1252728"/>
           </a:xfrm>
           <a:prstGeom prst="rect">
             <a:avLst/>
@@ -5049,7 +5227,7 @@
               <a:buChar char="•"/>
             </a:pPr>
             <a:r>
-              <a:rPr lang="en-US" sz="1400" dirty="0">
+              <a:rPr lang="en-US" sz="1700" dirty="0">
                 <a:solidFill>
                   <a:srgbClr val="0A1A1C"/>
                 </a:solidFill>
@@ -5059,7 +5237,7 @@
               </a:rPr>
               <a:t>Smallest deployable unit — a thin wrapper around one or more containers</a:t>
             </a:r>
-            <a:endParaRPr lang="en-US" sz="1400" dirty="0"/>
+            <a:endParaRPr lang="en-US" sz="1700" dirty="0"/>
           </a:p>
         </p:txBody>
       </p:sp>
@@ -5071,8 +5249,8 @@
         </p:nvSpPr>
         <p:spPr>
           <a:xfrm>
-            <a:off x="6254496" y="2574950"/>
-            <a:ext cx="5477256" cy="1002182"/>
+            <a:off x="6254496" y="2825496"/>
+            <a:ext cx="5477256" cy="1252728"/>
           </a:xfrm>
           <a:prstGeom prst="rect">
             <a:avLst/>
@@ -5089,7 +5267,7 @@
               <a:buChar char="•"/>
             </a:pPr>
             <a:r>
-              <a:rPr lang="en-US" sz="1400" dirty="0">
+              <a:rPr lang="en-US" sz="1700" dirty="0">
                 <a:solidFill>
                   <a:srgbClr val="0A1A1C"/>
                 </a:solidFill>
@@ -5099,7 +5277,7 @@
               </a:rPr>
               <a:t>kind: Pod is case-sensitive; lowercase pod fails outright</a:t>
             </a:r>
-            <a:endParaRPr lang="en-US" sz="1400" dirty="0"/>
+            <a:endParaRPr lang="en-US" sz="1700" dirty="0"/>
           </a:p>
         </p:txBody>
       </p:sp>
@@ -5111,8 +5289,8 @@
         </p:nvSpPr>
         <p:spPr>
           <a:xfrm>
-            <a:off x="6254496" y="3577133"/>
-            <a:ext cx="5477256" cy="1002182"/>
+            <a:off x="6254496" y="4078224"/>
+            <a:ext cx="5477256" cy="1252728"/>
           </a:xfrm>
           <a:prstGeom prst="rect">
             <a:avLst/>
@@ -5129,7 +5307,7 @@
               <a:buChar char="•"/>
             </a:pPr>
             <a:r>
-              <a:rPr lang="en-US" sz="1400" dirty="0">
+              <a:rPr lang="en-US" sz="1700" dirty="0">
                 <a:solidFill>
                   <a:srgbClr val="0A1A1C"/>
                 </a:solidFill>
@@ -5137,9 +5315,9 @@
                 <a:ea typeface="Trebuchet MS" pitchFamily="34" charset="-122"/>
                 <a:cs typeface="Trebuchet MS" pitchFamily="34" charset="-120"/>
               </a:rPr>
-              <a:t>The full experiment, in order: apply -f pod.yaml (creates it) → get pods (confirms Running) → delete pod hello-pod (removes the live object — not the file) → get pods again</a:t>
-            </a:r>
-            <a:endParaRPr lang="en-US" sz="1400" dirty="0"/>
+              <a:t>labels are just a tag on the object — inert until something else reads them</a:t>
+            </a:r>
+            <a:endParaRPr lang="en-US" sz="1700" dirty="0"/>
           </a:p>
         </p:txBody>
       </p:sp>
@@ -5151,8 +5329,8 @@
         </p:nvSpPr>
         <p:spPr>
           <a:xfrm>
-            <a:off x="6254496" y="4579315"/>
-            <a:ext cx="5477256" cy="1002182"/>
+            <a:off x="6254496" y="5330952"/>
+            <a:ext cx="5477256" cy="1252728"/>
           </a:xfrm>
           <a:prstGeom prst="rect">
             <a:avLst/>
@@ -5169,7 +5347,7 @@
               <a:buChar char="•"/>
             </a:pPr>
             <a:r>
-              <a:rPr lang="en-US" sz="1400" dirty="0">
+              <a:rPr lang="en-US" sz="1700" dirty="0">
                 <a:solidFill>
                   <a:srgbClr val="0A1A1C"/>
                 </a:solidFill>
@@ -5177,49 +5355,9 @@
                 <a:ea typeface="Trebuchet MS" pitchFamily="34" charset="-122"/>
                 <a:cs typeface="Trebuchet MS" pitchFamily="34" charset="-120"/>
               </a:rPr>
-              <a:t>pod.yaml sits on your laptop the whole time, completely untouched by that delete — a file and a cluster object are two separate things</a:t>
-            </a:r>
-            <a:endParaRPr lang="en-US" sz="1400" dirty="0"/>
-          </a:p>
-        </p:txBody>
-      </p:sp>
-      <p:sp>
-        <p:nvSpPr>
-          <p:cNvPr id="12" name="Text 10"/>
-          <p:cNvSpPr/>
-          <p:nvPr/>
-        </p:nvSpPr>
-        <p:spPr>
-          <a:xfrm>
-            <a:off x="6254496" y="5581498"/>
-            <a:ext cx="5477256" cy="1002182"/>
-          </a:xfrm>
-          <a:prstGeom prst="rect">
-            <a:avLst/>
-          </a:prstGeom>
-          <a:noFill/>
-          <a:ln/>
-        </p:spPr>
-        <p:txBody>
-          <a:bodyPr wrap="square" rtlCol="0" anchor="ctr"/>
-          <a:lstStyle/>
-          <a:p>
-            <a:pPr marL="254000" indent="-254000">
-              <a:buSzPct val="100000"/>
-              <a:buChar char="•"/>
-            </a:pPr>
-            <a:r>
-              <a:rPr lang="en-US" sz="1400" dirty="0">
-                <a:solidFill>
-                  <a:srgbClr val="0A1A1C"/>
-                </a:solidFill>
-                <a:latin typeface="Trebuchet MS" pitchFamily="34" charset="0"/>
-                <a:ea typeface="Trebuchet MS" pitchFamily="34" charset="-122"/>
-                <a:cs typeface="Trebuchet MS" pitchFamily="34" charset="-120"/>
-              </a:rPr>
-              <a:t>Result: No resources found in default namespace. — it does not come back</a:t>
-            </a:r>
-            <a:endParaRPr lang="en-US" sz="1400" dirty="0"/>
+              <a:t>spec.containers is a list — a Pod can hold more than one container, though most hold exactly one</a:t>
+            </a:r>
+            <a:endParaRPr lang="en-US" sz="1700" dirty="0"/>
           </a:p>
         </p:txBody>
       </p:sp>
@@ -5352,7 +5490,7 @@
                 <a:ea typeface="Arial Black" pitchFamily="34" charset="-122"/>
                 <a:cs typeface="Arial Black" pitchFamily="34" charset="-120"/>
               </a:rPr>
-              <a:t>Why Doesn't It Come Back?</a:t>
+              <a:t>What apply Actually Does</a:t>
             </a:r>
             <a:endParaRPr lang="en-US" sz="3000" dirty="0"/>
           </a:p>
@@ -5391,12 +5529,12 @@
         </p:nvSpPr>
         <p:spPr>
           <a:xfrm>
-            <a:off x="457200" y="1901952"/>
-            <a:ext cx="3526536" cy="804672"/>
+            <a:off x="457200" y="1922526"/>
+            <a:ext cx="1976933" cy="854964"/>
           </a:xfrm>
           <a:prstGeom prst="roundRect">
             <a:avLst>
-              <a:gd name="adj" fmla="val 11364"/>
+              <a:gd name="adj" fmla="val 10695"/>
             </a:avLst>
           </a:prstGeom>
           <a:solidFill>
@@ -5418,8 +5556,8 @@
         </p:nvSpPr>
         <p:spPr>
           <a:xfrm>
-            <a:off x="457200" y="1901952"/>
-            <a:ext cx="3526536" cy="804672"/>
+            <a:off x="457200" y="1922526"/>
+            <a:ext cx="1976933" cy="854964"/>
           </a:xfrm>
           <a:prstGeom prst="rect">
             <a:avLst/>
@@ -5435,7 +5573,7 @@
               <a:buNone/>
             </a:pPr>
             <a:r>
-              <a:rPr lang="en-US" sz="1200" b="1" dirty="0">
+              <a:rPr lang="en-US" sz="1100" b="1" dirty="0">
                 <a:solidFill>
                   <a:srgbClr val="0A1A1C"/>
                 </a:solidFill>
@@ -5443,9 +5581,9 @@
                 <a:ea typeface="Trebuchet MS" pitchFamily="34" charset="-122"/>
                 <a:cs typeface="Trebuchet MS" pitchFamily="34" charset="-120"/>
               </a:rPr>
-              <a:t>kubectl apply</a:t>
-            </a:r>
-            <a:endParaRPr lang="en-US" sz="1200" dirty="0"/>
+              <a:t>pod.yaml</a:t>
+            </a:r>
+            <a:endParaRPr lang="en-US" sz="1100" dirty="0"/>
           </a:p>
         </p:txBody>
       </p:sp>
@@ -5457,8 +5595,8 @@
         </p:nvSpPr>
         <p:spPr>
           <a:xfrm>
-            <a:off x="3983736" y="1901952"/>
-            <a:ext cx="347472" cy="804672"/>
+            <a:off x="2434133" y="1922526"/>
+            <a:ext cx="347472" cy="854964"/>
           </a:xfrm>
           <a:prstGeom prst="rect">
             <a:avLst/>
@@ -5496,12 +5634,12 @@
         </p:nvSpPr>
         <p:spPr>
           <a:xfrm>
-            <a:off x="4331208" y="1901952"/>
-            <a:ext cx="3526536" cy="804672"/>
+            <a:off x="2781605" y="1922526"/>
+            <a:ext cx="1976933" cy="854964"/>
           </a:xfrm>
           <a:prstGeom prst="roundRect">
             <a:avLst>
-              <a:gd name="adj" fmla="val 11364"/>
+              <a:gd name="adj" fmla="val 10695"/>
             </a:avLst>
           </a:prstGeom>
           <a:solidFill>
@@ -5523,8 +5661,8 @@
         </p:nvSpPr>
         <p:spPr>
           <a:xfrm>
-            <a:off x="4331208" y="1901952"/>
-            <a:ext cx="3526536" cy="804672"/>
+            <a:off x="2781605" y="1922526"/>
+            <a:ext cx="1976933" cy="854964"/>
           </a:xfrm>
           <a:prstGeom prst="rect">
             <a:avLst/>
@@ -5540,7 +5678,7 @@
               <a:buNone/>
             </a:pPr>
             <a:r>
-              <a:rPr lang="en-US" sz="1200" dirty="0">
+              <a:rPr lang="en-US" sz="1100" dirty="0">
                 <a:solidFill>
                   <a:srgbClr val="0A1A1C"/>
                 </a:solidFill>
@@ -5548,9 +5686,26 @@
                 <a:ea typeface="Trebuchet MS" pitchFamily="34" charset="-122"/>
                 <a:cs typeface="Trebuchet MS" pitchFamily="34" charset="-120"/>
               </a:rPr>
-              <a:t>Pod created</a:t>
-            </a:r>
-            <a:endParaRPr lang="en-US" sz="1200" dirty="0"/>
+              <a:t>API server</a:t>
+            </a:r>
+            <a:endParaRPr lang="en-US" sz="1100" dirty="0"/>
+          </a:p>
+          <a:p>
+            <a:pPr algn="ctr" indent="0" marL="0">
+              <a:buNone/>
+            </a:pPr>
+            <a:r>
+              <a:rPr lang="en-US" sz="1100" dirty="0">
+                <a:solidFill>
+                  <a:srgbClr val="0A1A1C"/>
+                </a:solidFill>
+                <a:latin typeface="Trebuchet MS" pitchFamily="34" charset="0"/>
+                <a:ea typeface="Trebuchet MS" pitchFamily="34" charset="-122"/>
+                <a:cs typeface="Trebuchet MS" pitchFamily="34" charset="-120"/>
+              </a:rPr>
+              <a:t>(validate + save)</a:t>
+            </a:r>
+            <a:endParaRPr lang="en-US" sz="1100" dirty="0"/>
           </a:p>
         </p:txBody>
       </p:sp>
@@ -5562,8 +5717,8 @@
         </p:nvSpPr>
         <p:spPr>
           <a:xfrm>
-            <a:off x="7857744" y="1901952"/>
-            <a:ext cx="347472" cy="804672"/>
+            <a:off x="4758538" y="1922526"/>
+            <a:ext cx="347472" cy="854964"/>
           </a:xfrm>
           <a:prstGeom prst="rect">
             <a:avLst/>
@@ -5601,18 +5756,18 @@
         </p:nvSpPr>
         <p:spPr>
           <a:xfrm>
-            <a:off x="8205216" y="1901952"/>
-            <a:ext cx="3526536" cy="804672"/>
+            <a:off x="5106010" y="1922526"/>
+            <a:ext cx="1976933" cy="854964"/>
           </a:xfrm>
           <a:prstGeom prst="roundRect">
             <a:avLst>
-              <a:gd name="adj" fmla="val 11364"/>
+              <a:gd name="adj" fmla="val 10695"/>
             </a:avLst>
           </a:prstGeom>
           <a:solidFill>
-            <a:srgbClr val="007A90"/>
+            <a:srgbClr val="B8ECF5"/>
           </a:solidFill>
-          <a:ln w="31750">
+          <a:ln w="19050">
             <a:solidFill>
               <a:srgbClr val="007A90"/>
             </a:solidFill>
@@ -5628,8 +5783,8 @@
         </p:nvSpPr>
         <p:spPr>
           <a:xfrm>
-            <a:off x="8205216" y="1901952"/>
-            <a:ext cx="3526536" cy="804672"/>
+            <a:off x="5106010" y="1922526"/>
+            <a:ext cx="1976933" cy="854964"/>
           </a:xfrm>
           <a:prstGeom prst="rect">
             <a:avLst/>
@@ -5645,34 +5800,34 @@
               <a:buNone/>
             </a:pPr>
             <a:r>
-              <a:rPr lang="en-US" sz="1200" b="1" dirty="0">
-                <a:solidFill>
-                  <a:srgbClr val="FFFFFF"/>
-                </a:solidFill>
-                <a:latin typeface="Trebuchet MS" pitchFamily="34" charset="0"/>
-                <a:ea typeface="Trebuchet MS" pitchFamily="34" charset="-122"/>
-                <a:cs typeface="Trebuchet MS" pitchFamily="34" charset="-120"/>
-              </a:rPr>
-              <a:t>apply exits</a:t>
-            </a:r>
-            <a:endParaRPr lang="en-US" sz="1200" dirty="0"/>
+              <a:rPr lang="en-US" sz="1100" dirty="0">
+                <a:solidFill>
+                  <a:srgbClr val="0A1A1C"/>
+                </a:solidFill>
+                <a:latin typeface="Trebuchet MS" pitchFamily="34" charset="0"/>
+                <a:ea typeface="Trebuchet MS" pitchFamily="34" charset="-122"/>
+                <a:cs typeface="Trebuchet MS" pitchFamily="34" charset="-120"/>
+              </a:rPr>
+              <a:t>Scheduler</a:t>
+            </a:r>
+            <a:endParaRPr lang="en-US" sz="1100" dirty="0"/>
           </a:p>
           <a:p>
             <a:pPr algn="ctr" indent="0" marL="0">
               <a:buNone/>
             </a:pPr>
             <a:r>
-              <a:rPr lang="en-US" sz="1200" b="1" dirty="0">
-                <a:solidFill>
-                  <a:srgbClr val="FFFFFF"/>
-                </a:solidFill>
-                <a:latin typeface="Trebuchet MS" pitchFamily="34" charset="0"/>
-                <a:ea typeface="Trebuchet MS" pitchFamily="34" charset="-122"/>
-                <a:cs typeface="Trebuchet MS" pitchFamily="34" charset="-120"/>
-              </a:rPr>
-              <a:t>(nothing left running)</a:t>
-            </a:r>
-            <a:endParaRPr lang="en-US" sz="1200" dirty="0"/>
+              <a:rPr lang="en-US" sz="1100" dirty="0">
+                <a:solidFill>
+                  <a:srgbClr val="0A1A1C"/>
+                </a:solidFill>
+                <a:latin typeface="Trebuchet MS" pitchFamily="34" charset="0"/>
+                <a:ea typeface="Trebuchet MS" pitchFamily="34" charset="-122"/>
+                <a:cs typeface="Trebuchet MS" pitchFamily="34" charset="-120"/>
+              </a:rPr>
+              <a:t>(pick a node)</a:t>
+            </a:r>
+            <a:endParaRPr lang="en-US" sz="1100" dirty="0"/>
           </a:p>
         </p:txBody>
       </p:sp>
@@ -5684,8 +5839,235 @@
         </p:nvSpPr>
         <p:spPr>
           <a:xfrm>
-            <a:off x="457200" y="3218688"/>
-            <a:ext cx="11274552" cy="560832"/>
+            <a:off x="7082942" y="1922526"/>
+            <a:ext cx="347472" cy="854964"/>
+          </a:xfrm>
+          <a:prstGeom prst="rect">
+            <a:avLst/>
+          </a:prstGeom>
+          <a:noFill/>
+          <a:ln/>
+        </p:spPr>
+        <p:txBody>
+          <a:bodyPr wrap="square" rtlCol="0" anchor="ctr"/>
+          <a:lstStyle/>
+          <a:p>
+            <a:pPr algn="ctr" indent="0" marL="0">
+              <a:buNone/>
+            </a:pPr>
+            <a:r>
+              <a:rPr lang="en-US" sz="2200" dirty="0">
+                <a:solidFill>
+                  <a:srgbClr val="007A90"/>
+                </a:solidFill>
+                <a:latin typeface="Trebuchet MS" pitchFamily="34" charset="0"/>
+                <a:ea typeface="Trebuchet MS" pitchFamily="34" charset="-122"/>
+                <a:cs typeface="Trebuchet MS" pitchFamily="34" charset="-120"/>
+              </a:rPr>
+              <a:t>→</a:t>
+            </a:r>
+            <a:endParaRPr lang="en-US" sz="2200" dirty="0"/>
+          </a:p>
+        </p:txBody>
+      </p:sp>
+      <p:sp>
+        <p:nvSpPr>
+          <p:cNvPr id="15" name="Shape 13"/>
+          <p:cNvSpPr/>
+          <p:nvPr/>
+        </p:nvSpPr>
+        <p:spPr>
+          <a:xfrm>
+            <a:off x="7430414" y="1922526"/>
+            <a:ext cx="1976933" cy="854964"/>
+          </a:xfrm>
+          <a:prstGeom prst="roundRect">
+            <a:avLst>
+              <a:gd name="adj" fmla="val 10695"/>
+            </a:avLst>
+          </a:prstGeom>
+          <a:solidFill>
+            <a:srgbClr val="B8ECF5"/>
+          </a:solidFill>
+          <a:ln w="19050">
+            <a:solidFill>
+              <a:srgbClr val="007A90"/>
+            </a:solidFill>
+            <a:prstDash val="solid"/>
+          </a:ln>
+        </p:spPr>
+      </p:sp>
+      <p:sp>
+        <p:nvSpPr>
+          <p:cNvPr id="16" name="Text 14"/>
+          <p:cNvSpPr/>
+          <p:nvPr/>
+        </p:nvSpPr>
+        <p:spPr>
+          <a:xfrm>
+            <a:off x="7430414" y="1922526"/>
+            <a:ext cx="1976933" cy="854964"/>
+          </a:xfrm>
+          <a:prstGeom prst="rect">
+            <a:avLst/>
+          </a:prstGeom>
+          <a:noFill/>
+          <a:ln/>
+        </p:spPr>
+        <p:txBody>
+          <a:bodyPr wrap="square" rtlCol="0" anchor="ctr"/>
+          <a:lstStyle/>
+          <a:p>
+            <a:pPr algn="ctr" indent="0" marL="0">
+              <a:buNone/>
+            </a:pPr>
+            <a:r>
+              <a:rPr lang="en-US" sz="1100" dirty="0">
+                <a:solidFill>
+                  <a:srgbClr val="0A1A1C"/>
+                </a:solidFill>
+                <a:latin typeface="Trebuchet MS" pitchFamily="34" charset="0"/>
+                <a:ea typeface="Trebuchet MS" pitchFamily="34" charset="-122"/>
+                <a:cs typeface="Trebuchet MS" pitchFamily="34" charset="-120"/>
+              </a:rPr>
+              <a:t>kubelet</a:t>
+            </a:r>
+            <a:endParaRPr lang="en-US" sz="1100" dirty="0"/>
+          </a:p>
+          <a:p>
+            <a:pPr algn="ctr" indent="0" marL="0">
+              <a:buNone/>
+            </a:pPr>
+            <a:r>
+              <a:rPr lang="en-US" sz="1100" dirty="0">
+                <a:solidFill>
+                  <a:srgbClr val="0A1A1C"/>
+                </a:solidFill>
+                <a:latin typeface="Trebuchet MS" pitchFamily="34" charset="0"/>
+                <a:ea typeface="Trebuchet MS" pitchFamily="34" charset="-122"/>
+                <a:cs typeface="Trebuchet MS" pitchFamily="34" charset="-120"/>
+              </a:rPr>
+              <a:t>(pull image, start container)</a:t>
+            </a:r>
+            <a:endParaRPr lang="en-US" sz="1100" dirty="0"/>
+          </a:p>
+        </p:txBody>
+      </p:sp>
+      <p:sp>
+        <p:nvSpPr>
+          <p:cNvPr id="17" name="Text 15"/>
+          <p:cNvSpPr/>
+          <p:nvPr/>
+        </p:nvSpPr>
+        <p:spPr>
+          <a:xfrm>
+            <a:off x="9407347" y="1922526"/>
+            <a:ext cx="347472" cy="854964"/>
+          </a:xfrm>
+          <a:prstGeom prst="rect">
+            <a:avLst/>
+          </a:prstGeom>
+          <a:noFill/>
+          <a:ln/>
+        </p:spPr>
+        <p:txBody>
+          <a:bodyPr wrap="square" rtlCol="0" anchor="ctr"/>
+          <a:lstStyle/>
+          <a:p>
+            <a:pPr algn="ctr" indent="0" marL="0">
+              <a:buNone/>
+            </a:pPr>
+            <a:r>
+              <a:rPr lang="en-US" sz="2200" dirty="0">
+                <a:solidFill>
+                  <a:srgbClr val="007A90"/>
+                </a:solidFill>
+                <a:latin typeface="Trebuchet MS" pitchFamily="34" charset="0"/>
+                <a:ea typeface="Trebuchet MS" pitchFamily="34" charset="-122"/>
+                <a:cs typeface="Trebuchet MS" pitchFamily="34" charset="-120"/>
+              </a:rPr>
+              <a:t>→</a:t>
+            </a:r>
+            <a:endParaRPr lang="en-US" sz="2200" dirty="0"/>
+          </a:p>
+        </p:txBody>
+      </p:sp>
+      <p:sp>
+        <p:nvSpPr>
+          <p:cNvPr id="18" name="Shape 16"/>
+          <p:cNvSpPr/>
+          <p:nvPr/>
+        </p:nvSpPr>
+        <p:spPr>
+          <a:xfrm>
+            <a:off x="9754819" y="1922526"/>
+            <a:ext cx="1976933" cy="854964"/>
+          </a:xfrm>
+          <a:prstGeom prst="roundRect">
+            <a:avLst>
+              <a:gd name="adj" fmla="val 10695"/>
+            </a:avLst>
+          </a:prstGeom>
+          <a:solidFill>
+            <a:srgbClr val="B8ECF5"/>
+          </a:solidFill>
+          <a:ln w="19050">
+            <a:solidFill>
+              <a:srgbClr val="007A90"/>
+            </a:solidFill>
+            <a:prstDash val="solid"/>
+          </a:ln>
+        </p:spPr>
+      </p:sp>
+      <p:sp>
+        <p:nvSpPr>
+          <p:cNvPr id="19" name="Text 17"/>
+          <p:cNvSpPr/>
+          <p:nvPr/>
+        </p:nvSpPr>
+        <p:spPr>
+          <a:xfrm>
+            <a:off x="9754819" y="1922526"/>
+            <a:ext cx="1976933" cy="854964"/>
+          </a:xfrm>
+          <a:prstGeom prst="rect">
+            <a:avLst/>
+          </a:prstGeom>
+          <a:noFill/>
+          <a:ln/>
+        </p:spPr>
+        <p:txBody>
+          <a:bodyPr wrap="square" rtlCol="0" anchor="ctr"/>
+          <a:lstStyle/>
+          <a:p>
+            <a:pPr algn="ctr" indent="0" marL="0">
+              <a:buNone/>
+            </a:pPr>
+            <a:r>
+              <a:rPr lang="en-US" sz="1100" b="1" dirty="0">
+                <a:solidFill>
+                  <a:srgbClr val="0A1A1C"/>
+                </a:solidFill>
+                <a:latin typeface="Trebuchet MS" pitchFamily="34" charset="0"/>
+                <a:ea typeface="Trebuchet MS" pitchFamily="34" charset="-122"/>
+                <a:cs typeface="Trebuchet MS" pitchFamily="34" charset="-120"/>
+              </a:rPr>
+              <a:t>Running</a:t>
+            </a:r>
+            <a:endParaRPr lang="en-US" sz="1100" dirty="0"/>
+          </a:p>
+        </p:txBody>
+      </p:sp>
+      <p:sp>
+        <p:nvSpPr>
+          <p:cNvPr id="20" name="Text 18"/>
+          <p:cNvSpPr/>
+          <p:nvPr/>
+        </p:nvSpPr>
+        <p:spPr>
+          <a:xfrm>
+            <a:off x="457200" y="3310128"/>
+            <a:ext cx="11274552" cy="654710"/>
           </a:xfrm>
           <a:prstGeom prst="rect">
             <a:avLst/>
@@ -5710,7 +6092,7 @@
                 <a:ea typeface="Trebuchet MS" pitchFamily="34" charset="-122"/>
                 <a:cs typeface="Trebuchet MS" pitchFamily="34" charset="-120"/>
               </a:rPr>
-              <a:t>apply runs exactly once: read the file, create the Pod, exit — nothing stays behind to keep enforcing it</a:t>
+              <a:t>Yes — apply genuinely deploys what's in the file: this manifest becomes one real, running container, not just a stored record</a:t>
             </a:r>
             <a:endParaRPr lang="en-US" sz="1500" dirty="0"/>
           </a:p>
@@ -5718,14 +6100,14 @@
       </p:sp>
       <p:sp>
         <p:nvSpPr>
-          <p:cNvPr id="15" name="Text 13"/>
-          <p:cNvSpPr/>
-          <p:nvPr/>
-        </p:nvSpPr>
-        <p:spPr>
-          <a:xfrm>
-            <a:off x="457200" y="3779520"/>
-            <a:ext cx="11274552" cy="560832"/>
+          <p:cNvPr id="21" name="Text 19"/>
+          <p:cNvSpPr/>
+          <p:nvPr/>
+        </p:nvSpPr>
+        <p:spPr>
+          <a:xfrm>
+            <a:off x="457200" y="3964838"/>
+            <a:ext cx="11274552" cy="654710"/>
           </a:xfrm>
           <a:prstGeom prst="rect">
             <a:avLst/>
@@ -5750,7 +6132,7 @@
                 <a:ea typeface="Trebuchet MS" pitchFamily="34" charset="-122"/>
                 <a:cs typeface="Trebuchet MS" pitchFamily="34" charset="-120"/>
               </a:rPr>
-              <a:t>delete only ever removes the live object in the cluster — pod.yaml on disk is never read, touched, or invalidated by it</a:t>
+              <a:t>apply -f pod.yaml sends the file to the API server, which validates it and saves the desired state to etcd — nothing is running yet at this point</a:t>
             </a:r>
             <a:endParaRPr lang="en-US" sz="1500" dirty="0"/>
           </a:p>
@@ -5758,14 +6140,14 @@
       </p:sp>
       <p:sp>
         <p:nvSpPr>
-          <p:cNvPr id="16" name="Text 14"/>
-          <p:cNvSpPr/>
-          <p:nvPr/>
-        </p:nvSpPr>
-        <p:spPr>
-          <a:xfrm>
-            <a:off x="457200" y="4340352"/>
-            <a:ext cx="11274552" cy="560832"/>
+          <p:cNvPr id="22" name="Text 20"/>
+          <p:cNvSpPr/>
+          <p:nvPr/>
+        </p:nvSpPr>
+        <p:spPr>
+          <a:xfrm>
+            <a:off x="457200" y="4619549"/>
+            <a:ext cx="11274552" cy="654710"/>
           </a:xfrm>
           <a:prstGeom prst="rect">
             <a:avLst/>
@@ -5790,7 +6172,7 @@
                 <a:ea typeface="Trebuchet MS" pitchFamily="34" charset="-122"/>
                 <a:cs typeface="Trebuchet MS" pitchFamily="34" charset="-120"/>
               </a:rPr>
-              <a:t>The Pod becomes a plain record in etcd with no controller attached to it</a:t>
+              <a:t>The scheduler decides which node hello-pod belongs on and records that decision; it doesn't start anything itself</a:t>
             </a:r>
             <a:endParaRPr lang="en-US" sz="1500" dirty="0"/>
           </a:p>
@@ -5798,14 +6180,14 @@
       </p:sp>
       <p:sp>
         <p:nvSpPr>
-          <p:cNvPr id="17" name="Text 15"/>
-          <p:cNvSpPr/>
-          <p:nvPr/>
-        </p:nvSpPr>
-        <p:spPr>
-          <a:xfrm>
-            <a:off x="457200" y="4901184"/>
-            <a:ext cx="11274552" cy="560832"/>
+          <p:cNvPr id="23" name="Text 21"/>
+          <p:cNvSpPr/>
+          <p:nvPr/>
+        </p:nvSpPr>
+        <p:spPr>
+          <a:xfrm>
+            <a:off x="457200" y="5274259"/>
+            <a:ext cx="11274552" cy="654710"/>
           </a:xfrm>
           <a:prstGeom prst="rect">
             <a:avLst/>
@@ -5830,7 +6212,7 @@
                 <a:ea typeface="Trebuchet MS" pitchFamily="34" charset="-122"/>
                 <a:cs typeface="Trebuchet MS" pitchFamily="34" charset="-120"/>
               </a:rPr>
-              <a:t>Nothing is asking "does hello-pod still exist?" on a loop, so nothing notices when the answer becomes no</a:t>
+              <a:t>kubelet on that node does the real work: pulls nginx:alpine and starts hello-container inside a new Pod sandbox</a:t>
             </a:r>
             <a:endParaRPr lang="en-US" sz="1500" dirty="0"/>
           </a:p>
@@ -5838,14 +6220,14 @@
       </p:sp>
       <p:sp>
         <p:nvSpPr>
-          <p:cNvPr id="18" name="Text 16"/>
-          <p:cNvSpPr/>
-          <p:nvPr/>
-        </p:nvSpPr>
-        <p:spPr>
-          <a:xfrm>
-            <a:off x="457200" y="5462016"/>
-            <a:ext cx="11274552" cy="560832"/>
+          <p:cNvPr id="24" name="Text 22"/>
+          <p:cNvSpPr/>
+          <p:nvPr/>
+        </p:nvSpPr>
+        <p:spPr>
+          <a:xfrm>
+            <a:off x="457200" y="5928970"/>
+            <a:ext cx="11274552" cy="654710"/>
           </a:xfrm>
           <a:prstGeom prst="rect">
             <a:avLst/>
@@ -5870,47 +6252,7 @@
                 <a:ea typeface="Trebuchet MS" pitchFamily="34" charset="-122"/>
                 <a:cs typeface="Trebuchet MS" pitchFamily="34" charset="-120"/>
               </a:rPr>
-              <a:t>A file and a cluster object are linked only for the instant apply runs — after that, editing or deleting one has zero effect on the other</a:t>
-            </a:r>
-            <a:endParaRPr lang="en-US" sz="1500" dirty="0"/>
-          </a:p>
-        </p:txBody>
-      </p:sp>
-      <p:sp>
-        <p:nvSpPr>
-          <p:cNvPr id="19" name="Text 17"/>
-          <p:cNvSpPr/>
-          <p:nvPr/>
-        </p:nvSpPr>
-        <p:spPr>
-          <a:xfrm>
-            <a:off x="457200" y="6022848"/>
-            <a:ext cx="11274552" cy="560832"/>
-          </a:xfrm>
-          <a:prstGeom prst="rect">
-            <a:avLst/>
-          </a:prstGeom>
-          <a:noFill/>
-          <a:ln/>
-        </p:spPr>
-        <p:txBody>
-          <a:bodyPr wrap="square" rtlCol="0" anchor="ctr"/>
-          <a:lstStyle/>
-          <a:p>
-            <a:pPr marL="254000" indent="-254000">
-              <a:buSzPct val="100000"/>
-              <a:buChar char="•"/>
-            </a:pPr>
-            <a:r>
-              <a:rPr lang="en-US" sz="1500" dirty="0">
-                <a:solidFill>
-                  <a:srgbClr val="0A1A1C"/>
-                </a:solidFill>
-                <a:latin typeface="Trebuchet MS" pitchFamily="34" charset="0"/>
-                <a:ea typeface="Trebuchet MS" pitchFamily="34" charset="-122"/>
-                <a:cs typeface="Trebuchet MS" pitchFamily="34" charset="-120"/>
-              </a:rPr>
-              <a:t>Not a bug — it's the exact gap a controller is built to close, which is exactly what a Deployment adds</a:t>
+              <a:t>kubelet reports Running back to the API server — that's exactly the status kubectl get pods displays</a:t>
             </a:r>
             <a:endParaRPr lang="en-US" sz="1500" dirty="0"/>
           </a:p>
@@ -6045,7 +6387,7 @@
                 <a:ea typeface="Arial Black" pitchFamily="34" charset="-122"/>
                 <a:cs typeface="Arial Black" pitchFamily="34" charset="-120"/>
               </a:rPr>
-              <a:t>Deployment → ReplicaSet → Pod</a:t>
+              <a:t>The Experiment: Delete It and Watch</a:t>
             </a:r>
             <a:endParaRPr lang="en-US" sz="3000" dirty="0"/>
           </a:p>
@@ -6084,284 +6426,8 @@
         </p:nvSpPr>
         <p:spPr>
           <a:xfrm>
-            <a:off x="457200" y="1840230"/>
-            <a:ext cx="3526536" cy="653796"/>
-          </a:xfrm>
-          <a:prstGeom prst="roundRect">
-            <a:avLst>
-              <a:gd name="adj" fmla="val 13986"/>
-            </a:avLst>
-          </a:prstGeom>
-          <a:solidFill>
-            <a:srgbClr val="B8ECF5"/>
-          </a:solidFill>
-          <a:ln w="19050">
-            <a:solidFill>
-              <a:srgbClr val="007A90"/>
-            </a:solidFill>
-            <a:prstDash val="solid"/>
-          </a:ln>
-        </p:spPr>
-      </p:sp>
-      <p:sp>
-        <p:nvSpPr>
-          <p:cNvPr id="7" name="Text 5"/>
-          <p:cNvSpPr/>
-          <p:nvPr/>
-        </p:nvSpPr>
-        <p:spPr>
-          <a:xfrm>
-            <a:off x="457200" y="1840230"/>
-            <a:ext cx="3526536" cy="653796"/>
-          </a:xfrm>
-          <a:prstGeom prst="rect">
-            <a:avLst/>
-          </a:prstGeom>
-          <a:noFill/>
-          <a:ln/>
-        </p:spPr>
-        <p:txBody>
-          <a:bodyPr wrap="square" rtlCol="0" anchor="ctr"/>
-          <a:lstStyle/>
-          <a:p>
-            <a:pPr algn="ctr" indent="0" marL="0">
-              <a:buNone/>
-            </a:pPr>
-            <a:r>
-              <a:rPr lang="en-US" sz="1200" b="1" dirty="0">
-                <a:solidFill>
-                  <a:srgbClr val="0A1A1C"/>
-                </a:solidFill>
-                <a:latin typeface="Trebuchet MS" pitchFamily="34" charset="0"/>
-                <a:ea typeface="Trebuchet MS" pitchFamily="34" charset="-122"/>
-                <a:cs typeface="Trebuchet MS" pitchFamily="34" charset="-120"/>
-              </a:rPr>
-              <a:t>Deployment</a:t>
-            </a:r>
-            <a:endParaRPr lang="en-US" sz="1200" dirty="0"/>
-          </a:p>
-        </p:txBody>
-      </p:sp>
-      <p:sp>
-        <p:nvSpPr>
-          <p:cNvPr id="8" name="Text 6"/>
-          <p:cNvSpPr/>
-          <p:nvPr/>
-        </p:nvSpPr>
-        <p:spPr>
-          <a:xfrm>
-            <a:off x="3983736" y="1840230"/>
-            <a:ext cx="347472" cy="653796"/>
-          </a:xfrm>
-          <a:prstGeom prst="rect">
-            <a:avLst/>
-          </a:prstGeom>
-          <a:noFill/>
-          <a:ln/>
-        </p:spPr>
-        <p:txBody>
-          <a:bodyPr wrap="square" rtlCol="0" anchor="ctr"/>
-          <a:lstStyle/>
-          <a:p>
-            <a:pPr algn="ctr" indent="0" marL="0">
-              <a:buNone/>
-            </a:pPr>
-            <a:r>
-              <a:rPr lang="en-US" sz="2200" dirty="0">
-                <a:solidFill>
-                  <a:srgbClr val="007A90"/>
-                </a:solidFill>
-                <a:latin typeface="Trebuchet MS" pitchFamily="34" charset="0"/>
-                <a:ea typeface="Trebuchet MS" pitchFamily="34" charset="-122"/>
-                <a:cs typeface="Trebuchet MS" pitchFamily="34" charset="-120"/>
-              </a:rPr>
-              <a:t>→</a:t>
-            </a:r>
-            <a:endParaRPr lang="en-US" sz="2200" dirty="0"/>
-          </a:p>
-        </p:txBody>
-      </p:sp>
-      <p:sp>
-        <p:nvSpPr>
-          <p:cNvPr id="9" name="Shape 7"/>
-          <p:cNvSpPr/>
-          <p:nvPr/>
-        </p:nvSpPr>
-        <p:spPr>
-          <a:xfrm>
-            <a:off x="4331208" y="1840230"/>
-            <a:ext cx="3526536" cy="653796"/>
-          </a:xfrm>
-          <a:prstGeom prst="roundRect">
-            <a:avLst>
-              <a:gd name="adj" fmla="val 13986"/>
-            </a:avLst>
-          </a:prstGeom>
-          <a:solidFill>
-            <a:srgbClr val="B8ECF5"/>
-          </a:solidFill>
-          <a:ln w="19050">
-            <a:solidFill>
-              <a:srgbClr val="007A90"/>
-            </a:solidFill>
-            <a:prstDash val="solid"/>
-          </a:ln>
-        </p:spPr>
-      </p:sp>
-      <p:sp>
-        <p:nvSpPr>
-          <p:cNvPr id="10" name="Text 8"/>
-          <p:cNvSpPr/>
-          <p:nvPr/>
-        </p:nvSpPr>
-        <p:spPr>
-          <a:xfrm>
-            <a:off x="4331208" y="1840230"/>
-            <a:ext cx="3526536" cy="653796"/>
-          </a:xfrm>
-          <a:prstGeom prst="rect">
-            <a:avLst/>
-          </a:prstGeom>
-          <a:noFill/>
-          <a:ln/>
-        </p:spPr>
-        <p:txBody>
-          <a:bodyPr wrap="square" rtlCol="0" anchor="ctr"/>
-          <a:lstStyle/>
-          <a:p>
-            <a:pPr algn="ctr" indent="0" marL="0">
-              <a:buNone/>
-            </a:pPr>
-            <a:r>
-              <a:rPr lang="en-US" sz="1200" dirty="0">
-                <a:solidFill>
-                  <a:srgbClr val="0A1A1C"/>
-                </a:solidFill>
-                <a:latin typeface="Trebuchet MS" pitchFamily="34" charset="0"/>
-                <a:ea typeface="Trebuchet MS" pitchFamily="34" charset="-122"/>
-                <a:cs typeface="Trebuchet MS" pitchFamily="34" charset="-120"/>
-              </a:rPr>
-              <a:t>ReplicaSet</a:t>
-            </a:r>
-            <a:endParaRPr lang="en-US" sz="1200" dirty="0"/>
-          </a:p>
-        </p:txBody>
-      </p:sp>
-      <p:sp>
-        <p:nvSpPr>
-          <p:cNvPr id="11" name="Text 9"/>
-          <p:cNvSpPr/>
-          <p:nvPr/>
-        </p:nvSpPr>
-        <p:spPr>
-          <a:xfrm>
-            <a:off x="7857744" y="1840230"/>
-            <a:ext cx="347472" cy="653796"/>
-          </a:xfrm>
-          <a:prstGeom prst="rect">
-            <a:avLst/>
-          </a:prstGeom>
-          <a:noFill/>
-          <a:ln/>
-        </p:spPr>
-        <p:txBody>
-          <a:bodyPr wrap="square" rtlCol="0" anchor="ctr"/>
-          <a:lstStyle/>
-          <a:p>
-            <a:pPr algn="ctr" indent="0" marL="0">
-              <a:buNone/>
-            </a:pPr>
-            <a:r>
-              <a:rPr lang="en-US" sz="2200" dirty="0">
-                <a:solidFill>
-                  <a:srgbClr val="007A90"/>
-                </a:solidFill>
-                <a:latin typeface="Trebuchet MS" pitchFamily="34" charset="0"/>
-                <a:ea typeface="Trebuchet MS" pitchFamily="34" charset="-122"/>
-                <a:cs typeface="Trebuchet MS" pitchFamily="34" charset="-120"/>
-              </a:rPr>
-              <a:t>→</a:t>
-            </a:r>
-            <a:endParaRPr lang="en-US" sz="2200" dirty="0"/>
-          </a:p>
-        </p:txBody>
-      </p:sp>
-      <p:sp>
-        <p:nvSpPr>
-          <p:cNvPr id="12" name="Shape 10"/>
-          <p:cNvSpPr/>
-          <p:nvPr/>
-        </p:nvSpPr>
-        <p:spPr>
-          <a:xfrm>
-            <a:off x="8205216" y="1840230"/>
-            <a:ext cx="3526536" cy="653796"/>
-          </a:xfrm>
-          <a:prstGeom prst="roundRect">
-            <a:avLst>
-              <a:gd name="adj" fmla="val 13986"/>
-            </a:avLst>
-          </a:prstGeom>
-          <a:solidFill>
-            <a:srgbClr val="B8ECF5"/>
-          </a:solidFill>
-          <a:ln w="19050">
-            <a:solidFill>
-              <a:srgbClr val="007A90"/>
-            </a:solidFill>
-            <a:prstDash val="solid"/>
-          </a:ln>
-        </p:spPr>
-      </p:sp>
-      <p:sp>
-        <p:nvSpPr>
-          <p:cNvPr id="13" name="Text 11"/>
-          <p:cNvSpPr/>
-          <p:nvPr/>
-        </p:nvSpPr>
-        <p:spPr>
-          <a:xfrm>
-            <a:off x="8205216" y="1840230"/>
-            <a:ext cx="3526536" cy="653796"/>
-          </a:xfrm>
-          <a:prstGeom prst="rect">
-            <a:avLst/>
-          </a:prstGeom>
-          <a:noFill/>
-          <a:ln/>
-        </p:spPr>
-        <p:txBody>
-          <a:bodyPr wrap="square" rtlCol="0" anchor="ctr"/>
-          <a:lstStyle/>
-          <a:p>
-            <a:pPr algn="ctr" indent="0" marL="0">
-              <a:buNone/>
-            </a:pPr>
-            <a:r>
-              <a:rPr lang="en-US" sz="1200" b="1" dirty="0">
-                <a:solidFill>
-                  <a:srgbClr val="0A1A1C"/>
-                </a:solidFill>
-                <a:latin typeface="Trebuchet MS" pitchFamily="34" charset="0"/>
-                <a:ea typeface="Trebuchet MS" pitchFamily="34" charset="-122"/>
-                <a:cs typeface="Trebuchet MS" pitchFamily="34" charset="-120"/>
-              </a:rPr>
-              <a:t>Pod(s)</a:t>
-            </a:r>
-            <a:endParaRPr lang="en-US" sz="1200" dirty="0"/>
-          </a:p>
-        </p:txBody>
-      </p:sp>
-      <p:sp>
-        <p:nvSpPr>
-          <p:cNvPr id="14" name="Shape 12"/>
-          <p:cNvSpPr/>
-          <p:nvPr/>
-        </p:nvSpPr>
-        <p:spPr>
-          <a:xfrm>
-            <a:off x="457200" y="2944368"/>
-            <a:ext cx="6040984" cy="3639312"/>
+            <a:off x="457200" y="1572768"/>
+            <a:ext cx="5477256" cy="5010912"/>
           </a:xfrm>
           <a:prstGeom prst="rect">
             <a:avLst/>
@@ -6379,14 +6445,14 @@
       </p:sp>
       <p:sp>
         <p:nvSpPr>
-          <p:cNvPr id="15" name="Text 13"/>
-          <p:cNvSpPr/>
-          <p:nvPr/>
-        </p:nvSpPr>
-        <p:spPr>
-          <a:xfrm>
-            <a:off x="640080" y="3081528"/>
-            <a:ext cx="5675224" cy="3364992"/>
+          <p:cNvPr id="7" name="Text 5"/>
+          <p:cNvSpPr/>
+          <p:nvPr/>
+        </p:nvSpPr>
+        <p:spPr>
+          <a:xfrm>
+            <a:off x="640080" y="1709928"/>
+            <a:ext cx="5111496" cy="4736592"/>
           </a:xfrm>
           <a:prstGeom prst="rect">
             <a:avLst/>
@@ -6402,7 +6468,7 @@
               <a:buNone/>
             </a:pPr>
             <a:r>
-              <a:rPr lang="en-US" sz="1300" dirty="0">
+              <a:rPr lang="en-US" sz="1200" dirty="0">
                 <a:solidFill>
                   <a:srgbClr val="003848"/>
                 </a:solidFill>
@@ -6410,16 +6476,16 @@
                 <a:ea typeface="Courier New" pitchFamily="34" charset="-122"/>
                 <a:cs typeface="Courier New" pitchFamily="34" charset="-120"/>
               </a:rPr>
-              <a:t>spec:</a:t>
-            </a:r>
-            <a:endParaRPr lang="en-US" sz="1300" dirty="0"/>
+              <a:t>kubectl apply -f pod.yaml       # 1. create it</a:t>
+            </a:r>
+            <a:endParaRPr lang="en-US" sz="1200" dirty="0"/>
           </a:p>
           <a:p>
             <a:pPr indent="0" marL="0">
               <a:buNone/>
             </a:pPr>
             <a:r>
-              <a:rPr lang="en-US" sz="1300" dirty="0">
+              <a:rPr lang="en-US" sz="1200" dirty="0">
                 <a:solidFill>
                   <a:srgbClr val="003848"/>
                 </a:solidFill>
@@ -6427,16 +6493,16 @@
                 <a:ea typeface="Courier New" pitchFamily="34" charset="-122"/>
                 <a:cs typeface="Courier New" pitchFamily="34" charset="-120"/>
               </a:rPr>
-              <a:t>  replicas: 3</a:t>
-            </a:r>
-            <a:endParaRPr lang="en-US" sz="1300" dirty="0"/>
+              <a:t>kubectl get pods                # 2. confirm: Running</a:t>
+            </a:r>
+            <a:endParaRPr lang="en-US" sz="1200" dirty="0"/>
           </a:p>
           <a:p>
             <a:pPr indent="0" marL="0">
               <a:buNone/>
             </a:pPr>
             <a:r>
-              <a:rPr lang="en-US" sz="1300" dirty="0">
+              <a:rPr lang="en-US" sz="1200" dirty="0">
                 <a:solidFill>
                   <a:srgbClr val="003848"/>
                 </a:solidFill>
@@ -6444,16 +6510,16 @@
                 <a:ea typeface="Courier New" pitchFamily="34" charset="-122"/>
                 <a:cs typeface="Courier New" pitchFamily="34" charset="-120"/>
               </a:rPr>
-              <a:t>  selector:</a:t>
-            </a:r>
-            <a:endParaRPr lang="en-US" sz="1300" dirty="0"/>
+              <a:t>kubectl delete pod hello-pod    # 3. remove the live object</a:t>
+            </a:r>
+            <a:endParaRPr lang="en-US" sz="1200" dirty="0"/>
           </a:p>
           <a:p>
             <a:pPr indent="0" marL="0">
               <a:buNone/>
             </a:pPr>
             <a:r>
-              <a:rPr lang="en-US" sz="1300" dirty="0">
+              <a:rPr lang="en-US" sz="1200" dirty="0">
                 <a:solidFill>
                   <a:srgbClr val="003848"/>
                 </a:solidFill>
@@ -6461,16 +6527,16 @@
                 <a:ea typeface="Courier New" pitchFamily="34" charset="-122"/>
                 <a:cs typeface="Courier New" pitchFamily="34" charset="-120"/>
               </a:rPr>
-              <a:t>    matchLabels:</a:t>
-            </a:r>
-            <a:endParaRPr lang="en-US" sz="1300" dirty="0"/>
+              <a:t>kubectl get pods                # 4. check again</a:t>
+            </a:r>
+            <a:endParaRPr lang="en-US" sz="1200" dirty="0"/>
           </a:p>
           <a:p>
             <a:pPr indent="0" marL="0">
               <a:buNone/>
             </a:pPr>
             <a:r>
-              <a:rPr lang="en-US" sz="1300" dirty="0">
+              <a:rPr lang="en-US" sz="1200" dirty="0">
                 <a:solidFill>
                   <a:srgbClr val="003848"/>
                 </a:solidFill>
@@ -6478,90 +6544,22 @@
                 <a:ea typeface="Courier New" pitchFamily="34" charset="-122"/>
                 <a:cs typeface="Courier New" pitchFamily="34" charset="-120"/>
               </a:rPr>
-              <a:t>      app: hello</a:t>
-            </a:r>
-            <a:endParaRPr lang="en-US" sz="1300" dirty="0"/>
-          </a:p>
-          <a:p>
-            <a:pPr indent="0" marL="0">
-              <a:buNone/>
-            </a:pPr>
-            <a:r>
-              <a:rPr lang="en-US" sz="1300" dirty="0">
-                <a:solidFill>
-                  <a:srgbClr val="003848"/>
-                </a:solidFill>
-                <a:latin typeface="Courier New" pitchFamily="34" charset="0"/>
-                <a:ea typeface="Courier New" pitchFamily="34" charset="-122"/>
-                <a:cs typeface="Courier New" pitchFamily="34" charset="-120"/>
-              </a:rPr>
-              <a:t>  template:      # a full Pod spec, nested one level deeper</a:t>
-            </a:r>
-            <a:endParaRPr lang="en-US" sz="1300" dirty="0"/>
-          </a:p>
-          <a:p>
-            <a:pPr indent="0" marL="0">
-              <a:buNone/>
-            </a:pPr>
-            <a:r>
-              <a:rPr lang="en-US" sz="1300" dirty="0">
-                <a:solidFill>
-                  <a:srgbClr val="003848"/>
-                </a:solidFill>
-                <a:latin typeface="Courier New" pitchFamily="34" charset="0"/>
-                <a:ea typeface="Courier New" pitchFamily="34" charset="-122"/>
-                <a:cs typeface="Courier New" pitchFamily="34" charset="-120"/>
-              </a:rPr>
-              <a:t>    metadata:</a:t>
-            </a:r>
-            <a:endParaRPr lang="en-US" sz="1300" dirty="0"/>
-          </a:p>
-          <a:p>
-            <a:pPr indent="0" marL="0">
-              <a:buNone/>
-            </a:pPr>
-            <a:r>
-              <a:rPr lang="en-US" sz="1300" dirty="0">
-                <a:solidFill>
-                  <a:srgbClr val="003848"/>
-                </a:solidFill>
-                <a:latin typeface="Courier New" pitchFamily="34" charset="0"/>
-                <a:ea typeface="Courier New" pitchFamily="34" charset="-122"/>
-                <a:cs typeface="Courier New" pitchFamily="34" charset="-120"/>
-              </a:rPr>
-              <a:t>      labels:</a:t>
-            </a:r>
-            <a:endParaRPr lang="en-US" sz="1300" dirty="0"/>
-          </a:p>
-          <a:p>
-            <a:pPr indent="0" marL="0">
-              <a:buNone/>
-            </a:pPr>
-            <a:r>
-              <a:rPr lang="en-US" sz="1300" dirty="0">
-                <a:solidFill>
-                  <a:srgbClr val="003848"/>
-                </a:solidFill>
-                <a:latin typeface="Courier New" pitchFamily="34" charset="0"/>
-                <a:ea typeface="Courier New" pitchFamily="34" charset="-122"/>
-                <a:cs typeface="Courier New" pitchFamily="34" charset="-120"/>
-              </a:rPr>
-              <a:t>        app: hello</a:t>
-            </a:r>
-            <a:endParaRPr lang="en-US" sz="1300" dirty="0"/>
-          </a:p>
-        </p:txBody>
-      </p:sp>
-      <p:sp>
-        <p:nvSpPr>
-          <p:cNvPr id="16" name="Text 14"/>
-          <p:cNvSpPr/>
-          <p:nvPr/>
-        </p:nvSpPr>
-        <p:spPr>
-          <a:xfrm>
-            <a:off x="6818224" y="2944368"/>
-            <a:ext cx="4913528" cy="909828"/>
+              <a:t># → No resources found in default namespace.</a:t>
+            </a:r>
+            <a:endParaRPr lang="en-US" sz="1200" dirty="0"/>
+          </a:p>
+        </p:txBody>
+      </p:sp>
+      <p:sp>
+        <p:nvSpPr>
+          <p:cNvPr id="8" name="Text 6"/>
+          <p:cNvSpPr/>
+          <p:nvPr/>
+        </p:nvSpPr>
+        <p:spPr>
+          <a:xfrm>
+            <a:off x="6254496" y="1572768"/>
+            <a:ext cx="5477256" cy="1252728"/>
           </a:xfrm>
           <a:prstGeom prst="rect">
             <a:avLst/>
@@ -6578,7 +6576,7 @@
               <a:buChar char="•"/>
             </a:pPr>
             <a:r>
-              <a:rPr lang="en-US" sz="1500" dirty="0">
+              <a:rPr lang="en-US" sz="1600" dirty="0">
                 <a:solidFill>
                   <a:srgbClr val="0A1A1C"/>
                 </a:solidFill>
@@ -6586,22 +6584,22 @@
                 <a:ea typeface="Trebuchet MS" pitchFamily="34" charset="-122"/>
                 <a:cs typeface="Trebuchet MS" pitchFamily="34" charset="-120"/>
               </a:rPr>
-              <a:t>Deployment doesn't run containers directly — it manages a ReplicaSet, and the ReplicaSet IS a controller: a background process maintaining a fixed Pod count</a:t>
-            </a:r>
-            <a:endParaRPr lang="en-US" sz="1500" dirty="0"/>
-          </a:p>
-        </p:txBody>
-      </p:sp>
-      <p:sp>
-        <p:nvSpPr>
-          <p:cNvPr id="17" name="Text 15"/>
-          <p:cNvSpPr/>
-          <p:nvPr/>
-        </p:nvSpPr>
-        <p:spPr>
-          <a:xfrm>
-            <a:off x="6818224" y="3854196"/>
-            <a:ext cx="4913528" cy="909828"/>
+              <a:t>Run this exact sequence yourself in Module 1 — it's the single most useful five minutes in this deck</a:t>
+            </a:r>
+            <a:endParaRPr lang="en-US" sz="1600" dirty="0"/>
+          </a:p>
+        </p:txBody>
+      </p:sp>
+      <p:sp>
+        <p:nvSpPr>
+          <p:cNvPr id="9" name="Text 7"/>
+          <p:cNvSpPr/>
+          <p:nvPr/>
+        </p:nvSpPr>
+        <p:spPr>
+          <a:xfrm>
+            <a:off x="6254496" y="2825496"/>
+            <a:ext cx="5477256" cy="1252728"/>
           </a:xfrm>
           <a:prstGeom prst="rect">
             <a:avLst/>
@@ -6618,7 +6616,7 @@
               <a:buChar char="•"/>
             </a:pPr>
             <a:r>
-              <a:rPr lang="en-US" sz="1500" dirty="0">
+              <a:rPr lang="en-US" sz="1600" dirty="0">
                 <a:solidFill>
                   <a:srgbClr val="0A1A1C"/>
                 </a:solidFill>
@@ -6626,22 +6624,22 @@
                 <a:ea typeface="Trebuchet MS" pitchFamily="34" charset="-122"/>
                 <a:cs typeface="Trebuchet MS" pitchFamily="34" charset="-120"/>
               </a:rPr>
-              <a:t>Delete one managed Pod: it disappears, a brand-new one (new random suffix) appears almost immediately — with no re-apply</a:t>
-            </a:r>
-            <a:endParaRPr lang="en-US" sz="1500" dirty="0"/>
-          </a:p>
-        </p:txBody>
-      </p:sp>
-      <p:sp>
-        <p:nvSpPr>
-          <p:cNvPr id="18" name="Text 16"/>
-          <p:cNvSpPr/>
-          <p:nvPr/>
-        </p:nvSpPr>
-        <p:spPr>
-          <a:xfrm>
-            <a:off x="6818224" y="4764024"/>
-            <a:ext cx="4913528" cy="909828"/>
+              <a:t>Step 3 deletes only the live object in the cluster — pod.yaml on your laptop is never read, touched, or invalidated by it</a:t>
+            </a:r>
+            <a:endParaRPr lang="en-US" sz="1600" dirty="0"/>
+          </a:p>
+        </p:txBody>
+      </p:sp>
+      <p:sp>
+        <p:nvSpPr>
+          <p:cNvPr id="10" name="Text 8"/>
+          <p:cNvSpPr/>
+          <p:nvPr/>
+        </p:nvSpPr>
+        <p:spPr>
+          <a:xfrm>
+            <a:off x="6254496" y="4078224"/>
+            <a:ext cx="5477256" cy="1252728"/>
           </a:xfrm>
           <a:prstGeom prst="rect">
             <a:avLst/>
@@ -6658,7 +6656,7 @@
               <a:buChar char="•"/>
             </a:pPr>
             <a:r>
-              <a:rPr lang="en-US" sz="1500" dirty="0">
+              <a:rPr lang="en-US" sz="1600" dirty="0">
                 <a:solidFill>
                   <a:srgbClr val="0A1A1C"/>
                 </a:solidFill>
@@ -6666,22 +6664,22 @@
                 <a:ea typeface="Trebuchet MS" pitchFamily="34" charset="-122"/>
                 <a:cs typeface="Trebuchet MS" pitchFamily="34" charset="-120"/>
               </a:rPr>
-              <a:t>A bare Pod has no such process watching it; a Deployment-managed Pod does — that's the entire difference</a:t>
-            </a:r>
-            <a:endParaRPr lang="en-US" sz="1500" dirty="0"/>
-          </a:p>
-        </p:txBody>
-      </p:sp>
-      <p:sp>
-        <p:nvSpPr>
-          <p:cNvPr id="19" name="Text 17"/>
-          <p:cNvSpPr/>
-          <p:nvPr/>
-        </p:nvSpPr>
-        <p:spPr>
-          <a:xfrm>
-            <a:off x="6818224" y="5673852"/>
-            <a:ext cx="4913528" cy="909828"/>
+              <a:t>A file and a cluster object are two separate things, linked only for the instant apply runs</a:t>
+            </a:r>
+            <a:endParaRPr lang="en-US" sz="1600" dirty="0"/>
+          </a:p>
+        </p:txBody>
+      </p:sp>
+      <p:sp>
+        <p:nvSpPr>
+          <p:cNvPr id="11" name="Text 9"/>
+          <p:cNvSpPr/>
+          <p:nvPr/>
+        </p:nvSpPr>
+        <p:spPr>
+          <a:xfrm>
+            <a:off x="6254496" y="5330952"/>
+            <a:ext cx="5477256" cy="1252728"/>
           </a:xfrm>
           <a:prstGeom prst="rect">
             <a:avLst/>
@@ -6698,7 +6696,7 @@
               <a:buChar char="•"/>
             </a:pPr>
             <a:r>
-              <a:rPr lang="en-US" sz="1500" dirty="0">
+              <a:rPr lang="en-US" sz="1600" dirty="0">
                 <a:solidFill>
                   <a:srgbClr val="0A1A1C"/>
                 </a:solidFill>
@@ -6706,9 +6704,9 @@
                 <a:ea typeface="Trebuchet MS" pitchFamily="34" charset="-122"/>
                 <a:cs typeface="Trebuchet MS" pitchFamily="34" charset="-120"/>
               </a:rPr>
-              <a:t>kubectl scale --replicas=5 just changes what "desired" means; the same controller loop does the rest</a:t>
-            </a:r>
-            <a:endParaRPr lang="en-US" sz="1500" dirty="0"/>
+              <a:t>Result: it does not come back — the file being right there, untouched, turns out not to matter</a:t>
+            </a:r>
+            <a:endParaRPr lang="en-US" sz="1600" dirty="0"/>
           </a:p>
         </p:txBody>
       </p:sp>
@@ -6726,7 +6724,7 @@
     <p:bg>
       <p:bgPr>
         <a:solidFill>
-          <a:srgbClr val="007A90"/>
+          <a:srgbClr val="EAFCFF"/>
         </a:solidFill>
       </p:bgPr>
     </p:bg>
@@ -6752,18 +6750,121 @@
         </p:nvSpPr>
         <p:spPr>
           <a:xfrm>
-            <a:off x="0" y="0"/>
-            <a:ext cx="164592" cy="6858000"/>
+            <a:off x="457200" y="201168"/>
+            <a:ext cx="1828800" cy="347472"/>
           </a:xfrm>
           <a:prstGeom prst="rect">
             <a:avLst/>
           </a:prstGeom>
           <a:solidFill>
-            <a:srgbClr val="FFFFFF"/>
+            <a:srgbClr val="007A90"/>
+          </a:solidFill>
+          <a:ln w="9525">
+            <a:solidFill>
+              <a:srgbClr val="007A90"/>
+            </a:solidFill>
+            <a:prstDash val="solid"/>
+          </a:ln>
+        </p:spPr>
+      </p:sp>
+      <p:sp>
+        <p:nvSpPr>
+          <p:cNvPr id="3" name="Text 1"/>
+          <p:cNvSpPr/>
+          <p:nvPr/>
+        </p:nvSpPr>
+        <p:spPr>
+          <a:xfrm>
+            <a:off x="457200" y="201168"/>
+            <a:ext cx="1828800" cy="347472"/>
+          </a:xfrm>
+          <a:prstGeom prst="rect">
+            <a:avLst/>
+          </a:prstGeom>
+          <a:noFill/>
+          <a:ln/>
+        </p:spPr>
+        <p:txBody>
+          <a:bodyPr wrap="square" rtlCol="0" anchor="ctr"/>
+          <a:lstStyle/>
+          <a:p>
+            <a:pPr algn="ctr" indent="0" marL="0">
+              <a:buNone/>
+            </a:pPr>
+            <a:r>
+              <a:rPr lang="en-US" sz="1200" b="1" spc="50" kern="0" dirty="0">
+                <a:solidFill>
+                  <a:srgbClr val="FFFFFF"/>
+                </a:solidFill>
+                <a:latin typeface="Trebuchet MS" pitchFamily="34" charset="0"/>
+                <a:ea typeface="Trebuchet MS" pitchFamily="34" charset="-122"/>
+                <a:cs typeface="Trebuchet MS" pitchFamily="34" charset="-120"/>
+              </a:rPr>
+              <a:t>KUBERNETES</a:t>
+            </a:r>
+            <a:endParaRPr lang="en-US" sz="1200" dirty="0"/>
+          </a:p>
+        </p:txBody>
+      </p:sp>
+      <p:sp>
+        <p:nvSpPr>
+          <p:cNvPr id="4" name="Text 2"/>
+          <p:cNvSpPr/>
+          <p:nvPr/>
+        </p:nvSpPr>
+        <p:spPr>
+          <a:xfrm>
+            <a:off x="457200" y="658368"/>
+            <a:ext cx="11274552" cy="685800"/>
+          </a:xfrm>
+          <a:prstGeom prst="rect">
+            <a:avLst/>
+          </a:prstGeom>
+          <a:noFill/>
+          <a:ln/>
+        </p:spPr>
+        <p:txBody>
+          <a:bodyPr wrap="square" rtlCol="0" anchor="ctr"/>
+          <a:lstStyle/>
+          <a:p>
+            <a:pPr indent="0" marL="0">
+              <a:buNone/>
+            </a:pPr>
+            <a:r>
+              <a:rPr lang="en-US" sz="3000" b="1" spc="50" kern="0" dirty="0">
+                <a:solidFill>
+                  <a:srgbClr val="0A1A1C"/>
+                </a:solidFill>
+                <a:latin typeface="Arial Black" pitchFamily="34" charset="0"/>
+                <a:ea typeface="Arial Black" pitchFamily="34" charset="-122"/>
+                <a:cs typeface="Arial Black" pitchFamily="34" charset="-120"/>
+              </a:rPr>
+              <a:t>Why Doesn't It Come Back?</a:t>
+            </a:r>
+            <a:endParaRPr lang="en-US" sz="3000" dirty="0"/>
+          </a:p>
+        </p:txBody>
+      </p:sp>
+      <p:sp>
+        <p:nvSpPr>
+          <p:cNvPr id="5" name="Shape 3"/>
+          <p:cNvSpPr/>
+          <p:nvPr/>
+        </p:nvSpPr>
+        <p:spPr>
+          <a:xfrm>
+            <a:off x="457200" y="1417320"/>
+            <a:ext cx="11274552" cy="27432"/>
+          </a:xfrm>
+          <a:prstGeom prst="rect">
+            <a:avLst/>
+          </a:prstGeom>
+          <a:solidFill>
+            <a:srgbClr val="007A90"/>
           </a:solidFill>
           <a:ln w="12700">
             <a:solidFill>
-              <a:srgbClr val="FFFFFF"/>
+              <a:srgbClr val="007A90"/>
             </a:solidFill>
             <a:prstDash val="solid"/>
           </a:ln>
@@ -6771,14 +6872,41 @@
       </p:sp>
       <p:sp>
         <p:nvSpPr>
-          <p:cNvPr id="3" name="Text 1"/>
-          <p:cNvSpPr/>
-          <p:nvPr/>
-        </p:nvSpPr>
-        <p:spPr>
-          <a:xfrm>
-            <a:off x="457200" y="2103120"/>
-            <a:ext cx="11274552" cy="1463040"/>
+          <p:cNvPr id="6" name="Shape 4"/>
+          <p:cNvSpPr/>
+          <p:nvPr/>
+        </p:nvSpPr>
+        <p:spPr>
+          <a:xfrm>
+            <a:off x="457200" y="1901952"/>
+            <a:ext cx="3526536" cy="804672"/>
+          </a:xfrm>
+          <a:prstGeom prst="roundRect">
+            <a:avLst>
+              <a:gd name="adj" fmla="val 11364"/>
+            </a:avLst>
+          </a:prstGeom>
+          <a:solidFill>
+            <a:srgbClr val="B8ECF5"/>
+          </a:solidFill>
+          <a:ln w="19050">
+            <a:solidFill>
+              <a:srgbClr val="007A90"/>
+            </a:solidFill>
+            <a:prstDash val="solid"/>
+          </a:ln>
+        </p:spPr>
+      </p:sp>
+      <p:sp>
+        <p:nvSpPr>
+          <p:cNvPr id="7" name="Text 5"/>
+          <p:cNvSpPr/>
+          <p:nvPr/>
+        </p:nvSpPr>
+        <p:spPr>
+          <a:xfrm>
+            <a:off x="457200" y="1901952"/>
+            <a:ext cx="3526536" cy="804672"/>
           </a:xfrm>
           <a:prstGeom prst="rect">
             <a:avLst/>
@@ -6794,58 +6922,484 @@
               <a:buNone/>
             </a:pPr>
             <a:r>
-              <a:rPr lang="en-US" sz="4800" b="1" spc="50" kern="0" dirty="0">
+              <a:rPr lang="en-US" sz="1200" b="1" dirty="0">
+                <a:solidFill>
+                  <a:srgbClr val="0A1A1C"/>
+                </a:solidFill>
+                <a:latin typeface="Trebuchet MS" pitchFamily="34" charset="0"/>
+                <a:ea typeface="Trebuchet MS" pitchFamily="34" charset="-122"/>
+                <a:cs typeface="Trebuchet MS" pitchFamily="34" charset="-120"/>
+              </a:rPr>
+              <a:t>kubectl apply</a:t>
+            </a:r>
+            <a:endParaRPr lang="en-US" sz="1200" dirty="0"/>
+          </a:p>
+        </p:txBody>
+      </p:sp>
+      <p:sp>
+        <p:nvSpPr>
+          <p:cNvPr id="8" name="Text 6"/>
+          <p:cNvSpPr/>
+          <p:nvPr/>
+        </p:nvSpPr>
+        <p:spPr>
+          <a:xfrm>
+            <a:off x="3983736" y="1901952"/>
+            <a:ext cx="347472" cy="804672"/>
+          </a:xfrm>
+          <a:prstGeom prst="rect">
+            <a:avLst/>
+          </a:prstGeom>
+          <a:noFill/>
+          <a:ln/>
+        </p:spPr>
+        <p:txBody>
+          <a:bodyPr wrap="square" rtlCol="0" anchor="ctr"/>
+          <a:lstStyle/>
+          <a:p>
+            <a:pPr algn="ctr" indent="0" marL="0">
+              <a:buNone/>
+            </a:pPr>
+            <a:r>
+              <a:rPr lang="en-US" sz="2200" dirty="0">
+                <a:solidFill>
+                  <a:srgbClr val="007A90"/>
+                </a:solidFill>
+                <a:latin typeface="Trebuchet MS" pitchFamily="34" charset="0"/>
+                <a:ea typeface="Trebuchet MS" pitchFamily="34" charset="-122"/>
+                <a:cs typeface="Trebuchet MS" pitchFamily="34" charset="-120"/>
+              </a:rPr>
+              <a:t>→</a:t>
+            </a:r>
+            <a:endParaRPr lang="en-US" sz="2200" dirty="0"/>
+          </a:p>
+        </p:txBody>
+      </p:sp>
+      <p:sp>
+        <p:nvSpPr>
+          <p:cNvPr id="9" name="Shape 7"/>
+          <p:cNvSpPr/>
+          <p:nvPr/>
+        </p:nvSpPr>
+        <p:spPr>
+          <a:xfrm>
+            <a:off x="4331208" y="1901952"/>
+            <a:ext cx="3526536" cy="804672"/>
+          </a:xfrm>
+          <a:prstGeom prst="roundRect">
+            <a:avLst>
+              <a:gd name="adj" fmla="val 11364"/>
+            </a:avLst>
+          </a:prstGeom>
+          <a:solidFill>
+            <a:srgbClr val="B8ECF5"/>
+          </a:solidFill>
+          <a:ln w="19050">
+            <a:solidFill>
+              <a:srgbClr val="007A90"/>
+            </a:solidFill>
+            <a:prstDash val="solid"/>
+          </a:ln>
+        </p:spPr>
+      </p:sp>
+      <p:sp>
+        <p:nvSpPr>
+          <p:cNvPr id="10" name="Text 8"/>
+          <p:cNvSpPr/>
+          <p:nvPr/>
+        </p:nvSpPr>
+        <p:spPr>
+          <a:xfrm>
+            <a:off x="4331208" y="1901952"/>
+            <a:ext cx="3526536" cy="804672"/>
+          </a:xfrm>
+          <a:prstGeom prst="rect">
+            <a:avLst/>
+          </a:prstGeom>
+          <a:noFill/>
+          <a:ln/>
+        </p:spPr>
+        <p:txBody>
+          <a:bodyPr wrap="square" rtlCol="0" anchor="ctr"/>
+          <a:lstStyle/>
+          <a:p>
+            <a:pPr algn="ctr" indent="0" marL="0">
+              <a:buNone/>
+            </a:pPr>
+            <a:r>
+              <a:rPr lang="en-US" sz="1200" dirty="0">
+                <a:solidFill>
+                  <a:srgbClr val="0A1A1C"/>
+                </a:solidFill>
+                <a:latin typeface="Trebuchet MS" pitchFamily="34" charset="0"/>
+                <a:ea typeface="Trebuchet MS" pitchFamily="34" charset="-122"/>
+                <a:cs typeface="Trebuchet MS" pitchFamily="34" charset="-120"/>
+              </a:rPr>
+              <a:t>Pod created</a:t>
+            </a:r>
+            <a:endParaRPr lang="en-US" sz="1200" dirty="0"/>
+          </a:p>
+        </p:txBody>
+      </p:sp>
+      <p:sp>
+        <p:nvSpPr>
+          <p:cNvPr id="11" name="Text 9"/>
+          <p:cNvSpPr/>
+          <p:nvPr/>
+        </p:nvSpPr>
+        <p:spPr>
+          <a:xfrm>
+            <a:off x="7857744" y="1901952"/>
+            <a:ext cx="347472" cy="804672"/>
+          </a:xfrm>
+          <a:prstGeom prst="rect">
+            <a:avLst/>
+          </a:prstGeom>
+          <a:noFill/>
+          <a:ln/>
+        </p:spPr>
+        <p:txBody>
+          <a:bodyPr wrap="square" rtlCol="0" anchor="ctr"/>
+          <a:lstStyle/>
+          <a:p>
+            <a:pPr algn="ctr" indent="0" marL="0">
+              <a:buNone/>
+            </a:pPr>
+            <a:r>
+              <a:rPr lang="en-US" sz="2200" dirty="0">
+                <a:solidFill>
+                  <a:srgbClr val="007A90"/>
+                </a:solidFill>
+                <a:latin typeface="Trebuchet MS" pitchFamily="34" charset="0"/>
+                <a:ea typeface="Trebuchet MS" pitchFamily="34" charset="-122"/>
+                <a:cs typeface="Trebuchet MS" pitchFamily="34" charset="-120"/>
+              </a:rPr>
+              <a:t>→</a:t>
+            </a:r>
+            <a:endParaRPr lang="en-US" sz="2200" dirty="0"/>
+          </a:p>
+        </p:txBody>
+      </p:sp>
+      <p:sp>
+        <p:nvSpPr>
+          <p:cNvPr id="12" name="Shape 10"/>
+          <p:cNvSpPr/>
+          <p:nvPr/>
+        </p:nvSpPr>
+        <p:spPr>
+          <a:xfrm>
+            <a:off x="8205216" y="1901952"/>
+            <a:ext cx="3526536" cy="804672"/>
+          </a:xfrm>
+          <a:prstGeom prst="roundRect">
+            <a:avLst>
+              <a:gd name="adj" fmla="val 11364"/>
+            </a:avLst>
+          </a:prstGeom>
+          <a:solidFill>
+            <a:srgbClr val="007A90"/>
+          </a:solidFill>
+          <a:ln w="31750">
+            <a:solidFill>
+              <a:srgbClr val="007A90"/>
+            </a:solidFill>
+            <a:prstDash val="solid"/>
+          </a:ln>
+        </p:spPr>
+      </p:sp>
+      <p:sp>
+        <p:nvSpPr>
+          <p:cNvPr id="13" name="Text 11"/>
+          <p:cNvSpPr/>
+          <p:nvPr/>
+        </p:nvSpPr>
+        <p:spPr>
+          <a:xfrm>
+            <a:off x="8205216" y="1901952"/>
+            <a:ext cx="3526536" cy="804672"/>
+          </a:xfrm>
+          <a:prstGeom prst="rect">
+            <a:avLst/>
+          </a:prstGeom>
+          <a:noFill/>
+          <a:ln/>
+        </p:spPr>
+        <p:txBody>
+          <a:bodyPr wrap="square" rtlCol="0" anchor="ctr"/>
+          <a:lstStyle/>
+          <a:p>
+            <a:pPr algn="ctr" indent="0" marL="0">
+              <a:buNone/>
+            </a:pPr>
+            <a:r>
+              <a:rPr lang="en-US" sz="1200" b="1" dirty="0">
                 <a:solidFill>
                   <a:srgbClr val="FFFFFF"/>
                 </a:solidFill>
-                <a:latin typeface="Arial Black" pitchFamily="34" charset="0"/>
-                <a:ea typeface="Arial Black" pitchFamily="34" charset="-122"/>
-                <a:cs typeface="Arial Black" pitchFamily="34" charset="-120"/>
-              </a:rPr>
-              <a:t>Services, Config/Secrets &amp; the Capstone</a:t>
-            </a:r>
-            <a:endParaRPr lang="en-US" sz="4800" dirty="0"/>
-          </a:p>
-        </p:txBody>
-      </p:sp>
-      <p:sp>
-        <p:nvSpPr>
-          <p:cNvPr id="4" name="Text 2"/>
-          <p:cNvSpPr/>
-          <p:nvPr/>
-        </p:nvSpPr>
-        <p:spPr>
-          <a:xfrm>
-            <a:off x="457200" y="3749040"/>
-            <a:ext cx="11274552" cy="640080"/>
-          </a:xfrm>
-          <a:prstGeom prst="rect">
-            <a:avLst/>
-          </a:prstGeom>
-          <a:noFill/>
-          <a:ln/>
-        </p:spPr>
-        <p:txBody>
-          <a:bodyPr wrap="square" rtlCol="0" anchor="ctr"/>
-          <a:lstStyle/>
+                <a:latin typeface="Trebuchet MS" pitchFamily="34" charset="0"/>
+                <a:ea typeface="Trebuchet MS" pitchFamily="34" charset="-122"/>
+                <a:cs typeface="Trebuchet MS" pitchFamily="34" charset="-120"/>
+              </a:rPr>
+              <a:t>apply exits</a:t>
+            </a:r>
+            <a:endParaRPr lang="en-US" sz="1200" dirty="0"/>
+          </a:p>
           <a:p>
             <a:pPr algn="ctr" indent="0" marL="0">
               <a:buNone/>
             </a:pPr>
             <a:r>
-              <a:rPr lang="en-US" sz="2200" dirty="0">
-                <a:solidFill>
-                  <a:srgbClr val="FFFFFF">
-                    <a:alpha val="80000"/>
-                  </a:srgbClr>
-                </a:solidFill>
-                <a:latin typeface="Trebuchet MS" pitchFamily="34" charset="0"/>
-                <a:ea typeface="Trebuchet MS" pitchFamily="34" charset="-122"/>
-                <a:cs typeface="Trebuchet MS" pitchFamily="34" charset="-120"/>
-              </a:rPr>
-              <a:t>Stable networking, externalized config, and how it all composes.</a:t>
-            </a:r>
-            <a:endParaRPr lang="en-US" sz="2200" dirty="0"/>
+              <a:rPr lang="en-US" sz="1200" b="1" dirty="0">
+                <a:solidFill>
+                  <a:srgbClr val="FFFFFF"/>
+                </a:solidFill>
+                <a:latin typeface="Trebuchet MS" pitchFamily="34" charset="0"/>
+                <a:ea typeface="Trebuchet MS" pitchFamily="34" charset="-122"/>
+                <a:cs typeface="Trebuchet MS" pitchFamily="34" charset="-120"/>
+              </a:rPr>
+              <a:t>(nothing left running)</a:t>
+            </a:r>
+            <a:endParaRPr lang="en-US" sz="1200" dirty="0"/>
+          </a:p>
+        </p:txBody>
+      </p:sp>
+      <p:sp>
+        <p:nvSpPr>
+          <p:cNvPr id="14" name="Text 12"/>
+          <p:cNvSpPr/>
+          <p:nvPr/>
+        </p:nvSpPr>
+        <p:spPr>
+          <a:xfrm>
+            <a:off x="457200" y="3218688"/>
+            <a:ext cx="11274552" cy="560832"/>
+          </a:xfrm>
+          <a:prstGeom prst="rect">
+            <a:avLst/>
+          </a:prstGeom>
+          <a:noFill/>
+          <a:ln/>
+        </p:spPr>
+        <p:txBody>
+          <a:bodyPr wrap="square" rtlCol="0" anchor="ctr"/>
+          <a:lstStyle/>
+          <a:p>
+            <a:pPr marL="254000" indent="-254000">
+              <a:buSzPct val="100000"/>
+              <a:buChar char="•"/>
+            </a:pPr>
+            <a:r>
+              <a:rPr lang="en-US" sz="1500" dirty="0">
+                <a:solidFill>
+                  <a:srgbClr val="0A1A1C"/>
+                </a:solidFill>
+                <a:latin typeface="Trebuchet MS" pitchFamily="34" charset="0"/>
+                <a:ea typeface="Trebuchet MS" pitchFamily="34" charset="-122"/>
+                <a:cs typeface="Trebuchet MS" pitchFamily="34" charset="-120"/>
+              </a:rPr>
+              <a:t>apply runs exactly once: read the file, create the Pod, exit — nothing stays behind to keep enforcing it</a:t>
+            </a:r>
+            <a:endParaRPr lang="en-US" sz="1500" dirty="0"/>
+          </a:p>
+        </p:txBody>
+      </p:sp>
+      <p:sp>
+        <p:nvSpPr>
+          <p:cNvPr id="15" name="Text 13"/>
+          <p:cNvSpPr/>
+          <p:nvPr/>
+        </p:nvSpPr>
+        <p:spPr>
+          <a:xfrm>
+            <a:off x="457200" y="3779520"/>
+            <a:ext cx="11274552" cy="560832"/>
+          </a:xfrm>
+          <a:prstGeom prst="rect">
+            <a:avLst/>
+          </a:prstGeom>
+          <a:noFill/>
+          <a:ln/>
+        </p:spPr>
+        <p:txBody>
+          <a:bodyPr wrap="square" rtlCol="0" anchor="ctr"/>
+          <a:lstStyle/>
+          <a:p>
+            <a:pPr marL="254000" indent="-254000">
+              <a:buSzPct val="100000"/>
+              <a:buChar char="•"/>
+            </a:pPr>
+            <a:r>
+              <a:rPr lang="en-US" sz="1500" dirty="0">
+                <a:solidFill>
+                  <a:srgbClr val="0A1A1C"/>
+                </a:solidFill>
+                <a:latin typeface="Trebuchet MS" pitchFamily="34" charset="0"/>
+                <a:ea typeface="Trebuchet MS" pitchFamily="34" charset="-122"/>
+                <a:cs typeface="Trebuchet MS" pitchFamily="34" charset="-120"/>
+              </a:rPr>
+              <a:t>delete only ever removes the live object in the cluster — pod.yaml on disk is never read, touched, or invalidated by it</a:t>
+            </a:r>
+            <a:endParaRPr lang="en-US" sz="1500" dirty="0"/>
+          </a:p>
+        </p:txBody>
+      </p:sp>
+      <p:sp>
+        <p:nvSpPr>
+          <p:cNvPr id="16" name="Text 14"/>
+          <p:cNvSpPr/>
+          <p:nvPr/>
+        </p:nvSpPr>
+        <p:spPr>
+          <a:xfrm>
+            <a:off x="457200" y="4340352"/>
+            <a:ext cx="11274552" cy="560832"/>
+          </a:xfrm>
+          <a:prstGeom prst="rect">
+            <a:avLst/>
+          </a:prstGeom>
+          <a:noFill/>
+          <a:ln/>
+        </p:spPr>
+        <p:txBody>
+          <a:bodyPr wrap="square" rtlCol="0" anchor="ctr"/>
+          <a:lstStyle/>
+          <a:p>
+            <a:pPr marL="254000" indent="-254000">
+              <a:buSzPct val="100000"/>
+              <a:buChar char="•"/>
+            </a:pPr>
+            <a:r>
+              <a:rPr lang="en-US" sz="1500" dirty="0">
+                <a:solidFill>
+                  <a:srgbClr val="0A1A1C"/>
+                </a:solidFill>
+                <a:latin typeface="Trebuchet MS" pitchFamily="34" charset="0"/>
+                <a:ea typeface="Trebuchet MS" pitchFamily="34" charset="-122"/>
+                <a:cs typeface="Trebuchet MS" pitchFamily="34" charset="-120"/>
+              </a:rPr>
+              <a:t>The Pod becomes a plain record in etcd with no controller attached to it</a:t>
+            </a:r>
+            <a:endParaRPr lang="en-US" sz="1500" dirty="0"/>
+          </a:p>
+        </p:txBody>
+      </p:sp>
+      <p:sp>
+        <p:nvSpPr>
+          <p:cNvPr id="17" name="Text 15"/>
+          <p:cNvSpPr/>
+          <p:nvPr/>
+        </p:nvSpPr>
+        <p:spPr>
+          <a:xfrm>
+            <a:off x="457200" y="4901184"/>
+            <a:ext cx="11274552" cy="560832"/>
+          </a:xfrm>
+          <a:prstGeom prst="rect">
+            <a:avLst/>
+          </a:prstGeom>
+          <a:noFill/>
+          <a:ln/>
+        </p:spPr>
+        <p:txBody>
+          <a:bodyPr wrap="square" rtlCol="0" anchor="ctr"/>
+          <a:lstStyle/>
+          <a:p>
+            <a:pPr marL="254000" indent="-254000">
+              <a:buSzPct val="100000"/>
+              <a:buChar char="•"/>
+            </a:pPr>
+            <a:r>
+              <a:rPr lang="en-US" sz="1500" dirty="0">
+                <a:solidFill>
+                  <a:srgbClr val="0A1A1C"/>
+                </a:solidFill>
+                <a:latin typeface="Trebuchet MS" pitchFamily="34" charset="0"/>
+                <a:ea typeface="Trebuchet MS" pitchFamily="34" charset="-122"/>
+                <a:cs typeface="Trebuchet MS" pitchFamily="34" charset="-120"/>
+              </a:rPr>
+              <a:t>Nothing is asking "does hello-pod still exist?" on a loop, so nothing notices when the answer becomes no</a:t>
+            </a:r>
+            <a:endParaRPr lang="en-US" sz="1500" dirty="0"/>
+          </a:p>
+        </p:txBody>
+      </p:sp>
+      <p:sp>
+        <p:nvSpPr>
+          <p:cNvPr id="18" name="Text 16"/>
+          <p:cNvSpPr/>
+          <p:nvPr/>
+        </p:nvSpPr>
+        <p:spPr>
+          <a:xfrm>
+            <a:off x="457200" y="5462016"/>
+            <a:ext cx="11274552" cy="560832"/>
+          </a:xfrm>
+          <a:prstGeom prst="rect">
+            <a:avLst/>
+          </a:prstGeom>
+          <a:noFill/>
+          <a:ln/>
+        </p:spPr>
+        <p:txBody>
+          <a:bodyPr wrap="square" rtlCol="0" anchor="ctr"/>
+          <a:lstStyle/>
+          <a:p>
+            <a:pPr marL="254000" indent="-254000">
+              <a:buSzPct val="100000"/>
+              <a:buChar char="•"/>
+            </a:pPr>
+            <a:r>
+              <a:rPr lang="en-US" sz="1500" dirty="0">
+                <a:solidFill>
+                  <a:srgbClr val="0A1A1C"/>
+                </a:solidFill>
+                <a:latin typeface="Trebuchet MS" pitchFamily="34" charset="0"/>
+                <a:ea typeface="Trebuchet MS" pitchFamily="34" charset="-122"/>
+                <a:cs typeface="Trebuchet MS" pitchFamily="34" charset="-120"/>
+              </a:rPr>
+              <a:t>A file and a cluster object are linked only for the instant apply runs — after that, editing or deleting one has zero effect on the other</a:t>
+            </a:r>
+            <a:endParaRPr lang="en-US" sz="1500" dirty="0"/>
+          </a:p>
+        </p:txBody>
+      </p:sp>
+      <p:sp>
+        <p:nvSpPr>
+          <p:cNvPr id="19" name="Text 17"/>
+          <p:cNvSpPr/>
+          <p:nvPr/>
+        </p:nvSpPr>
+        <p:spPr>
+          <a:xfrm>
+            <a:off x="457200" y="6022848"/>
+            <a:ext cx="11274552" cy="560832"/>
+          </a:xfrm>
+          <a:prstGeom prst="rect">
+            <a:avLst/>
+          </a:prstGeom>
+          <a:noFill/>
+          <a:ln/>
+        </p:spPr>
+        <p:txBody>
+          <a:bodyPr wrap="square" rtlCol="0" anchor="ctr"/>
+          <a:lstStyle/>
+          <a:p>
+            <a:pPr marL="254000" indent="-254000">
+              <a:buSzPct val="100000"/>
+              <a:buChar char="•"/>
+            </a:pPr>
+            <a:r>
+              <a:rPr lang="en-US" sz="1500" dirty="0">
+                <a:solidFill>
+                  <a:srgbClr val="0A1A1C"/>
+                </a:solidFill>
+                <a:latin typeface="Trebuchet MS" pitchFamily="34" charset="0"/>
+                <a:ea typeface="Trebuchet MS" pitchFamily="34" charset="-122"/>
+                <a:cs typeface="Trebuchet MS" pitchFamily="34" charset="-120"/>
+              </a:rPr>
+              <a:t>Not a bug — it's the exact gap a controller is built to close, which is exactly what a Deployment adds</a:t>
+            </a:r>
+            <a:endParaRPr lang="en-US" sz="1500" dirty="0"/>
           </a:p>
         </p:txBody>
       </p:sp>
@@ -6978,7 +7532,7 @@
                 <a:ea typeface="Arial Black" pitchFamily="34" charset="-122"/>
                 <a:cs typeface="Arial Black" pitchFamily="34" charset="-120"/>
               </a:rPr>
-              <a:t>Services: Stable Addresses Over Disposable Pods</a:t>
+              <a:t>Deployment → ReplicaSet → Pod</a:t>
             </a:r>
             <a:endParaRPr lang="en-US" sz="3000" dirty="0"/>
           </a:p>
@@ -7017,8 +7571,284 @@
         </p:nvSpPr>
         <p:spPr>
           <a:xfrm>
-            <a:off x="457200" y="1572768"/>
-            <a:ext cx="5477256" cy="5010912"/>
+            <a:off x="457200" y="1840230"/>
+            <a:ext cx="3526536" cy="653796"/>
+          </a:xfrm>
+          <a:prstGeom prst="roundRect">
+            <a:avLst>
+              <a:gd name="adj" fmla="val 13986"/>
+            </a:avLst>
+          </a:prstGeom>
+          <a:solidFill>
+            <a:srgbClr val="B8ECF5"/>
+          </a:solidFill>
+          <a:ln w="19050">
+            <a:solidFill>
+              <a:srgbClr val="007A90"/>
+            </a:solidFill>
+            <a:prstDash val="solid"/>
+          </a:ln>
+        </p:spPr>
+      </p:sp>
+      <p:sp>
+        <p:nvSpPr>
+          <p:cNvPr id="7" name="Text 5"/>
+          <p:cNvSpPr/>
+          <p:nvPr/>
+        </p:nvSpPr>
+        <p:spPr>
+          <a:xfrm>
+            <a:off x="457200" y="1840230"/>
+            <a:ext cx="3526536" cy="653796"/>
+          </a:xfrm>
+          <a:prstGeom prst="rect">
+            <a:avLst/>
+          </a:prstGeom>
+          <a:noFill/>
+          <a:ln/>
+        </p:spPr>
+        <p:txBody>
+          <a:bodyPr wrap="square" rtlCol="0" anchor="ctr"/>
+          <a:lstStyle/>
+          <a:p>
+            <a:pPr algn="ctr" indent="0" marL="0">
+              <a:buNone/>
+            </a:pPr>
+            <a:r>
+              <a:rPr lang="en-US" sz="1200" b="1" dirty="0">
+                <a:solidFill>
+                  <a:srgbClr val="0A1A1C"/>
+                </a:solidFill>
+                <a:latin typeface="Trebuchet MS" pitchFamily="34" charset="0"/>
+                <a:ea typeface="Trebuchet MS" pitchFamily="34" charset="-122"/>
+                <a:cs typeface="Trebuchet MS" pitchFamily="34" charset="-120"/>
+              </a:rPr>
+              <a:t>Deployment</a:t>
+            </a:r>
+            <a:endParaRPr lang="en-US" sz="1200" dirty="0"/>
+          </a:p>
+        </p:txBody>
+      </p:sp>
+      <p:sp>
+        <p:nvSpPr>
+          <p:cNvPr id="8" name="Text 6"/>
+          <p:cNvSpPr/>
+          <p:nvPr/>
+        </p:nvSpPr>
+        <p:spPr>
+          <a:xfrm>
+            <a:off x="3983736" y="1840230"/>
+            <a:ext cx="347472" cy="653796"/>
+          </a:xfrm>
+          <a:prstGeom prst="rect">
+            <a:avLst/>
+          </a:prstGeom>
+          <a:noFill/>
+          <a:ln/>
+        </p:spPr>
+        <p:txBody>
+          <a:bodyPr wrap="square" rtlCol="0" anchor="ctr"/>
+          <a:lstStyle/>
+          <a:p>
+            <a:pPr algn="ctr" indent="0" marL="0">
+              <a:buNone/>
+            </a:pPr>
+            <a:r>
+              <a:rPr lang="en-US" sz="2200" dirty="0">
+                <a:solidFill>
+                  <a:srgbClr val="007A90"/>
+                </a:solidFill>
+                <a:latin typeface="Trebuchet MS" pitchFamily="34" charset="0"/>
+                <a:ea typeface="Trebuchet MS" pitchFamily="34" charset="-122"/>
+                <a:cs typeface="Trebuchet MS" pitchFamily="34" charset="-120"/>
+              </a:rPr>
+              <a:t>→</a:t>
+            </a:r>
+            <a:endParaRPr lang="en-US" sz="2200" dirty="0"/>
+          </a:p>
+        </p:txBody>
+      </p:sp>
+      <p:sp>
+        <p:nvSpPr>
+          <p:cNvPr id="9" name="Shape 7"/>
+          <p:cNvSpPr/>
+          <p:nvPr/>
+        </p:nvSpPr>
+        <p:spPr>
+          <a:xfrm>
+            <a:off x="4331208" y="1840230"/>
+            <a:ext cx="3526536" cy="653796"/>
+          </a:xfrm>
+          <a:prstGeom prst="roundRect">
+            <a:avLst>
+              <a:gd name="adj" fmla="val 13986"/>
+            </a:avLst>
+          </a:prstGeom>
+          <a:solidFill>
+            <a:srgbClr val="B8ECF5"/>
+          </a:solidFill>
+          <a:ln w="19050">
+            <a:solidFill>
+              <a:srgbClr val="007A90"/>
+            </a:solidFill>
+            <a:prstDash val="solid"/>
+          </a:ln>
+        </p:spPr>
+      </p:sp>
+      <p:sp>
+        <p:nvSpPr>
+          <p:cNvPr id="10" name="Text 8"/>
+          <p:cNvSpPr/>
+          <p:nvPr/>
+        </p:nvSpPr>
+        <p:spPr>
+          <a:xfrm>
+            <a:off x="4331208" y="1840230"/>
+            <a:ext cx="3526536" cy="653796"/>
+          </a:xfrm>
+          <a:prstGeom prst="rect">
+            <a:avLst/>
+          </a:prstGeom>
+          <a:noFill/>
+          <a:ln/>
+        </p:spPr>
+        <p:txBody>
+          <a:bodyPr wrap="square" rtlCol="0" anchor="ctr"/>
+          <a:lstStyle/>
+          <a:p>
+            <a:pPr algn="ctr" indent="0" marL="0">
+              <a:buNone/>
+            </a:pPr>
+            <a:r>
+              <a:rPr lang="en-US" sz="1200" dirty="0">
+                <a:solidFill>
+                  <a:srgbClr val="0A1A1C"/>
+                </a:solidFill>
+                <a:latin typeface="Trebuchet MS" pitchFamily="34" charset="0"/>
+                <a:ea typeface="Trebuchet MS" pitchFamily="34" charset="-122"/>
+                <a:cs typeface="Trebuchet MS" pitchFamily="34" charset="-120"/>
+              </a:rPr>
+              <a:t>ReplicaSet</a:t>
+            </a:r>
+            <a:endParaRPr lang="en-US" sz="1200" dirty="0"/>
+          </a:p>
+        </p:txBody>
+      </p:sp>
+      <p:sp>
+        <p:nvSpPr>
+          <p:cNvPr id="11" name="Text 9"/>
+          <p:cNvSpPr/>
+          <p:nvPr/>
+        </p:nvSpPr>
+        <p:spPr>
+          <a:xfrm>
+            <a:off x="7857744" y="1840230"/>
+            <a:ext cx="347472" cy="653796"/>
+          </a:xfrm>
+          <a:prstGeom prst="rect">
+            <a:avLst/>
+          </a:prstGeom>
+          <a:noFill/>
+          <a:ln/>
+        </p:spPr>
+        <p:txBody>
+          <a:bodyPr wrap="square" rtlCol="0" anchor="ctr"/>
+          <a:lstStyle/>
+          <a:p>
+            <a:pPr algn="ctr" indent="0" marL="0">
+              <a:buNone/>
+            </a:pPr>
+            <a:r>
+              <a:rPr lang="en-US" sz="2200" dirty="0">
+                <a:solidFill>
+                  <a:srgbClr val="007A90"/>
+                </a:solidFill>
+                <a:latin typeface="Trebuchet MS" pitchFamily="34" charset="0"/>
+                <a:ea typeface="Trebuchet MS" pitchFamily="34" charset="-122"/>
+                <a:cs typeface="Trebuchet MS" pitchFamily="34" charset="-120"/>
+              </a:rPr>
+              <a:t>→</a:t>
+            </a:r>
+            <a:endParaRPr lang="en-US" sz="2200" dirty="0"/>
+          </a:p>
+        </p:txBody>
+      </p:sp>
+      <p:sp>
+        <p:nvSpPr>
+          <p:cNvPr id="12" name="Shape 10"/>
+          <p:cNvSpPr/>
+          <p:nvPr/>
+        </p:nvSpPr>
+        <p:spPr>
+          <a:xfrm>
+            <a:off x="8205216" y="1840230"/>
+            <a:ext cx="3526536" cy="653796"/>
+          </a:xfrm>
+          <a:prstGeom prst="roundRect">
+            <a:avLst>
+              <a:gd name="adj" fmla="val 13986"/>
+            </a:avLst>
+          </a:prstGeom>
+          <a:solidFill>
+            <a:srgbClr val="B8ECF5"/>
+          </a:solidFill>
+          <a:ln w="19050">
+            <a:solidFill>
+              <a:srgbClr val="007A90"/>
+            </a:solidFill>
+            <a:prstDash val="solid"/>
+          </a:ln>
+        </p:spPr>
+      </p:sp>
+      <p:sp>
+        <p:nvSpPr>
+          <p:cNvPr id="13" name="Text 11"/>
+          <p:cNvSpPr/>
+          <p:nvPr/>
+        </p:nvSpPr>
+        <p:spPr>
+          <a:xfrm>
+            <a:off x="8205216" y="1840230"/>
+            <a:ext cx="3526536" cy="653796"/>
+          </a:xfrm>
+          <a:prstGeom prst="rect">
+            <a:avLst/>
+          </a:prstGeom>
+          <a:noFill/>
+          <a:ln/>
+        </p:spPr>
+        <p:txBody>
+          <a:bodyPr wrap="square" rtlCol="0" anchor="ctr"/>
+          <a:lstStyle/>
+          <a:p>
+            <a:pPr algn="ctr" indent="0" marL="0">
+              <a:buNone/>
+            </a:pPr>
+            <a:r>
+              <a:rPr lang="en-US" sz="1200" b="1" dirty="0">
+                <a:solidFill>
+                  <a:srgbClr val="0A1A1C"/>
+                </a:solidFill>
+                <a:latin typeface="Trebuchet MS" pitchFamily="34" charset="0"/>
+                <a:ea typeface="Trebuchet MS" pitchFamily="34" charset="-122"/>
+                <a:cs typeface="Trebuchet MS" pitchFamily="34" charset="-120"/>
+              </a:rPr>
+              <a:t>Pod(s)</a:t>
+            </a:r>
+            <a:endParaRPr lang="en-US" sz="1200" dirty="0"/>
+          </a:p>
+        </p:txBody>
+      </p:sp>
+      <p:sp>
+        <p:nvSpPr>
+          <p:cNvPr id="14" name="Shape 12"/>
+          <p:cNvSpPr/>
+          <p:nvPr/>
+        </p:nvSpPr>
+        <p:spPr>
+          <a:xfrm>
+            <a:off x="457200" y="2944368"/>
+            <a:ext cx="6040984" cy="3639312"/>
           </a:xfrm>
           <a:prstGeom prst="rect">
             <a:avLst/>
@@ -7036,14 +7866,14 @@
       </p:sp>
       <p:sp>
         <p:nvSpPr>
-          <p:cNvPr id="7" name="Text 5"/>
-          <p:cNvSpPr/>
-          <p:nvPr/>
-        </p:nvSpPr>
-        <p:spPr>
-          <a:xfrm>
-            <a:off x="640080" y="1709928"/>
-            <a:ext cx="5111496" cy="4736592"/>
+          <p:cNvPr id="15" name="Text 13"/>
+          <p:cNvSpPr/>
+          <p:nvPr/>
+        </p:nvSpPr>
+        <p:spPr>
+          <a:xfrm>
+            <a:off x="640080" y="3081528"/>
+            <a:ext cx="5675224" cy="3364992"/>
           </a:xfrm>
           <a:prstGeom prst="rect">
             <a:avLst/>
@@ -7067,7 +7897,7 @@
                 <a:ea typeface="Courier New" pitchFamily="34" charset="-122"/>
                 <a:cs typeface="Courier New" pitchFamily="34" charset="-120"/>
               </a:rPr>
-              <a:t>kubectl expose deployment hello-deploy \</a:t>
+              <a:t>spec:</a:t>
             </a:r>
             <a:endParaRPr lang="en-US" sz="1300" dirty="0"/>
           </a:p>
@@ -7084,7 +7914,7 @@
                 <a:ea typeface="Courier New" pitchFamily="34" charset="-122"/>
                 <a:cs typeface="Courier New" pitchFamily="34" charset="-120"/>
               </a:rPr>
-              <a:t>  --port=80 --target-port=80 --name=hello-service</a:t>
+              <a:t>  replicas: 3</a:t>
             </a:r>
             <a:endParaRPr lang="en-US" sz="1300" dirty="0"/>
           </a:p>
@@ -7101,22 +7931,124 @@
                 <a:ea typeface="Courier New" pitchFamily="34" charset="-122"/>
                 <a:cs typeface="Courier New" pitchFamily="34" charset="-120"/>
               </a:rPr>
-              <a:t># → TYPE: ClusterIP   CLUSTER-IP: 10.x.x.x (stays fixed)</a:t>
+              <a:t>  selector:</a:t>
             </a:r>
             <a:endParaRPr lang="en-US" sz="1300" dirty="0"/>
           </a:p>
-        </p:txBody>
-      </p:sp>
-      <p:sp>
-        <p:nvSpPr>
-          <p:cNvPr id="8" name="Text 6"/>
-          <p:cNvSpPr/>
-          <p:nvPr/>
-        </p:nvSpPr>
-        <p:spPr>
-          <a:xfrm>
-            <a:off x="6254496" y="1572768"/>
-            <a:ext cx="5477256" cy="1252728"/>
+          <a:p>
+            <a:pPr indent="0" marL="0">
+              <a:buNone/>
+            </a:pPr>
+            <a:r>
+              <a:rPr lang="en-US" sz="1300" dirty="0">
+                <a:solidFill>
+                  <a:srgbClr val="003848"/>
+                </a:solidFill>
+                <a:latin typeface="Courier New" pitchFamily="34" charset="0"/>
+                <a:ea typeface="Courier New" pitchFamily="34" charset="-122"/>
+                <a:cs typeface="Courier New" pitchFamily="34" charset="-120"/>
+              </a:rPr>
+              <a:t>    matchLabels:</a:t>
+            </a:r>
+            <a:endParaRPr lang="en-US" sz="1300" dirty="0"/>
+          </a:p>
+          <a:p>
+            <a:pPr indent="0" marL="0">
+              <a:buNone/>
+            </a:pPr>
+            <a:r>
+              <a:rPr lang="en-US" sz="1300" dirty="0">
+                <a:solidFill>
+                  <a:srgbClr val="003848"/>
+                </a:solidFill>
+                <a:latin typeface="Courier New" pitchFamily="34" charset="0"/>
+                <a:ea typeface="Courier New" pitchFamily="34" charset="-122"/>
+                <a:cs typeface="Courier New" pitchFamily="34" charset="-120"/>
+              </a:rPr>
+              <a:t>      app: hello</a:t>
+            </a:r>
+            <a:endParaRPr lang="en-US" sz="1300" dirty="0"/>
+          </a:p>
+          <a:p>
+            <a:pPr indent="0" marL="0">
+              <a:buNone/>
+            </a:pPr>
+            <a:r>
+              <a:rPr lang="en-US" sz="1300" dirty="0">
+                <a:solidFill>
+                  <a:srgbClr val="003848"/>
+                </a:solidFill>
+                <a:latin typeface="Courier New" pitchFamily="34" charset="0"/>
+                <a:ea typeface="Courier New" pitchFamily="34" charset="-122"/>
+                <a:cs typeface="Courier New" pitchFamily="34" charset="-120"/>
+              </a:rPr>
+              <a:t>  template:      # a full Pod spec, nested one level deeper</a:t>
+            </a:r>
+            <a:endParaRPr lang="en-US" sz="1300" dirty="0"/>
+          </a:p>
+          <a:p>
+            <a:pPr indent="0" marL="0">
+              <a:buNone/>
+            </a:pPr>
+            <a:r>
+              <a:rPr lang="en-US" sz="1300" dirty="0">
+                <a:solidFill>
+                  <a:srgbClr val="003848"/>
+                </a:solidFill>
+                <a:latin typeface="Courier New" pitchFamily="34" charset="0"/>
+                <a:ea typeface="Courier New" pitchFamily="34" charset="-122"/>
+                <a:cs typeface="Courier New" pitchFamily="34" charset="-120"/>
+              </a:rPr>
+              <a:t>    metadata:</a:t>
+            </a:r>
+            <a:endParaRPr lang="en-US" sz="1300" dirty="0"/>
+          </a:p>
+          <a:p>
+            <a:pPr indent="0" marL="0">
+              <a:buNone/>
+            </a:pPr>
+            <a:r>
+              <a:rPr lang="en-US" sz="1300" dirty="0">
+                <a:solidFill>
+                  <a:srgbClr val="003848"/>
+                </a:solidFill>
+                <a:latin typeface="Courier New" pitchFamily="34" charset="0"/>
+                <a:ea typeface="Courier New" pitchFamily="34" charset="-122"/>
+                <a:cs typeface="Courier New" pitchFamily="34" charset="-120"/>
+              </a:rPr>
+              <a:t>      labels:</a:t>
+            </a:r>
+            <a:endParaRPr lang="en-US" sz="1300" dirty="0"/>
+          </a:p>
+          <a:p>
+            <a:pPr indent="0" marL="0">
+              <a:buNone/>
+            </a:pPr>
+            <a:r>
+              <a:rPr lang="en-US" sz="1300" dirty="0">
+                <a:solidFill>
+                  <a:srgbClr val="003848"/>
+                </a:solidFill>
+                <a:latin typeface="Courier New" pitchFamily="34" charset="0"/>
+                <a:ea typeface="Courier New" pitchFamily="34" charset="-122"/>
+                <a:cs typeface="Courier New" pitchFamily="34" charset="-120"/>
+              </a:rPr>
+              <a:t>        app: hello</a:t>
+            </a:r>
+            <a:endParaRPr lang="en-US" sz="1300" dirty="0"/>
+          </a:p>
+        </p:txBody>
+      </p:sp>
+      <p:sp>
+        <p:nvSpPr>
+          <p:cNvPr id="16" name="Text 14"/>
+          <p:cNvSpPr/>
+          <p:nvPr/>
+        </p:nvSpPr>
+        <p:spPr>
+          <a:xfrm>
+            <a:off x="6818224" y="2944368"/>
+            <a:ext cx="4913528" cy="909828"/>
           </a:xfrm>
           <a:prstGeom prst="rect">
             <a:avLst/>
@@ -7133,7 +8065,7 @@
               <a:buChar char="•"/>
             </a:pPr>
             <a:r>
-              <a:rPr lang="en-US" sz="1700" dirty="0">
+              <a:rPr lang="en-US" sz="1500" dirty="0">
                 <a:solidFill>
                   <a:srgbClr val="0A1A1C"/>
                 </a:solidFill>
@@ -7141,22 +8073,22 @@
                 <a:ea typeface="Trebuchet MS" pitchFamily="34" charset="-122"/>
                 <a:cs typeface="Trebuchet MS" pitchFamily="34" charset="-120"/>
               </a:rPr>
-              <a:t>Every Pod gets its own IP, but Pods are disposable — you just proved that</a:t>
-            </a:r>
-            <a:endParaRPr lang="en-US" sz="1700" dirty="0"/>
-          </a:p>
-        </p:txBody>
-      </p:sp>
-      <p:sp>
-        <p:nvSpPr>
-          <p:cNvPr id="9" name="Text 7"/>
-          <p:cNvSpPr/>
-          <p:nvPr/>
-        </p:nvSpPr>
-        <p:spPr>
-          <a:xfrm>
-            <a:off x="6254496" y="2825496"/>
-            <a:ext cx="5477256" cy="1252728"/>
+              <a:t>Deployment doesn't run containers directly — it manages a ReplicaSet, and the ReplicaSet IS a controller: a background process maintaining a fixed Pod count</a:t>
+            </a:r>
+            <a:endParaRPr lang="en-US" sz="1500" dirty="0"/>
+          </a:p>
+        </p:txBody>
+      </p:sp>
+      <p:sp>
+        <p:nvSpPr>
+          <p:cNvPr id="17" name="Text 15"/>
+          <p:cNvSpPr/>
+          <p:nvPr/>
+        </p:nvSpPr>
+        <p:spPr>
+          <a:xfrm>
+            <a:off x="6818224" y="3854196"/>
+            <a:ext cx="4913528" cy="909828"/>
           </a:xfrm>
           <a:prstGeom prst="rect">
             <a:avLst/>
@@ -7173,7 +8105,7 @@
               <a:buChar char="•"/>
             </a:pPr>
             <a:r>
-              <a:rPr lang="en-US" sz="1700" dirty="0">
+              <a:rPr lang="en-US" sz="1500" dirty="0">
                 <a:solidFill>
                   <a:srgbClr val="0A1A1C"/>
                 </a:solidFill>
@@ -7181,22 +8113,22 @@
                 <a:ea typeface="Trebuchet MS" pitchFamily="34" charset="-122"/>
                 <a:cs typeface="Trebuchet MS" pitchFamily="34" charset="-120"/>
               </a:rPr>
-              <a:t>A Service is a permanent address that tracks whichever Pods match its label selector</a:t>
-            </a:r>
-            <a:endParaRPr lang="en-US" sz="1700" dirty="0"/>
-          </a:p>
-        </p:txBody>
-      </p:sp>
-      <p:sp>
-        <p:nvSpPr>
-          <p:cNvPr id="10" name="Text 8"/>
-          <p:cNvSpPr/>
-          <p:nvPr/>
-        </p:nvSpPr>
-        <p:spPr>
-          <a:xfrm>
-            <a:off x="6254496" y="4078224"/>
-            <a:ext cx="5477256" cy="1252728"/>
+              <a:t>Delete one managed Pod: it disappears, a brand-new one (new random suffix) appears almost immediately — with no re-apply</a:t>
+            </a:r>
+            <a:endParaRPr lang="en-US" sz="1500" dirty="0"/>
+          </a:p>
+        </p:txBody>
+      </p:sp>
+      <p:sp>
+        <p:nvSpPr>
+          <p:cNvPr id="18" name="Text 16"/>
+          <p:cNvSpPr/>
+          <p:nvPr/>
+        </p:nvSpPr>
+        <p:spPr>
+          <a:xfrm>
+            <a:off x="6818224" y="4764024"/>
+            <a:ext cx="4913528" cy="909828"/>
           </a:xfrm>
           <a:prstGeom prst="rect">
             <a:avLst/>
@@ -7213,7 +8145,7 @@
               <a:buChar char="•"/>
             </a:pPr>
             <a:r>
-              <a:rPr lang="en-US" sz="1700" dirty="0">
+              <a:rPr lang="en-US" sz="1500" dirty="0">
                 <a:solidFill>
                   <a:srgbClr val="0A1A1C"/>
                 </a:solidFill>
@@ -7221,22 +8153,22 @@
                 <a:ea typeface="Trebuchet MS" pitchFamily="34" charset="-122"/>
                 <a:cs typeface="Trebuchet MS" pitchFamily="34" charset="-120"/>
               </a:rPr>
-              <a:t>ClusterIP (default) — internal-only; NodePort — opens a port in the 30000–32767 range for external access</a:t>
-            </a:r>
-            <a:endParaRPr lang="en-US" sz="1700" dirty="0"/>
-          </a:p>
-        </p:txBody>
-      </p:sp>
-      <p:sp>
-        <p:nvSpPr>
-          <p:cNvPr id="11" name="Text 9"/>
-          <p:cNvSpPr/>
-          <p:nvPr/>
-        </p:nvSpPr>
-        <p:spPr>
-          <a:xfrm>
-            <a:off x="6254496" y="5330952"/>
-            <a:ext cx="5477256" cy="1252728"/>
+              <a:t>A bare Pod has no such process watching it; a Deployment-managed Pod does — that's the entire difference</a:t>
+            </a:r>
+            <a:endParaRPr lang="en-US" sz="1500" dirty="0"/>
+          </a:p>
+        </p:txBody>
+      </p:sp>
+      <p:sp>
+        <p:nvSpPr>
+          <p:cNvPr id="19" name="Text 17"/>
+          <p:cNvSpPr/>
+          <p:nvPr/>
+        </p:nvSpPr>
+        <p:spPr>
+          <a:xfrm>
+            <a:off x="6818224" y="5673852"/>
+            <a:ext cx="4913528" cy="909828"/>
           </a:xfrm>
           <a:prstGeom prst="rect">
             <a:avLst/>
@@ -7253,7 +8185,7 @@
               <a:buChar char="•"/>
             </a:pPr>
             <a:r>
-              <a:rPr lang="en-US" sz="1700" dirty="0">
+              <a:rPr lang="en-US" sz="1500" dirty="0">
                 <a:solidFill>
                   <a:srgbClr val="0A1A1C"/>
                 </a:solidFill>
@@ -7261,9 +8193,9 @@
                 <a:ea typeface="Trebuchet MS" pitchFamily="34" charset="-122"/>
                 <a:cs typeface="Trebuchet MS" pitchFamily="34" charset="-120"/>
               </a:rPr>
-              <a:t>Proof: delete a Pod behind a Service — CLUSTER-IP stays exactly the same the whole time</a:t>
-            </a:r>
-            <a:endParaRPr lang="en-US" sz="1700" dirty="0"/>
+              <a:t>kubectl scale --replicas=5 just changes what "desired" means; the same controller loop does the rest</a:t>
+            </a:r>
+            <a:endParaRPr lang="en-US" sz="1500" dirty="0"/>
           </a:p>
         </p:txBody>
       </p:sp>
@@ -7281,7 +8213,7 @@
     <p:bg>
       <p:bgPr>
         <a:solidFill>
-          <a:srgbClr val="EAFCFF"/>
+          <a:srgbClr val="007A90"/>
         </a:solidFill>
       </p:bgPr>
     </p:bg>
@@ -7307,18 +8239,18 @@
         </p:nvSpPr>
         <p:spPr>
           <a:xfrm>
-            <a:off x="457200" y="201168"/>
-            <a:ext cx="1828800" cy="347472"/>
+            <a:off x="0" y="0"/>
+            <a:ext cx="164592" cy="6858000"/>
           </a:xfrm>
           <a:prstGeom prst="rect">
             <a:avLst/>
           </a:prstGeom>
           <a:solidFill>
-            <a:srgbClr val="007A90"/>
+            <a:srgbClr val="FFFFFF"/>
           </a:solidFill>
-          <a:ln w="9525">
+          <a:ln w="12700">
             <a:solidFill>
-              <a:srgbClr val="007A90"/>
+              <a:srgbClr val="FFFFFF"/>
             </a:solidFill>
             <a:prstDash val="solid"/>
           </a:ln>
@@ -7332,8 +8264,8 @@
         </p:nvSpPr>
         <p:spPr>
           <a:xfrm>
-            <a:off x="457200" y="201168"/>
-            <a:ext cx="1828800" cy="347472"/>
+            <a:off x="457200" y="2103120"/>
+            <a:ext cx="11274552" cy="1463040"/>
           </a:xfrm>
           <a:prstGeom prst="rect">
             <a:avLst/>
@@ -7349,239 +8281,56 @@
               <a:buNone/>
             </a:pPr>
             <a:r>
-              <a:rPr lang="en-US" sz="1200" b="1" spc="50" kern="0" dirty="0">
+              <a:rPr lang="en-US" sz="4800" b="1" spc="50" kern="0" dirty="0">
                 <a:solidFill>
                   <a:srgbClr val="FFFFFF"/>
-                </a:solidFill>
-                <a:latin typeface="Trebuchet MS" pitchFamily="34" charset="0"/>
-                <a:ea typeface="Trebuchet MS" pitchFamily="34" charset="-122"/>
-                <a:cs typeface="Trebuchet MS" pitchFamily="34" charset="-120"/>
-              </a:rPr>
-              <a:t>KUBERNETES</a:t>
-            </a:r>
-            <a:endParaRPr lang="en-US" sz="1200" dirty="0"/>
-          </a:p>
-        </p:txBody>
-      </p:sp>
-      <p:sp>
-        <p:nvSpPr>
-          <p:cNvPr id="4" name="Text 2"/>
-          <p:cNvSpPr/>
-          <p:nvPr/>
-        </p:nvSpPr>
-        <p:spPr>
-          <a:xfrm>
-            <a:off x="457200" y="658368"/>
-            <a:ext cx="11274552" cy="685800"/>
-          </a:xfrm>
-          <a:prstGeom prst="rect">
-            <a:avLst/>
-          </a:prstGeom>
-          <a:noFill/>
-          <a:ln/>
-        </p:spPr>
-        <p:txBody>
-          <a:bodyPr wrap="square" rtlCol="0" anchor="ctr"/>
-          <a:lstStyle/>
-          <a:p>
-            <a:pPr indent="0" marL="0">
-              <a:buNone/>
-            </a:pPr>
-            <a:r>
-              <a:rPr lang="en-US" sz="3000" b="1" spc="50" kern="0" dirty="0">
-                <a:solidFill>
-                  <a:srgbClr val="0A1A1C"/>
                 </a:solidFill>
                 <a:latin typeface="Arial Black" pitchFamily="34" charset="0"/>
                 <a:ea typeface="Arial Black" pitchFamily="34" charset="-122"/>
                 <a:cs typeface="Arial Black" pitchFamily="34" charset="-120"/>
               </a:rPr>
-              <a:t>ConfigMaps &amp; Secrets: Externalizing Config</a:t>
-            </a:r>
-            <a:endParaRPr lang="en-US" sz="3000" dirty="0"/>
-          </a:p>
-        </p:txBody>
-      </p:sp>
-      <p:sp>
-        <p:nvSpPr>
-          <p:cNvPr id="5" name="Shape 3"/>
-          <p:cNvSpPr/>
-          <p:nvPr/>
-        </p:nvSpPr>
-        <p:spPr>
-          <a:xfrm>
-            <a:off x="457200" y="1417320"/>
-            <a:ext cx="11274552" cy="27432"/>
-          </a:xfrm>
-          <a:prstGeom prst="rect">
-            <a:avLst/>
-          </a:prstGeom>
-          <a:solidFill>
-            <a:srgbClr val="007A90"/>
-          </a:solidFill>
-          <a:ln w="12700">
-            <a:solidFill>
-              <a:srgbClr val="007A90"/>
-            </a:solidFill>
-            <a:prstDash val="solid"/>
-          </a:ln>
-        </p:spPr>
-      </p:sp>
-      <p:sp>
-        <p:nvSpPr>
-          <p:cNvPr id="6" name="Text 4"/>
-          <p:cNvSpPr/>
-          <p:nvPr/>
-        </p:nvSpPr>
-        <p:spPr>
-          <a:xfrm>
-            <a:off x="457200" y="1572768"/>
-            <a:ext cx="11274552" cy="1252728"/>
-          </a:xfrm>
-          <a:prstGeom prst="rect">
-            <a:avLst/>
-          </a:prstGeom>
-          <a:noFill/>
-          <a:ln/>
-        </p:spPr>
-        <p:txBody>
-          <a:bodyPr wrap="square" rtlCol="0" anchor="ctr"/>
-          <a:lstStyle/>
-          <a:p>
-            <a:pPr marL="254000" indent="-254000">
-              <a:buSzPct val="100000"/>
-              <a:buChar char="•"/>
+              <a:t>Services, Config/Secrets &amp; the Capstone</a:t>
+            </a:r>
+            <a:endParaRPr lang="en-US" sz="4800" dirty="0"/>
+          </a:p>
+        </p:txBody>
+      </p:sp>
+      <p:sp>
+        <p:nvSpPr>
+          <p:cNvPr id="4" name="Text 2"/>
+          <p:cNvSpPr/>
+          <p:nvPr/>
+        </p:nvSpPr>
+        <p:spPr>
+          <a:xfrm>
+            <a:off x="457200" y="3749040"/>
+            <a:ext cx="11274552" cy="640080"/>
+          </a:xfrm>
+          <a:prstGeom prst="rect">
+            <a:avLst/>
+          </a:prstGeom>
+          <a:noFill/>
+          <a:ln/>
+        </p:spPr>
+        <p:txBody>
+          <a:bodyPr wrap="square" rtlCol="0" anchor="ctr"/>
+          <a:lstStyle/>
+          <a:p>
+            <a:pPr algn="ctr" indent="0" marL="0">
+              <a:buNone/>
             </a:pPr>
             <a:r>
               <a:rPr lang="en-US" sz="2200" dirty="0">
                 <a:solidFill>
-                  <a:srgbClr val="0A1A1C"/>
-                </a:solidFill>
-                <a:latin typeface="Trebuchet MS" pitchFamily="34" charset="0"/>
-                <a:ea typeface="Trebuchet MS" pitchFamily="34" charset="-122"/>
-                <a:cs typeface="Trebuchet MS" pitchFamily="34" charset="-120"/>
-              </a:rPr>
-              <a:t>Same container image should run unmodified across dev, staging, prod — only config and credentials should differ</a:t>
-            </a:r>
-            <a:endParaRPr lang="en-US" sz="2200" dirty="0"/>
-          </a:p>
-        </p:txBody>
-      </p:sp>
-      <p:sp>
-        <p:nvSpPr>
-          <p:cNvPr id="7" name="Text 5"/>
-          <p:cNvSpPr/>
-          <p:nvPr/>
-        </p:nvSpPr>
-        <p:spPr>
-          <a:xfrm>
-            <a:off x="457200" y="2825496"/>
-            <a:ext cx="11274552" cy="1252728"/>
-          </a:xfrm>
-          <a:prstGeom prst="rect">
-            <a:avLst/>
-          </a:prstGeom>
-          <a:noFill/>
-          <a:ln/>
-        </p:spPr>
-        <p:txBody>
-          <a:bodyPr wrap="square" rtlCol="0" anchor="ctr"/>
-          <a:lstStyle/>
-          <a:p>
-            <a:pPr marL="254000" indent="-254000">
-              <a:buSzPct val="100000"/>
-              <a:buChar char="•"/>
-            </a:pPr>
-            <a:r>
-              <a:rPr lang="en-US" sz="2200" dirty="0">
-                <a:solidFill>
-                  <a:srgbClr val="0A1A1C"/>
-                </a:solidFill>
-                <a:latin typeface="Trebuchet MS" pitchFamily="34" charset="0"/>
-                <a:ea typeface="Trebuchet MS" pitchFamily="34" charset="-122"/>
-                <a:cs typeface="Trebuchet MS" pitchFamily="34" charset="-120"/>
-              </a:rPr>
-              <a:t>ConfigMap = plain configuration; Secret = sensitive values — same injection mechanism for both</a:t>
-            </a:r>
-            <a:endParaRPr lang="en-US" sz="2200" dirty="0"/>
-          </a:p>
-        </p:txBody>
-      </p:sp>
-      <p:sp>
-        <p:nvSpPr>
-          <p:cNvPr id="8" name="Text 6"/>
-          <p:cNvSpPr/>
-          <p:nvPr/>
-        </p:nvSpPr>
-        <p:spPr>
-          <a:xfrm>
-            <a:off x="457200" y="4078224"/>
-            <a:ext cx="11274552" cy="1252728"/>
-          </a:xfrm>
-          <a:prstGeom prst="rect">
-            <a:avLst/>
-          </a:prstGeom>
-          <a:noFill/>
-          <a:ln/>
-        </p:spPr>
-        <p:txBody>
-          <a:bodyPr wrap="square" rtlCol="0" anchor="ctr"/>
-          <a:lstStyle/>
-          <a:p>
-            <a:pPr marL="254000" indent="-254000">
-              <a:buSzPct val="100000"/>
-              <a:buChar char="•"/>
-            </a:pPr>
-            <a:r>
-              <a:rPr lang="en-US" sz="2200" dirty="0">
-                <a:solidFill>
-                  <a:srgbClr val="0A1A1C"/>
-                </a:solidFill>
-                <a:latin typeface="Trebuchet MS" pitchFamily="34" charset="0"/>
-                <a:ea typeface="Trebuchet MS" pitchFamily="34" charset="-122"/>
-                <a:cs typeface="Trebuchet MS" pitchFamily="34" charset="-120"/>
-              </a:rPr>
-              <a:t>Both referenced from a Pod via valueFrom.configMapKeyRef / valueFrom.secretKeyRef, injected as env vars at startup</a:t>
-            </a:r>
-            <a:endParaRPr lang="en-US" sz="2200" dirty="0"/>
-          </a:p>
-        </p:txBody>
-      </p:sp>
-      <p:sp>
-        <p:nvSpPr>
-          <p:cNvPr id="9" name="Text 7"/>
-          <p:cNvSpPr/>
-          <p:nvPr/>
-        </p:nvSpPr>
-        <p:spPr>
-          <a:xfrm>
-            <a:off x="457200" y="5330952"/>
-            <a:ext cx="11274552" cy="1252728"/>
-          </a:xfrm>
-          <a:prstGeom prst="rect">
-            <a:avLst/>
-          </a:prstGeom>
-          <a:noFill/>
-          <a:ln/>
-        </p:spPr>
-        <p:txBody>
-          <a:bodyPr wrap="square" rtlCol="0" anchor="ctr"/>
-          <a:lstStyle/>
-          <a:p>
-            <a:pPr marL="254000" indent="-254000">
-              <a:buSzPct val="100000"/>
-              <a:buChar char="•"/>
-            </a:pPr>
-            <a:r>
-              <a:rPr lang="en-US" sz="2200" dirty="0">
-                <a:solidFill>
-                  <a:srgbClr val="0A1A1C"/>
-                </a:solidFill>
-                <a:latin typeface="Trebuchet MS" pitchFamily="34" charset="0"/>
-                <a:ea typeface="Trebuchet MS" pitchFamily="34" charset="-122"/>
-                <a:cs typeface="Trebuchet MS" pitchFamily="34" charset="-120"/>
-              </a:rPr>
-              <a:t>Secrets are base64 encoded, not encrypted — anyone with API access can trivially decode them; fine for practice, not for production as-is</a:t>
+                  <a:srgbClr val="FFFFFF">
+                    <a:alpha val="80000"/>
+                  </a:srgbClr>
+                </a:solidFill>
+                <a:latin typeface="Trebuchet MS" pitchFamily="34" charset="0"/>
+                <a:ea typeface="Trebuchet MS" pitchFamily="34" charset="-122"/>
+                <a:cs typeface="Trebuchet MS" pitchFamily="34" charset="-120"/>
+              </a:rPr>
+              <a:t>Stable networking, externalized config, and how it all composes.</a:t>
             </a:r>
             <a:endParaRPr lang="en-US" sz="2200" dirty="0"/>
           </a:p>
@@ -7716,7 +8465,7 @@
                 <a:ea typeface="Arial Black" pitchFamily="34" charset="-122"/>
                 <a:cs typeface="Arial Black" pitchFamily="34" charset="-120"/>
               </a:rPr>
-              <a:t>The Capstone: Wiring It All Together</a:t>
+              <a:t>Services: Stable Addresses Over Disposable Pods</a:t>
             </a:r>
             <a:endParaRPr lang="en-US" sz="3000" dirty="0"/>
           </a:p>
@@ -7755,18 +8504,16 @@
         </p:nvSpPr>
         <p:spPr>
           <a:xfrm>
-            <a:off x="457200" y="1922526"/>
-            <a:ext cx="1976933" cy="854964"/>
-          </a:xfrm>
-          <a:prstGeom prst="roundRect">
-            <a:avLst>
-              <a:gd name="adj" fmla="val 10695"/>
-            </a:avLst>
+            <a:off x="457200" y="1572768"/>
+            <a:ext cx="5477256" cy="5010912"/>
+          </a:xfrm>
+          <a:prstGeom prst="rect">
+            <a:avLst/>
           </a:prstGeom>
           <a:solidFill>
-            <a:srgbClr val="B8ECF5"/>
+            <a:srgbClr val="C0EDF5"/>
           </a:solidFill>
-          <a:ln w="19050">
+          <a:ln w="9525">
             <a:solidFill>
               <a:srgbClr val="007A90"/>
             </a:solidFill>
@@ -7782,51 +8529,68 @@
         </p:nvSpPr>
         <p:spPr>
           <a:xfrm>
-            <a:off x="457200" y="1922526"/>
-            <a:ext cx="1976933" cy="854964"/>
-          </a:xfrm>
-          <a:prstGeom prst="rect">
-            <a:avLst/>
-          </a:prstGeom>
-          <a:noFill/>
-          <a:ln/>
-        </p:spPr>
-        <p:txBody>
-          <a:bodyPr wrap="square" rtlCol="0" anchor="ctr"/>
-          <a:lstStyle/>
-          <a:p>
-            <a:pPr algn="ctr" indent="0" marL="0">
-              <a:buNone/>
-            </a:pPr>
-            <a:r>
-              <a:rPr lang="en-US" sz="1100" b="1" dirty="0">
-                <a:solidFill>
-                  <a:srgbClr val="0A1A1C"/>
-                </a:solidFill>
-                <a:latin typeface="Trebuchet MS" pitchFamily="34" charset="0"/>
-                <a:ea typeface="Trebuchet MS" pitchFamily="34" charset="-122"/>
-                <a:cs typeface="Trebuchet MS" pitchFamily="34" charset="-120"/>
-              </a:rPr>
-              <a:t>Secret</a:t>
-            </a:r>
-            <a:endParaRPr lang="en-US" sz="1100" dirty="0"/>
-          </a:p>
-          <a:p>
-            <a:pPr algn="ctr" indent="0" marL="0">
-              <a:buNone/>
-            </a:pPr>
-            <a:r>
-              <a:rPr lang="en-US" sz="1100" b="1" dirty="0">
-                <a:solidFill>
-                  <a:srgbClr val="0A1A1C"/>
-                </a:solidFill>
-                <a:latin typeface="Trebuchet MS" pitchFamily="34" charset="0"/>
-                <a:ea typeface="Trebuchet MS" pitchFamily="34" charset="-122"/>
-                <a:cs typeface="Trebuchet MS" pitchFamily="34" charset="-120"/>
-              </a:rPr>
-              <a:t>(mongo creds)</a:t>
-            </a:r>
-            <a:endParaRPr lang="en-US" sz="1100" dirty="0"/>
+            <a:off x="640080" y="1709928"/>
+            <a:ext cx="5111496" cy="4736592"/>
+          </a:xfrm>
+          <a:prstGeom prst="rect">
+            <a:avLst/>
+          </a:prstGeom>
+          <a:noFill/>
+          <a:ln/>
+        </p:spPr>
+        <p:txBody>
+          <a:bodyPr wrap="none" rtlCol="0" anchor="t"/>
+          <a:lstStyle/>
+          <a:p>
+            <a:pPr indent="0" marL="0">
+              <a:buNone/>
+            </a:pPr>
+            <a:r>
+              <a:rPr lang="en-US" sz="1300" dirty="0">
+                <a:solidFill>
+                  <a:srgbClr val="003848"/>
+                </a:solidFill>
+                <a:latin typeface="Courier New" pitchFamily="34" charset="0"/>
+                <a:ea typeface="Courier New" pitchFamily="34" charset="-122"/>
+                <a:cs typeface="Courier New" pitchFamily="34" charset="-120"/>
+              </a:rPr>
+              <a:t>kubectl expose deployment hello-deploy \</a:t>
+            </a:r>
+            <a:endParaRPr lang="en-US" sz="1300" dirty="0"/>
+          </a:p>
+          <a:p>
+            <a:pPr indent="0" marL="0">
+              <a:buNone/>
+            </a:pPr>
+            <a:r>
+              <a:rPr lang="en-US" sz="1300" dirty="0">
+                <a:solidFill>
+                  <a:srgbClr val="003848"/>
+                </a:solidFill>
+                <a:latin typeface="Courier New" pitchFamily="34" charset="0"/>
+                <a:ea typeface="Courier New" pitchFamily="34" charset="-122"/>
+                <a:cs typeface="Courier New" pitchFamily="34" charset="-120"/>
+              </a:rPr>
+              <a:t>  --port=80 --target-port=80 --name=hello-service</a:t>
+            </a:r>
+            <a:endParaRPr lang="en-US" sz="1300" dirty="0"/>
+          </a:p>
+          <a:p>
+            <a:pPr indent="0" marL="0">
+              <a:buNone/>
+            </a:pPr>
+            <a:r>
+              <a:rPr lang="en-US" sz="1300" dirty="0">
+                <a:solidFill>
+                  <a:srgbClr val="003848"/>
+                </a:solidFill>
+                <a:latin typeface="Courier New" pitchFamily="34" charset="0"/>
+                <a:ea typeface="Courier New" pitchFamily="34" charset="-122"/>
+                <a:cs typeface="Courier New" pitchFamily="34" charset="-120"/>
+              </a:rPr>
+              <a:t># → TYPE: ClusterIP   CLUSTER-IP: 10.x.x.x (stays fixed)</a:t>
+            </a:r>
+            <a:endParaRPr lang="en-US" sz="1300" dirty="0"/>
           </a:p>
         </p:txBody>
       </p:sp>
@@ -7838,479 +8602,8 @@
         </p:nvSpPr>
         <p:spPr>
           <a:xfrm>
-            <a:off x="2434133" y="1922526"/>
-            <a:ext cx="347472" cy="854964"/>
-          </a:xfrm>
-          <a:prstGeom prst="rect">
-            <a:avLst/>
-          </a:prstGeom>
-          <a:noFill/>
-          <a:ln/>
-        </p:spPr>
-        <p:txBody>
-          <a:bodyPr wrap="square" rtlCol="0" anchor="ctr"/>
-          <a:lstStyle/>
-          <a:p>
-            <a:pPr algn="ctr" indent="0" marL="0">
-              <a:buNone/>
-            </a:pPr>
-            <a:r>
-              <a:rPr lang="en-US" sz="2200" dirty="0">
-                <a:solidFill>
-                  <a:srgbClr val="007A90"/>
-                </a:solidFill>
-                <a:latin typeface="Trebuchet MS" pitchFamily="34" charset="0"/>
-                <a:ea typeface="Trebuchet MS" pitchFamily="34" charset="-122"/>
-                <a:cs typeface="Trebuchet MS" pitchFamily="34" charset="-120"/>
-              </a:rPr>
-              <a:t>→</a:t>
-            </a:r>
-            <a:endParaRPr lang="en-US" sz="2200" dirty="0"/>
-          </a:p>
-        </p:txBody>
-      </p:sp>
-      <p:sp>
-        <p:nvSpPr>
-          <p:cNvPr id="9" name="Shape 7"/>
-          <p:cNvSpPr/>
-          <p:nvPr/>
-        </p:nvSpPr>
-        <p:spPr>
-          <a:xfrm>
-            <a:off x="2781605" y="1922526"/>
-            <a:ext cx="1976933" cy="854964"/>
-          </a:xfrm>
-          <a:prstGeom prst="roundRect">
-            <a:avLst>
-              <a:gd name="adj" fmla="val 10695"/>
-            </a:avLst>
-          </a:prstGeom>
-          <a:solidFill>
-            <a:srgbClr val="B8ECF5"/>
-          </a:solidFill>
-          <a:ln w="19050">
-            <a:solidFill>
-              <a:srgbClr val="007A90"/>
-            </a:solidFill>
-            <a:prstDash val="solid"/>
-          </a:ln>
-        </p:spPr>
-      </p:sp>
-      <p:sp>
-        <p:nvSpPr>
-          <p:cNvPr id="10" name="Text 8"/>
-          <p:cNvSpPr/>
-          <p:nvPr/>
-        </p:nvSpPr>
-        <p:spPr>
-          <a:xfrm>
-            <a:off x="2781605" y="1922526"/>
-            <a:ext cx="1976933" cy="854964"/>
-          </a:xfrm>
-          <a:prstGeom prst="rect">
-            <a:avLst/>
-          </a:prstGeom>
-          <a:noFill/>
-          <a:ln/>
-        </p:spPr>
-        <p:txBody>
-          <a:bodyPr wrap="square" rtlCol="0" anchor="ctr"/>
-          <a:lstStyle/>
-          <a:p>
-            <a:pPr algn="ctr" indent="0" marL="0">
-              <a:buNone/>
-            </a:pPr>
-            <a:r>
-              <a:rPr lang="en-US" sz="1100" dirty="0">
-                <a:solidFill>
-                  <a:srgbClr val="0A1A1C"/>
-                </a:solidFill>
-                <a:latin typeface="Trebuchet MS" pitchFamily="34" charset="0"/>
-                <a:ea typeface="Trebuchet MS" pitchFamily="34" charset="-122"/>
-                <a:cs typeface="Trebuchet MS" pitchFamily="34" charset="-120"/>
-              </a:rPr>
-              <a:t>MongoDB Deploy</a:t>
-            </a:r>
-            <a:endParaRPr lang="en-US" sz="1100" dirty="0"/>
-          </a:p>
-          <a:p>
-            <a:pPr algn="ctr" indent="0" marL="0">
-              <a:buNone/>
-            </a:pPr>
-            <a:r>
-              <a:rPr lang="en-US" sz="1100" dirty="0">
-                <a:solidFill>
-                  <a:srgbClr val="0A1A1C"/>
-                </a:solidFill>
-                <a:latin typeface="Trebuchet MS" pitchFamily="34" charset="0"/>
-                <a:ea typeface="Trebuchet MS" pitchFamily="34" charset="-122"/>
-                <a:cs typeface="Trebuchet MS" pitchFamily="34" charset="-120"/>
-              </a:rPr>
-              <a:t>+ ClusterIP Svc</a:t>
-            </a:r>
-            <a:endParaRPr lang="en-US" sz="1100" dirty="0"/>
-          </a:p>
-        </p:txBody>
-      </p:sp>
-      <p:sp>
-        <p:nvSpPr>
-          <p:cNvPr id="11" name="Text 9"/>
-          <p:cNvSpPr/>
-          <p:nvPr/>
-        </p:nvSpPr>
-        <p:spPr>
-          <a:xfrm>
-            <a:off x="4758538" y="1922526"/>
-            <a:ext cx="347472" cy="854964"/>
-          </a:xfrm>
-          <a:prstGeom prst="rect">
-            <a:avLst/>
-          </a:prstGeom>
-          <a:noFill/>
-          <a:ln/>
-        </p:spPr>
-        <p:txBody>
-          <a:bodyPr wrap="square" rtlCol="0" anchor="ctr"/>
-          <a:lstStyle/>
-          <a:p>
-            <a:pPr algn="ctr" indent="0" marL="0">
-              <a:buNone/>
-            </a:pPr>
-            <a:r>
-              <a:rPr lang="en-US" sz="2200" dirty="0">
-                <a:solidFill>
-                  <a:srgbClr val="007A90"/>
-                </a:solidFill>
-                <a:latin typeface="Trebuchet MS" pitchFamily="34" charset="0"/>
-                <a:ea typeface="Trebuchet MS" pitchFamily="34" charset="-122"/>
-                <a:cs typeface="Trebuchet MS" pitchFamily="34" charset="-120"/>
-              </a:rPr>
-              <a:t>→</a:t>
-            </a:r>
-            <a:endParaRPr lang="en-US" sz="2200" dirty="0"/>
-          </a:p>
-        </p:txBody>
-      </p:sp>
-      <p:sp>
-        <p:nvSpPr>
-          <p:cNvPr id="12" name="Shape 10"/>
-          <p:cNvSpPr/>
-          <p:nvPr/>
-        </p:nvSpPr>
-        <p:spPr>
-          <a:xfrm>
-            <a:off x="5106010" y="1922526"/>
-            <a:ext cx="1976933" cy="854964"/>
-          </a:xfrm>
-          <a:prstGeom prst="roundRect">
-            <a:avLst>
-              <a:gd name="adj" fmla="val 10695"/>
-            </a:avLst>
-          </a:prstGeom>
-          <a:solidFill>
-            <a:srgbClr val="B8ECF5"/>
-          </a:solidFill>
-          <a:ln w="19050">
-            <a:solidFill>
-              <a:srgbClr val="007A90"/>
-            </a:solidFill>
-            <a:prstDash val="solid"/>
-          </a:ln>
-        </p:spPr>
-      </p:sp>
-      <p:sp>
-        <p:nvSpPr>
-          <p:cNvPr id="13" name="Text 11"/>
-          <p:cNvSpPr/>
-          <p:nvPr/>
-        </p:nvSpPr>
-        <p:spPr>
-          <a:xfrm>
-            <a:off x="5106010" y="1922526"/>
-            <a:ext cx="1976933" cy="854964"/>
-          </a:xfrm>
-          <a:prstGeom prst="rect">
-            <a:avLst/>
-          </a:prstGeom>
-          <a:noFill/>
-          <a:ln/>
-        </p:spPr>
-        <p:txBody>
-          <a:bodyPr wrap="square" rtlCol="0" anchor="ctr"/>
-          <a:lstStyle/>
-          <a:p>
-            <a:pPr algn="ctr" indent="0" marL="0">
-              <a:buNone/>
-            </a:pPr>
-            <a:r>
-              <a:rPr lang="en-US" sz="1100" dirty="0">
-                <a:solidFill>
-                  <a:srgbClr val="0A1A1C"/>
-                </a:solidFill>
-                <a:latin typeface="Trebuchet MS" pitchFamily="34" charset="0"/>
-                <a:ea typeface="Trebuchet MS" pitchFamily="34" charset="-122"/>
-                <a:cs typeface="Trebuchet MS" pitchFamily="34" charset="-120"/>
-              </a:rPr>
-              <a:t>ConfigMap</a:t>
-            </a:r>
-            <a:endParaRPr lang="en-US" sz="1100" dirty="0"/>
-          </a:p>
-          <a:p>
-            <a:pPr algn="ctr" indent="0" marL="0">
-              <a:buNone/>
-            </a:pPr>
-            <a:r>
-              <a:rPr lang="en-US" sz="1100" dirty="0">
-                <a:solidFill>
-                  <a:srgbClr val="0A1A1C"/>
-                </a:solidFill>
-                <a:latin typeface="Trebuchet MS" pitchFamily="34" charset="0"/>
-                <a:ea typeface="Trebuchet MS" pitchFamily="34" charset="-122"/>
-                <a:cs typeface="Trebuchet MS" pitchFamily="34" charset="-120"/>
-              </a:rPr>
-              <a:t>(mongo URL)</a:t>
-            </a:r>
-            <a:endParaRPr lang="en-US" sz="1100" dirty="0"/>
-          </a:p>
-        </p:txBody>
-      </p:sp>
-      <p:sp>
-        <p:nvSpPr>
-          <p:cNvPr id="14" name="Text 12"/>
-          <p:cNvSpPr/>
-          <p:nvPr/>
-        </p:nvSpPr>
-        <p:spPr>
-          <a:xfrm>
-            <a:off x="7082942" y="1922526"/>
-            <a:ext cx="347472" cy="854964"/>
-          </a:xfrm>
-          <a:prstGeom prst="rect">
-            <a:avLst/>
-          </a:prstGeom>
-          <a:noFill/>
-          <a:ln/>
-        </p:spPr>
-        <p:txBody>
-          <a:bodyPr wrap="square" rtlCol="0" anchor="ctr"/>
-          <a:lstStyle/>
-          <a:p>
-            <a:pPr algn="ctr" indent="0" marL="0">
-              <a:buNone/>
-            </a:pPr>
-            <a:r>
-              <a:rPr lang="en-US" sz="2200" dirty="0">
-                <a:solidFill>
-                  <a:srgbClr val="007A90"/>
-                </a:solidFill>
-                <a:latin typeface="Trebuchet MS" pitchFamily="34" charset="0"/>
-                <a:ea typeface="Trebuchet MS" pitchFamily="34" charset="-122"/>
-                <a:cs typeface="Trebuchet MS" pitchFamily="34" charset="-120"/>
-              </a:rPr>
-              <a:t>→</a:t>
-            </a:r>
-            <a:endParaRPr lang="en-US" sz="2200" dirty="0"/>
-          </a:p>
-        </p:txBody>
-      </p:sp>
-      <p:sp>
-        <p:nvSpPr>
-          <p:cNvPr id="15" name="Shape 13"/>
-          <p:cNvSpPr/>
-          <p:nvPr/>
-        </p:nvSpPr>
-        <p:spPr>
-          <a:xfrm>
-            <a:off x="7430414" y="1922526"/>
-            <a:ext cx="1976933" cy="854964"/>
-          </a:xfrm>
-          <a:prstGeom prst="roundRect">
-            <a:avLst>
-              <a:gd name="adj" fmla="val 10695"/>
-            </a:avLst>
-          </a:prstGeom>
-          <a:solidFill>
-            <a:srgbClr val="B8ECF5"/>
-          </a:solidFill>
-          <a:ln w="19050">
-            <a:solidFill>
-              <a:srgbClr val="007A90"/>
-            </a:solidFill>
-            <a:prstDash val="solid"/>
-          </a:ln>
-        </p:spPr>
-      </p:sp>
-      <p:sp>
-        <p:nvSpPr>
-          <p:cNvPr id="16" name="Text 14"/>
-          <p:cNvSpPr/>
-          <p:nvPr/>
-        </p:nvSpPr>
-        <p:spPr>
-          <a:xfrm>
-            <a:off x="7430414" y="1922526"/>
-            <a:ext cx="1976933" cy="854964"/>
-          </a:xfrm>
-          <a:prstGeom prst="rect">
-            <a:avLst/>
-          </a:prstGeom>
-          <a:noFill/>
-          <a:ln/>
-        </p:spPr>
-        <p:txBody>
-          <a:bodyPr wrap="square" rtlCol="0" anchor="ctr"/>
-          <a:lstStyle/>
-          <a:p>
-            <a:pPr algn="ctr" indent="0" marL="0">
-              <a:buNone/>
-            </a:pPr>
-            <a:r>
-              <a:rPr lang="en-US" sz="1100" dirty="0">
-                <a:solidFill>
-                  <a:srgbClr val="0A1A1C"/>
-                </a:solidFill>
-                <a:latin typeface="Trebuchet MS" pitchFamily="34" charset="0"/>
-                <a:ea typeface="Trebuchet MS" pitchFamily="34" charset="-122"/>
-                <a:cs typeface="Trebuchet MS" pitchFamily="34" charset="-120"/>
-              </a:rPr>
-              <a:t>Web App Deploy</a:t>
-            </a:r>
-            <a:endParaRPr lang="en-US" sz="1100" dirty="0"/>
-          </a:p>
-          <a:p>
-            <a:pPr algn="ctr" indent="0" marL="0">
-              <a:buNone/>
-            </a:pPr>
-            <a:r>
-              <a:rPr lang="en-US" sz="1100" dirty="0">
-                <a:solidFill>
-                  <a:srgbClr val="0A1A1C"/>
-                </a:solidFill>
-                <a:latin typeface="Trebuchet MS" pitchFamily="34" charset="0"/>
-                <a:ea typeface="Trebuchet MS" pitchFamily="34" charset="-122"/>
-                <a:cs typeface="Trebuchet MS" pitchFamily="34" charset="-120"/>
-              </a:rPr>
-              <a:t>+ NodePort Svc</a:t>
-            </a:r>
-            <a:endParaRPr lang="en-US" sz="1100" dirty="0"/>
-          </a:p>
-        </p:txBody>
-      </p:sp>
-      <p:sp>
-        <p:nvSpPr>
-          <p:cNvPr id="17" name="Text 15"/>
-          <p:cNvSpPr/>
-          <p:nvPr/>
-        </p:nvSpPr>
-        <p:spPr>
-          <a:xfrm>
-            <a:off x="9407347" y="1922526"/>
-            <a:ext cx="347472" cy="854964"/>
-          </a:xfrm>
-          <a:prstGeom prst="rect">
-            <a:avLst/>
-          </a:prstGeom>
-          <a:noFill/>
-          <a:ln/>
-        </p:spPr>
-        <p:txBody>
-          <a:bodyPr wrap="square" rtlCol="0" anchor="ctr"/>
-          <a:lstStyle/>
-          <a:p>
-            <a:pPr algn="ctr" indent="0" marL="0">
-              <a:buNone/>
-            </a:pPr>
-            <a:r>
-              <a:rPr lang="en-US" sz="2200" dirty="0">
-                <a:solidFill>
-                  <a:srgbClr val="007A90"/>
-                </a:solidFill>
-                <a:latin typeface="Trebuchet MS" pitchFamily="34" charset="0"/>
-                <a:ea typeface="Trebuchet MS" pitchFamily="34" charset="-122"/>
-                <a:cs typeface="Trebuchet MS" pitchFamily="34" charset="-120"/>
-              </a:rPr>
-              <a:t>→</a:t>
-            </a:r>
-            <a:endParaRPr lang="en-US" sz="2200" dirty="0"/>
-          </a:p>
-        </p:txBody>
-      </p:sp>
-      <p:sp>
-        <p:nvSpPr>
-          <p:cNvPr id="18" name="Shape 16"/>
-          <p:cNvSpPr/>
-          <p:nvPr/>
-        </p:nvSpPr>
-        <p:spPr>
-          <a:xfrm>
-            <a:off x="9754819" y="1922526"/>
-            <a:ext cx="1976933" cy="854964"/>
-          </a:xfrm>
-          <a:prstGeom prst="roundRect">
-            <a:avLst>
-              <a:gd name="adj" fmla="val 10695"/>
-            </a:avLst>
-          </a:prstGeom>
-          <a:solidFill>
-            <a:srgbClr val="B8ECF5"/>
-          </a:solidFill>
-          <a:ln w="19050">
-            <a:solidFill>
-              <a:srgbClr val="007A90"/>
-            </a:solidFill>
-            <a:prstDash val="solid"/>
-          </a:ln>
-        </p:spPr>
-      </p:sp>
-      <p:sp>
-        <p:nvSpPr>
-          <p:cNvPr id="19" name="Text 17"/>
-          <p:cNvSpPr/>
-          <p:nvPr/>
-        </p:nvSpPr>
-        <p:spPr>
-          <a:xfrm>
-            <a:off x="9754819" y="1922526"/>
-            <a:ext cx="1976933" cy="854964"/>
-          </a:xfrm>
-          <a:prstGeom prst="rect">
-            <a:avLst/>
-          </a:prstGeom>
-          <a:noFill/>
-          <a:ln/>
-        </p:spPr>
-        <p:txBody>
-          <a:bodyPr wrap="square" rtlCol="0" anchor="ctr"/>
-          <a:lstStyle/>
-          <a:p>
-            <a:pPr algn="ctr" indent="0" marL="0">
-              <a:buNone/>
-            </a:pPr>
-            <a:r>
-              <a:rPr lang="en-US" sz="1100" b="1" dirty="0">
-                <a:solidFill>
-                  <a:srgbClr val="0A1A1C"/>
-                </a:solidFill>
-                <a:latin typeface="Trebuchet MS" pitchFamily="34" charset="0"/>
-                <a:ea typeface="Trebuchet MS" pitchFamily="34" charset="-122"/>
-                <a:cs typeface="Trebuchet MS" pitchFamily="34" charset="-120"/>
-              </a:rPr>
-              <a:t>Browser</a:t>
-            </a:r>
-            <a:endParaRPr lang="en-US" sz="1100" dirty="0"/>
-          </a:p>
-        </p:txBody>
-      </p:sp>
-      <p:sp>
-        <p:nvSpPr>
-          <p:cNvPr id="20" name="Text 18"/>
-          <p:cNvSpPr/>
-          <p:nvPr/>
-        </p:nvSpPr>
-        <p:spPr>
-          <a:xfrm>
-            <a:off x="457200" y="3310128"/>
-            <a:ext cx="11274552" cy="818388"/>
+            <a:off x="6254496" y="1572768"/>
+            <a:ext cx="5477256" cy="1252728"/>
           </a:xfrm>
           <a:prstGeom prst="rect">
             <a:avLst/>
@@ -8327,7 +8620,7 @@
               <a:buChar char="•"/>
             </a:pPr>
             <a:r>
-              <a:rPr lang="en-US" sz="1600" dirty="0">
+              <a:rPr lang="en-US" sz="1700" dirty="0">
                 <a:solidFill>
                   <a:srgbClr val="0A1A1C"/>
                 </a:solidFill>
@@ -8335,22 +8628,22 @@
                 <a:ea typeface="Trebuchet MS" pitchFamily="34" charset="-122"/>
                 <a:cs typeface="Trebuchet MS" pitchFamily="34" charset="-120"/>
               </a:rPr>
-              <a:t>Every object type covered so far combines into one two-tier system (web app + MongoDB)</a:t>
-            </a:r>
-            <a:endParaRPr lang="en-US" sz="1600" dirty="0"/>
-          </a:p>
-        </p:txBody>
-      </p:sp>
-      <p:sp>
-        <p:nvSpPr>
-          <p:cNvPr id="21" name="Text 19"/>
-          <p:cNvSpPr/>
-          <p:nvPr/>
-        </p:nvSpPr>
-        <p:spPr>
-          <a:xfrm>
-            <a:off x="457200" y="4128516"/>
-            <a:ext cx="11274552" cy="818388"/>
+              <a:t>Every Pod gets its own IP, but Pods are disposable — you just proved that</a:t>
+            </a:r>
+            <a:endParaRPr lang="en-US" sz="1700" dirty="0"/>
+          </a:p>
+        </p:txBody>
+      </p:sp>
+      <p:sp>
+        <p:nvSpPr>
+          <p:cNvPr id="9" name="Text 7"/>
+          <p:cNvSpPr/>
+          <p:nvPr/>
+        </p:nvSpPr>
+        <p:spPr>
+          <a:xfrm>
+            <a:off x="6254496" y="2825496"/>
+            <a:ext cx="5477256" cy="1252728"/>
           </a:xfrm>
           <a:prstGeom prst="rect">
             <a:avLst/>
@@ -8367,7 +8660,7 @@
               <a:buChar char="•"/>
             </a:pPr>
             <a:r>
-              <a:rPr lang="en-US" sz="1600" dirty="0">
+              <a:rPr lang="en-US" sz="1700" dirty="0">
                 <a:solidFill>
                   <a:srgbClr val="0A1A1C"/>
                 </a:solidFill>
@@ -8375,22 +8668,22 @@
                 <a:ea typeface="Trebuchet MS" pitchFamily="34" charset="-122"/>
                 <a:cs typeface="Trebuchet MS" pitchFamily="34" charset="-120"/>
               </a:rPr>
-              <a:t>Kubernetes gives every Service a DNS name matching its metadata.name — mongo-service resolves automatically, no IP involved</a:t>
-            </a:r>
-            <a:endParaRPr lang="en-US" sz="1600" dirty="0"/>
-          </a:p>
-        </p:txBody>
-      </p:sp>
-      <p:sp>
-        <p:nvSpPr>
-          <p:cNvPr id="22" name="Text 20"/>
-          <p:cNvSpPr/>
-          <p:nvPr/>
-        </p:nvSpPr>
-        <p:spPr>
-          <a:xfrm>
-            <a:off x="457200" y="4946904"/>
-            <a:ext cx="11274552" cy="818388"/>
+              <a:t>A Service is a permanent address that tracks whichever Pods match its label selector</a:t>
+            </a:r>
+            <a:endParaRPr lang="en-US" sz="1700" dirty="0"/>
+          </a:p>
+        </p:txBody>
+      </p:sp>
+      <p:sp>
+        <p:nvSpPr>
+          <p:cNvPr id="10" name="Text 8"/>
+          <p:cNvSpPr/>
+          <p:nvPr/>
+        </p:nvSpPr>
+        <p:spPr>
+          <a:xfrm>
+            <a:off x="6254496" y="4078224"/>
+            <a:ext cx="5477256" cy="1252728"/>
           </a:xfrm>
           <a:prstGeom prst="rect">
             <a:avLst/>
@@ -8407,7 +8700,7 @@
               <a:buChar char="•"/>
             </a:pPr>
             <a:r>
-              <a:rPr lang="en-US" sz="1600" dirty="0">
+              <a:rPr lang="en-US" sz="1700" dirty="0">
                 <a:solidFill>
                   <a:srgbClr val="0A1A1C"/>
                 </a:solidFill>
@@ -8415,22 +8708,22 @@
                 <a:ea typeface="Trebuchet MS" pitchFamily="34" charset="-122"/>
                 <a:cs typeface="Trebuchet MS" pitchFamily="34" charset="-120"/>
               </a:rPr>
-              <a:t>Deploy order matters: the database's config must exist before the app that depends on it</a:t>
-            </a:r>
-            <a:endParaRPr lang="en-US" sz="1600" dirty="0"/>
-          </a:p>
-        </p:txBody>
-      </p:sp>
-      <p:sp>
-        <p:nvSpPr>
-          <p:cNvPr id="23" name="Text 21"/>
-          <p:cNvSpPr/>
-          <p:nvPr/>
-        </p:nvSpPr>
-        <p:spPr>
-          <a:xfrm>
-            <a:off x="457200" y="5765292"/>
-            <a:ext cx="11274552" cy="818388"/>
+              <a:t>ClusterIP (default) — internal-only; NodePort — opens a port in the 30000–32767 range for external access</a:t>
+            </a:r>
+            <a:endParaRPr lang="en-US" sz="1700" dirty="0"/>
+          </a:p>
+        </p:txBody>
+      </p:sp>
+      <p:sp>
+        <p:nvSpPr>
+          <p:cNvPr id="11" name="Text 9"/>
+          <p:cNvSpPr/>
+          <p:nvPr/>
+        </p:nvSpPr>
+        <p:spPr>
+          <a:xfrm>
+            <a:off x="6254496" y="5330952"/>
+            <a:ext cx="5477256" cy="1252728"/>
           </a:xfrm>
           <a:prstGeom prst="rect">
             <a:avLst/>
@@ -8447,7 +8740,7 @@
               <a:buChar char="•"/>
             </a:pPr>
             <a:r>
-              <a:rPr lang="en-US" sz="1600" dirty="0">
+              <a:rPr lang="en-US" sz="1700" dirty="0">
                 <a:solidFill>
                   <a:srgbClr val="0A1A1C"/>
                 </a:solidFill>
@@ -8455,9 +8748,9 @@
                 <a:ea typeface="Trebuchet MS" pitchFamily="34" charset="-122"/>
                 <a:cs typeface="Trebuchet MS" pitchFamily="34" charset="-120"/>
               </a:rPr>
-              <a:t>Proof of wiring: kubectl exec deploy/webapp-deploy -- printenv MONGO_URL prints the full connection string, assembled purely from cluster objects</a:t>
-            </a:r>
-            <a:endParaRPr lang="en-US" sz="1600" dirty="0"/>
+              <a:t>Proof: delete a Pod behind a Service — CLUSTER-IP stays exactly the same the whole time</a:t>
+            </a:r>
+            <a:endParaRPr lang="en-US" sz="1700" dirty="0"/>
           </a:p>
         </p:txBody>
       </p:sp>
@@ -8950,7 +9243,7 @@
                 <a:ea typeface="Arial Black" pitchFamily="34" charset="-122"/>
                 <a:cs typeface="Arial Black" pitchFamily="34" charset="-120"/>
               </a:rPr>
-              <a:t>Gotchas &amp; Lessons</a:t>
+              <a:t>ConfigMaps &amp; Secrets: Externalizing Config</a:t>
             </a:r>
             <a:endParaRPr lang="en-US" sz="3000" dirty="0"/>
           </a:p>
@@ -9015,7 +9308,7 @@
                 <a:ea typeface="Trebuchet MS" pitchFamily="34" charset="-122"/>
                 <a:cs typeface="Trebuchet MS" pitchFamily="34" charset="-120"/>
               </a:rPr>
-              <a:t>Most common real failure across Modules 1–5: a typo in key: or name: inside a configMapKeyRef/secretKeyRef → shows up as CreateContainerConfigError</a:t>
+              <a:t>Same container image should run unmodified across dev, staging, prod — only config and credentials should differ</a:t>
             </a:r>
             <a:endParaRPr lang="en-US" sz="2200" dirty="0"/>
           </a:p>
@@ -9055,7 +9348,7 @@
                 <a:ea typeface="Trebuchet MS" pitchFamily="34" charset="-122"/>
                 <a:cs typeface="Trebuchet MS" pitchFamily="34" charset="-120"/>
               </a:rPr>
-              <a:t>kubectl describe pod → the Events section is always the first move to diagnose a broken Pod</a:t>
+              <a:t>ConfigMap = plain configuration; Secret = sensitive values — same injection mechanism for both</a:t>
             </a:r>
             <a:endParaRPr lang="en-US" sz="2200" dirty="0"/>
           </a:p>
@@ -9095,7 +9388,7 @@
                 <a:ea typeface="Trebuchet MS" pitchFamily="34" charset="-122"/>
                 <a:cs typeface="Trebuchet MS" pitchFamily="34" charset="-120"/>
               </a:rPr>
-              <a:t>Podman's Minikube driver is explicitly experimental — --driver=docker is the fallback if you hit an uncovered wall</a:t>
+              <a:t>Both referenced from a Pod via valueFrom.configMapKeyRef / valueFrom.secretKeyRef, injected as env vars at startup</a:t>
             </a:r>
             <a:endParaRPr lang="en-US" sz="2200" dirty="0"/>
           </a:p>
@@ -9135,7 +9428,7 @@
                 <a:ea typeface="Trebuchet MS" pitchFamily="34" charset="-122"/>
                 <a:cs typeface="Trebuchet MS" pitchFamily="34" charset="-120"/>
               </a:rPr>
-              <a:t>Base64 is encoding, not encryption — don't mistake a Secret for something actually secured</a:t>
+              <a:t>Secrets are base64 encoded, not encrypted — anyone with API access can trivially decode them; fine for practice, not for production as-is</a:t>
             </a:r>
             <a:endParaRPr lang="en-US" sz="2200" dirty="0"/>
           </a:p>
@@ -9270,7 +9563,7 @@
                 <a:ea typeface="Arial Black" pitchFamily="34" charset="-122"/>
                 <a:cs typeface="Arial Black" pitchFamily="34" charset="-120"/>
               </a:rPr>
-              <a:t>Key Insight</a:t>
+              <a:t>The Capstone: Wiring It All Together</a:t>
             </a:r>
             <a:endParaRPr lang="en-US" sz="3000" dirty="0"/>
           </a:p>
@@ -9309,16 +9602,18 @@
         </p:nvSpPr>
         <p:spPr>
           <a:xfrm>
-            <a:off x="457200" y="2029968"/>
-            <a:ext cx="11274552" cy="4096512"/>
-          </a:xfrm>
-          <a:prstGeom prst="rect">
-            <a:avLst/>
+            <a:off x="457200" y="1922526"/>
+            <a:ext cx="1976933" cy="854964"/>
+          </a:xfrm>
+          <a:prstGeom prst="roundRect">
+            <a:avLst>
+              <a:gd name="adj" fmla="val 10695"/>
+            </a:avLst>
           </a:prstGeom>
           <a:solidFill>
             <a:srgbClr val="B8ECF5"/>
           </a:solidFill>
-          <a:ln w="25400">
+          <a:ln w="19050">
             <a:solidFill>
               <a:srgbClr val="007A90"/>
             </a:solidFill>
@@ -9328,22 +9623,119 @@
       </p:sp>
       <p:sp>
         <p:nvSpPr>
-          <p:cNvPr id="7" name="Shape 5"/>
-          <p:cNvSpPr/>
-          <p:nvPr/>
-        </p:nvSpPr>
-        <p:spPr>
-          <a:xfrm>
-            <a:off x="457200" y="2029968"/>
-            <a:ext cx="73152" cy="4096512"/>
-          </a:xfrm>
-          <a:prstGeom prst="rect">
-            <a:avLst/>
+          <p:cNvPr id="7" name="Text 5"/>
+          <p:cNvSpPr/>
+          <p:nvPr/>
+        </p:nvSpPr>
+        <p:spPr>
+          <a:xfrm>
+            <a:off x="457200" y="1922526"/>
+            <a:ext cx="1976933" cy="854964"/>
+          </a:xfrm>
+          <a:prstGeom prst="rect">
+            <a:avLst/>
+          </a:prstGeom>
+          <a:noFill/>
+          <a:ln/>
+        </p:spPr>
+        <p:txBody>
+          <a:bodyPr wrap="square" rtlCol="0" anchor="ctr"/>
+          <a:lstStyle/>
+          <a:p>
+            <a:pPr algn="ctr" indent="0" marL="0">
+              <a:buNone/>
+            </a:pPr>
+            <a:r>
+              <a:rPr lang="en-US" sz="1100" b="1" dirty="0">
+                <a:solidFill>
+                  <a:srgbClr val="0A1A1C"/>
+                </a:solidFill>
+                <a:latin typeface="Trebuchet MS" pitchFamily="34" charset="0"/>
+                <a:ea typeface="Trebuchet MS" pitchFamily="34" charset="-122"/>
+                <a:cs typeface="Trebuchet MS" pitchFamily="34" charset="-120"/>
+              </a:rPr>
+              <a:t>Secret</a:t>
+            </a:r>
+            <a:endParaRPr lang="en-US" sz="1100" dirty="0"/>
+          </a:p>
+          <a:p>
+            <a:pPr algn="ctr" indent="0" marL="0">
+              <a:buNone/>
+            </a:pPr>
+            <a:r>
+              <a:rPr lang="en-US" sz="1100" b="1" dirty="0">
+                <a:solidFill>
+                  <a:srgbClr val="0A1A1C"/>
+                </a:solidFill>
+                <a:latin typeface="Trebuchet MS" pitchFamily="34" charset="0"/>
+                <a:ea typeface="Trebuchet MS" pitchFamily="34" charset="-122"/>
+                <a:cs typeface="Trebuchet MS" pitchFamily="34" charset="-120"/>
+              </a:rPr>
+              <a:t>(mongo creds)</a:t>
+            </a:r>
+            <a:endParaRPr lang="en-US" sz="1100" dirty="0"/>
+          </a:p>
+        </p:txBody>
+      </p:sp>
+      <p:sp>
+        <p:nvSpPr>
+          <p:cNvPr id="8" name="Text 6"/>
+          <p:cNvSpPr/>
+          <p:nvPr/>
+        </p:nvSpPr>
+        <p:spPr>
+          <a:xfrm>
+            <a:off x="2434133" y="1922526"/>
+            <a:ext cx="347472" cy="854964"/>
+          </a:xfrm>
+          <a:prstGeom prst="rect">
+            <a:avLst/>
+          </a:prstGeom>
+          <a:noFill/>
+          <a:ln/>
+        </p:spPr>
+        <p:txBody>
+          <a:bodyPr wrap="square" rtlCol="0" anchor="ctr"/>
+          <a:lstStyle/>
+          <a:p>
+            <a:pPr algn="ctr" indent="0" marL="0">
+              <a:buNone/>
+            </a:pPr>
+            <a:r>
+              <a:rPr lang="en-US" sz="2200" dirty="0">
+                <a:solidFill>
+                  <a:srgbClr val="007A90"/>
+                </a:solidFill>
+                <a:latin typeface="Trebuchet MS" pitchFamily="34" charset="0"/>
+                <a:ea typeface="Trebuchet MS" pitchFamily="34" charset="-122"/>
+                <a:cs typeface="Trebuchet MS" pitchFamily="34" charset="-120"/>
+              </a:rPr>
+              <a:t>→</a:t>
+            </a:r>
+            <a:endParaRPr lang="en-US" sz="2200" dirty="0"/>
+          </a:p>
+        </p:txBody>
+      </p:sp>
+      <p:sp>
+        <p:nvSpPr>
+          <p:cNvPr id="9" name="Shape 7"/>
+          <p:cNvSpPr/>
+          <p:nvPr/>
+        </p:nvSpPr>
+        <p:spPr>
+          <a:xfrm>
+            <a:off x="2781605" y="1922526"/>
+            <a:ext cx="1976933" cy="854964"/>
+          </a:xfrm>
+          <a:prstGeom prst="roundRect">
+            <a:avLst>
+              <a:gd name="adj" fmla="val 10695"/>
+            </a:avLst>
           </a:prstGeom>
           <a:solidFill>
-            <a:srgbClr val="007A90"/>
+            <a:srgbClr val="B8ECF5"/>
           </a:solidFill>
-          <a:ln w="12700">
+          <a:ln w="19050">
             <a:solidFill>
               <a:srgbClr val="007A90"/>
             </a:solidFill>
@@ -9353,30 +9745,30 @@
       </p:sp>
       <p:sp>
         <p:nvSpPr>
-          <p:cNvPr id="8" name="Text 6"/>
-          <p:cNvSpPr/>
-          <p:nvPr/>
-        </p:nvSpPr>
-        <p:spPr>
-          <a:xfrm>
-            <a:off x="685800" y="2167128"/>
-            <a:ext cx="10954512" cy="3822192"/>
-          </a:xfrm>
-          <a:prstGeom prst="rect">
-            <a:avLst/>
-          </a:prstGeom>
-          <a:noFill/>
-          <a:ln/>
-        </p:spPr>
-        <p:txBody>
-          <a:bodyPr wrap="square" rtlCol="0" anchor="ctr"/>
-          <a:lstStyle/>
-          <a:p>
-            <a:pPr indent="0" marL="0">
-              <a:buNone/>
-            </a:pPr>
-            <a:r>
-              <a:rPr lang="en-US" sz="2600" b="1" dirty="0">
+          <p:cNvPr id="10" name="Text 8"/>
+          <p:cNvSpPr/>
+          <p:nvPr/>
+        </p:nvSpPr>
+        <p:spPr>
+          <a:xfrm>
+            <a:off x="2781605" y="1922526"/>
+            <a:ext cx="1976933" cy="854964"/>
+          </a:xfrm>
+          <a:prstGeom prst="rect">
+            <a:avLst/>
+          </a:prstGeom>
+          <a:noFill/>
+          <a:ln/>
+        </p:spPr>
+        <p:txBody>
+          <a:bodyPr wrap="square" rtlCol="0" anchor="ctr"/>
+          <a:lstStyle/>
+          <a:p>
+            <a:pPr algn="ctr" indent="0" marL="0">
+              <a:buNone/>
+            </a:pPr>
+            <a:r>
+              <a:rPr lang="en-US" sz="1100" dirty="0">
                 <a:solidFill>
                   <a:srgbClr val="0A1A1C"/>
                 </a:solidFill>
@@ -9384,9 +9776,535 @@
                 <a:ea typeface="Trebuchet MS" pitchFamily="34" charset="-122"/>
                 <a:cs typeface="Trebuchet MS" pitchFamily="34" charset="-120"/>
               </a:rPr>
-              <a:t>Every guarantee Kubernetes makes — self-healing, scaling, zero-downtime rollout — reduces to one idea: you declare desired state, and a control loop never stops trying to make reality match it</a:t>
-            </a:r>
-            <a:endParaRPr lang="en-US" sz="2600" dirty="0"/>
+              <a:t>MongoDB Deploy</a:t>
+            </a:r>
+            <a:endParaRPr lang="en-US" sz="1100" dirty="0"/>
+          </a:p>
+          <a:p>
+            <a:pPr algn="ctr" indent="0" marL="0">
+              <a:buNone/>
+            </a:pPr>
+            <a:r>
+              <a:rPr lang="en-US" sz="1100" dirty="0">
+                <a:solidFill>
+                  <a:srgbClr val="0A1A1C"/>
+                </a:solidFill>
+                <a:latin typeface="Trebuchet MS" pitchFamily="34" charset="0"/>
+                <a:ea typeface="Trebuchet MS" pitchFamily="34" charset="-122"/>
+                <a:cs typeface="Trebuchet MS" pitchFamily="34" charset="-120"/>
+              </a:rPr>
+              <a:t>+ ClusterIP Svc</a:t>
+            </a:r>
+            <a:endParaRPr lang="en-US" sz="1100" dirty="0"/>
+          </a:p>
+        </p:txBody>
+      </p:sp>
+      <p:sp>
+        <p:nvSpPr>
+          <p:cNvPr id="11" name="Text 9"/>
+          <p:cNvSpPr/>
+          <p:nvPr/>
+        </p:nvSpPr>
+        <p:spPr>
+          <a:xfrm>
+            <a:off x="4758538" y="1922526"/>
+            <a:ext cx="347472" cy="854964"/>
+          </a:xfrm>
+          <a:prstGeom prst="rect">
+            <a:avLst/>
+          </a:prstGeom>
+          <a:noFill/>
+          <a:ln/>
+        </p:spPr>
+        <p:txBody>
+          <a:bodyPr wrap="square" rtlCol="0" anchor="ctr"/>
+          <a:lstStyle/>
+          <a:p>
+            <a:pPr algn="ctr" indent="0" marL="0">
+              <a:buNone/>
+            </a:pPr>
+            <a:r>
+              <a:rPr lang="en-US" sz="2200" dirty="0">
+                <a:solidFill>
+                  <a:srgbClr val="007A90"/>
+                </a:solidFill>
+                <a:latin typeface="Trebuchet MS" pitchFamily="34" charset="0"/>
+                <a:ea typeface="Trebuchet MS" pitchFamily="34" charset="-122"/>
+                <a:cs typeface="Trebuchet MS" pitchFamily="34" charset="-120"/>
+              </a:rPr>
+              <a:t>→</a:t>
+            </a:r>
+            <a:endParaRPr lang="en-US" sz="2200" dirty="0"/>
+          </a:p>
+        </p:txBody>
+      </p:sp>
+      <p:sp>
+        <p:nvSpPr>
+          <p:cNvPr id="12" name="Shape 10"/>
+          <p:cNvSpPr/>
+          <p:nvPr/>
+        </p:nvSpPr>
+        <p:spPr>
+          <a:xfrm>
+            <a:off x="5106010" y="1922526"/>
+            <a:ext cx="1976933" cy="854964"/>
+          </a:xfrm>
+          <a:prstGeom prst="roundRect">
+            <a:avLst>
+              <a:gd name="adj" fmla="val 10695"/>
+            </a:avLst>
+          </a:prstGeom>
+          <a:solidFill>
+            <a:srgbClr val="B8ECF5"/>
+          </a:solidFill>
+          <a:ln w="19050">
+            <a:solidFill>
+              <a:srgbClr val="007A90"/>
+            </a:solidFill>
+            <a:prstDash val="solid"/>
+          </a:ln>
+        </p:spPr>
+      </p:sp>
+      <p:sp>
+        <p:nvSpPr>
+          <p:cNvPr id="13" name="Text 11"/>
+          <p:cNvSpPr/>
+          <p:nvPr/>
+        </p:nvSpPr>
+        <p:spPr>
+          <a:xfrm>
+            <a:off x="5106010" y="1922526"/>
+            <a:ext cx="1976933" cy="854964"/>
+          </a:xfrm>
+          <a:prstGeom prst="rect">
+            <a:avLst/>
+          </a:prstGeom>
+          <a:noFill/>
+          <a:ln/>
+        </p:spPr>
+        <p:txBody>
+          <a:bodyPr wrap="square" rtlCol="0" anchor="ctr"/>
+          <a:lstStyle/>
+          <a:p>
+            <a:pPr algn="ctr" indent="0" marL="0">
+              <a:buNone/>
+            </a:pPr>
+            <a:r>
+              <a:rPr lang="en-US" sz="1100" dirty="0">
+                <a:solidFill>
+                  <a:srgbClr val="0A1A1C"/>
+                </a:solidFill>
+                <a:latin typeface="Trebuchet MS" pitchFamily="34" charset="0"/>
+                <a:ea typeface="Trebuchet MS" pitchFamily="34" charset="-122"/>
+                <a:cs typeface="Trebuchet MS" pitchFamily="34" charset="-120"/>
+              </a:rPr>
+              <a:t>ConfigMap</a:t>
+            </a:r>
+            <a:endParaRPr lang="en-US" sz="1100" dirty="0"/>
+          </a:p>
+          <a:p>
+            <a:pPr algn="ctr" indent="0" marL="0">
+              <a:buNone/>
+            </a:pPr>
+            <a:r>
+              <a:rPr lang="en-US" sz="1100" dirty="0">
+                <a:solidFill>
+                  <a:srgbClr val="0A1A1C"/>
+                </a:solidFill>
+                <a:latin typeface="Trebuchet MS" pitchFamily="34" charset="0"/>
+                <a:ea typeface="Trebuchet MS" pitchFamily="34" charset="-122"/>
+                <a:cs typeface="Trebuchet MS" pitchFamily="34" charset="-120"/>
+              </a:rPr>
+              <a:t>(mongo URL)</a:t>
+            </a:r>
+            <a:endParaRPr lang="en-US" sz="1100" dirty="0"/>
+          </a:p>
+        </p:txBody>
+      </p:sp>
+      <p:sp>
+        <p:nvSpPr>
+          <p:cNvPr id="14" name="Text 12"/>
+          <p:cNvSpPr/>
+          <p:nvPr/>
+        </p:nvSpPr>
+        <p:spPr>
+          <a:xfrm>
+            <a:off x="7082942" y="1922526"/>
+            <a:ext cx="347472" cy="854964"/>
+          </a:xfrm>
+          <a:prstGeom prst="rect">
+            <a:avLst/>
+          </a:prstGeom>
+          <a:noFill/>
+          <a:ln/>
+        </p:spPr>
+        <p:txBody>
+          <a:bodyPr wrap="square" rtlCol="0" anchor="ctr"/>
+          <a:lstStyle/>
+          <a:p>
+            <a:pPr algn="ctr" indent="0" marL="0">
+              <a:buNone/>
+            </a:pPr>
+            <a:r>
+              <a:rPr lang="en-US" sz="2200" dirty="0">
+                <a:solidFill>
+                  <a:srgbClr val="007A90"/>
+                </a:solidFill>
+                <a:latin typeface="Trebuchet MS" pitchFamily="34" charset="0"/>
+                <a:ea typeface="Trebuchet MS" pitchFamily="34" charset="-122"/>
+                <a:cs typeface="Trebuchet MS" pitchFamily="34" charset="-120"/>
+              </a:rPr>
+              <a:t>→</a:t>
+            </a:r>
+            <a:endParaRPr lang="en-US" sz="2200" dirty="0"/>
+          </a:p>
+        </p:txBody>
+      </p:sp>
+      <p:sp>
+        <p:nvSpPr>
+          <p:cNvPr id="15" name="Shape 13"/>
+          <p:cNvSpPr/>
+          <p:nvPr/>
+        </p:nvSpPr>
+        <p:spPr>
+          <a:xfrm>
+            <a:off x="7430414" y="1922526"/>
+            <a:ext cx="1976933" cy="854964"/>
+          </a:xfrm>
+          <a:prstGeom prst="roundRect">
+            <a:avLst>
+              <a:gd name="adj" fmla="val 10695"/>
+            </a:avLst>
+          </a:prstGeom>
+          <a:solidFill>
+            <a:srgbClr val="B8ECF5"/>
+          </a:solidFill>
+          <a:ln w="19050">
+            <a:solidFill>
+              <a:srgbClr val="007A90"/>
+            </a:solidFill>
+            <a:prstDash val="solid"/>
+          </a:ln>
+        </p:spPr>
+      </p:sp>
+      <p:sp>
+        <p:nvSpPr>
+          <p:cNvPr id="16" name="Text 14"/>
+          <p:cNvSpPr/>
+          <p:nvPr/>
+        </p:nvSpPr>
+        <p:spPr>
+          <a:xfrm>
+            <a:off x="7430414" y="1922526"/>
+            <a:ext cx="1976933" cy="854964"/>
+          </a:xfrm>
+          <a:prstGeom prst="rect">
+            <a:avLst/>
+          </a:prstGeom>
+          <a:noFill/>
+          <a:ln/>
+        </p:spPr>
+        <p:txBody>
+          <a:bodyPr wrap="square" rtlCol="0" anchor="ctr"/>
+          <a:lstStyle/>
+          <a:p>
+            <a:pPr algn="ctr" indent="0" marL="0">
+              <a:buNone/>
+            </a:pPr>
+            <a:r>
+              <a:rPr lang="en-US" sz="1100" dirty="0">
+                <a:solidFill>
+                  <a:srgbClr val="0A1A1C"/>
+                </a:solidFill>
+                <a:latin typeface="Trebuchet MS" pitchFamily="34" charset="0"/>
+                <a:ea typeface="Trebuchet MS" pitchFamily="34" charset="-122"/>
+                <a:cs typeface="Trebuchet MS" pitchFamily="34" charset="-120"/>
+              </a:rPr>
+              <a:t>Web App Deploy</a:t>
+            </a:r>
+            <a:endParaRPr lang="en-US" sz="1100" dirty="0"/>
+          </a:p>
+          <a:p>
+            <a:pPr algn="ctr" indent="0" marL="0">
+              <a:buNone/>
+            </a:pPr>
+            <a:r>
+              <a:rPr lang="en-US" sz="1100" dirty="0">
+                <a:solidFill>
+                  <a:srgbClr val="0A1A1C"/>
+                </a:solidFill>
+                <a:latin typeface="Trebuchet MS" pitchFamily="34" charset="0"/>
+                <a:ea typeface="Trebuchet MS" pitchFamily="34" charset="-122"/>
+                <a:cs typeface="Trebuchet MS" pitchFamily="34" charset="-120"/>
+              </a:rPr>
+              <a:t>+ NodePort Svc</a:t>
+            </a:r>
+            <a:endParaRPr lang="en-US" sz="1100" dirty="0"/>
+          </a:p>
+        </p:txBody>
+      </p:sp>
+      <p:sp>
+        <p:nvSpPr>
+          <p:cNvPr id="17" name="Text 15"/>
+          <p:cNvSpPr/>
+          <p:nvPr/>
+        </p:nvSpPr>
+        <p:spPr>
+          <a:xfrm>
+            <a:off x="9407347" y="1922526"/>
+            <a:ext cx="347472" cy="854964"/>
+          </a:xfrm>
+          <a:prstGeom prst="rect">
+            <a:avLst/>
+          </a:prstGeom>
+          <a:noFill/>
+          <a:ln/>
+        </p:spPr>
+        <p:txBody>
+          <a:bodyPr wrap="square" rtlCol="0" anchor="ctr"/>
+          <a:lstStyle/>
+          <a:p>
+            <a:pPr algn="ctr" indent="0" marL="0">
+              <a:buNone/>
+            </a:pPr>
+            <a:r>
+              <a:rPr lang="en-US" sz="2200" dirty="0">
+                <a:solidFill>
+                  <a:srgbClr val="007A90"/>
+                </a:solidFill>
+                <a:latin typeface="Trebuchet MS" pitchFamily="34" charset="0"/>
+                <a:ea typeface="Trebuchet MS" pitchFamily="34" charset="-122"/>
+                <a:cs typeface="Trebuchet MS" pitchFamily="34" charset="-120"/>
+              </a:rPr>
+              <a:t>→</a:t>
+            </a:r>
+            <a:endParaRPr lang="en-US" sz="2200" dirty="0"/>
+          </a:p>
+        </p:txBody>
+      </p:sp>
+      <p:sp>
+        <p:nvSpPr>
+          <p:cNvPr id="18" name="Shape 16"/>
+          <p:cNvSpPr/>
+          <p:nvPr/>
+        </p:nvSpPr>
+        <p:spPr>
+          <a:xfrm>
+            <a:off x="9754819" y="1922526"/>
+            <a:ext cx="1976933" cy="854964"/>
+          </a:xfrm>
+          <a:prstGeom prst="roundRect">
+            <a:avLst>
+              <a:gd name="adj" fmla="val 10695"/>
+            </a:avLst>
+          </a:prstGeom>
+          <a:solidFill>
+            <a:srgbClr val="B8ECF5"/>
+          </a:solidFill>
+          <a:ln w="19050">
+            <a:solidFill>
+              <a:srgbClr val="007A90"/>
+            </a:solidFill>
+            <a:prstDash val="solid"/>
+          </a:ln>
+        </p:spPr>
+      </p:sp>
+      <p:sp>
+        <p:nvSpPr>
+          <p:cNvPr id="19" name="Text 17"/>
+          <p:cNvSpPr/>
+          <p:nvPr/>
+        </p:nvSpPr>
+        <p:spPr>
+          <a:xfrm>
+            <a:off x="9754819" y="1922526"/>
+            <a:ext cx="1976933" cy="854964"/>
+          </a:xfrm>
+          <a:prstGeom prst="rect">
+            <a:avLst/>
+          </a:prstGeom>
+          <a:noFill/>
+          <a:ln/>
+        </p:spPr>
+        <p:txBody>
+          <a:bodyPr wrap="square" rtlCol="0" anchor="ctr"/>
+          <a:lstStyle/>
+          <a:p>
+            <a:pPr algn="ctr" indent="0" marL="0">
+              <a:buNone/>
+            </a:pPr>
+            <a:r>
+              <a:rPr lang="en-US" sz="1100" b="1" dirty="0">
+                <a:solidFill>
+                  <a:srgbClr val="0A1A1C"/>
+                </a:solidFill>
+                <a:latin typeface="Trebuchet MS" pitchFamily="34" charset="0"/>
+                <a:ea typeface="Trebuchet MS" pitchFamily="34" charset="-122"/>
+                <a:cs typeface="Trebuchet MS" pitchFamily="34" charset="-120"/>
+              </a:rPr>
+              <a:t>Browser</a:t>
+            </a:r>
+            <a:endParaRPr lang="en-US" sz="1100" dirty="0"/>
+          </a:p>
+        </p:txBody>
+      </p:sp>
+      <p:sp>
+        <p:nvSpPr>
+          <p:cNvPr id="20" name="Text 18"/>
+          <p:cNvSpPr/>
+          <p:nvPr/>
+        </p:nvSpPr>
+        <p:spPr>
+          <a:xfrm>
+            <a:off x="457200" y="3310128"/>
+            <a:ext cx="11274552" cy="818388"/>
+          </a:xfrm>
+          <a:prstGeom prst="rect">
+            <a:avLst/>
+          </a:prstGeom>
+          <a:noFill/>
+          <a:ln/>
+        </p:spPr>
+        <p:txBody>
+          <a:bodyPr wrap="square" rtlCol="0" anchor="ctr"/>
+          <a:lstStyle/>
+          <a:p>
+            <a:pPr marL="254000" indent="-254000">
+              <a:buSzPct val="100000"/>
+              <a:buChar char="•"/>
+            </a:pPr>
+            <a:r>
+              <a:rPr lang="en-US" sz="1600" dirty="0">
+                <a:solidFill>
+                  <a:srgbClr val="0A1A1C"/>
+                </a:solidFill>
+                <a:latin typeface="Trebuchet MS" pitchFamily="34" charset="0"/>
+                <a:ea typeface="Trebuchet MS" pitchFamily="34" charset="-122"/>
+                <a:cs typeface="Trebuchet MS" pitchFamily="34" charset="-120"/>
+              </a:rPr>
+              <a:t>Every object type covered so far combines into one two-tier system (web app + MongoDB)</a:t>
+            </a:r>
+            <a:endParaRPr lang="en-US" sz="1600" dirty="0"/>
+          </a:p>
+        </p:txBody>
+      </p:sp>
+      <p:sp>
+        <p:nvSpPr>
+          <p:cNvPr id="21" name="Text 19"/>
+          <p:cNvSpPr/>
+          <p:nvPr/>
+        </p:nvSpPr>
+        <p:spPr>
+          <a:xfrm>
+            <a:off x="457200" y="4128516"/>
+            <a:ext cx="11274552" cy="818388"/>
+          </a:xfrm>
+          <a:prstGeom prst="rect">
+            <a:avLst/>
+          </a:prstGeom>
+          <a:noFill/>
+          <a:ln/>
+        </p:spPr>
+        <p:txBody>
+          <a:bodyPr wrap="square" rtlCol="0" anchor="ctr"/>
+          <a:lstStyle/>
+          <a:p>
+            <a:pPr marL="254000" indent="-254000">
+              <a:buSzPct val="100000"/>
+              <a:buChar char="•"/>
+            </a:pPr>
+            <a:r>
+              <a:rPr lang="en-US" sz="1600" dirty="0">
+                <a:solidFill>
+                  <a:srgbClr val="0A1A1C"/>
+                </a:solidFill>
+                <a:latin typeface="Trebuchet MS" pitchFamily="34" charset="0"/>
+                <a:ea typeface="Trebuchet MS" pitchFamily="34" charset="-122"/>
+                <a:cs typeface="Trebuchet MS" pitchFamily="34" charset="-120"/>
+              </a:rPr>
+              <a:t>Kubernetes gives every Service a DNS name matching its metadata.name — mongo-service resolves automatically, no IP involved</a:t>
+            </a:r>
+            <a:endParaRPr lang="en-US" sz="1600" dirty="0"/>
+          </a:p>
+        </p:txBody>
+      </p:sp>
+      <p:sp>
+        <p:nvSpPr>
+          <p:cNvPr id="22" name="Text 20"/>
+          <p:cNvSpPr/>
+          <p:nvPr/>
+        </p:nvSpPr>
+        <p:spPr>
+          <a:xfrm>
+            <a:off x="457200" y="4946904"/>
+            <a:ext cx="11274552" cy="818388"/>
+          </a:xfrm>
+          <a:prstGeom prst="rect">
+            <a:avLst/>
+          </a:prstGeom>
+          <a:noFill/>
+          <a:ln/>
+        </p:spPr>
+        <p:txBody>
+          <a:bodyPr wrap="square" rtlCol="0" anchor="ctr"/>
+          <a:lstStyle/>
+          <a:p>
+            <a:pPr marL="254000" indent="-254000">
+              <a:buSzPct val="100000"/>
+              <a:buChar char="•"/>
+            </a:pPr>
+            <a:r>
+              <a:rPr lang="en-US" sz="1600" dirty="0">
+                <a:solidFill>
+                  <a:srgbClr val="0A1A1C"/>
+                </a:solidFill>
+                <a:latin typeface="Trebuchet MS" pitchFamily="34" charset="0"/>
+                <a:ea typeface="Trebuchet MS" pitchFamily="34" charset="-122"/>
+                <a:cs typeface="Trebuchet MS" pitchFamily="34" charset="-120"/>
+              </a:rPr>
+              <a:t>Deploy order matters: the database's config must exist before the app that depends on it</a:t>
+            </a:r>
+            <a:endParaRPr lang="en-US" sz="1600" dirty="0"/>
+          </a:p>
+        </p:txBody>
+      </p:sp>
+      <p:sp>
+        <p:nvSpPr>
+          <p:cNvPr id="23" name="Text 21"/>
+          <p:cNvSpPr/>
+          <p:nvPr/>
+        </p:nvSpPr>
+        <p:spPr>
+          <a:xfrm>
+            <a:off x="457200" y="5765292"/>
+            <a:ext cx="11274552" cy="818388"/>
+          </a:xfrm>
+          <a:prstGeom prst="rect">
+            <a:avLst/>
+          </a:prstGeom>
+          <a:noFill/>
+          <a:ln/>
+        </p:spPr>
+        <p:txBody>
+          <a:bodyPr wrap="square" rtlCol="0" anchor="ctr"/>
+          <a:lstStyle/>
+          <a:p>
+            <a:pPr marL="254000" indent="-254000">
+              <a:buSzPct val="100000"/>
+              <a:buChar char="•"/>
+            </a:pPr>
+            <a:r>
+              <a:rPr lang="en-US" sz="1600" dirty="0">
+                <a:solidFill>
+                  <a:srgbClr val="0A1A1C"/>
+                </a:solidFill>
+                <a:latin typeface="Trebuchet MS" pitchFamily="34" charset="0"/>
+                <a:ea typeface="Trebuchet MS" pitchFamily="34" charset="-122"/>
+                <a:cs typeface="Trebuchet MS" pitchFamily="34" charset="-120"/>
+              </a:rPr>
+              <a:t>Proof of wiring: kubectl exec deploy/webapp-deploy -- printenv MONGO_URL prints the full connection string, assembled purely from cluster objects</a:t>
+            </a:r>
+            <a:endParaRPr lang="en-US" sz="1600" dirty="0"/>
           </a:p>
         </p:txBody>
       </p:sp>
@@ -9519,7 +10437,7 @@
                 <a:ea typeface="Arial Black" pitchFamily="34" charset="-122"/>
                 <a:cs typeface="Arial Black" pitchFamily="34" charset="-120"/>
               </a:rPr>
-              <a:t>What's Next: Open TUTORIAL.md</a:t>
+              <a:t>Gotchas &amp; Lessons</a:t>
             </a:r>
             <a:endParaRPr lang="en-US" sz="3000" dirty="0"/>
           </a:p>
@@ -9584,7 +10502,7 @@
                 <a:ea typeface="Trebuchet MS" pitchFamily="34" charset="-122"/>
                 <a:cs typeface="Trebuchet MS" pitchFamily="34" charset="-120"/>
               </a:rPr>
-              <a:t>This deck was the map — the territory starts now</a:t>
+              <a:t>Most common real failure across Modules 1–5: a typo in key: or name: inside a configMapKeyRef/secretKeyRef → shows up as CreateContainerConfigError</a:t>
             </a:r>
             <a:endParaRPr lang="en-US" sz="2200" dirty="0"/>
           </a:p>
@@ -9624,7 +10542,7 @@
                 <a:ea typeface="Trebuchet MS" pitchFamily="34" charset="-122"/>
                 <a:cs typeface="Trebuchet MS" pitchFamily="34" charset="-120"/>
               </a:rPr>
-              <a:t>Open TUTORIAL.md, start at Module 0 (Setup &amp; Orientation): install Podman, start Minikube, run your first real kubectl get nodes</a:t>
+              <a:t>kubectl describe pod → the Events section is always the first move to diagnose a broken Pod</a:t>
             </a:r>
             <a:endParaRPr lang="en-US" sz="2200" dirty="0"/>
           </a:p>
@@ -9664,7 +10582,7 @@
                 <a:ea typeface="Trebuchet MS" pitchFamily="34" charset="-122"/>
                 <a:cs typeface="Trebuchet MS" pitchFamily="34" charset="-120"/>
               </a:rPr>
-              <a:t>Modules 1–6 build in exactly today's order: Pods → Deployments → Services → Config/Secrets → Capstone → Cleanup</a:t>
+              <a:t>Podman's Minikube driver is explicitly experimental — --driver=docker is the fallback if you hit an uncovered wall</a:t>
             </a:r>
             <a:endParaRPr lang="en-US" sz="2200" dirty="0"/>
           </a:p>
@@ -9704,7 +10622,7 @@
                 <a:ea typeface="Trebuchet MS" pitchFamily="34" charset="-122"/>
                 <a:cs typeface="Trebuchet MS" pitchFamily="34" charset="-120"/>
               </a:rPr>
-              <a:t>docs/kubernetes-fundamentals-notes.md has the CKA/CKAD-style deeper reference once a concept clicks</a:t>
+              <a:t>Base64 is encoding, not encryption — don't mistake a Secret for something actually secured</a:t>
             </a:r>
             <a:endParaRPr lang="en-US" sz="2200" dirty="0"/>
           </a:p>
@@ -9721,6 +10639,575 @@
 <file path=ppt/slides/slide23.xml><?xml version="1.0" encoding="utf-8"?>
 <p:sld xmlns:a="http://schemas.openxmlformats.org/drawingml/2006/main" xmlns:r="http://schemas.openxmlformats.org/officeDocument/2006/relationships" xmlns:p="http://schemas.openxmlformats.org/presentationml/2006/main">
   <p:cSld name="Slide 23">
+    <p:bg>
+      <p:bgPr>
+        <a:solidFill>
+          <a:srgbClr val="EAFCFF"/>
+        </a:solidFill>
+      </p:bgPr>
+    </p:bg>
+    <p:spTree>
+      <p:nvGrpSpPr>
+        <p:cNvPr id="1" name=""/>
+        <p:cNvGrpSpPr/>
+        <p:nvPr/>
+      </p:nvGrpSpPr>
+      <p:grpSpPr>
+        <a:xfrm>
+          <a:off x="0" y="0"/>
+          <a:ext cx="0" cy="0"/>
+          <a:chOff x="0" y="0"/>
+          <a:chExt cx="0" cy="0"/>
+        </a:xfrm>
+      </p:grpSpPr>
+      <p:sp>
+        <p:nvSpPr>
+          <p:cNvPr id="2" name="Shape 0"/>
+          <p:cNvSpPr/>
+          <p:nvPr/>
+        </p:nvSpPr>
+        <p:spPr>
+          <a:xfrm>
+            <a:off x="457200" y="201168"/>
+            <a:ext cx="1828800" cy="347472"/>
+          </a:xfrm>
+          <a:prstGeom prst="rect">
+            <a:avLst/>
+          </a:prstGeom>
+          <a:solidFill>
+            <a:srgbClr val="007A90"/>
+          </a:solidFill>
+          <a:ln w="9525">
+            <a:solidFill>
+              <a:srgbClr val="007A90"/>
+            </a:solidFill>
+            <a:prstDash val="solid"/>
+          </a:ln>
+        </p:spPr>
+      </p:sp>
+      <p:sp>
+        <p:nvSpPr>
+          <p:cNvPr id="3" name="Text 1"/>
+          <p:cNvSpPr/>
+          <p:nvPr/>
+        </p:nvSpPr>
+        <p:spPr>
+          <a:xfrm>
+            <a:off x="457200" y="201168"/>
+            <a:ext cx="1828800" cy="347472"/>
+          </a:xfrm>
+          <a:prstGeom prst="rect">
+            <a:avLst/>
+          </a:prstGeom>
+          <a:noFill/>
+          <a:ln/>
+        </p:spPr>
+        <p:txBody>
+          <a:bodyPr wrap="square" rtlCol="0" anchor="ctr"/>
+          <a:lstStyle/>
+          <a:p>
+            <a:pPr algn="ctr" indent="0" marL="0">
+              <a:buNone/>
+            </a:pPr>
+            <a:r>
+              <a:rPr lang="en-US" sz="1200" b="1" spc="50" kern="0" dirty="0">
+                <a:solidFill>
+                  <a:srgbClr val="FFFFFF"/>
+                </a:solidFill>
+                <a:latin typeface="Trebuchet MS" pitchFamily="34" charset="0"/>
+                <a:ea typeface="Trebuchet MS" pitchFamily="34" charset="-122"/>
+                <a:cs typeface="Trebuchet MS" pitchFamily="34" charset="-120"/>
+              </a:rPr>
+              <a:t>KUBERNETES</a:t>
+            </a:r>
+            <a:endParaRPr lang="en-US" sz="1200" dirty="0"/>
+          </a:p>
+        </p:txBody>
+      </p:sp>
+      <p:sp>
+        <p:nvSpPr>
+          <p:cNvPr id="4" name="Text 2"/>
+          <p:cNvSpPr/>
+          <p:nvPr/>
+        </p:nvSpPr>
+        <p:spPr>
+          <a:xfrm>
+            <a:off x="457200" y="658368"/>
+            <a:ext cx="11274552" cy="685800"/>
+          </a:xfrm>
+          <a:prstGeom prst="rect">
+            <a:avLst/>
+          </a:prstGeom>
+          <a:noFill/>
+          <a:ln/>
+        </p:spPr>
+        <p:txBody>
+          <a:bodyPr wrap="square" rtlCol="0" anchor="ctr"/>
+          <a:lstStyle/>
+          <a:p>
+            <a:pPr indent="0" marL="0">
+              <a:buNone/>
+            </a:pPr>
+            <a:r>
+              <a:rPr lang="en-US" sz="3000" b="1" spc="50" kern="0" dirty="0">
+                <a:solidFill>
+                  <a:srgbClr val="0A1A1C"/>
+                </a:solidFill>
+                <a:latin typeface="Arial Black" pitchFamily="34" charset="0"/>
+                <a:ea typeface="Arial Black" pitchFamily="34" charset="-122"/>
+                <a:cs typeface="Arial Black" pitchFamily="34" charset="-120"/>
+              </a:rPr>
+              <a:t>Key Insight</a:t>
+            </a:r>
+            <a:endParaRPr lang="en-US" sz="3000" dirty="0"/>
+          </a:p>
+        </p:txBody>
+      </p:sp>
+      <p:sp>
+        <p:nvSpPr>
+          <p:cNvPr id="5" name="Shape 3"/>
+          <p:cNvSpPr/>
+          <p:nvPr/>
+        </p:nvSpPr>
+        <p:spPr>
+          <a:xfrm>
+            <a:off x="457200" y="1417320"/>
+            <a:ext cx="11274552" cy="27432"/>
+          </a:xfrm>
+          <a:prstGeom prst="rect">
+            <a:avLst/>
+          </a:prstGeom>
+          <a:solidFill>
+            <a:srgbClr val="007A90"/>
+          </a:solidFill>
+          <a:ln w="12700">
+            <a:solidFill>
+              <a:srgbClr val="007A90"/>
+            </a:solidFill>
+            <a:prstDash val="solid"/>
+          </a:ln>
+        </p:spPr>
+      </p:sp>
+      <p:sp>
+        <p:nvSpPr>
+          <p:cNvPr id="6" name="Shape 4"/>
+          <p:cNvSpPr/>
+          <p:nvPr/>
+        </p:nvSpPr>
+        <p:spPr>
+          <a:xfrm>
+            <a:off x="457200" y="2029968"/>
+            <a:ext cx="11274552" cy="4096512"/>
+          </a:xfrm>
+          <a:prstGeom prst="rect">
+            <a:avLst/>
+          </a:prstGeom>
+          <a:solidFill>
+            <a:srgbClr val="B8ECF5"/>
+          </a:solidFill>
+          <a:ln w="25400">
+            <a:solidFill>
+              <a:srgbClr val="007A90"/>
+            </a:solidFill>
+            <a:prstDash val="solid"/>
+          </a:ln>
+        </p:spPr>
+      </p:sp>
+      <p:sp>
+        <p:nvSpPr>
+          <p:cNvPr id="7" name="Shape 5"/>
+          <p:cNvSpPr/>
+          <p:nvPr/>
+        </p:nvSpPr>
+        <p:spPr>
+          <a:xfrm>
+            <a:off x="457200" y="2029968"/>
+            <a:ext cx="73152" cy="4096512"/>
+          </a:xfrm>
+          <a:prstGeom prst="rect">
+            <a:avLst/>
+          </a:prstGeom>
+          <a:solidFill>
+            <a:srgbClr val="007A90"/>
+          </a:solidFill>
+          <a:ln w="12700">
+            <a:solidFill>
+              <a:srgbClr val="007A90"/>
+            </a:solidFill>
+            <a:prstDash val="solid"/>
+          </a:ln>
+        </p:spPr>
+      </p:sp>
+      <p:sp>
+        <p:nvSpPr>
+          <p:cNvPr id="8" name="Text 6"/>
+          <p:cNvSpPr/>
+          <p:nvPr/>
+        </p:nvSpPr>
+        <p:spPr>
+          <a:xfrm>
+            <a:off x="685800" y="2167128"/>
+            <a:ext cx="10954512" cy="3822192"/>
+          </a:xfrm>
+          <a:prstGeom prst="rect">
+            <a:avLst/>
+          </a:prstGeom>
+          <a:noFill/>
+          <a:ln/>
+        </p:spPr>
+        <p:txBody>
+          <a:bodyPr wrap="square" rtlCol="0" anchor="ctr"/>
+          <a:lstStyle/>
+          <a:p>
+            <a:pPr indent="0" marL="0">
+              <a:buNone/>
+            </a:pPr>
+            <a:r>
+              <a:rPr lang="en-US" sz="2600" b="1" dirty="0">
+                <a:solidFill>
+                  <a:srgbClr val="0A1A1C"/>
+                </a:solidFill>
+                <a:latin typeface="Trebuchet MS" pitchFamily="34" charset="0"/>
+                <a:ea typeface="Trebuchet MS" pitchFamily="34" charset="-122"/>
+                <a:cs typeface="Trebuchet MS" pitchFamily="34" charset="-120"/>
+              </a:rPr>
+              <a:t>Every guarantee Kubernetes makes — self-healing, scaling, zero-downtime rollout — reduces to one idea: you declare desired state, and a control loop never stops trying to make reality match it</a:t>
+            </a:r>
+            <a:endParaRPr lang="en-US" sz="2600" dirty="0"/>
+          </a:p>
+        </p:txBody>
+      </p:sp>
+    </p:spTree>
+  </p:cSld>
+  <p:clrMapOvr>
+    <a:masterClrMapping/>
+  </p:clrMapOvr>
+</p:sld>
+</file>
+
+<file path=ppt/slides/slide24.xml><?xml version="1.0" encoding="utf-8"?>
+<p:sld xmlns:a="http://schemas.openxmlformats.org/drawingml/2006/main" xmlns:r="http://schemas.openxmlformats.org/officeDocument/2006/relationships" xmlns:p="http://schemas.openxmlformats.org/presentationml/2006/main">
+  <p:cSld name="Slide 24">
+    <p:bg>
+      <p:bgPr>
+        <a:solidFill>
+          <a:srgbClr val="EAFCFF"/>
+        </a:solidFill>
+      </p:bgPr>
+    </p:bg>
+    <p:spTree>
+      <p:nvGrpSpPr>
+        <p:cNvPr id="1" name=""/>
+        <p:cNvGrpSpPr/>
+        <p:nvPr/>
+      </p:nvGrpSpPr>
+      <p:grpSpPr>
+        <a:xfrm>
+          <a:off x="0" y="0"/>
+          <a:ext cx="0" cy="0"/>
+          <a:chOff x="0" y="0"/>
+          <a:chExt cx="0" cy="0"/>
+        </a:xfrm>
+      </p:grpSpPr>
+      <p:sp>
+        <p:nvSpPr>
+          <p:cNvPr id="2" name="Shape 0"/>
+          <p:cNvSpPr/>
+          <p:nvPr/>
+        </p:nvSpPr>
+        <p:spPr>
+          <a:xfrm>
+            <a:off x="457200" y="201168"/>
+            <a:ext cx="1828800" cy="347472"/>
+          </a:xfrm>
+          <a:prstGeom prst="rect">
+            <a:avLst/>
+          </a:prstGeom>
+          <a:solidFill>
+            <a:srgbClr val="007A90"/>
+          </a:solidFill>
+          <a:ln w="9525">
+            <a:solidFill>
+              <a:srgbClr val="007A90"/>
+            </a:solidFill>
+            <a:prstDash val="solid"/>
+          </a:ln>
+        </p:spPr>
+      </p:sp>
+      <p:sp>
+        <p:nvSpPr>
+          <p:cNvPr id="3" name="Text 1"/>
+          <p:cNvSpPr/>
+          <p:nvPr/>
+        </p:nvSpPr>
+        <p:spPr>
+          <a:xfrm>
+            <a:off x="457200" y="201168"/>
+            <a:ext cx="1828800" cy="347472"/>
+          </a:xfrm>
+          <a:prstGeom prst="rect">
+            <a:avLst/>
+          </a:prstGeom>
+          <a:noFill/>
+          <a:ln/>
+        </p:spPr>
+        <p:txBody>
+          <a:bodyPr wrap="square" rtlCol="0" anchor="ctr"/>
+          <a:lstStyle/>
+          <a:p>
+            <a:pPr algn="ctr" indent="0" marL="0">
+              <a:buNone/>
+            </a:pPr>
+            <a:r>
+              <a:rPr lang="en-US" sz="1200" b="1" spc="50" kern="0" dirty="0">
+                <a:solidFill>
+                  <a:srgbClr val="FFFFFF"/>
+                </a:solidFill>
+                <a:latin typeface="Trebuchet MS" pitchFamily="34" charset="0"/>
+                <a:ea typeface="Trebuchet MS" pitchFamily="34" charset="-122"/>
+                <a:cs typeface="Trebuchet MS" pitchFamily="34" charset="-120"/>
+              </a:rPr>
+              <a:t>KUBERNETES</a:t>
+            </a:r>
+            <a:endParaRPr lang="en-US" sz="1200" dirty="0"/>
+          </a:p>
+        </p:txBody>
+      </p:sp>
+      <p:sp>
+        <p:nvSpPr>
+          <p:cNvPr id="4" name="Text 2"/>
+          <p:cNvSpPr/>
+          <p:nvPr/>
+        </p:nvSpPr>
+        <p:spPr>
+          <a:xfrm>
+            <a:off x="457200" y="658368"/>
+            <a:ext cx="11274552" cy="685800"/>
+          </a:xfrm>
+          <a:prstGeom prst="rect">
+            <a:avLst/>
+          </a:prstGeom>
+          <a:noFill/>
+          <a:ln/>
+        </p:spPr>
+        <p:txBody>
+          <a:bodyPr wrap="square" rtlCol="0" anchor="ctr"/>
+          <a:lstStyle/>
+          <a:p>
+            <a:pPr indent="0" marL="0">
+              <a:buNone/>
+            </a:pPr>
+            <a:r>
+              <a:rPr lang="en-US" sz="3000" b="1" spc="50" kern="0" dirty="0">
+                <a:solidFill>
+                  <a:srgbClr val="0A1A1C"/>
+                </a:solidFill>
+                <a:latin typeface="Arial Black" pitchFamily="34" charset="0"/>
+                <a:ea typeface="Arial Black" pitchFamily="34" charset="-122"/>
+                <a:cs typeface="Arial Black" pitchFamily="34" charset="-120"/>
+              </a:rPr>
+              <a:t>What's Next: Open TUTORIAL.md</a:t>
+            </a:r>
+            <a:endParaRPr lang="en-US" sz="3000" dirty="0"/>
+          </a:p>
+        </p:txBody>
+      </p:sp>
+      <p:sp>
+        <p:nvSpPr>
+          <p:cNvPr id="5" name="Shape 3"/>
+          <p:cNvSpPr/>
+          <p:nvPr/>
+        </p:nvSpPr>
+        <p:spPr>
+          <a:xfrm>
+            <a:off x="457200" y="1417320"/>
+            <a:ext cx="11274552" cy="27432"/>
+          </a:xfrm>
+          <a:prstGeom prst="rect">
+            <a:avLst/>
+          </a:prstGeom>
+          <a:solidFill>
+            <a:srgbClr val="007A90"/>
+          </a:solidFill>
+          <a:ln w="12700">
+            <a:solidFill>
+              <a:srgbClr val="007A90"/>
+            </a:solidFill>
+            <a:prstDash val="solid"/>
+          </a:ln>
+        </p:spPr>
+      </p:sp>
+      <p:sp>
+        <p:nvSpPr>
+          <p:cNvPr id="6" name="Text 4"/>
+          <p:cNvSpPr/>
+          <p:nvPr/>
+        </p:nvSpPr>
+        <p:spPr>
+          <a:xfrm>
+            <a:off x="457200" y="1572768"/>
+            <a:ext cx="11274552" cy="1252728"/>
+          </a:xfrm>
+          <a:prstGeom prst="rect">
+            <a:avLst/>
+          </a:prstGeom>
+          <a:noFill/>
+          <a:ln/>
+        </p:spPr>
+        <p:txBody>
+          <a:bodyPr wrap="square" rtlCol="0" anchor="ctr"/>
+          <a:lstStyle/>
+          <a:p>
+            <a:pPr marL="254000" indent="-254000">
+              <a:buSzPct val="100000"/>
+              <a:buChar char="•"/>
+            </a:pPr>
+            <a:r>
+              <a:rPr lang="en-US" sz="2200" dirty="0">
+                <a:solidFill>
+                  <a:srgbClr val="0A1A1C"/>
+                </a:solidFill>
+                <a:latin typeface="Trebuchet MS" pitchFamily="34" charset="0"/>
+                <a:ea typeface="Trebuchet MS" pitchFamily="34" charset="-122"/>
+                <a:cs typeface="Trebuchet MS" pitchFamily="34" charset="-120"/>
+              </a:rPr>
+              <a:t>This deck was the map — the territory starts now</a:t>
+            </a:r>
+            <a:endParaRPr lang="en-US" sz="2200" dirty="0"/>
+          </a:p>
+        </p:txBody>
+      </p:sp>
+      <p:sp>
+        <p:nvSpPr>
+          <p:cNvPr id="7" name="Text 5"/>
+          <p:cNvSpPr/>
+          <p:nvPr/>
+        </p:nvSpPr>
+        <p:spPr>
+          <a:xfrm>
+            <a:off x="457200" y="2825496"/>
+            <a:ext cx="11274552" cy="1252728"/>
+          </a:xfrm>
+          <a:prstGeom prst="rect">
+            <a:avLst/>
+          </a:prstGeom>
+          <a:noFill/>
+          <a:ln/>
+        </p:spPr>
+        <p:txBody>
+          <a:bodyPr wrap="square" rtlCol="0" anchor="ctr"/>
+          <a:lstStyle/>
+          <a:p>
+            <a:pPr marL="254000" indent="-254000">
+              <a:buSzPct val="100000"/>
+              <a:buChar char="•"/>
+            </a:pPr>
+            <a:r>
+              <a:rPr lang="en-US" sz="2200" dirty="0">
+                <a:solidFill>
+                  <a:srgbClr val="0A1A1C"/>
+                </a:solidFill>
+                <a:latin typeface="Trebuchet MS" pitchFamily="34" charset="0"/>
+                <a:ea typeface="Trebuchet MS" pitchFamily="34" charset="-122"/>
+                <a:cs typeface="Trebuchet MS" pitchFamily="34" charset="-120"/>
+              </a:rPr>
+              <a:t>Open TUTORIAL.md, start at Module 0 (Setup &amp; Orientation): install Podman, start Minikube, run your first real kubectl get nodes</a:t>
+            </a:r>
+            <a:endParaRPr lang="en-US" sz="2200" dirty="0"/>
+          </a:p>
+        </p:txBody>
+      </p:sp>
+      <p:sp>
+        <p:nvSpPr>
+          <p:cNvPr id="8" name="Text 6"/>
+          <p:cNvSpPr/>
+          <p:nvPr/>
+        </p:nvSpPr>
+        <p:spPr>
+          <a:xfrm>
+            <a:off x="457200" y="4078224"/>
+            <a:ext cx="11274552" cy="1252728"/>
+          </a:xfrm>
+          <a:prstGeom prst="rect">
+            <a:avLst/>
+          </a:prstGeom>
+          <a:noFill/>
+          <a:ln/>
+        </p:spPr>
+        <p:txBody>
+          <a:bodyPr wrap="square" rtlCol="0" anchor="ctr"/>
+          <a:lstStyle/>
+          <a:p>
+            <a:pPr marL="254000" indent="-254000">
+              <a:buSzPct val="100000"/>
+              <a:buChar char="•"/>
+            </a:pPr>
+            <a:r>
+              <a:rPr lang="en-US" sz="2200" dirty="0">
+                <a:solidFill>
+                  <a:srgbClr val="0A1A1C"/>
+                </a:solidFill>
+                <a:latin typeface="Trebuchet MS" pitchFamily="34" charset="0"/>
+                <a:ea typeface="Trebuchet MS" pitchFamily="34" charset="-122"/>
+                <a:cs typeface="Trebuchet MS" pitchFamily="34" charset="-120"/>
+              </a:rPr>
+              <a:t>Modules 1–6 build in exactly today's order: Pods → Deployments → Services → Config/Secrets → Capstone → Cleanup</a:t>
+            </a:r>
+            <a:endParaRPr lang="en-US" sz="2200" dirty="0"/>
+          </a:p>
+        </p:txBody>
+      </p:sp>
+      <p:sp>
+        <p:nvSpPr>
+          <p:cNvPr id="9" name="Text 7"/>
+          <p:cNvSpPr/>
+          <p:nvPr/>
+        </p:nvSpPr>
+        <p:spPr>
+          <a:xfrm>
+            <a:off x="457200" y="5330952"/>
+            <a:ext cx="11274552" cy="1252728"/>
+          </a:xfrm>
+          <a:prstGeom prst="rect">
+            <a:avLst/>
+          </a:prstGeom>
+          <a:noFill/>
+          <a:ln/>
+        </p:spPr>
+        <p:txBody>
+          <a:bodyPr wrap="square" rtlCol="0" anchor="ctr"/>
+          <a:lstStyle/>
+          <a:p>
+            <a:pPr marL="254000" indent="-254000">
+              <a:buSzPct val="100000"/>
+              <a:buChar char="•"/>
+            </a:pPr>
+            <a:r>
+              <a:rPr lang="en-US" sz="2200" dirty="0">
+                <a:solidFill>
+                  <a:srgbClr val="0A1A1C"/>
+                </a:solidFill>
+                <a:latin typeface="Trebuchet MS" pitchFamily="34" charset="0"/>
+                <a:ea typeface="Trebuchet MS" pitchFamily="34" charset="-122"/>
+                <a:cs typeface="Trebuchet MS" pitchFamily="34" charset="-120"/>
+              </a:rPr>
+              <a:t>docs/kubernetes-fundamentals-notes.md has the CKA/CKAD-style deeper reference once a concept clicks</a:t>
+            </a:r>
+            <a:endParaRPr lang="en-US" sz="2200" dirty="0"/>
+          </a:p>
+        </p:txBody>
+      </p:sp>
+    </p:spTree>
+  </p:cSld>
+  <p:clrMapOvr>
+    <a:masterClrMapping/>
+  </p:clrMapOvr>
+</p:sld>
+</file>
+
+<file path=ppt/slides/slide25.xml><?xml version="1.0" encoding="utf-8"?>
+<p:sld xmlns:a="http://schemas.openxmlformats.org/drawingml/2006/main" xmlns:r="http://schemas.openxmlformats.org/officeDocument/2006/relationships" xmlns:p="http://schemas.openxmlformats.org/presentationml/2006/main">
+  <p:cSld name="Slide 25">
     <p:bg>
       <p:bgPr>
         <a:solidFill>

--- a/docs/presentations/KubernetesFundamentals/KubernetesFundamentals.pptx
+++ b/docs/presentations/KubernetesFundamentals/KubernetesFundamentals.pptx
@@ -6584,7 +6584,7 @@
                 <a:ea typeface="Trebuchet MS" pitchFamily="34" charset="-122"/>
                 <a:cs typeface="Trebuchet MS" pitchFamily="34" charset="-120"/>
               </a:rPr>
-              <a:t>Run this exact sequence yourself in Module 1 — it's the single most useful five minutes in this deck</a:t>
+              <a:t>Try this yourself against a real cluster — watching the Pod not come back is what makes the distinction stick</a:t>
             </a:r>
             <a:endParaRPr lang="en-US" sz="1600" dirty="0"/>
           </a:p>

--- a/docs/presentations/KubernetesFundamentals/KubernetesFundamentals.pptx
+++ b/docs/presentations/KubernetesFundamentals/KubernetesFundamentals.pptx
@@ -6584,7 +6584,7 @@
                 <a:ea typeface="Trebuchet MS" pitchFamily="34" charset="-122"/>
                 <a:cs typeface="Trebuchet MS" pitchFamily="34" charset="-120"/>
               </a:rPr>
-              <a:t>Try this yourself against a real cluster — watching the Pod not come back is what makes the distinction stick</a:t>
+              <a:t>This sequence isolates one specific question: whether the file's mere presence is enough to keep the Pod alive on its own</a:t>
             </a:r>
             <a:endParaRPr lang="en-US" sz="1600" dirty="0"/>
           </a:p>
